--- a/slides/Lecture_Chapter09.pptx
+++ b/slides/Lecture_Chapter09.pptx
@@ -145,7 +145,7 @@
   <p:extLst>
     <p:ext uri="{521415D9-36F7-43E2-AB2F-B90AF26B5E84}">
       <p14:sectionLst xmlns:p14="http://schemas.microsoft.com/office/powerpoint/2010/main">
-        <p14:section name="Default Section" id="{83286E67-F0F0-421C-8F74-7B93ABA17FBF}">
+        <p14:section name="Prediction" id="{83286E67-F0F0-421C-8F74-7B93ABA17FBF}">
           <p14:sldIdLst>
             <p14:sldId id="256"/>
             <p14:sldId id="313"/>
@@ -300,7 +300,7 @@
           <a:p>
             <a:fld id="{2987FC57-34F3-4A88-970B-010E7C0EC943}" type="datetimeFigureOut">
               <a:rPr lang="en-US" smtClean="0"/>
-              <a:t>5/31/2026</a:t>
+              <a:t>10/15/26</a:t>
             </a:fld>
             <a:endParaRPr lang="en-US"/>
           </a:p>
@@ -882,7 +882,7 @@
           <a:p>
             <a:fld id="{3E22BF2E-04DA-469E-97C5-BB68A0368813}" type="datetimeFigureOut">
               <a:rPr lang="en-US" smtClean="0"/>
-              <a:t>5/31/2026</a:t>
+              <a:t>10/15/26</a:t>
             </a:fld>
             <a:endParaRPr lang="en-US"/>
           </a:p>
@@ -1080,7 +1080,7 @@
           <a:p>
             <a:fld id="{3E22BF2E-04DA-469E-97C5-BB68A0368813}" type="datetimeFigureOut">
               <a:rPr lang="en-US" smtClean="0"/>
-              <a:t>5/31/2026</a:t>
+              <a:t>10/15/26</a:t>
             </a:fld>
             <a:endParaRPr lang="en-US"/>
           </a:p>
@@ -1288,7 +1288,7 @@
           <a:p>
             <a:fld id="{3E22BF2E-04DA-469E-97C5-BB68A0368813}" type="datetimeFigureOut">
               <a:rPr lang="en-US" smtClean="0"/>
-              <a:t>5/31/2026</a:t>
+              <a:t>10/15/26</a:t>
             </a:fld>
             <a:endParaRPr lang="en-US"/>
           </a:p>
@@ -1496,7 +1496,7 @@
           <a:p>
             <a:fld id="{3E22BF2E-04DA-469E-97C5-BB68A0368813}" type="datetimeFigureOut">
               <a:rPr lang="en-US" smtClean="0"/>
-              <a:t>5/31/2026</a:t>
+              <a:t>10/15/26</a:t>
             </a:fld>
             <a:endParaRPr lang="en-US"/>
           </a:p>
@@ -1771,7 +1771,7 @@
           <a:p>
             <a:fld id="{3E22BF2E-04DA-469E-97C5-BB68A0368813}" type="datetimeFigureOut">
               <a:rPr lang="en-US" smtClean="0"/>
-              <a:t>5/31/2026</a:t>
+              <a:t>10/15/26</a:t>
             </a:fld>
             <a:endParaRPr lang="en-US"/>
           </a:p>
@@ -2036,7 +2036,7 @@
           <a:p>
             <a:fld id="{3E22BF2E-04DA-469E-97C5-BB68A0368813}" type="datetimeFigureOut">
               <a:rPr lang="en-US" smtClean="0"/>
-              <a:t>5/31/2026</a:t>
+              <a:t>10/15/26</a:t>
             </a:fld>
             <a:endParaRPr lang="en-US"/>
           </a:p>
@@ -2448,7 +2448,7 @@
           <a:p>
             <a:fld id="{3E22BF2E-04DA-469E-97C5-BB68A0368813}" type="datetimeFigureOut">
               <a:rPr lang="en-US" smtClean="0"/>
-              <a:t>5/31/2026</a:t>
+              <a:t>10/15/26</a:t>
             </a:fld>
             <a:endParaRPr lang="en-US"/>
           </a:p>
@@ -2589,7 +2589,7 @@
           <a:p>
             <a:fld id="{3E22BF2E-04DA-469E-97C5-BB68A0368813}" type="datetimeFigureOut">
               <a:rPr lang="en-US" smtClean="0"/>
-              <a:t>5/31/2026</a:t>
+              <a:t>10/15/26</a:t>
             </a:fld>
             <a:endParaRPr lang="en-US"/>
           </a:p>
@@ -2702,7 +2702,7 @@
           <a:p>
             <a:fld id="{3E22BF2E-04DA-469E-97C5-BB68A0368813}" type="datetimeFigureOut">
               <a:rPr lang="en-US" smtClean="0"/>
-              <a:t>5/31/2026</a:t>
+              <a:t>10/15/26</a:t>
             </a:fld>
             <a:endParaRPr lang="en-US"/>
           </a:p>
@@ -3013,7 +3013,7 @@
           <a:p>
             <a:fld id="{3E22BF2E-04DA-469E-97C5-BB68A0368813}" type="datetimeFigureOut">
               <a:rPr lang="en-US" smtClean="0"/>
-              <a:t>5/31/2026</a:t>
+              <a:t>10/15/26</a:t>
             </a:fld>
             <a:endParaRPr lang="en-US"/>
           </a:p>
@@ -3301,7 +3301,7 @@
           <a:p>
             <a:fld id="{3E22BF2E-04DA-469E-97C5-BB68A0368813}" type="datetimeFigureOut">
               <a:rPr lang="en-US" smtClean="0"/>
-              <a:t>5/31/2026</a:t>
+              <a:t>10/15/26</a:t>
             </a:fld>
             <a:endParaRPr lang="en-US"/>
           </a:p>
@@ -3542,7 +3542,7 @@
           <a:p>
             <a:fld id="{3E22BF2E-04DA-469E-97C5-BB68A0368813}" type="datetimeFigureOut">
               <a:rPr lang="en-US" smtClean="0"/>
-              <a:t>5/31/2026</a:t>
+              <a:t>10/15/26</a:t>
             </a:fld>
             <a:endParaRPr lang="en-US"/>
           </a:p>
@@ -4243,92 +4243,56 @@
           </a:p>
         </p:txBody>
       </p:sp>
-      <p:sp>
-        <p:nvSpPr>
-          <p:cNvPr id="3" name="Subtitle 2">
+      <p:pic>
+        <p:nvPicPr>
+          <p:cNvPr id="6" name="Picture 5">
             <a:extLst>
               <a:ext uri="{FF2B5EF4-FFF2-40B4-BE49-F238E27FC236}">
-                <a16:creationId xmlns:a16="http://schemas.microsoft.com/office/drawing/2014/main" id="{7FFF10C2-8C10-0E89-D285-D614C36EEE69}"/>
+                <a16:creationId xmlns:a16="http://schemas.microsoft.com/office/drawing/2014/main" id="{8AD28C7D-14A3-CFEB-3DEC-2E01272844F2}"/>
+              </a:ext>
+              <a:ext uri="{C183D7F6-B498-43B3-948B-1728B52AA6E4}">
+                <adec:decorative xmlns:adec="http://schemas.microsoft.com/office/drawing/2017/decorative" val="1"/>
               </a:ext>
             </a:extLst>
           </p:cNvPr>
-          <p:cNvSpPr>
-            <a:spLocks noGrp="1"/>
-          </p:cNvSpPr>
-          <p:nvPr>
-            <p:ph type="subTitle" idx="1"/>
-          </p:nvPr>
-        </p:nvSpPr>
-        <p:spPr>
+          <p:cNvPicPr>
+            <a:picLocks noChangeAspect="1" noChangeArrowheads="1"/>
+          </p:cNvPicPr>
+          <p:nvPr/>
+        </p:nvPicPr>
+        <p:blipFill>
+          <a:blip r:embed="rId3">
+            <a:extLst>
+              <a:ext uri="{28A0092B-C50C-407E-A947-70E740481C1C}">
+                <a14:useLocalDpi xmlns:a14="http://schemas.microsoft.com/office/drawing/2010/main" val="0"/>
+              </a:ext>
+            </a:extLst>
+          </a:blip>
+          <a:srcRect/>
+          <a:stretch>
+            <a:fillRect/>
+          </a:stretch>
+        </p:blipFill>
+        <p:spPr bwMode="auto">
           <a:xfrm>
-            <a:off x="477982" y="4868822"/>
-            <a:ext cx="4169519" cy="1443894"/>
+            <a:off x="7816072" y="145911"/>
+            <a:ext cx="4182403" cy="1000945"/>
           </a:xfrm>
+          <a:prstGeom prst="rect">
+            <a:avLst/>
+          </a:prstGeom>
+          <a:noFill/>
+          <a:extLst>
+            <a:ext uri="{909E8E84-426E-40DD-AFC4-6F175D3DCCD1}">
+              <a14:hiddenFill xmlns:a14="http://schemas.microsoft.com/office/drawing/2010/main">
+                <a:solidFill>
+                  <a:srgbClr val="FFFFFF"/>
+                </a:solidFill>
+              </a14:hiddenFill>
+            </a:ext>
+          </a:extLst>
         </p:spPr>
-        <p:txBody>
-          <a:bodyPr>
-            <a:normAutofit fontScale="92500"/>
-          </a:bodyPr>
-          <a:lstStyle/>
-          <a:p>
-            <a:pPr algn="l"/>
-            <a:r>
-              <a:rPr lang="en-US" sz="1700" dirty="0">
-                <a:solidFill>
-                  <a:schemeClr val="bg1"/>
-                </a:solidFill>
-              </a:rPr>
-              <a:t>Michael Hahsler, SMU</a:t>
-            </a:r>
-          </a:p>
-          <a:p>
-            <a:pPr algn="l"/>
-            <a:r>
-              <a:rPr lang="en-US" sz="1300" dirty="0">
-                <a:solidFill>
-                  <a:schemeClr val="bg1"/>
-                </a:solidFill>
-              </a:rPr>
-              <a:t>With figures from Sutton/Barto*</a:t>
-            </a:r>
-          </a:p>
-          <a:p>
-            <a:pPr algn="l"/>
-            <a:endParaRPr lang="en-US" sz="1300" dirty="0">
-              <a:solidFill>
-                <a:schemeClr val="bg1"/>
-              </a:solidFill>
-            </a:endParaRPr>
-          </a:p>
-          <a:p>
-            <a:pPr algn="l"/>
-            <a:r>
-              <a:rPr lang="en-US" sz="1300" dirty="0">
-                <a:solidFill>
-                  <a:schemeClr val="bg1"/>
-                </a:solidFill>
-              </a:rPr>
-              <a:t>*Sutton and Barto, Reinforcement Learning: An Introduction, 2</a:t>
-            </a:r>
-            <a:r>
-              <a:rPr lang="en-US" sz="1300" baseline="30000" dirty="0">
-                <a:solidFill>
-                  <a:schemeClr val="bg1"/>
-                </a:solidFill>
-              </a:rPr>
-              <a:t>nd</a:t>
-            </a:r>
-            <a:r>
-              <a:rPr lang="en-US" sz="1300" dirty="0">
-                <a:solidFill>
-                  <a:schemeClr val="bg1"/>
-                </a:solidFill>
-              </a:rPr>
-              <a:t> edition, MIT Press, Cambridge, MA, 2018</a:t>
-            </a:r>
-          </a:p>
-        </p:txBody>
-      </p:sp>
+      </p:pic>
       <p:sp>
         <p:nvSpPr>
           <p:cNvPr id="14" name="Rectangle 13">
@@ -4490,88 +4454,104 @@
           </a:p>
         </p:txBody>
       </p:sp>
-      <p:pic>
-        <p:nvPicPr>
-          <p:cNvPr id="4" name="object 23">
-            <a:hlinkClick r:id="rId3"/>
+      <p:sp>
+        <p:nvSpPr>
+          <p:cNvPr id="3" name="Subtitle 2">
             <a:extLst>
               <a:ext uri="{FF2B5EF4-FFF2-40B4-BE49-F238E27FC236}">
-                <a16:creationId xmlns:a16="http://schemas.microsoft.com/office/drawing/2014/main" id="{3CBD6548-3D4E-9A40-CA35-355261D4E92C}"/>
+                <a16:creationId xmlns:a16="http://schemas.microsoft.com/office/drawing/2014/main" id="{7FFF10C2-8C10-0E89-D285-D614C36EEE69}"/>
+              </a:ext>
+              <a:ext uri="{C183D7F6-B498-43B3-948B-1728B52AA6E4}">
+                <adec:decorative xmlns:adec="http://schemas.microsoft.com/office/drawing/2017/decorative" val="1"/>
               </a:ext>
             </a:extLst>
           </p:cNvPr>
-          <p:cNvPicPr/>
-          <p:nvPr/>
-        </p:nvPicPr>
-        <p:blipFill>
-          <a:blip r:embed="rId4" cstate="print"/>
-          <a:stretch>
-            <a:fillRect/>
-          </a:stretch>
-        </p:blipFill>
+          <p:cNvSpPr>
+            <a:spLocks noGrp="1"/>
+          </p:cNvSpPr>
+          <p:nvPr>
+            <p:ph type="subTitle" idx="1"/>
+          </p:nvPr>
+        </p:nvSpPr>
         <p:spPr>
           <a:xfrm>
-            <a:off x="10961016" y="6265038"/>
-            <a:ext cx="1037459" cy="383579"/>
+            <a:off x="477982" y="4868822"/>
+            <a:ext cx="4169519" cy="1443894"/>
           </a:xfrm>
-          <a:prstGeom prst="rect">
-            <a:avLst/>
-          </a:prstGeom>
         </p:spPr>
-      </p:pic>
-      <p:pic>
-        <p:nvPicPr>
-          <p:cNvPr id="6" name="Picture 5">
-            <a:extLst>
-              <a:ext uri="{FF2B5EF4-FFF2-40B4-BE49-F238E27FC236}">
-                <a16:creationId xmlns:a16="http://schemas.microsoft.com/office/drawing/2014/main" id="{8AD28C7D-14A3-CFEB-3DEC-2E01272844F2}"/>
-              </a:ext>
-            </a:extLst>
-          </p:cNvPr>
-          <p:cNvPicPr>
-            <a:picLocks noChangeAspect="1" noChangeArrowheads="1"/>
-          </p:cNvPicPr>
-          <p:nvPr/>
-        </p:nvPicPr>
-        <p:blipFill>
-          <a:blip r:embed="rId5">
-            <a:extLst>
-              <a:ext uri="{28A0092B-C50C-407E-A947-70E740481C1C}">
-                <a14:useLocalDpi xmlns:a14="http://schemas.microsoft.com/office/drawing/2010/main" val="0"/>
-              </a:ext>
-            </a:extLst>
-          </a:blip>
-          <a:srcRect/>
-          <a:stretch>
-            <a:fillRect/>
-          </a:stretch>
-        </p:blipFill>
-        <p:spPr bwMode="auto">
-          <a:xfrm>
-            <a:off x="7816072" y="145911"/>
-            <a:ext cx="4182403" cy="1000945"/>
-          </a:xfrm>
-          <a:prstGeom prst="rect">
-            <a:avLst/>
-          </a:prstGeom>
-          <a:noFill/>
-          <a:extLst>
-            <a:ext uri="{909E8E84-426E-40DD-AFC4-6F175D3DCCD1}">
-              <a14:hiddenFill xmlns:a14="http://schemas.microsoft.com/office/drawing/2010/main">
+        <p:txBody>
+          <a:bodyPr>
+            <a:normAutofit fontScale="92500"/>
+          </a:bodyPr>
+          <a:lstStyle/>
+          <a:p>
+            <a:pPr algn="l"/>
+            <a:r>
+              <a:rPr lang="en-US" sz="1700" dirty="0">
                 <a:solidFill>
-                  <a:srgbClr val="FFFFFF"/>
+                  <a:schemeClr val="bg1"/>
                 </a:solidFill>
-              </a14:hiddenFill>
-            </a:ext>
-          </a:extLst>
-        </p:spPr>
-      </p:pic>
+              </a:rPr>
+              <a:t>Michael Hahsler, SMU</a:t>
+            </a:r>
+          </a:p>
+          <a:p>
+            <a:pPr algn="l"/>
+            <a:r>
+              <a:rPr lang="en-US" sz="1300" dirty="0">
+                <a:solidFill>
+                  <a:schemeClr val="bg1"/>
+                </a:solidFill>
+              </a:rPr>
+              <a:t>With figures from Sutton/Barto*</a:t>
+            </a:r>
+          </a:p>
+          <a:p>
+            <a:pPr algn="l"/>
+            <a:endParaRPr lang="en-US" sz="1300" dirty="0">
+              <a:solidFill>
+                <a:schemeClr val="bg1"/>
+              </a:solidFill>
+            </a:endParaRPr>
+          </a:p>
+          <a:p>
+            <a:pPr algn="l"/>
+            <a:r>
+              <a:rPr lang="en-US" sz="1300" dirty="0">
+                <a:solidFill>
+                  <a:schemeClr val="bg1"/>
+                </a:solidFill>
+              </a:rPr>
+              <a:t>*Sutton and Barto, Reinforcement Learning: An Introduction, 2</a:t>
+            </a:r>
+            <a:r>
+              <a:rPr lang="en-US" sz="1300" baseline="30000" dirty="0">
+                <a:solidFill>
+                  <a:schemeClr val="bg1"/>
+                </a:solidFill>
+              </a:rPr>
+              <a:t>nd</a:t>
+            </a:r>
+            <a:r>
+              <a:rPr lang="en-US" sz="1300" dirty="0">
+                <a:solidFill>
+                  <a:schemeClr val="bg1"/>
+                </a:solidFill>
+              </a:rPr>
+              <a:t> edition, MIT Press, Cambridge, MA, 2018</a:t>
+            </a:r>
+          </a:p>
+        </p:txBody>
+      </p:sp>
       <p:grpSp>
         <p:nvGrpSpPr>
           <p:cNvPr id="7" name="Group 6">
             <a:extLst>
               <a:ext uri="{FF2B5EF4-FFF2-40B4-BE49-F238E27FC236}">
                 <a16:creationId xmlns:a16="http://schemas.microsoft.com/office/drawing/2014/main" id="{DA1C6744-BD97-2C10-F393-A0B726F71E7A}"/>
+              </a:ext>
+              <a:ext uri="{C183D7F6-B498-43B3-948B-1728B52AA6E4}">
+                <adec:decorative xmlns:adec="http://schemas.microsoft.com/office/drawing/2017/decorative" val="1"/>
               </a:ext>
             </a:extLst>
           </p:cNvPr>
@@ -4593,6 +4573,9 @@
                 <a:ext uri="{FF2B5EF4-FFF2-40B4-BE49-F238E27FC236}">
                   <a16:creationId xmlns:a16="http://schemas.microsoft.com/office/drawing/2014/main" id="{2F5FC233-1ACF-0EE9-5B1F-F0A29270EECF}"/>
                 </a:ext>
+                <a:ext uri="{C183D7F6-B498-43B3-948B-1728B52AA6E4}">
+                  <adec:decorative xmlns:adec="http://schemas.microsoft.com/office/drawing/2017/decorative" val="1"/>
+                </a:ext>
               </a:extLst>
             </p:cNvPr>
             <p:cNvPicPr>
@@ -4601,7 +4584,7 @@
             <p:nvPr/>
           </p:nvPicPr>
           <p:blipFill>
-            <a:blip r:embed="rId6"/>
+            <a:blip r:embed="rId4"/>
             <a:stretch>
               <a:fillRect/>
             </a:stretch>
@@ -4618,7 +4601,7 @@
         </p:pic>
         <p:pic>
           <p:nvPicPr>
-            <p:cNvPr id="9" name="Picture 8">
+            <p:cNvPr id="9" name="Picture 8" descr="QR code linking to the online course material.">
               <a:extLst>
                 <a:ext uri="{FF2B5EF4-FFF2-40B4-BE49-F238E27FC236}">
                   <a16:creationId xmlns:a16="http://schemas.microsoft.com/office/drawing/2014/main" id="{26CB3135-CE78-1137-FBA3-29AA8592D8FA}"/>
@@ -4631,7 +4614,7 @@
             <p:nvPr/>
           </p:nvPicPr>
           <p:blipFill>
-            <a:blip r:embed="rId7"/>
+            <a:blip r:embed="rId5"/>
             <a:stretch>
               <a:fillRect/>
             </a:stretch>
@@ -4647,6 +4630,38 @@
           </p:spPr>
         </p:pic>
       </p:grpSp>
+      <p:pic>
+        <p:nvPicPr>
+          <p:cNvPr id="4" name="object 23">
+            <a:hlinkClick r:id="rId6"/>
+            <a:extLst>
+              <a:ext uri="{FF2B5EF4-FFF2-40B4-BE49-F238E27FC236}">
+                <a16:creationId xmlns:a16="http://schemas.microsoft.com/office/drawing/2014/main" id="{3CBD6548-3D4E-9A40-CA35-355261D4E92C}"/>
+              </a:ext>
+              <a:ext uri="{C183D7F6-B498-43B3-948B-1728B52AA6E4}">
+                <adec:decorative xmlns:adec="http://schemas.microsoft.com/office/drawing/2017/decorative" val="1"/>
+              </a:ext>
+            </a:extLst>
+          </p:cNvPr>
+          <p:cNvPicPr/>
+          <p:nvPr/>
+        </p:nvPicPr>
+        <p:blipFill>
+          <a:blip r:embed="rId7" cstate="print"/>
+          <a:stretch>
+            <a:fillRect/>
+          </a:stretch>
+        </p:blipFill>
+        <p:spPr>
+          <a:xfrm>
+            <a:off x="10961016" y="6265038"/>
+            <a:ext cx="1037459" cy="383579"/>
+          </a:xfrm>
+          <a:prstGeom prst="rect">
+            <a:avLst/>
+          </a:prstGeom>
+        </p:spPr>
+      </p:pic>
     </p:spTree>
     <p:extLst>
       <p:ext uri="{BB962C8B-B14F-4D97-AF65-F5344CB8AC3E}">
@@ -4711,6 +4726,9 @@
             <a:extLst>
               <a:ext uri="{FF2B5EF4-FFF2-40B4-BE49-F238E27FC236}">
                 <a16:creationId xmlns:a16="http://schemas.microsoft.com/office/drawing/2014/main" id="{A7EF6370-86D1-9264-5816-F21882AD1F8B}"/>
+              </a:ext>
+              <a:ext uri="{C183D7F6-B498-43B3-948B-1728B52AA6E4}">
+                <adec:decorative xmlns:adec="http://schemas.microsoft.com/office/drawing/2017/decorative" val="1"/>
               </a:ext>
             </a:extLst>
           </p:cNvPr>
@@ -4792,7 +4810,7 @@
         <mc:Choice Requires="a14">
           <p:sp>
             <p:nvSpPr>
-              <p:cNvPr id="3" name="Content Placeholder 2">
+              <p:cNvPr id="3" name="Content Placeholder 2" descr="Setup. For a given policy pi, learn an approximation v hat (s,w) is approximately v sub pi. We use w is defined as (w sub 1,w sub 2, dot dot dot,w sub d) transpose. C hoose v hat (s,w) as a differentiable function of w for all s in S. Learning. We sample following pi, and observe at each discrete time step t equals 0, 1, 2, 3, dot dot dot a new example S sub t maps to v sub pi (S sub t) . Update w to reduce VE bar . I.e., make v hat (s,w) more similar to v sub pi . Note that the samples automatically follow the distribution mu for pi">
                 <a:extLst>
                   <a:ext uri="{FF2B5EF4-FFF2-40B4-BE49-F238E27FC236}">
                     <a16:creationId xmlns:a16="http://schemas.microsoft.com/office/drawing/2014/main" id="{429671F6-58E1-5895-8D89-7778F6212AA2}"/>
@@ -4869,7 +4887,7 @@
                     <m:d>
                       <m:dPr>
                         <m:ctrlPr>
-                          <a:rPr lang="en-US" i="1" dirty="0">
+                          <a:rPr lang="en-US" i="1">
                             <a:latin typeface="Cambria Math" panose="02040503050406030204" pitchFamily="18" charset="0"/>
                           </a:rPr>
                         </m:ctrlPr>
@@ -4951,13 +4969,7 @@
                       <a:rPr lang="en-US" b="1" i="1">
                         <a:latin typeface="Cambria Math" panose="02040503050406030204" pitchFamily="18" charset="0"/>
                       </a:rPr>
-                      <m:t> </m:t>
-                    </m:r>
-                    <m:r>
-                      <a:rPr lang="en-US" i="1">
-                        <a:latin typeface="Cambria Math" panose="02040503050406030204" pitchFamily="18" charset="0"/>
-                      </a:rPr>
-                      <m:t>≝</m:t>
+                      <m:t> ≝</m:t>
                     </m:r>
                     <m:sSup>
                       <m:sSupPr>
@@ -5137,7 +5149,7 @@
                     <m:d>
                       <m:dPr>
                         <m:ctrlPr>
-                          <a:rPr lang="en-US" i="1" dirty="0">
+                          <a:rPr lang="en-US" i="1">
                             <a:latin typeface="Cambria Math" panose="02040503050406030204" pitchFamily="18" charset="0"/>
                           </a:rPr>
                         </m:ctrlPr>
@@ -5262,13 +5274,7 @@
                       <a:rPr lang="en-US" b="0" i="1" smtClean="0">
                         <a:latin typeface="Cambria Math" panose="02040503050406030204" pitchFamily="18" charset="0"/>
                       </a:rPr>
-                      <m:t>=0, 1, 2, 3, …</m:t>
-                    </m:r>
-                    <m:r>
-                      <a:rPr lang="en-US" b="1" i="0" smtClean="0">
-                        <a:latin typeface="Cambria Math" panose="02040503050406030204" pitchFamily="18" charset="0"/>
-                      </a:rPr>
-                      <m:t> </m:t>
+                      <m:t>=0, 1, 2, 3, … </m:t>
                     </m:r>
                   </m:oMath>
                 </a14:m>
@@ -5440,7 +5446,7 @@
                       <m:accPr>
                         <m:chr m:val="̅"/>
                         <m:ctrlPr>
-                          <a:rPr lang="en-US" i="1" smtClean="0">
+                          <a:rPr lang="en-US" b="0" i="1" smtClean="0">
                             <a:latin typeface="Cambria Math" panose="02040503050406030204" pitchFamily="18" charset="0"/>
                           </a:rPr>
                         </m:ctrlPr>
@@ -5483,7 +5489,7 @@
                     <m:d>
                       <m:dPr>
                         <m:ctrlPr>
-                          <a:rPr lang="en-US" i="1" dirty="0">
+                          <a:rPr lang="en-US" i="1">
                             <a:latin typeface="Cambria Math" panose="02040503050406030204" pitchFamily="18" charset="0"/>
                           </a:rPr>
                         </m:ctrlPr>
@@ -5596,7 +5602,7 @@
         <mc:Fallback xmlns="">
           <p:sp>
             <p:nvSpPr>
-              <p:cNvPr id="3" name="Content Placeholder 2">
+              <p:cNvPr id="3" name="Content Placeholder 2" descr="Setup. For a given policy pi, learn an approximation v hat (s,w) is approximately v sub pi. We use w is defined as (w sub 1,w sub 2, dot dot dot,w sub d) transpose. C hoose v hat (s,w) as a differentiable function of w for all s in S. Learning. We sample following pi, and observe at each discrete time step t equals 0, 1, 2, 3, dot dot dot a new example S sub t maps to v sub pi (S sub t) . Update w to reduce VE bar . I.e., make v hat (s,w) more similar to v sub pi . Note that the samples automatically follow the distribution mu for pi">
                 <a:extLst>
                   <a:ext uri="{FF2B5EF4-FFF2-40B4-BE49-F238E27FC236}">
                     <a16:creationId xmlns:a16="http://schemas.microsoft.com/office/drawing/2014/main" id="{429671F6-58E1-5895-8D89-7778F6212AA2}"/>
@@ -5641,7 +5647,7 @@
         <mc:Choice Requires="a14">
           <p:sp>
             <p:nvSpPr>
-              <p:cNvPr id="4" name="Speech Bubble: Rectangle with Corners Rounded 3">
+              <p:cNvPr id="4" name="Speech Bubble: Rectangle with Corners Rounded 3" descr="For now, we assume that we can assess the correct v sub pi (S sub t)">
                 <a:extLst>
                   <a:ext uri="{FF2B5EF4-FFF2-40B4-BE49-F238E27FC236}">
                     <a16:creationId xmlns:a16="http://schemas.microsoft.com/office/drawing/2014/main" id="{AB49CAFC-1028-608B-EC85-51F22C5CF030}"/>
@@ -5771,7 +5777,7 @@
         <mc:Fallback xmlns="">
           <p:sp>
             <p:nvSpPr>
-              <p:cNvPr id="4" name="Speech Bubble: Rectangle with Corners Rounded 3">
+              <p:cNvPr id="4" name="Speech Bubble: Rectangle with Corners Rounded 3" descr="For now, we assume that we can assess the correct v sub pi (S sub t)">
                 <a:extLst>
                   <a:ext uri="{FF2B5EF4-FFF2-40B4-BE49-F238E27FC236}">
                     <a16:creationId xmlns:a16="http://schemas.microsoft.com/office/drawing/2014/main" id="{AB49CAFC-1028-608B-EC85-51F22C5CF030}"/>
@@ -5821,7 +5827,7 @@
         <mc:Choice Requires="a14">
           <p:sp>
             <p:nvSpPr>
-              <p:cNvPr id="6" name="TextBox 5">
+              <p:cNvPr id="6" name="TextBox 5" descr="Equation: VE bar is defined as the sum over s in S, of mu (s) [v sub pi minus v hat (s,w)] squared">
                 <a:extLst>
                   <a:ext uri="{FF2B5EF4-FFF2-40B4-BE49-F238E27FC236}">
                     <a16:creationId xmlns:a16="http://schemas.microsoft.com/office/drawing/2014/main" id="{B382737A-0856-8EC8-DC5F-DBE97B7A043F}"/>
@@ -5865,15 +5871,12 @@
                 <a:pPr/>
                 <a14:m>
                   <m:oMathPara xmlns:m="http://schemas.openxmlformats.org/officeDocument/2006/math">
-                    <m:oMathParaPr>
-                      <m:jc m:val="centerGroup"/>
-                    </m:oMathParaPr>
-                    <m:oMath xmlns:m="http://schemas.openxmlformats.org/officeDocument/2006/math">
+                    <m:oMath>
                       <m:acc>
                         <m:accPr>
                           <m:chr m:val="̅"/>
                           <m:ctrlPr>
-                            <a:rPr lang="en-US" i="1" smtClean="0">
+                            <a:rPr lang="en-US" b="0" i="1" smtClean="0">
                               <a:latin typeface="Cambria Math" panose="02040503050406030204" pitchFamily="18" charset="0"/>
                             </a:rPr>
                           </m:ctrlPr>
@@ -5970,7 +5973,7 @@
                                   <m:begChr m:val="["/>
                                   <m:endChr m:val="]"/>
                                   <m:ctrlPr>
-                                    <a:rPr lang="en-US" b="0" i="1" smtClean="0">
+                                    <a:rPr lang="en-US" i="1">
                                       <a:latin typeface="Cambria Math" panose="02040503050406030204" pitchFamily="18" charset="0"/>
                                     </a:rPr>
                                   </m:ctrlPr>
@@ -6079,7 +6082,7 @@
         <mc:Fallback xmlns="">
           <p:sp>
             <p:nvSpPr>
-              <p:cNvPr id="6" name="TextBox 5">
+              <p:cNvPr id="6" name="TextBox 5" descr="Equation: VE bar is defined as the sum over s in S, of mu (s) [v sub pi minus v hat (s,w)] squared">
                 <a:extLst>
                   <a:ext uri="{FF2B5EF4-FFF2-40B4-BE49-F238E27FC236}">
                     <a16:creationId xmlns:a16="http://schemas.microsoft.com/office/drawing/2014/main" id="{B382737A-0856-8EC8-DC5F-DBE97B7A043F}"/>
@@ -6368,11 +6371,39 @@
           <a:chExt cx="0" cy="0"/>
         </a:xfrm>
       </p:grpSpPr>
+      <p:sp>
+        <p:nvSpPr>
+          <p:cNvPr id="2" name="Title 1">
+            <a:extLst>
+              <a:ext uri="{FF2B5EF4-FFF2-40B4-BE49-F238E27FC236}">
+                <a16:creationId xmlns:a16="http://schemas.microsoft.com/office/drawing/2014/main" id="{5C24791A-2065-2469-FCF2-F9E719EFE922}"/>
+              </a:ext>
+            </a:extLst>
+          </p:cNvPr>
+          <p:cNvSpPr>
+            <a:spLocks noGrp="1"/>
+          </p:cNvSpPr>
+          <p:nvPr>
+            <p:ph type="title"/>
+          </p:nvPr>
+        </p:nvSpPr>
+        <p:spPr/>
+        <p:txBody>
+          <a:bodyPr/>
+          <a:lstStyle/>
+          <a:p>
+            <a:r>
+              <a:rPr lang="en-US" dirty="0"/>
+              <a:t>SGD: Stochastic-Gradient Descend</a:t>
+            </a:r>
+          </a:p>
+        </p:txBody>
+      </p:sp>
       <mc:AlternateContent xmlns:mc="http://schemas.openxmlformats.org/markup-compatibility/2006" xmlns:a14="http://schemas.microsoft.com/office/drawing/2010/main">
         <mc:Choice Requires="a14">
           <p:sp>
             <p:nvSpPr>
-              <p:cNvPr id="3" name="Content Placeholder 2">
+              <p:cNvPr id="3" name="Content Placeholder 2" descr="Minimize VE bar is defined as the sum over s in S, of mu (s) [v sub pi minus v hat (s,w)] squared by moving w in the direction gradient of VE bar . Definition of the gradient: gradient of f (w) equals (the fraction partial f (w), over partial w sub 1, end fraction, the fraction partial f (w), over partial w sub 2, end fraction, dot dot dot, the fraction partial f (w), over partial w sub d, end fraction) transpose. Update for one observation: S sub t maps to v sub pi (S sub t). w sub t plus 1, equals w sub t minus 1 over 2 alpha gradient of [v sub pi (S sub t) minus v hat (S sub t,w sub t)] squared equals w sub t plus alpha [v sub pi (S sub t) minus v hat (S sub t,w sub t)] gradient of v hat (S sub t,w sub t). Important property of SGD: Only depends on the gradient of the loss function. Does not need the gradient of the unknown value function!. Stochastic: because update is on a single (randomly chosen) example for S sub t . This is why there is no sum in the update. Step size alpha : Since we update towards a sampled value and updates of w for one state will change the value for other states as well, we use many small updates (small value of alpha)">
                 <a:extLst>
                   <a:ext uri="{FF2B5EF4-FFF2-40B4-BE49-F238E27FC236}">
                     <a16:creationId xmlns:a16="http://schemas.microsoft.com/office/drawing/2014/main" id="{841FE312-5C26-99AC-5278-403A56057DE9}"/>
@@ -6777,7 +6808,7 @@
                                 <m:d>
                                   <m:dPr>
                                     <m:ctrlPr>
-                                      <a:rPr lang="en-US" b="1" i="1" smtClean="0">
+                                      <a:rPr lang="en-US" b="1" i="1">
                                         <a:latin typeface="Cambria Math" panose="02040503050406030204" pitchFamily="18" charset="0"/>
                                         <a:ea typeface="Cambria Math" panose="02040503050406030204" pitchFamily="18" charset="0"/>
                                       </a:rPr>
@@ -7179,14 +7210,11 @@
                 </a:pPr>
                 <a14:m>
                   <m:oMathPara xmlns:m="http://schemas.openxmlformats.org/officeDocument/2006/math">
-                    <m:oMathParaPr>
-                      <m:jc m:val="centerGroup"/>
-                    </m:oMathParaPr>
-                    <m:oMath xmlns:m="http://schemas.openxmlformats.org/officeDocument/2006/math">
+                    <m:oMath>
                       <m:sSub>
                         <m:sSubPr>
                           <m:ctrlPr>
-                            <a:rPr lang="en-US" b="0" i="1" smtClean="0">
+                            <a:rPr lang="en-US" b="1" i="1" smtClean="0">
                               <a:latin typeface="Cambria Math" panose="02040503050406030204" pitchFamily="18" charset="0"/>
                             </a:rPr>
                           </m:ctrlPr>
@@ -7226,7 +7254,7 @@
                       <m:sSub>
                         <m:sSubPr>
                           <m:ctrlPr>
-                            <a:rPr lang="en-US" b="0" i="1" smtClean="0">
+                            <a:rPr lang="en-US" b="1" i="1" smtClean="0">
                               <a:latin typeface="Cambria Math" panose="02040503050406030204" pitchFamily="18" charset="0"/>
                             </a:rPr>
                           </m:ctrlPr>
@@ -7466,7 +7494,7 @@
                                   <m:sSub>
                                     <m:sSubPr>
                                       <m:ctrlPr>
-                                        <a:rPr lang="en-US" b="0" i="1" smtClean="0">
+                                        <a:rPr lang="en-US" b="1" i="1" smtClean="0">
                                           <a:latin typeface="Cambria Math" panose="02040503050406030204" pitchFamily="18" charset="0"/>
                                           <a:ea typeface="Cambria Math" panose="02040503050406030204" pitchFamily="18" charset="0"/>
                                         </a:rPr>
@@ -7526,7 +7554,7 @@
                     <m:sSub>
                       <m:sSubPr>
                         <m:ctrlPr>
-                          <a:rPr lang="en-US" i="1">
+                          <a:rPr lang="en-US" b="1" i="1">
                             <a:latin typeface="Cambria Math" panose="02040503050406030204" pitchFamily="18" charset="0"/>
                           </a:rPr>
                         </m:ctrlPr>
@@ -7715,7 +7743,7 @@
                             <m:sSub>
                               <m:sSubPr>
                                 <m:ctrlPr>
-                                  <a:rPr lang="en-US" i="1">
+                                  <a:rPr lang="en-US" b="1" i="1">
                                     <a:latin typeface="Cambria Math" panose="02040503050406030204" pitchFamily="18" charset="0"/>
                                     <a:ea typeface="Cambria Math" panose="02040503050406030204" pitchFamily="18" charset="0"/>
                                   </a:rPr>
@@ -7768,7 +7796,7 @@
                       <m:accPr>
                         <m:chr m:val="̂"/>
                         <m:ctrlPr>
-                          <a:rPr lang="en-US" i="1" smtClean="0">
+                          <a:rPr lang="en-US" i="1">
                             <a:latin typeface="Cambria Math" panose="02040503050406030204" pitchFamily="18" charset="0"/>
                             <a:ea typeface="Cambria Math" panose="02040503050406030204" pitchFamily="18" charset="0"/>
                           </a:rPr>
@@ -7832,7 +7860,7 @@
                         <m:sSub>
                           <m:sSubPr>
                             <m:ctrlPr>
-                              <a:rPr lang="en-US" i="1">
+                              <a:rPr lang="en-US" b="1" i="1">
                                 <a:latin typeface="Cambria Math" panose="02040503050406030204" pitchFamily="18" charset="0"/>
                                 <a:ea typeface="Cambria Math" panose="02040503050406030204" pitchFamily="18" charset="0"/>
                               </a:rPr>
@@ -7981,7 +8009,7 @@
         <mc:Fallback xmlns="">
           <p:sp>
             <p:nvSpPr>
-              <p:cNvPr id="3" name="Content Placeholder 2">
+              <p:cNvPr id="3" name="Content Placeholder 2" descr="Minimize VE bar is defined as the sum over s in S, of mu (s) [v sub pi minus v hat (s,w)] squared by moving w in the direction gradient of VE bar . Definition of the gradient: gradient of f (w) equals (the fraction partial f (w), over partial w sub 1, end fraction, the fraction partial f (w), over partial w sub 2, end fraction, dot dot dot, the fraction partial f (w), over partial w sub d, end fraction) transpose. Update for one observation: S sub t maps to v sub pi (S sub t). w sub t plus 1, equals w sub t minus 1 over 2 alpha gradient of [v sub pi (S sub t) minus v hat (S sub t,w sub t)] squared equals w sub t plus alpha [v sub pi (S sub t) minus v hat (S sub t,w sub t)] gradient of v hat (S sub t,w sub t). Important property of SGD: Only depends on the gradient of the loss function. Does not need the gradient of the unknown value function!. Stochastic: because update is on a single (randomly chosen) example for S sub t . This is why there is no sum in the update. Step size alpha : Since we update towards a sampled value and updates of w for one state will change the value for other states as well, we use many small updates (small value of alpha)">
                 <a:extLst>
                   <a:ext uri="{FF2B5EF4-FFF2-40B4-BE49-F238E27FC236}">
                     <a16:creationId xmlns:a16="http://schemas.microsoft.com/office/drawing/2014/main" id="{841FE312-5C26-99AC-5278-403A56057DE9}"/>
@@ -8022,39 +8050,11 @@
           </p:sp>
         </mc:Fallback>
       </mc:AlternateContent>
-      <p:sp>
-        <p:nvSpPr>
-          <p:cNvPr id="2" name="Title 1">
-            <a:extLst>
-              <a:ext uri="{FF2B5EF4-FFF2-40B4-BE49-F238E27FC236}">
-                <a16:creationId xmlns:a16="http://schemas.microsoft.com/office/drawing/2014/main" id="{5C24791A-2065-2469-FCF2-F9E719EFE922}"/>
-              </a:ext>
-            </a:extLst>
-          </p:cNvPr>
-          <p:cNvSpPr>
-            <a:spLocks noGrp="1"/>
-          </p:cNvSpPr>
-          <p:nvPr>
-            <p:ph type="title"/>
-          </p:nvPr>
-        </p:nvSpPr>
-        <p:spPr/>
-        <p:txBody>
-          <a:bodyPr/>
-          <a:lstStyle/>
-          <a:p>
-            <a:r>
-              <a:rPr lang="en-US" dirty="0"/>
-              <a:t>SGD: Stochastic-Gradient Descend</a:t>
-            </a:r>
-          </a:p>
-        </p:txBody>
-      </p:sp>
       <mc:AlternateContent xmlns:mc="http://schemas.openxmlformats.org/markup-compatibility/2006" xmlns:a14="http://schemas.microsoft.com/office/drawing/2010/main">
         <mc:Choice Requires="a14">
           <p:sp>
             <p:nvSpPr>
-              <p:cNvPr id="4" name="Speech Bubble: Rectangle with Corners Rounded 3">
+              <p:cNvPr id="4" name="Speech Bubble: Rectangle with Corners Rounded 3" descr="Applying the chain rule* shows that we only need the gradient of the approximation function. Notes: the sign changes and 1 over 2 was chosen for convenience">
                 <a:extLst>
                   <a:ext uri="{FF2B5EF4-FFF2-40B4-BE49-F238E27FC236}">
                     <a16:creationId xmlns:a16="http://schemas.microsoft.com/office/drawing/2014/main" id="{BA5FC1EA-408E-750E-8302-14FB867FDECE}"/>
@@ -8153,7 +8153,7 @@
         <mc:Fallback xmlns="">
           <p:sp>
             <p:nvSpPr>
-              <p:cNvPr id="4" name="Speech Bubble: Rectangle with Corners Rounded 3">
+              <p:cNvPr id="4" name="Speech Bubble: Rectangle with Corners Rounded 3" descr="Applying the chain rule* shows that we only need the gradient of the approximation function. Notes: the sign changes and 1 over 2 was chosen for convenience">
                 <a:extLst>
                   <a:ext uri="{FF2B5EF4-FFF2-40B4-BE49-F238E27FC236}">
                     <a16:creationId xmlns:a16="http://schemas.microsoft.com/office/drawing/2014/main" id="{BA5FC1EA-408E-750E-8302-14FB867FDECE}"/>
@@ -8201,7 +8201,7 @@
       </mc:AlternateContent>
       <p:grpSp>
         <p:nvGrpSpPr>
-          <p:cNvPr id="15" name="Group 14">
+          <p:cNvPr id="15" name="Group 14" descr="Rainbow-coloured 3D surface plot of a bowl-shaped quadratic function of two variables, lowest (0) at the centre and rising to 2 at the corners of the square from −1 to 1. Labels: w sub 1; w sub 2; f; gradient of f (w).">
             <a:extLst>
               <a:ext uri="{FF2B5EF4-FFF2-40B4-BE49-F238E27FC236}">
                 <a16:creationId xmlns:a16="http://schemas.microsoft.com/office/drawing/2014/main" id="{27A2F1BA-E1F0-0F40-5826-097EAD324210}"/>
@@ -8221,7 +8221,7 @@
         </p:grpSpPr>
         <p:pic>
           <p:nvPicPr>
-            <p:cNvPr id="1026" name="Picture 2" descr="image">
+            <p:cNvPr id="1026" name="Picture 2" descr="Rainbow-coloured 3D surface plot of a bowl-shaped quadratic function of two variables, lowest (0) at the centre and rising to 2 at the corners of the square from −1 to 1.">
               <a:extLst>
                 <a:ext uri="{FF2B5EF4-FFF2-40B4-BE49-F238E27FC236}">
                   <a16:creationId xmlns:a16="http://schemas.microsoft.com/office/drawing/2014/main" id="{9DB133E6-6974-8668-496C-211BA8ECF05F}"/>
@@ -8275,7 +8275,7 @@
           <mc:Choice Requires="a14">
             <p:sp>
               <p:nvSpPr>
-                <p:cNvPr id="7" name="TextBox 6">
+                <p:cNvPr id="7" name="TextBox 6" descr="Equation: w sub 1">
                   <a:extLst>
                     <a:ext uri="{FF2B5EF4-FFF2-40B4-BE49-F238E27FC236}">
                       <a16:creationId xmlns:a16="http://schemas.microsoft.com/office/drawing/2014/main" id="{D7CAA104-4550-BD6D-56DD-A22FA63743F8}"/>
@@ -8304,10 +8304,7 @@
                   <a:pPr/>
                   <a14:m>
                     <m:oMathPara xmlns:m="http://schemas.openxmlformats.org/officeDocument/2006/math">
-                      <m:oMathParaPr>
-                        <m:jc m:val="centerGroup"/>
-                      </m:oMathParaPr>
-                      <m:oMath xmlns:m="http://schemas.openxmlformats.org/officeDocument/2006/math">
+                      <m:oMath>
                         <m:sSub>
                           <m:sSubPr>
                             <m:ctrlPr>
@@ -8344,7 +8341,7 @@
           <mc:Fallback xmlns="">
             <p:sp>
               <p:nvSpPr>
-                <p:cNvPr id="7" name="TextBox 6">
+                <p:cNvPr id="7" name="TextBox 6" descr="Equation: w sub 1">
                   <a:extLst>
                     <a:ext uri="{FF2B5EF4-FFF2-40B4-BE49-F238E27FC236}">
                       <a16:creationId xmlns:a16="http://schemas.microsoft.com/office/drawing/2014/main" id="{D7CAA104-4550-BD6D-56DD-A22FA63743F8}"/>
@@ -8390,7 +8387,7 @@
           <mc:Choice Requires="a14">
             <p:sp>
               <p:nvSpPr>
-                <p:cNvPr id="8" name="TextBox 7">
+                <p:cNvPr id="8" name="TextBox 7" descr="Equation: w sub 2">
                   <a:extLst>
                     <a:ext uri="{FF2B5EF4-FFF2-40B4-BE49-F238E27FC236}">
                       <a16:creationId xmlns:a16="http://schemas.microsoft.com/office/drawing/2014/main" id="{CBC8F59E-37BC-8A67-5B3D-4B2F5FBFF36F}"/>
@@ -8419,10 +8416,7 @@
                   <a:pPr/>
                   <a14:m>
                     <m:oMathPara xmlns:m="http://schemas.openxmlformats.org/officeDocument/2006/math">
-                      <m:oMathParaPr>
-                        <m:jc m:val="centerGroup"/>
-                      </m:oMathParaPr>
-                      <m:oMath xmlns:m="http://schemas.openxmlformats.org/officeDocument/2006/math">
+                      <m:oMath>
                         <m:sSub>
                           <m:sSubPr>
                             <m:ctrlPr>
@@ -8459,7 +8453,7 @@
           <mc:Fallback xmlns="">
             <p:sp>
               <p:nvSpPr>
-                <p:cNvPr id="8" name="TextBox 7">
+                <p:cNvPr id="8" name="TextBox 7" descr="Equation: w sub 2">
                   <a:extLst>
                     <a:ext uri="{FF2B5EF4-FFF2-40B4-BE49-F238E27FC236}">
                       <a16:creationId xmlns:a16="http://schemas.microsoft.com/office/drawing/2014/main" id="{CBC8F59E-37BC-8A67-5B3D-4B2F5FBFF36F}"/>
@@ -8505,7 +8499,7 @@
           <mc:Choice Requires="a14">
             <p:sp>
               <p:nvSpPr>
-                <p:cNvPr id="11" name="TextBox 10">
+                <p:cNvPr id="11" name="TextBox 10" descr="Equation: f">
                   <a:extLst>
                     <a:ext uri="{FF2B5EF4-FFF2-40B4-BE49-F238E27FC236}">
                       <a16:creationId xmlns:a16="http://schemas.microsoft.com/office/drawing/2014/main" id="{D4AC81AC-BB68-87B3-206F-FBBC280799AC}"/>
@@ -8534,10 +8528,7 @@
                   <a:pPr/>
                   <a14:m>
                     <m:oMathPara xmlns:m="http://schemas.openxmlformats.org/officeDocument/2006/math">
-                      <m:oMathParaPr>
-                        <m:jc m:val="centerGroup"/>
-                      </m:oMathParaPr>
-                      <m:oMath xmlns:m="http://schemas.openxmlformats.org/officeDocument/2006/math">
+                      <m:oMath>
                         <m:r>
                           <a:rPr lang="en-US" sz="1100" i="1" dirty="0" smtClean="0">
                             <a:latin typeface="Cambria Math" panose="02040503050406030204" pitchFamily="18" charset="0"/>
@@ -8555,7 +8546,7 @@
           <mc:Fallback xmlns="">
             <p:sp>
               <p:nvSpPr>
-                <p:cNvPr id="11" name="TextBox 10">
+                <p:cNvPr id="11" name="TextBox 10" descr="Equation: f">
                   <a:extLst>
                     <a:ext uri="{FF2B5EF4-FFF2-40B4-BE49-F238E27FC236}">
                       <a16:creationId xmlns:a16="http://schemas.microsoft.com/office/drawing/2014/main" id="{D4AC81AC-BB68-87B3-206F-FBBC280799AC}"/>
@@ -8601,7 +8592,7 @@
           <mc:Choice Requires="a14">
             <p:sp>
               <p:nvSpPr>
-                <p:cNvPr id="12" name="TextBox 11">
+                <p:cNvPr id="12" name="TextBox 11" descr="Equation: gradient of f (w)">
                   <a:extLst>
                     <a:ext uri="{FF2B5EF4-FFF2-40B4-BE49-F238E27FC236}">
                       <a16:creationId xmlns:a16="http://schemas.microsoft.com/office/drawing/2014/main" id="{D8B93170-B8DD-FFC8-7FE1-BE9B397B92C0}"/>
@@ -8649,10 +8640,7 @@
                   <a:pPr/>
                   <a14:m>
                     <m:oMathPara xmlns:m="http://schemas.openxmlformats.org/officeDocument/2006/math">
-                      <m:oMathParaPr>
-                        <m:jc m:val="centerGroup"/>
-                      </m:oMathParaPr>
-                      <m:oMath xmlns:m="http://schemas.openxmlformats.org/officeDocument/2006/math">
+                      <m:oMath>
                         <m:r>
                           <m:rPr>
                             <m:sty m:val="p"/>
@@ -8700,7 +8688,7 @@
           <mc:Fallback xmlns="">
             <p:sp>
               <p:nvSpPr>
-                <p:cNvPr id="12" name="TextBox 11">
+                <p:cNvPr id="12" name="TextBox 11" descr="Equation: gradient of f (w)">
                   <a:extLst>
                     <a:ext uri="{FF2B5EF4-FFF2-40B4-BE49-F238E27FC236}">
                       <a16:creationId xmlns:a16="http://schemas.microsoft.com/office/drawing/2014/main" id="{D8B93170-B8DD-FFC8-7FE1-BE9B397B92C0}"/>
@@ -8752,6 +8740,9 @@
                 <a:ext uri="{FF2B5EF4-FFF2-40B4-BE49-F238E27FC236}">
                   <a16:creationId xmlns:a16="http://schemas.microsoft.com/office/drawing/2014/main" id="{918AFD0D-1261-061C-9731-56427D17F16A}"/>
                 </a:ext>
+                <a:ext uri="{C183D7F6-B498-43B3-948B-1728B52AA6E4}">
+                  <adec:decorative xmlns:adec="http://schemas.microsoft.com/office/drawing/2017/decorative" val="1"/>
+                </a:ext>
               </a:extLst>
             </p:cNvPr>
             <p:cNvCxnSpPr/>
@@ -8789,7 +8780,7 @@
         <mc:Choice Requires="a14">
           <p:sp>
             <p:nvSpPr>
-              <p:cNvPr id="16" name="TextBox 15">
+              <p:cNvPr id="16" name="TextBox 15" descr="*Chain rule (of differentiation). h(x) equals z(y(x)). is equivalent to. h prime(x) equals z prime(y(x)) y prime(x)">
                 <a:extLst>
                   <a:ext uri="{FF2B5EF4-FFF2-40B4-BE49-F238E27FC236}">
                     <a16:creationId xmlns:a16="http://schemas.microsoft.com/office/drawing/2014/main" id="{751B930F-43AF-8B6E-3F69-D8CF3DDE50A5}"/>
@@ -8844,15 +8835,12 @@
                 <a:pPr/>
                 <a14:m>
                   <m:oMathPara xmlns:m="http://schemas.openxmlformats.org/officeDocument/2006/math">
-                    <m:oMathParaPr>
-                      <m:jc m:val="centerGroup"/>
-                    </m:oMathParaPr>
-                    <m:oMath xmlns:m="http://schemas.openxmlformats.org/officeDocument/2006/math">
+                    <m:oMath>
                       <m:r>
                         <a:rPr lang="en-US" sz="1400" i="1">
                           <a:latin typeface="Cambria Math" panose="02040503050406030204" pitchFamily="18" charset="0"/>
                         </a:rPr>
-                        <m:t>h</m:t>
+                        <m:t>ℎ</m:t>
                       </m:r>
                       <m:r>
                         <a:rPr lang="en-US" sz="1400" i="1">
@@ -8923,15 +8911,12 @@
                 <a:pPr/>
                 <a14:m>
                   <m:oMathPara xmlns:m="http://schemas.openxmlformats.org/officeDocument/2006/math">
-                    <m:oMathParaPr>
-                      <m:jc m:val="centerGroup"/>
-                    </m:oMathParaPr>
-                    <m:oMath xmlns:m="http://schemas.openxmlformats.org/officeDocument/2006/math">
+                    <m:oMath>
                       <m:r>
                         <a:rPr lang="es-ES" sz="1400" i="1">
                           <a:latin typeface="Cambria Math" panose="02040503050406030204" pitchFamily="18" charset="0"/>
                         </a:rPr>
-                        <m:t>h</m:t>
+                        <m:t>ℎ</m:t>
                       </m:r>
                       <m:r>
                         <a:rPr lang="es-ES" sz="1400" i="1">
@@ -9022,7 +9007,7 @@
         <mc:Fallback xmlns="">
           <p:sp>
             <p:nvSpPr>
-              <p:cNvPr id="16" name="TextBox 15">
+              <p:cNvPr id="16" name="TextBox 15" descr="*Chain rule (of differentiation). h(x) equals z(y(x)). is equivalent to. h prime(x) equals z prime(y(x)) y prime(x)">
                 <a:extLst>
                   <a:ext uri="{FF2B5EF4-FFF2-40B4-BE49-F238E27FC236}">
                     <a16:creationId xmlns:a16="http://schemas.microsoft.com/office/drawing/2014/main" id="{751B930F-43AF-8B6E-3F69-D8CF3DDE50A5}"/>
@@ -9590,7 +9575,7 @@
         <mc:Choice Requires="a14">
           <p:sp>
             <p:nvSpPr>
-              <p:cNvPr id="3" name="Content Placeholder 2">
+              <p:cNvPr id="3" name="Content Placeholder 2" descr="SGD converges to a local optimum if the stochastic approximation criterion (Robbins–Monro conditions) is met: the sum over n equals 1 to infinity, of alpha sub n (a) equals infinity and the sum over n equals 1 to infinity, of alpha sub n, to the power 2, (a) is less than or equal to infinity. alpha sub n (a) … step size used after the n -th selection of action a. Popular choices for alpha :. Tabular MC uses alpha sub n (a) equals 1 over n which leads to sample averaging. Not appropriate for TD or approximation!. Constant alpha equals 1 divided by tau means a tabular estimate would approach to the mean target after tau experiences + keeps learning. How to choose alpha in practice. Typical values: 0.1, 0.01, 0.001. If learning diverges: reduce alpha by a factor of 10. If learning is too slow: increase alpha bey a factor of 2 to 5. Plot learning curve">
                 <a:extLst>
                   <a:ext uri="{FF2B5EF4-FFF2-40B4-BE49-F238E27FC236}">
                     <a16:creationId xmlns:a16="http://schemas.microsoft.com/office/drawing/2014/main" id="{1D168661-07BB-DFA8-AD05-96A97DFC4345}"/>
@@ -9731,16 +9716,7 @@
                           <a:rPr lang="en-US" b="0" i="0" smtClean="0">
                             <a:latin typeface="Cambria Math" panose="02040503050406030204" pitchFamily="18" charset="0"/>
                           </a:rPr>
-                          <m:t>     </m:t>
-                        </m:r>
-                        <m:r>
-                          <m:rPr>
-                            <m:nor/>
-                          </m:rPr>
-                          <a:rPr lang="en-US" b="0" i="0" smtClean="0">
-                            <a:latin typeface="Cambria Math" panose="02040503050406030204" pitchFamily="18" charset="0"/>
-                          </a:rPr>
-                          <m:t>and</m:t>
+                          <m:t>     and</m:t>
                         </m:r>
                         <m:r>
                           <a:rPr lang="en-US" b="0" i="1" smtClean="0">
@@ -9785,7 +9761,7 @@
                         <m:sSubSup>
                           <m:sSubSupPr>
                             <m:ctrlPr>
-                              <a:rPr lang="en-US" b="0" i="1" smtClean="0">
+                              <a:rPr lang="en-US" i="1">
                                 <a:latin typeface="Cambria Math" panose="02040503050406030204" pitchFamily="18" charset="0"/>
                               </a:rPr>
                             </m:ctrlPr>
@@ -9818,7 +9794,7 @@
                         <m:d>
                           <m:dPr>
                             <m:ctrlPr>
-                              <a:rPr lang="en-US" i="1" smtClean="0">
+                              <a:rPr lang="en-US" i="1">
                                 <a:latin typeface="Cambria Math" panose="02040503050406030204" pitchFamily="18" charset="0"/>
                               </a:rPr>
                             </m:ctrlPr>
@@ -9895,7 +9871,7 @@
                     <m:d>
                       <m:dPr>
                         <m:ctrlPr>
-                          <a:rPr lang="en-US" i="1" smtClean="0">
+                          <a:rPr lang="en-US" i="1">
                             <a:latin typeface="Cambria Math" panose="02040503050406030204" pitchFamily="18" charset="0"/>
                           </a:rPr>
                         </m:ctrlPr>
@@ -9985,7 +9961,7 @@
                     <m:sSub>
                       <m:sSubPr>
                         <m:ctrlPr>
-                          <a:rPr lang="en-US" i="1">
+                          <a:rPr lang="en-US" b="0" i="1" smtClean="0">
                             <a:latin typeface="Cambria Math" panose="02040503050406030204" pitchFamily="18" charset="0"/>
                           </a:rPr>
                         </m:ctrlPr>
@@ -10220,7 +10196,7 @@
         <mc:Fallback xmlns="">
           <p:sp>
             <p:nvSpPr>
-              <p:cNvPr id="3" name="Content Placeholder 2">
+              <p:cNvPr id="3" name="Content Placeholder 2" descr="SGD converges to a local optimum if the stochastic approximation criterion (Robbins–Monro conditions) is met: the sum over n equals 1 to infinity, of alpha sub n (a) equals infinity and the sum over n equals 1 to infinity, of alpha sub n, to the power 2, (a) is less than or equal to infinity. alpha sub n (a) … step size used after the n -th selection of action a. Popular choices for alpha :. Tabular MC uses alpha sub n (a) equals 1 over n which leads to sample averaging. Not appropriate for TD or approximation!. Constant alpha equals 1 divided by tau means a tabular estimate would approach to the mean target after tau experiences + keeps learning. How to choose alpha in practice. Typical values: 0.1, 0.01, 0.001. If learning diverges: reduce alpha by a factor of 10. If learning is too slow: increase alpha bey a factor of 2 to 5. Plot learning curve">
                 <a:extLst>
                   <a:ext uri="{FF2B5EF4-FFF2-40B4-BE49-F238E27FC236}">
                     <a16:creationId xmlns:a16="http://schemas.microsoft.com/office/drawing/2014/main" id="{1D168661-07BB-DFA8-AD05-96A97DFC4345}"/>
@@ -10738,7 +10714,7 @@
         <mc:Choice Requires="a14">
           <p:sp>
             <p:nvSpPr>
-              <p:cNvPr id="3" name="Content Placeholder 2">
+              <p:cNvPr id="3" name="Content Placeholder 2" descr="Issue: We have assumed that we know the actual value of v sub pi (S sub t) for the update w sub t plus 1, equals w sub t plus alpha [v sub pi (S sub t) minus v hat (S sub t,w sub t)] gradient of v hat (S sub t,w sub t) but that is not the case in RL where we want to learn v sub pi . Solution: We can use any target estimate of the expected return U sub t instead w sub t plus 1, equals w sub t plus alpha [U sub t minus v hat (S sub t,w sub t)] gradient of v hat (S sub t,w sub t). SGD converges to a local optimum as long as U sub t is an unbiased estimate. I.e., E (U sub t given S sub t equals s) equals v sub pi (s) . Examples:. The Gradient Monte Carlo method uses the unbiased MC estimate U sub t equals G sub t">
                 <a:extLst>
                   <a:ext uri="{FF2B5EF4-FFF2-40B4-BE49-F238E27FC236}">
                     <a16:creationId xmlns:a16="http://schemas.microsoft.com/office/drawing/2014/main" id="{C3CA6C95-A0E7-12A5-B281-567AF30BF918}"/>
@@ -10859,14 +10835,11 @@
                 </a:br>
                 <a14:m>
                   <m:oMathPara xmlns:m="http://schemas.openxmlformats.org/officeDocument/2006/math">
-                    <m:oMathParaPr>
-                      <m:jc m:val="centerGroup"/>
-                    </m:oMathParaPr>
-                    <m:oMath xmlns:m="http://schemas.openxmlformats.org/officeDocument/2006/math">
+                    <m:oMath>
                       <m:sSub>
                         <m:sSubPr>
                           <m:ctrlPr>
-                            <a:rPr lang="en-US" i="1">
+                            <a:rPr lang="en-US" b="1" i="1">
                               <a:latin typeface="Cambria Math" panose="02040503050406030204" pitchFamily="18" charset="0"/>
                             </a:rPr>
                           </m:ctrlPr>
@@ -10903,7 +10876,7 @@
                       <m:sSub>
                         <m:sSubPr>
                           <m:ctrlPr>
-                            <a:rPr lang="en-US" i="1">
+                            <a:rPr lang="en-US" b="1" i="1">
                               <a:latin typeface="Cambria Math" panose="02040503050406030204" pitchFamily="18" charset="0"/>
                             </a:rPr>
                           </m:ctrlPr>
@@ -10942,7 +10915,10 @@
                           <m:begChr m:val="["/>
                           <m:endChr m:val="]"/>
                           <m:ctrlPr>
-                            <a:rPr lang="en-US" i="1">
+                            <a:rPr lang="en-US" i="1" smtClean="0">
+                              <a:solidFill>
+                                <a:srgbClr val="FF0000"/>
+                              </a:solidFill>
                               <a:latin typeface="Cambria Math" panose="02040503050406030204" pitchFamily="18" charset="0"/>
                               <a:ea typeface="Cambria Math" panose="02040503050406030204" pitchFamily="18" charset="0"/>
                             </a:rPr>
@@ -10952,7 +10928,7 @@
                           <m:sSub>
                             <m:sSubPr>
                               <m:ctrlPr>
-                                <a:rPr lang="en-US" i="1" smtClean="0">
+                                <a:rPr lang="en-US" i="1">
                                   <a:solidFill>
                                     <a:srgbClr val="FF0000"/>
                                   </a:solidFill>
@@ -11113,7 +11089,7 @@
                               <m:sSub>
                                 <m:sSubPr>
                                   <m:ctrlPr>
-                                    <a:rPr lang="en-US" i="1">
+                                    <a:rPr lang="en-US" b="1" i="1">
                                       <a:latin typeface="Cambria Math" panose="02040503050406030204" pitchFamily="18" charset="0"/>
                                       <a:ea typeface="Cambria Math" panose="02040503050406030204" pitchFamily="18" charset="0"/>
                                     </a:rPr>
@@ -11227,7 +11203,7 @@
                           <m:sSub>
                             <m:sSubPr>
                               <m:ctrlPr>
-                                <a:rPr lang="en-US" i="1">
+                                <a:rPr lang="en-US" b="1" i="1">
                                   <a:latin typeface="Cambria Math" panose="02040503050406030204" pitchFamily="18" charset="0"/>
                                   <a:ea typeface="Cambria Math" panose="02040503050406030204" pitchFamily="18" charset="0"/>
                                 </a:rPr>
@@ -11360,14 +11336,11 @@
                 </a:br>
                 <a14:m>
                   <m:oMathPara xmlns:m="http://schemas.openxmlformats.org/officeDocument/2006/math">
-                    <m:oMathParaPr>
-                      <m:jc m:val="centerGroup"/>
-                    </m:oMathParaPr>
-                    <m:oMath xmlns:m="http://schemas.openxmlformats.org/officeDocument/2006/math">
+                    <m:oMath>
                       <m:sSub>
                         <m:sSubPr>
                           <m:ctrlPr>
-                            <a:rPr lang="en-US" i="1" smtClean="0">
+                            <a:rPr lang="en-US" b="1" i="1">
                               <a:latin typeface="Cambria Math" panose="02040503050406030204" pitchFamily="18" charset="0"/>
                             </a:rPr>
                           </m:ctrlPr>
@@ -11404,7 +11377,7 @@
                       <m:sSub>
                         <m:sSubPr>
                           <m:ctrlPr>
-                            <a:rPr lang="en-US" i="1">
+                            <a:rPr lang="en-US" b="1" i="1">
                               <a:latin typeface="Cambria Math" panose="02040503050406030204" pitchFamily="18" charset="0"/>
                             </a:rPr>
                           </m:ctrlPr>
@@ -11443,7 +11416,10 @@
                           <m:begChr m:val="["/>
                           <m:endChr m:val="]"/>
                           <m:ctrlPr>
-                            <a:rPr lang="en-US" i="1">
+                            <a:rPr lang="en-US" i="1" smtClean="0">
+                              <a:solidFill>
+                                <a:srgbClr val="FF0000"/>
+                              </a:solidFill>
                               <a:latin typeface="Cambria Math" panose="02040503050406030204" pitchFamily="18" charset="0"/>
                               <a:ea typeface="Cambria Math" panose="02040503050406030204" pitchFamily="18" charset="0"/>
                             </a:rPr>
@@ -11453,7 +11429,7 @@
                           <m:sSub>
                             <m:sSubPr>
                               <m:ctrlPr>
-                                <a:rPr lang="en-US" i="1" smtClean="0">
+                                <a:rPr lang="en-US" i="1">
                                   <a:solidFill>
                                     <a:srgbClr val="FF0000"/>
                                   </a:solidFill>
@@ -11562,7 +11538,7 @@
                               <m:sSub>
                                 <m:sSubPr>
                                   <m:ctrlPr>
-                                    <a:rPr lang="en-US" i="1">
+                                    <a:rPr lang="en-US" b="1" i="1">
                                       <a:latin typeface="Cambria Math" panose="02040503050406030204" pitchFamily="18" charset="0"/>
                                       <a:ea typeface="Cambria Math" panose="02040503050406030204" pitchFamily="18" charset="0"/>
                                     </a:rPr>
@@ -11676,7 +11652,7 @@
                           <m:sSub>
                             <m:sSubPr>
                               <m:ctrlPr>
-                                <a:rPr lang="en-US" i="1">
+                                <a:rPr lang="en-US" b="1" i="1">
                                   <a:latin typeface="Cambria Math" panose="02040503050406030204" pitchFamily="18" charset="0"/>
                                   <a:ea typeface="Cambria Math" panose="02040503050406030204" pitchFamily="18" charset="0"/>
                                 </a:rPr>
@@ -11771,10 +11747,7 @@
                 </a:br>
                 <a14:m>
                   <m:oMathPara xmlns:m="http://schemas.openxmlformats.org/officeDocument/2006/math">
-                    <m:oMathParaPr>
-                      <m:jc m:val="centerGroup"/>
-                    </m:oMathParaPr>
-                    <m:oMath xmlns:m="http://schemas.openxmlformats.org/officeDocument/2006/math">
+                    <m:oMath>
                       <m:r>
                         <a:rPr lang="en-US" i="1">
                           <a:latin typeface="Cambria Math" panose="02040503050406030204" pitchFamily="18" charset="0"/>
@@ -12021,7 +11994,7 @@
         <mc:Fallback xmlns="">
           <p:sp>
             <p:nvSpPr>
-              <p:cNvPr id="3" name="Content Placeholder 2">
+              <p:cNvPr id="3" name="Content Placeholder 2" descr="Issue: We have assumed that we know the actual value of v sub pi (S sub t) for the update w sub t plus 1, equals w sub t plus alpha [v sub pi (S sub t) minus v hat (S sub t,w sub t)] gradient of v hat (S sub t,w sub t) but that is not the case in RL where we want to learn v sub pi . Solution: We can use any target estimate of the expected return U sub t instead w sub t plus 1, equals w sub t plus alpha [U sub t minus v hat (S sub t,w sub t)] gradient of v hat (S sub t,w sub t). SGD converges to a local optimum as long as U sub t is an unbiased estimate. I.e., E (U sub t given S sub t equals s) equals v sub pi (s) . Examples:. The Gradient Monte Carlo method uses the unbiased MC estimate U sub t equals G sub t">
                 <a:extLst>
                   <a:ext uri="{FF2B5EF4-FFF2-40B4-BE49-F238E27FC236}">
                     <a16:creationId xmlns:a16="http://schemas.microsoft.com/office/drawing/2014/main" id="{C3CA6C95-A0E7-12A5-B281-567AF30BF918}"/>
@@ -12330,7 +12303,7 @@
       </p:sp>
       <p:pic>
         <p:nvPicPr>
-          <p:cNvPr id="5" name="Picture 4">
+          <p:cNvPr id="5" name="Picture 4" descr="Algorithm box: Gradient Monte Carlo Algorithm for Estimating v hat ≈ v pi. Input: the policy pi to be evaluated. Input: a differentiable function v hat: S × R^d → R. Algorithm parameter: step size alpha &gt; 0. Initialize value-function weights w in R^d arbitrarily (e.g., w = 0). Loop forever (for each episode): Generate an episode S_0, A_0, R_1, S_1, A_1, …, R_T, S_T using pi; Loop for each step of episode, t = 0, 1, …, T − 1: w ← w + alpha [G_t − v hat(S_t, w)] times the gradient of v hat(S_t, w).">
             <a:extLst>
               <a:ext uri="{FF2B5EF4-FFF2-40B4-BE49-F238E27FC236}">
                 <a16:creationId xmlns:a16="http://schemas.microsoft.com/office/drawing/2014/main" id="{E7EDBCD4-F6F4-7E08-7AC0-D5D908315CCA}"/>
@@ -12362,7 +12335,7 @@
         <mc:Choice Requires="a14">
           <p:sp>
             <p:nvSpPr>
-              <p:cNvPr id="7" name="TextBox 6">
+              <p:cNvPr id="7" name="TextBox 6" descr="Remember from MC: G sub t equals the sum over k equals 0 to T, of gamma to the power k R sub t plus k plus 1">
                 <a:extLst>
                   <a:ext uri="{FF2B5EF4-FFF2-40B4-BE49-F238E27FC236}">
                     <a16:creationId xmlns:a16="http://schemas.microsoft.com/office/drawing/2014/main" id="{763EE823-2892-5E2B-9E19-4EDE0A4D1C0A}"/>
@@ -12417,10 +12390,7 @@
                 </a:br>
                 <a14:m>
                   <m:oMathPara xmlns:m="http://schemas.openxmlformats.org/officeDocument/2006/math">
-                    <m:oMathParaPr>
-                      <m:jc m:val="centerGroup"/>
-                    </m:oMathParaPr>
-                    <m:oMath xmlns:m="http://schemas.openxmlformats.org/officeDocument/2006/math">
+                    <m:oMath>
                       <m:sSub>
                         <m:sSubPr>
                           <m:ctrlPr>
@@ -12565,7 +12535,7 @@
         <mc:Fallback xmlns="">
           <p:sp>
             <p:nvSpPr>
-              <p:cNvPr id="7" name="TextBox 6">
+              <p:cNvPr id="7" name="TextBox 6" descr="Remember from MC: G sub t equals the sum over k equals 0 to T, of gamma to the power k R sub t plus k plus 1">
                 <a:extLst>
                   <a:ext uri="{FF2B5EF4-FFF2-40B4-BE49-F238E27FC236}">
                     <a16:creationId xmlns:a16="http://schemas.microsoft.com/office/drawing/2014/main" id="{763EE823-2892-5E2B-9E19-4EDE0A4D1C0A}"/>
@@ -12673,7 +12643,7 @@
         <mc:Choice Requires="a14">
           <p:sp>
             <p:nvSpPr>
-              <p:cNvPr id="3" name="Content Placeholder 2">
+              <p:cNvPr id="3" name="Content Placeholder 2" descr="Issue:. To get the true gradient requires, the target has to be unbiased, fixed and only the prediction can depend on w . w sub t plus 1, equals w sub t plus alpha [U sub t minus v hat (S sub t,w sub t)] gradient of v hat (S sub t,w sub t). Gradient Monte Carlo Algorithm: Works since U sub t equals G sub t is the result of only sampled rewards which are independent of w . Bootstrapping methods (e.g., n -step TD): break this requirement because U sub t depends on the bootstrap estimate v hat (S sub t plus n,w) and thus the current value of w . This does not result in a true gradient, and convergence cannot be guaranteed. Semi-Gradient Methods:. If we use the approach with a biased target estimate, then this is called a semi-gradient method. Advantages:. Are usually faster learners. Often still converge (especially for linear approximators). TD can learn online">
                 <a:extLst>
                   <a:ext uri="{FF2B5EF4-FFF2-40B4-BE49-F238E27FC236}">
                     <a16:creationId xmlns:a16="http://schemas.microsoft.com/office/drawing/2014/main" id="{EF5111B7-DA2B-3620-D5E7-614C6CD0E5D7}"/>
@@ -12738,7 +12708,7 @@
                     <m:sSub>
                       <m:sSubPr>
                         <m:ctrlPr>
-                          <a:rPr lang="en-US" i="1">
+                          <a:rPr lang="en-US" b="1" i="1">
                             <a:latin typeface="Cambria Math" panose="02040503050406030204" pitchFamily="18" charset="0"/>
                           </a:rPr>
                         </m:ctrlPr>
@@ -12775,7 +12745,7 @@
                     <m:sSub>
                       <m:sSubPr>
                         <m:ctrlPr>
-                          <a:rPr lang="en-US" i="1">
+                          <a:rPr lang="en-US" b="1" i="1">
                             <a:latin typeface="Cambria Math" panose="02040503050406030204" pitchFamily="18" charset="0"/>
                           </a:rPr>
                         </m:ctrlPr>
@@ -12924,7 +12894,7 @@
                             <m:sSub>
                               <m:sSubPr>
                                 <m:ctrlPr>
-                                  <a:rPr lang="en-US" i="1">
+                                  <a:rPr lang="en-US" b="1" i="1">
                                     <a:latin typeface="Cambria Math" panose="02040503050406030204" pitchFamily="18" charset="0"/>
                                     <a:ea typeface="Cambria Math" panose="02040503050406030204" pitchFamily="18" charset="0"/>
                                   </a:rPr>
@@ -13038,7 +13008,7 @@
                         <m:sSub>
                           <m:sSubPr>
                             <m:ctrlPr>
-                              <a:rPr lang="en-US" i="1">
+                              <a:rPr lang="en-US" b="1" i="1">
                                 <a:latin typeface="Cambria Math" panose="02040503050406030204" pitchFamily="18" charset="0"/>
                                 <a:ea typeface="Cambria Math" panose="02040503050406030204" pitchFamily="18" charset="0"/>
                               </a:rPr>
@@ -13405,7 +13375,7 @@
         <mc:Fallback xmlns="">
           <p:sp>
             <p:nvSpPr>
-              <p:cNvPr id="3" name="Content Placeholder 2">
+              <p:cNvPr id="3" name="Content Placeholder 2" descr="Issue:. To get the true gradient requires, the target has to be unbiased, fixed and only the prediction can depend on w . w sub t plus 1, equals w sub t plus alpha [U sub t minus v hat (S sub t,w sub t)] gradient of v hat (S sub t,w sub t). Gradient Monte Carlo Algorithm: Works since U sub t equals G sub t is the result of only sampled rewards which are independent of w . Bootstrapping methods (e.g., n -step TD): break this requirement because U sub t depends on the bootstrap estimate v hat (S sub t plus n,w) and thus the current value of w . This does not result in a true gradient, and convergence cannot be guaranteed. Semi-Gradient Methods:. If we use the approach with a biased target estimate, then this is called a semi-gradient method. Advantages:. Are usually faster learners. Often still converge (especially for linear approximators). TD can learn online">
                 <a:extLst>
                   <a:ext uri="{FF2B5EF4-FFF2-40B4-BE49-F238E27FC236}">
                     <a16:creationId xmlns:a16="http://schemas.microsoft.com/office/drawing/2014/main" id="{EF5111B7-DA2B-3620-D5E7-614C6CD0E5D7}"/>
@@ -13942,7 +13912,7 @@
       </p:sp>
       <p:pic>
         <p:nvPicPr>
-          <p:cNvPr id="5" name="Picture 4">
+          <p:cNvPr id="5" name="Picture 4" descr="Algorithm box: Semi-gradient TD(0) for estimating v hat ≈ v pi. Input: the policy pi to be evaluated. Input: a differentiable function v hat: S plus × R^d → R such that v hat(terminal, ·) = 0. Algorithm parameter: step size alpha &gt; 0. Initialize value-function weights w in R^d arbitrarily (e.g., w = 0). Loop for each episode: Initialize S; Loop for each step of episode: Choose A ~ pi(· | S); Take action A, observe R, S′; w ← w + alpha [R + gamma v hat(S′, w) − v hat(S, w)] times the gradient of v hat(S, w); S ← S′; until S is terminal.">
             <a:extLst>
               <a:ext uri="{FF2B5EF4-FFF2-40B4-BE49-F238E27FC236}">
                 <a16:creationId xmlns:a16="http://schemas.microsoft.com/office/drawing/2014/main" id="{0FC398A0-3D5C-B42F-6A72-E3FFED218479}"/>
@@ -13976,6 +13946,9 @@
             <a:extLst>
               <a:ext uri="{FF2B5EF4-FFF2-40B4-BE49-F238E27FC236}">
                 <a16:creationId xmlns:a16="http://schemas.microsoft.com/office/drawing/2014/main" id="{BC98F6AF-8EC3-90BA-203C-644C9BAD6DB4}"/>
+              </a:ext>
+              <a:ext uri="{C183D7F6-B498-43B3-948B-1728B52AA6E4}">
+                <adec:decorative xmlns:adec="http://schemas.microsoft.com/office/drawing/2017/decorative" val="1"/>
               </a:ext>
             </a:extLst>
           </p:cNvPr>
@@ -14012,7 +13985,7 @@
         <mc:Choice Requires="a14">
           <p:sp>
             <p:nvSpPr>
-              <p:cNvPr id="9" name="Speech Bubble: Rectangle with Corners Rounded 8">
+              <p:cNvPr id="9" name="Speech Bubble: Rectangle with Corners Rounded 8" descr="U sub t is a bootstrapped estimate and biased because it uses w . Convergence is not guaranteed!">
                 <a:extLst>
                   <a:ext uri="{FF2B5EF4-FFF2-40B4-BE49-F238E27FC236}">
                     <a16:creationId xmlns:a16="http://schemas.microsoft.com/office/drawing/2014/main" id="{C622FEA7-28B7-FDAC-0622-559EAC7C3CE0}"/>
@@ -14061,7 +14034,7 @@
                     <m:sSub>
                       <m:sSubPr>
                         <m:ctrlPr>
-                          <a:rPr lang="en-US" i="1" smtClean="0">
+                          <a:rPr lang="en-US" b="0" i="1" smtClean="0">
                             <a:latin typeface="Cambria Math" panose="02040503050406030204" pitchFamily="18" charset="0"/>
                           </a:rPr>
                         </m:ctrlPr>
@@ -14110,7 +14083,7 @@
         <mc:Fallback xmlns="">
           <p:sp>
             <p:nvSpPr>
-              <p:cNvPr id="9" name="Speech Bubble: Rectangle with Corners Rounded 8">
+              <p:cNvPr id="9" name="Speech Bubble: Rectangle with Corners Rounded 8" descr="U sub t is a bootstrapped estimate and biased because it uses w . Convergence is not guaranteed!">
                 <a:extLst>
                   <a:ext uri="{FF2B5EF4-FFF2-40B4-BE49-F238E27FC236}">
                     <a16:creationId xmlns:a16="http://schemas.microsoft.com/office/drawing/2014/main" id="{C622FEA7-28B7-FDAC-0622-559EAC7C3CE0}"/>
@@ -14218,7 +14191,7 @@
         <mc:Choice Requires="a14">
           <p:sp>
             <p:nvSpPr>
-              <p:cNvPr id="5" name="Text Placeholder 4">
+              <p:cNvPr id="5" name="Text Placeholder 4" descr="The approximation function v hat (s,w)">
                 <a:extLst>
                   <a:ext uri="{FF2B5EF4-FFF2-40B4-BE49-F238E27FC236}">
                     <a16:creationId xmlns:a16="http://schemas.microsoft.com/office/drawing/2014/main" id="{30D0F8F0-5C2B-42CF-9485-B7064784A25E}"/>
@@ -14300,7 +14273,7 @@
         <mc:Fallback xmlns="">
           <p:sp>
             <p:nvSpPr>
-              <p:cNvPr id="5" name="Text Placeholder 4">
+              <p:cNvPr id="5" name="Text Placeholder 4" descr="The approximation function v hat (s,w)">
                 <a:extLst>
                   <a:ext uri="{FF2B5EF4-FFF2-40B4-BE49-F238E27FC236}">
                     <a16:creationId xmlns:a16="http://schemas.microsoft.com/office/drawing/2014/main" id="{30D0F8F0-5C2B-42CF-9485-B7064784A25E}"/>
@@ -14395,11 +14368,11 @@
           </a:p>
         </p:txBody>
       </p:sp>
-      <mc:AlternateContent xmlns:mc="http://schemas.openxmlformats.org/markup-compatibility/2006">
-        <mc:Choice xmlns:a14="http://schemas.microsoft.com/office/drawing/2010/main" Requires="a14">
+      <mc:AlternateContent xmlns:mc="http://schemas.openxmlformats.org/markup-compatibility/2006" xmlns:a14="http://schemas.microsoft.com/office/drawing/2010/main">
+        <mc:Choice Requires="a14">
           <p:sp>
             <p:nvSpPr>
-              <p:cNvPr id="3" name="Content Placeholder 2">
+              <p:cNvPr id="3" name="Content Placeholder 2" descr="Linear approximation of the state value by the inner product v hat (s,w) is defined as w transpose x (s) equals the sum over i equals 1 to d, of w sub i x sub i (s) x(s) … a state feature vector with x sub i :S to the real numbers (called basis function). SGD gradient: gradient of v hat (s,w) equals (the fraction partial v hat (s,w), over partial w sub 1, end fraction, the fraction partial v hat (s,w), over partial w sub 2, end fraction, dot dot dot, the fraction partial v hat (s,w), over partial w sub d, end fraction) transpose equals (x sub 1, x sub 2, dot dot dot,x sub d) transpose equals x (s) transpose. SGD update: w sub t plus 1, equals w sub t plus alpha [U sub t minus v hat (S sub t,w sub t)] x (S sub t). Advantages:. Simple math. Has only one optimum and is guaranteed to converge to the global minimum of VE bar if alpha is reduced following the stochastic approximation condition. Convergence guarantee also holds for bootstrapping methods like Semi-gradient TD(0)!">
                 <a:extLst>
                   <a:ext uri="{FF2B5EF4-FFF2-40B4-BE49-F238E27FC236}">
                     <a16:creationId xmlns:a16="http://schemas.microsoft.com/office/drawing/2014/main" id="{2083189E-BE7C-267A-8E70-A48014366D8A}"/>
@@ -14851,7 +14824,7 @@
                             <m:f>
                               <m:fPr>
                                 <m:ctrlPr>
-                                  <a:rPr lang="en-US" i="1">
+                                  <a:rPr lang="en-US" i="1" smtClean="0">
                                     <a:latin typeface="Cambria Math" panose="02040503050406030204" pitchFamily="18" charset="0"/>
                                     <a:ea typeface="Cambria Math" panose="02040503050406030204" pitchFamily="18" charset="0"/>
                                   </a:rPr>
@@ -15338,7 +15311,7 @@
                     <m:sSup>
                       <m:sSupPr>
                         <m:ctrlPr>
-                          <a:rPr lang="en-US" b="0" i="1" smtClean="0">
+                          <a:rPr lang="en-US" i="1">
                             <a:latin typeface="Cambria Math" panose="02040503050406030204" pitchFamily="18" charset="0"/>
                           </a:rPr>
                         </m:ctrlPr>
@@ -15389,7 +15362,7 @@
                     <m:sSub>
                       <m:sSubPr>
                         <m:ctrlPr>
-                          <a:rPr lang="en-US" i="1">
+                          <a:rPr lang="en-US" b="1" i="1">
                             <a:latin typeface="Cambria Math" panose="02040503050406030204" pitchFamily="18" charset="0"/>
                           </a:rPr>
                         </m:ctrlPr>
@@ -15426,7 +15399,7 @@
                     <m:sSub>
                       <m:sSubPr>
                         <m:ctrlPr>
-                          <a:rPr lang="en-US" i="1">
+                          <a:rPr lang="en-US" b="1" i="1">
                             <a:latin typeface="Cambria Math" panose="02040503050406030204" pitchFamily="18" charset="0"/>
                           </a:rPr>
                         </m:ctrlPr>
@@ -15575,7 +15548,7 @@
                             <m:sSub>
                               <m:sSubPr>
                                 <m:ctrlPr>
-                                  <a:rPr lang="en-US" i="1">
+                                  <a:rPr lang="en-US" b="1" i="1">
                                     <a:latin typeface="Cambria Math" panose="02040503050406030204" pitchFamily="18" charset="0"/>
                                     <a:ea typeface="Cambria Math" panose="02040503050406030204" pitchFamily="18" charset="0"/>
                                   </a:rPr>
@@ -15613,7 +15586,7 @@
                     <m:d>
                       <m:dPr>
                         <m:ctrlPr>
-                          <a:rPr lang="en-US" i="1">
+                          <a:rPr lang="en-US" b="0" i="1" smtClean="0">
                             <a:latin typeface="Cambria Math" panose="02040503050406030204" pitchFamily="18" charset="0"/>
                           </a:rPr>
                         </m:ctrlPr>
@@ -15757,10 +15730,10 @@
             </p:txBody>
           </p:sp>
         </mc:Choice>
-        <mc:Fallback>
+        <mc:Fallback xmlns="">
           <p:sp>
             <p:nvSpPr>
-              <p:cNvPr id="3" name="Content Placeholder 2">
+              <p:cNvPr id="3" name="Content Placeholder 2" descr="Linear approximation of the state value by the inner product v hat (s,w) is defined as w transpose x (s) equals the sum over i equals 1 to d, of w sub i x sub i (s) x(s) … a state feature vector with x sub i :S to the real numbers (called basis function). SGD gradient: gradient of v hat (s,w) equals (the fraction partial v hat (s,w), over partial w sub 1, end fraction, the fraction partial v hat (s,w), over partial w sub 2, end fraction, dot dot dot, the fraction partial v hat (s,w), over partial w sub d, end fraction) transpose equals (x sub 1, x sub 2, dot dot dot,x sub d) transpose equals x (s) transpose. SGD update: w sub t plus 1, equals w sub t plus alpha [U sub t minus v hat (S sub t,w sub t)] x (S sub t). Advantages:. Simple math. Has only one optimum and is guaranteed to converge to the global minimum of VE bar if alpha is reduced following the stochastic approximation condition. Convergence guarantee also holds for bootstrapping methods like Semi-gradient TD(0)!">
                 <a:extLst>
                   <a:ext uri="{FF2B5EF4-FFF2-40B4-BE49-F238E27FC236}">
                     <a16:creationId xmlns:a16="http://schemas.microsoft.com/office/drawing/2014/main" id="{2083189E-BE7C-267A-8E70-A48014366D8A}"/>
@@ -16171,11 +16144,11 @@
           </a:p>
         </p:txBody>
       </p:sp>
-      <mc:AlternateContent xmlns:mc="http://schemas.openxmlformats.org/markup-compatibility/2006">
-        <mc:Choice xmlns:a14="http://schemas.microsoft.com/office/drawing/2010/main" Requires="a14">
+      <mc:AlternateContent xmlns:mc="http://schemas.openxmlformats.org/markup-compatibility/2006" xmlns:a14="http://schemas.microsoft.com/office/drawing/2010/main">
+        <mc:Choice Requires="a14">
           <p:sp>
             <p:nvSpPr>
-              <p:cNvPr id="3" name="Content Placeholder 2">
+              <p:cNvPr id="3" name="Content Placeholder 2" descr="Issue: How do we construct the state feature vector x(s) ?. Initial idea: If the factored state description consists of several numbers (e.g., x and y coordinates), then we can directly use them as the feature vector x (s) equals (s sub x, s sub y) . This leads to linear interpolation learned as a linear regression. Problems:. The value function may not depend linearly on the variables used in the state description. Linear regression cannot represent interactions between the variables">
                 <a:extLst>
                   <a:ext uri="{FF2B5EF4-FFF2-40B4-BE49-F238E27FC236}">
                     <a16:creationId xmlns:a16="http://schemas.microsoft.com/office/drawing/2014/main" id="{43AA4273-07F2-A9DC-CBEB-728A9F627BE8}"/>
@@ -16260,7 +16233,7 @@
                     <m:d>
                       <m:dPr>
                         <m:ctrlPr>
-                          <a:rPr lang="en-US" b="1" i="1">
+                          <a:rPr lang="en-US" i="1">
                             <a:latin typeface="Cambria Math" panose="02040503050406030204" pitchFamily="18" charset="0"/>
                           </a:rPr>
                         </m:ctrlPr>
@@ -16415,10 +16388,10 @@
             </p:txBody>
           </p:sp>
         </mc:Choice>
-        <mc:Fallback>
+        <mc:Fallback xmlns="">
           <p:sp>
             <p:nvSpPr>
-              <p:cNvPr id="3" name="Content Placeholder 2">
+              <p:cNvPr id="3" name="Content Placeholder 2" descr="Issue: How do we construct the state feature vector x(s) ?. Initial idea: If the factored state description consists of several numbers (e.g., x and y coordinates), then we can directly use them as the feature vector x (s) equals (s sub x, s sub y) . This leads to linear interpolation learned as a linear regression. Problems:. The value function may not depend linearly on the variables used in the state description. Linear regression cannot represent interactions between the variables">
                 <a:extLst>
                   <a:ext uri="{FF2B5EF4-FFF2-40B4-BE49-F238E27FC236}">
                     <a16:creationId xmlns:a16="http://schemas.microsoft.com/office/drawing/2014/main" id="{43AA4273-07F2-A9DC-CBEB-728A9F627BE8}"/>
@@ -16801,7 +16774,7 @@
       </p:sp>
       <p:pic>
         <p:nvPicPr>
-          <p:cNvPr id="4" name="Picture 3">
+          <p:cNvPr id="4" name="Picture 3" descr="Heat map titled Value Function over the 10 by 10 L-maze (x and y from 0 to 9), learned with linear features, colour scale from −0.818 to 1.0. The values are almost flat, slightly higher toward the upper right, with straight, evenly spaced contour lines running diagonally: a linear function cannot represent the wall.">
             <a:extLst>
               <a:ext uri="{FF2B5EF4-FFF2-40B4-BE49-F238E27FC236}">
                 <a16:creationId xmlns:a16="http://schemas.microsoft.com/office/drawing/2014/main" id="{9EA8ADD4-2C01-4341-D827-D48BA71E311D}"/>
@@ -16831,7 +16804,7 @@
       </p:pic>
       <p:pic>
         <p:nvPicPr>
-          <p:cNvPr id="8" name="Picture 7">
+          <p:cNvPr id="8" name="Picture 7" descr="Grid titled Found Path for the L-maze with linear features: a 10 by 10 grid with start S at (3, 2), goal G at (8, 8), and an L-shaped wall along row 6 from column 1 to 6 and down column 6 to row 1. The greedy path climbs diagonally from S up and to the right, (3, 3), (4, 3), (4, 4), (5, 4), (5, 5), and gets stuck in the inside corner of the wall without reaching G.">
             <a:extLst>
               <a:ext uri="{FF2B5EF4-FFF2-40B4-BE49-F238E27FC236}">
                 <a16:creationId xmlns:a16="http://schemas.microsoft.com/office/drawing/2014/main" id="{30D48BFC-E186-4381-4FFE-D8887C3041EE}"/>
@@ -16927,7 +16900,7 @@
         <mc:Choice Requires="a14">
           <p:sp>
             <p:nvSpPr>
-              <p:cNvPr id="3" name="Content Placeholder 2">
+              <p:cNvPr id="3" name="Content Placeholder 2" descr="Idea: Use a more flexible, non-linear transform phi of the state description to construct state features. x (s) equals phi (s). We will focus on the most popular feature construction methods that work well for RL:. Fourier Basis: strong baseline; very efficient; strong guarantees. Tile Coding: coarse coding using tiles, local generalization, very computationally efficient. Other methods. One-Hot Features: exact representation; no generalization (equivalent to tabular RL). Coarse Coding using spherical reception fields. Polynomials Features: smooth global generalization. Radial Basis Functions: smooth local generalization">
                 <a:extLst>
                   <a:ext uri="{FF2B5EF4-FFF2-40B4-BE49-F238E27FC236}">
                     <a16:creationId xmlns:a16="http://schemas.microsoft.com/office/drawing/2014/main" id="{CA3F8D59-91BD-8D3F-17EC-9451FBDC8E5C}"/>
@@ -17120,7 +17093,7 @@
         <mc:Fallback xmlns="">
           <p:sp>
             <p:nvSpPr>
-              <p:cNvPr id="3" name="Content Placeholder 2">
+              <p:cNvPr id="3" name="Content Placeholder 2" descr="Idea: Use a more flexible, non-linear transform phi of the state description to construct state features. x (s) equals phi (s). We will focus on the most popular feature construction methods that work well for RL:. Fourier Basis: strong baseline; very efficient; strong guarantees. Tile Coding: coarse coding using tiles, local generalization, very computationally efficient. Other methods. One-Hot Features: exact representation; no generalization (equivalent to tabular RL). Coarse Coding using spherical reception fields. Polynomials Features: smooth global generalization. Radial Basis Functions: smooth local generalization">
                 <a:extLst>
                   <a:ext uri="{FF2B5EF4-FFF2-40B4-BE49-F238E27FC236}">
                     <a16:creationId xmlns:a16="http://schemas.microsoft.com/office/drawing/2014/main" id="{CA3F8D59-91BD-8D3F-17EC-9451FBDC8E5C}"/>
@@ -17585,7 +17558,7 @@
         <mc:Choice Requires="a14">
           <p:sp>
             <p:nvSpPr>
-              <p:cNvPr id="3" name="Content Placeholder 2">
+              <p:cNvPr id="3" name="Content Placeholder 2" descr="A Fourier series (Fourier transform) represents a periodic function as a weighted sum of sine and cosine basis functions of increasing frequencies. State features are not periodic, so we consider only a single period, chosen so that we only need to use cosine basis functions. On dimensional case: state is represented by a single number s in [0,1] x sub i (s) equals cos of (i pi s) with i equals 0, dot dot dot,n where i is the frequency and n is the order of the Fourier basis function. Strong theoretical foundation: Fourier series can approximate any function">
                 <a:extLst>
                   <a:ext uri="{FF2B5EF4-FFF2-40B4-BE49-F238E27FC236}">
                     <a16:creationId xmlns:a16="http://schemas.microsoft.com/office/drawing/2014/main" id="{C6811E52-042D-798C-3261-CCDB94EB6B4C}"/>
@@ -17734,7 +17707,7 @@
                     <m:func>
                       <m:funcPr>
                         <m:ctrlPr>
-                          <a:rPr lang="en-US" b="0" i="1" smtClean="0">
+                          <a:rPr lang="en-US" b="0" i="0" smtClean="0">
                             <a:latin typeface="Cambria Math" panose="02040503050406030204" pitchFamily="18" charset="0"/>
                           </a:rPr>
                         </m:ctrlPr>
@@ -17875,7 +17848,7 @@
         <mc:Fallback xmlns="">
           <p:sp>
             <p:nvSpPr>
-              <p:cNvPr id="3" name="Content Placeholder 2">
+              <p:cNvPr id="3" name="Content Placeholder 2" descr="A Fourier series (Fourier transform) represents a periodic function as a weighted sum of sine and cosine basis functions of increasing frequencies. State features are not periodic, so we consider only a single period, chosen so that we only need to use cosine basis functions. On dimensional case: state is represented by a single number s in [0,1] x sub i (s) equals cos of (i pi s) with i equals 0, dot dot dot,n where i is the frequency and n is the order of the Fourier basis function. Strong theoretical foundation: Fourier series can approximate any function">
                 <a:extLst>
                   <a:ext uri="{FF2B5EF4-FFF2-40B4-BE49-F238E27FC236}">
                     <a16:creationId xmlns:a16="http://schemas.microsoft.com/office/drawing/2014/main" id="{C6811E52-042D-798C-3261-CCDB94EB6B4C}"/>
@@ -17918,7 +17891,7 @@
       </mc:AlternateContent>
       <p:grpSp>
         <p:nvGrpSpPr>
-          <p:cNvPr id="28" name="Group 27">
+          <p:cNvPr id="28" name="Group 27" descr="Four plots of one-dimensional Fourier cosine features on the interval 0 to 1, with frequency increasing from left to right: half a wave, one full wave, one and a half waves, and two waves. Labels: i equals 1; i equals 2; i equals 3; i equals 4; s; Example: Order-4 Fourier cosine basis creates 4 features plus the intercept for i equals 0 for linear approximation; x sub 1 (s); x (.2) equals (1, .9,.65, .35,. 1).">
             <a:extLst>
               <a:ext uri="{FF2B5EF4-FFF2-40B4-BE49-F238E27FC236}">
                 <a16:creationId xmlns:a16="http://schemas.microsoft.com/office/drawing/2014/main" id="{969D3EEB-DF2C-E4E0-6C47-A07423C916CC}"/>
@@ -17938,7 +17911,7 @@
         </p:grpSpPr>
         <p:grpSp>
           <p:nvGrpSpPr>
-            <p:cNvPr id="30" name="Group 29">
+            <p:cNvPr id="30" name="Group 29" descr="Four plots of one-dimensional Fourier cosine features on the interval 0 to 1, with frequency increasing from left to right: half a wave, one full wave, one and a half waves, and two waves. Labels: i equals 1; i equals 2; i equals 3; i equals 4; s; Example: Order-4 Fourier cosine basis creates 4 features plus the intercept for i equals 0 for linear approximation.">
               <a:extLst>
                 <a:ext uri="{FF2B5EF4-FFF2-40B4-BE49-F238E27FC236}">
                   <a16:creationId xmlns:a16="http://schemas.microsoft.com/office/drawing/2014/main" id="{506EE23C-B5A9-DF31-8286-7EF0B31BE999}"/>
@@ -17958,7 +17931,7 @@
           </p:grpSpPr>
           <p:grpSp>
             <p:nvGrpSpPr>
-              <p:cNvPr id="27" name="Group 26">
+              <p:cNvPr id="27" name="Group 26" descr="Four plots of one-dimensional Fourier cosine features on the interval 0 to 1, with frequency increasing from left to right: half a wave, one full wave, one and a half waves, and two waves. Labels: i equals 1; i equals 2; i equals 3; i equals 4; s.">
                 <a:extLst>
                   <a:ext uri="{FF2B5EF4-FFF2-40B4-BE49-F238E27FC236}">
                     <a16:creationId xmlns:a16="http://schemas.microsoft.com/office/drawing/2014/main" id="{97505212-7A05-EF5F-595D-8F58C8B01957}"/>
@@ -17978,7 +17951,7 @@
             </p:grpSpPr>
             <p:grpSp>
               <p:nvGrpSpPr>
-                <p:cNvPr id="14" name="Group 13">
+                <p:cNvPr id="14" name="Group 13" descr="Four plots of one-dimensional Fourier cosine features on the interval 0 to 1, with frequency increasing from left to right: half a wave, one full wave, one and a half waves, and two waves. Labels: i equals 1; i equals 2; i equals 3; i equals 4.">
                   <a:extLst>
                     <a:ext uri="{FF2B5EF4-FFF2-40B4-BE49-F238E27FC236}">
                       <a16:creationId xmlns:a16="http://schemas.microsoft.com/office/drawing/2014/main" id="{E28C3802-8BE9-3532-FD3E-63D4C67B7343}"/>
@@ -17998,7 +17971,7 @@
               </p:grpSpPr>
               <p:pic>
                 <p:nvPicPr>
-                  <p:cNvPr id="5" name="Picture 4">
+                  <p:cNvPr id="5" name="Picture 4" descr="Four plots of one-dimensional Fourier cosine features on the interval 0 to 1, with frequency increasing from left to right: half a wave, one full wave, one and a half waves, and two waves.">
                     <a:extLst>
                       <a:ext uri="{FF2B5EF4-FFF2-40B4-BE49-F238E27FC236}">
                         <a16:creationId xmlns:a16="http://schemas.microsoft.com/office/drawing/2014/main" id="{3B1C95FD-8690-42B1-E727-B2971459644A}"/>
@@ -18030,7 +18003,7 @@
                 <mc:Choice Requires="a14">
                   <p:sp>
                     <p:nvSpPr>
-                      <p:cNvPr id="6" name="TextBox 5">
+                      <p:cNvPr id="6" name="TextBox 5" descr="Equation: i equals 1">
                         <a:extLst>
                           <a:ext uri="{FF2B5EF4-FFF2-40B4-BE49-F238E27FC236}">
                             <a16:creationId xmlns:a16="http://schemas.microsoft.com/office/drawing/2014/main" id="{080C96CF-121E-44DE-76C2-6C0CBBE9281C}"/>
@@ -18059,10 +18032,7 @@
                         <a:pPr/>
                         <a14:m>
                           <m:oMathPara xmlns:m="http://schemas.openxmlformats.org/officeDocument/2006/math">
-                            <m:oMathParaPr>
-                              <m:jc m:val="centerGroup"/>
-                            </m:oMathParaPr>
-                            <m:oMath xmlns:m="http://schemas.openxmlformats.org/officeDocument/2006/math">
+                            <m:oMath>
                               <m:r>
                                 <a:rPr lang="en-US" sz="1400" b="0" i="1" smtClean="0">
                                   <a:latin typeface="Cambria Math" panose="02040503050406030204" pitchFamily="18" charset="0"/>
@@ -18086,7 +18056,7 @@
                 <mc:Fallback xmlns="">
                   <p:sp>
                     <p:nvSpPr>
-                      <p:cNvPr id="6" name="TextBox 5">
+                      <p:cNvPr id="6" name="TextBox 5" descr="Equation: i equals 1">
                         <a:extLst>
                           <a:ext uri="{FF2B5EF4-FFF2-40B4-BE49-F238E27FC236}">
                             <a16:creationId xmlns:a16="http://schemas.microsoft.com/office/drawing/2014/main" id="{080C96CF-121E-44DE-76C2-6C0CBBE9281C}"/>
@@ -18132,7 +18102,7 @@
                 <mc:Choice Requires="a14">
                   <p:sp>
                     <p:nvSpPr>
-                      <p:cNvPr id="7" name="TextBox 6">
+                      <p:cNvPr id="7" name="TextBox 6" descr="Equation: i equals 2">
                         <a:extLst>
                           <a:ext uri="{FF2B5EF4-FFF2-40B4-BE49-F238E27FC236}">
                             <a16:creationId xmlns:a16="http://schemas.microsoft.com/office/drawing/2014/main" id="{74940EEB-2288-42CB-85C4-BCE6702B531D}"/>
@@ -18161,10 +18131,7 @@
                         <a:pPr/>
                         <a14:m>
                           <m:oMathPara xmlns:m="http://schemas.openxmlformats.org/officeDocument/2006/math">
-                            <m:oMathParaPr>
-                              <m:jc m:val="centerGroup"/>
-                            </m:oMathParaPr>
-                            <m:oMath xmlns:m="http://schemas.openxmlformats.org/officeDocument/2006/math">
+                            <m:oMath>
                               <m:r>
                                 <a:rPr lang="en-US" sz="1400" b="0" i="1" smtClean="0">
                                   <a:latin typeface="Cambria Math" panose="02040503050406030204" pitchFamily="18" charset="0"/>
@@ -18188,7 +18155,7 @@
                 <mc:Fallback xmlns="">
                   <p:sp>
                     <p:nvSpPr>
-                      <p:cNvPr id="7" name="TextBox 6">
+                      <p:cNvPr id="7" name="TextBox 6" descr="Equation: i equals 2">
                         <a:extLst>
                           <a:ext uri="{FF2B5EF4-FFF2-40B4-BE49-F238E27FC236}">
                             <a16:creationId xmlns:a16="http://schemas.microsoft.com/office/drawing/2014/main" id="{74940EEB-2288-42CB-85C4-BCE6702B531D}"/>
@@ -18234,7 +18201,7 @@
                 <mc:Choice Requires="a14">
                   <p:sp>
                     <p:nvSpPr>
-                      <p:cNvPr id="8" name="TextBox 7">
+                      <p:cNvPr id="8" name="TextBox 7" descr="Equation: i equals 3">
                         <a:extLst>
                           <a:ext uri="{FF2B5EF4-FFF2-40B4-BE49-F238E27FC236}">
                             <a16:creationId xmlns:a16="http://schemas.microsoft.com/office/drawing/2014/main" id="{1D751660-33C0-9273-76A8-F4F97BE80225}"/>
@@ -18263,10 +18230,7 @@
                         <a:pPr/>
                         <a14:m>
                           <m:oMathPara xmlns:m="http://schemas.openxmlformats.org/officeDocument/2006/math">
-                            <m:oMathParaPr>
-                              <m:jc m:val="centerGroup"/>
-                            </m:oMathParaPr>
-                            <m:oMath xmlns:m="http://schemas.openxmlformats.org/officeDocument/2006/math">
+                            <m:oMath>
                               <m:r>
                                 <a:rPr lang="en-US" sz="1400" b="0" i="1" smtClean="0">
                                   <a:latin typeface="Cambria Math" panose="02040503050406030204" pitchFamily="18" charset="0"/>
@@ -18290,7 +18254,7 @@
                 <mc:Fallback xmlns="">
                   <p:sp>
                     <p:nvSpPr>
-                      <p:cNvPr id="8" name="TextBox 7">
+                      <p:cNvPr id="8" name="TextBox 7" descr="Equation: i equals 3">
                         <a:extLst>
                           <a:ext uri="{FF2B5EF4-FFF2-40B4-BE49-F238E27FC236}">
                             <a16:creationId xmlns:a16="http://schemas.microsoft.com/office/drawing/2014/main" id="{1D751660-33C0-9273-76A8-F4F97BE80225}"/>
@@ -18336,7 +18300,7 @@
                 <mc:Choice Requires="a14">
                   <p:sp>
                     <p:nvSpPr>
-                      <p:cNvPr id="9" name="TextBox 8">
+                      <p:cNvPr id="9" name="TextBox 8" descr="Equation: i equals 4">
                         <a:extLst>
                           <a:ext uri="{FF2B5EF4-FFF2-40B4-BE49-F238E27FC236}">
                             <a16:creationId xmlns:a16="http://schemas.microsoft.com/office/drawing/2014/main" id="{6F1B4BF1-DC74-1988-A35B-B27BEB860718}"/>
@@ -18365,10 +18329,7 @@
                         <a:pPr/>
                         <a14:m>
                           <m:oMathPara xmlns:m="http://schemas.openxmlformats.org/officeDocument/2006/math">
-                            <m:oMathParaPr>
-                              <m:jc m:val="centerGroup"/>
-                            </m:oMathParaPr>
-                            <m:oMath xmlns:m="http://schemas.openxmlformats.org/officeDocument/2006/math">
+                            <m:oMath>
                               <m:r>
                                 <a:rPr lang="en-US" sz="1400" b="0" i="1" smtClean="0">
                                   <a:latin typeface="Cambria Math" panose="02040503050406030204" pitchFamily="18" charset="0"/>
@@ -18392,7 +18353,7 @@
                 <mc:Fallback xmlns="">
                   <p:sp>
                     <p:nvSpPr>
-                      <p:cNvPr id="9" name="TextBox 8">
+                      <p:cNvPr id="9" name="TextBox 8" descr="Equation: i equals 4">
                         <a:extLst>
                           <a:ext uri="{FF2B5EF4-FFF2-40B4-BE49-F238E27FC236}">
                             <a16:creationId xmlns:a16="http://schemas.microsoft.com/office/drawing/2014/main" id="{6F1B4BF1-DC74-1988-A35B-B27BEB860718}"/>
@@ -18441,6 +18402,9 @@
                   <a:extLst>
                     <a:ext uri="{FF2B5EF4-FFF2-40B4-BE49-F238E27FC236}">
                       <a16:creationId xmlns:a16="http://schemas.microsoft.com/office/drawing/2014/main" id="{3866DA77-53C0-752D-ADC9-563106926B59}"/>
+                    </a:ext>
+                    <a:ext uri="{C183D7F6-B498-43B3-948B-1728B52AA6E4}">
+                      <adec:decorative xmlns:adec="http://schemas.microsoft.com/office/drawing/2017/decorative" val="1"/>
                     </a:ext>
                   </a:extLst>
                 </p:cNvPr>
@@ -18482,6 +18446,9 @@
                     <a:ext uri="{FF2B5EF4-FFF2-40B4-BE49-F238E27FC236}">
                       <a16:creationId xmlns:a16="http://schemas.microsoft.com/office/drawing/2014/main" id="{E79E0EE6-A05E-2FC8-DC10-89263EE369CF}"/>
                     </a:ext>
+                    <a:ext uri="{C183D7F6-B498-43B3-948B-1728B52AA6E4}">
+                      <adec:decorative xmlns:adec="http://schemas.microsoft.com/office/drawing/2017/decorative" val="1"/>
+                    </a:ext>
                   </a:extLst>
                 </p:cNvPr>
                 <p:cNvCxnSpPr>
@@ -18519,6 +18486,9 @@
                   <a:extLst>
                     <a:ext uri="{FF2B5EF4-FFF2-40B4-BE49-F238E27FC236}">
                       <a16:creationId xmlns:a16="http://schemas.microsoft.com/office/drawing/2014/main" id="{AF39E40D-4A5D-52AA-F276-4D237C0077F4}"/>
+                    </a:ext>
+                    <a:ext uri="{C183D7F6-B498-43B3-948B-1728B52AA6E4}">
+                      <adec:decorative xmlns:adec="http://schemas.microsoft.com/office/drawing/2017/decorative" val="1"/>
                     </a:ext>
                   </a:extLst>
                 </p:cNvPr>
@@ -18558,6 +18528,9 @@
                     <a:ext uri="{FF2B5EF4-FFF2-40B4-BE49-F238E27FC236}">
                       <a16:creationId xmlns:a16="http://schemas.microsoft.com/office/drawing/2014/main" id="{11E9E864-8136-5401-1AA3-C92C28B36EC2}"/>
                     </a:ext>
+                    <a:ext uri="{C183D7F6-B498-43B3-948B-1728B52AA6E4}">
+                      <adec:decorative xmlns:adec="http://schemas.microsoft.com/office/drawing/2017/decorative" val="1"/>
+                    </a:ext>
                   </a:extLst>
                 </p:cNvPr>
                 <p:cNvCxnSpPr>
@@ -18593,7 +18566,7 @@
               <mc:Choice Requires="a14">
                 <p:sp>
                   <p:nvSpPr>
-                    <p:cNvPr id="24" name="TextBox 23">
+                    <p:cNvPr id="24" name="TextBox 23" descr="Equation: s">
                       <a:extLst>
                         <a:ext uri="{FF2B5EF4-FFF2-40B4-BE49-F238E27FC236}">
                           <a16:creationId xmlns:a16="http://schemas.microsoft.com/office/drawing/2014/main" id="{B575E85A-359F-ECA5-9366-AE1BB9BDA12D}"/>
@@ -18622,10 +18595,7 @@
                       <a:pPr/>
                       <a14:m>
                         <m:oMathPara xmlns:m="http://schemas.openxmlformats.org/officeDocument/2006/math">
-                          <m:oMathParaPr>
-                            <m:jc m:val="centerGroup"/>
-                          </m:oMathParaPr>
-                          <m:oMath xmlns:m="http://schemas.openxmlformats.org/officeDocument/2006/math">
+                          <m:oMath>
                             <m:r>
                               <a:rPr lang="en-US" sz="1600" b="0" i="1" smtClean="0">
                                 <a:latin typeface="Cambria Math" panose="02040503050406030204" pitchFamily="18" charset="0"/>
@@ -18643,7 +18613,7 @@
               <mc:Fallback xmlns="">
                 <p:sp>
                   <p:nvSpPr>
-                    <p:cNvPr id="24" name="TextBox 23">
+                    <p:cNvPr id="24" name="TextBox 23" descr="Equation: s">
                       <a:extLst>
                         <a:ext uri="{FF2B5EF4-FFF2-40B4-BE49-F238E27FC236}">
                           <a16:creationId xmlns:a16="http://schemas.microsoft.com/office/drawing/2014/main" id="{B575E85A-359F-ECA5-9366-AE1BB9BDA12D}"/>
@@ -18692,6 +18662,9 @@
                     <a:ext uri="{FF2B5EF4-FFF2-40B4-BE49-F238E27FC236}">
                       <a16:creationId xmlns:a16="http://schemas.microsoft.com/office/drawing/2014/main" id="{D4DD42E0-1896-C9C2-F00F-BD6D1136542E}"/>
                     </a:ext>
+                    <a:ext uri="{C183D7F6-B498-43B3-948B-1728B52AA6E4}">
+                      <adec:decorative xmlns:adec="http://schemas.microsoft.com/office/drawing/2017/decorative" val="1"/>
+                    </a:ext>
                   </a:extLst>
                 </p:cNvPr>
                 <p:cNvCxnSpPr>
@@ -18731,7 +18704,7 @@
             <mc:Choice Requires="a14">
               <p:sp>
                 <p:nvSpPr>
-                  <p:cNvPr id="29" name="TextBox 28">
+                  <p:cNvPr id="29" name="TextBox 28" descr="Example: Order-4 Fourier cosine basis creates 4 features plus the intercept for i equals 0 for linear approximation">
                     <a:extLst>
                       <a:ext uri="{FF2B5EF4-FFF2-40B4-BE49-F238E27FC236}">
                         <a16:creationId xmlns:a16="http://schemas.microsoft.com/office/drawing/2014/main" id="{7D635983-D050-D8D7-7557-F5169D4628E3}"/>
@@ -18792,7 +18765,7 @@
             <mc:Fallback xmlns="">
               <p:sp>
                 <p:nvSpPr>
-                  <p:cNvPr id="29" name="TextBox 28">
+                  <p:cNvPr id="29" name="TextBox 28" descr="Example: Order-4 Fourier cosine basis creates 4 features plus the intercept for i equals 0 for linear approximation">
                     <a:extLst>
                       <a:ext uri="{FF2B5EF4-FFF2-40B4-BE49-F238E27FC236}">
                         <a16:creationId xmlns:a16="http://schemas.microsoft.com/office/drawing/2014/main" id="{7D635983-D050-D8D7-7557-F5169D4628E3}"/>
@@ -18839,7 +18812,7 @@
           <mc:Choice Requires="a14">
             <p:sp>
               <p:nvSpPr>
-                <p:cNvPr id="15" name="TextBox 14">
+                <p:cNvPr id="15" name="TextBox 14" descr="Equation: x sub 1 (s)">
                   <a:extLst>
                     <a:ext uri="{FF2B5EF4-FFF2-40B4-BE49-F238E27FC236}">
                       <a16:creationId xmlns:a16="http://schemas.microsoft.com/office/drawing/2014/main" id="{FF7A3A9F-24AD-7EC9-98A9-9DDA975E5F02}"/>
@@ -18868,10 +18841,7 @@
                   <a:pPr/>
                   <a14:m>
                     <m:oMathPara xmlns:m="http://schemas.openxmlformats.org/officeDocument/2006/math">
-                      <m:oMathParaPr>
-                        <m:jc m:val="centerGroup"/>
-                      </m:oMathParaPr>
-                      <m:oMath xmlns:m="http://schemas.openxmlformats.org/officeDocument/2006/math">
+                      <m:oMath>
                         <m:sSub>
                           <m:sSubPr>
                             <m:ctrlPr>
@@ -18925,7 +18895,7 @@
           <mc:Fallback xmlns="">
             <p:sp>
               <p:nvSpPr>
-                <p:cNvPr id="15" name="TextBox 14">
+                <p:cNvPr id="15" name="TextBox 14" descr="Equation: x sub 1 (s)">
                   <a:extLst>
                     <a:ext uri="{FF2B5EF4-FFF2-40B4-BE49-F238E27FC236}">
                       <a16:creationId xmlns:a16="http://schemas.microsoft.com/office/drawing/2014/main" id="{FF7A3A9F-24AD-7EC9-98A9-9DDA975E5F02}"/>
@@ -18974,6 +18944,9 @@
                 <a:ext uri="{FF2B5EF4-FFF2-40B4-BE49-F238E27FC236}">
                   <a16:creationId xmlns:a16="http://schemas.microsoft.com/office/drawing/2014/main" id="{E9C0D353-A18F-D358-478D-9049A0E1C237}"/>
                 </a:ext>
+                <a:ext uri="{C183D7F6-B498-43B3-948B-1728B52AA6E4}">
+                  <adec:decorative xmlns:adec="http://schemas.microsoft.com/office/drawing/2017/decorative" val="1"/>
+                </a:ext>
               </a:extLst>
             </p:cNvPr>
             <p:cNvCxnSpPr>
@@ -19014,6 +18987,9 @@
               <a:extLst>
                 <a:ext uri="{FF2B5EF4-FFF2-40B4-BE49-F238E27FC236}">
                   <a16:creationId xmlns:a16="http://schemas.microsoft.com/office/drawing/2014/main" id="{1ACC812F-AEFF-E345-9D42-29B26CC073CE}"/>
+                </a:ext>
+                <a:ext uri="{C183D7F6-B498-43B3-948B-1728B52AA6E4}">
+                  <adec:decorative xmlns:adec="http://schemas.microsoft.com/office/drawing/2017/decorative" val="1"/>
                 </a:ext>
               </a:extLst>
             </p:cNvPr>
@@ -19056,6 +19032,9 @@
                 <a:ext uri="{FF2B5EF4-FFF2-40B4-BE49-F238E27FC236}">
                   <a16:creationId xmlns:a16="http://schemas.microsoft.com/office/drawing/2014/main" id="{E2BA4C85-A58D-76FE-B207-FF7306921EEE}"/>
                 </a:ext>
+                <a:ext uri="{C183D7F6-B498-43B3-948B-1728B52AA6E4}">
+                  <adec:decorative xmlns:adec="http://schemas.microsoft.com/office/drawing/2017/decorative" val="1"/>
+                </a:ext>
               </a:extLst>
             </p:cNvPr>
             <p:cNvCxnSpPr>
@@ -19094,7 +19073,7 @@
           <mc:Choice Requires="a14">
             <p:sp>
               <p:nvSpPr>
-                <p:cNvPr id="25" name="TextBox 24">
+                <p:cNvPr id="25" name="TextBox 24" descr="Equation: x (.2) equals (1, .9,.65, .35,. 1)">
                   <a:extLst>
                     <a:ext uri="{FF2B5EF4-FFF2-40B4-BE49-F238E27FC236}">
                       <a16:creationId xmlns:a16="http://schemas.microsoft.com/office/drawing/2014/main" id="{FB522CFE-9B16-F8BC-FF09-9DD69CA05165}"/>
@@ -19123,10 +19102,7 @@
                   <a:pPr/>
                   <a14:m>
                     <m:oMathPara xmlns:m="http://schemas.openxmlformats.org/officeDocument/2006/math">
-                      <m:oMathParaPr>
-                        <m:jc m:val="centerGroup"/>
-                      </m:oMathParaPr>
-                      <m:oMath xmlns:m="http://schemas.openxmlformats.org/officeDocument/2006/math">
+                      <m:oMath>
                         <m:r>
                           <a:rPr lang="en-US" sz="1600" b="1" i="1" smtClean="0">
                             <a:latin typeface="Cambria Math" panose="02040503050406030204" pitchFamily="18" charset="0"/>
@@ -19173,7 +19149,7 @@
           <mc:Fallback xmlns="">
             <p:sp>
               <p:nvSpPr>
-                <p:cNvPr id="25" name="TextBox 24">
+                <p:cNvPr id="25" name="TextBox 24" descr="Equation: x (.2) equals (1, .9,.65, .35,. 1)">
                   <a:extLst>
                     <a:ext uri="{FF2B5EF4-FFF2-40B4-BE49-F238E27FC236}">
                       <a16:creationId xmlns:a16="http://schemas.microsoft.com/office/drawing/2014/main" id="{FB522CFE-9B16-F8BC-FF09-9DD69CA05165}"/>
@@ -19220,7 +19196,7 @@
         <mc:Choice Requires="a14">
           <p:sp>
             <p:nvSpPr>
-              <p:cNvPr id="10" name="Speech Bubble: Rectangle with Corners Rounded 9">
+              <p:cNvPr id="10" name="Speech Bubble: Rectangle with Corners Rounded 9" descr="pi is 180° in radians">
                 <a:extLst>
                   <a:ext uri="{FF2B5EF4-FFF2-40B4-BE49-F238E27FC236}">
                     <a16:creationId xmlns:a16="http://schemas.microsoft.com/office/drawing/2014/main" id="{C8AC6A20-B8CB-1187-C462-562359C18B3A}"/>
@@ -19285,7 +19261,7 @@
         <mc:Fallback xmlns="">
           <p:sp>
             <p:nvSpPr>
-              <p:cNvPr id="10" name="Speech Bubble: Rectangle with Corners Rounded 9">
+              <p:cNvPr id="10" name="Speech Bubble: Rectangle with Corners Rounded 9" descr="pi is 180° in radians">
                 <a:extLst>
                   <a:ext uri="{FF2B5EF4-FFF2-40B4-BE49-F238E27FC236}">
                     <a16:creationId xmlns:a16="http://schemas.microsoft.com/office/drawing/2014/main" id="{C8AC6A20-B8CB-1187-C462-562359C18B3A}"/>
@@ -19333,7 +19309,7 @@
       </mc:AlternateContent>
       <p:grpSp>
         <p:nvGrpSpPr>
-          <p:cNvPr id="13" name="Group 12">
+          <p:cNvPr id="13" name="Group 12" descr="A red curve approximating a square wave as a sum of a few Fourier harmonics: flat high and low sections with small ripples near the jumps. Labels: Source: Wikipedia; Example: Fourier Transform.">
             <a:extLst>
               <a:ext uri="{FF2B5EF4-FFF2-40B4-BE49-F238E27FC236}">
                 <a16:creationId xmlns:a16="http://schemas.microsoft.com/office/drawing/2014/main" id="{38876022-5188-C8C5-E2FF-F9F27D5220A1}"/>
@@ -19353,7 +19329,7 @@
         </p:grpSpPr>
         <p:pic>
           <p:nvPicPr>
-            <p:cNvPr id="1028" name="Picture 4" descr="Function '&quot;`UNIQ--postMath-00000001-QINU`&quot;' (in red) is a Fourier series sum of 6 harmonically related sine waves (in blue). Its Fourier transform '&quot;`UNIQ--postMath-00000002-QINU`&quot;' is a frequency-domain representation that reveals the amplitudes of the summed sine waves.">
+            <p:cNvPr id="1028" name="Picture 4" descr="A red curve approximating a square wave as a sum of a few Fourier harmonics: flat high and low sections with small ripples near the jumps.">
               <a:extLst>
                 <a:ext uri="{FF2B5EF4-FFF2-40B4-BE49-F238E27FC236}">
                   <a16:creationId xmlns:a16="http://schemas.microsoft.com/office/drawing/2014/main" id="{1E00C4C1-B0C6-8D46-6D83-4982BDA32576}"/>
@@ -19480,6 +19456,9 @@
               <a:extLst>
                 <a:ext uri="{FF2B5EF4-FFF2-40B4-BE49-F238E27FC236}">
                   <a16:creationId xmlns:a16="http://schemas.microsoft.com/office/drawing/2014/main" id="{6F1A2B57-5D62-E99D-69BF-688E1CEF2542}"/>
+                </a:ext>
+                <a:ext uri="{C183D7F6-B498-43B3-948B-1728B52AA6E4}">
+                  <adec:decorative xmlns:adec="http://schemas.microsoft.com/office/drawing/2017/decorative" val="1"/>
                 </a:ext>
               </a:extLst>
             </p:cNvPr>
@@ -19813,7 +19792,7 @@
         <mc:Choice Requires="a14">
           <p:sp>
             <p:nvSpPr>
-              <p:cNvPr id="3" name="Content Placeholder 2">
+              <p:cNvPr id="3" name="Content Placeholder 2" descr="State is represented by the normalized features as vector s equals (s sub 1,s sub 2, dot dot dot,s sub k) in [0,1] to the power k. x sub i (s) equals cos of (pi s transpose c to the power i). where c to the power i equals (c sub 1, to the power i, dot dot dot,c sub k, to the power i) with c sub j, to the power i, in {0, dot dot dot,n} for j equals 1, dot dot dot,k and i equals 1, dot dot dot, (n plus 1) to the power k">
                 <a:extLst>
                   <a:ext uri="{FF2B5EF4-FFF2-40B4-BE49-F238E27FC236}">
                     <a16:creationId xmlns:a16="http://schemas.microsoft.com/office/drawing/2014/main" id="{51D2685D-FDF9-514B-B9A0-346F0F6960BB}"/>
@@ -20014,10 +19993,7 @@
                 </a:pPr>
                 <a14:m>
                   <m:oMathPara xmlns:m="http://schemas.openxmlformats.org/officeDocument/2006/math">
-                    <m:oMathParaPr>
-                      <m:jc m:val="centerGroup"/>
-                    </m:oMathParaPr>
-                    <m:oMath xmlns:m="http://schemas.openxmlformats.org/officeDocument/2006/math">
+                    <m:oMath>
                       <m:sSub>
                         <m:sSubPr>
                           <m:ctrlPr>
@@ -20069,7 +20045,7 @@
                       <m:func>
                         <m:funcPr>
                           <m:ctrlPr>
-                            <a:rPr lang="en-US" b="0" i="1" smtClean="0">
+                            <a:rPr lang="en-US" b="0" i="0" smtClean="0">
                               <a:latin typeface="Cambria Math" panose="02040503050406030204" pitchFamily="18" charset="0"/>
                             </a:rPr>
                           </m:ctrlPr>
@@ -20101,7 +20077,7 @@
                           <m:sSup>
                             <m:sSupPr>
                               <m:ctrlPr>
-                                <a:rPr lang="en-US" b="0" i="1" smtClean="0">
+                                <a:rPr lang="en-US" b="1" i="1" smtClean="0">
                                   <a:latin typeface="Cambria Math" panose="02040503050406030204" pitchFamily="18" charset="0"/>
                                 </a:rPr>
                               </m:ctrlPr>
@@ -20126,7 +20102,7 @@
                           <m:sSup>
                             <m:sSupPr>
                               <m:ctrlPr>
-                                <a:rPr lang="en-US" b="0" i="1" smtClean="0">
+                                <a:rPr lang="en-US" b="1" i="1" smtClean="0">
                                   <a:latin typeface="Cambria Math" panose="02040503050406030204" pitchFamily="18" charset="0"/>
                                 </a:rPr>
                               </m:ctrlPr>
@@ -20174,7 +20150,7 @@
                     <m:sSup>
                       <m:sSupPr>
                         <m:ctrlPr>
-                          <a:rPr lang="en-US" i="1">
+                          <a:rPr lang="en-US" b="1" i="1">
                             <a:latin typeface="Cambria Math" panose="02040503050406030204" pitchFamily="18" charset="0"/>
                           </a:rPr>
                         </m:ctrlPr>
@@ -20445,7 +20421,7 @@
         <mc:Fallback xmlns="">
           <p:sp>
             <p:nvSpPr>
-              <p:cNvPr id="3" name="Content Placeholder 2">
+              <p:cNvPr id="3" name="Content Placeholder 2" descr="State is represented by the normalized features as vector s equals (s sub 1,s sub 2, dot dot dot,s sub k) in [0,1] to the power k. x sub i (s) equals cos of (pi s transpose c to the power i). where c to the power i equals (c sub 1, to the power i, dot dot dot,c sub k, to the power i) with c sub j, to the power i, in {0, dot dot dot,n} for j equals 1, dot dot dot,k and i equals 1, dot dot dot, (n plus 1) to the power k">
                 <a:extLst>
                   <a:ext uri="{FF2B5EF4-FFF2-40B4-BE49-F238E27FC236}">
                     <a16:creationId xmlns:a16="http://schemas.microsoft.com/office/drawing/2014/main" id="{51D2685D-FDF9-514B-B9A0-346F0F6960BB}"/>
@@ -20486,42 +20462,11 @@
           </p:sp>
         </mc:Fallback>
       </mc:AlternateContent>
-      <p:pic>
-        <p:nvPicPr>
-          <p:cNvPr id="4" name="Picture 3">
-            <a:extLst>
-              <a:ext uri="{FF2B5EF4-FFF2-40B4-BE49-F238E27FC236}">
-                <a16:creationId xmlns:a16="http://schemas.microsoft.com/office/drawing/2014/main" id="{BD6AC598-B007-2E2D-CAE3-EEE732E2B42B}"/>
-              </a:ext>
-            </a:extLst>
-          </p:cNvPr>
-          <p:cNvPicPr>
-            <a:picLocks noChangeAspect="1"/>
-          </p:cNvPicPr>
-          <p:nvPr/>
-        </p:nvPicPr>
-        <p:blipFill>
-          <a:blip r:embed="rId3"/>
-          <a:srcRect b="13414"/>
-          <a:stretch>
-            <a:fillRect/>
-          </a:stretch>
-        </p:blipFill>
-        <p:spPr>
-          <a:xfrm>
-            <a:off x="5138743" y="2959586"/>
-            <a:ext cx="6459944" cy="3601758"/>
-          </a:xfrm>
-          <a:prstGeom prst="rect">
-            <a:avLst/>
-          </a:prstGeom>
-        </p:spPr>
-      </p:pic>
       <mc:AlternateContent xmlns:mc="http://schemas.openxmlformats.org/markup-compatibility/2006" xmlns:a14="http://schemas.microsoft.com/office/drawing/2010/main">
         <mc:Choice Requires="a14">
           <p:sp>
             <p:nvSpPr>
-              <p:cNvPr id="5" name="TextBox 4">
+              <p:cNvPr id="5" name="TextBox 4" descr="Example: 2-dimensional Fourier cosine features for 6 different c">
                 <a:extLst>
                   <a:ext uri="{FF2B5EF4-FFF2-40B4-BE49-F238E27FC236}">
                     <a16:creationId xmlns:a16="http://schemas.microsoft.com/office/drawing/2014/main" id="{3335A2D5-4A82-0CDD-A592-03470B0C2F86}"/>
@@ -20575,7 +20520,7 @@
         <mc:Fallback xmlns="">
           <p:sp>
             <p:nvSpPr>
-              <p:cNvPr id="5" name="TextBox 4">
+              <p:cNvPr id="5" name="TextBox 4" descr="Example: 2-dimensional Fourier cosine features for 6 different c">
                 <a:extLst>
                   <a:ext uri="{FF2B5EF4-FFF2-40B4-BE49-F238E27FC236}">
                     <a16:creationId xmlns:a16="http://schemas.microsoft.com/office/drawing/2014/main" id="{3335A2D5-4A82-0CDD-A592-03470B0C2F86}"/>
@@ -20617,12 +20562,46 @@
           </p:sp>
         </mc:Fallback>
       </mc:AlternateContent>
+      <p:pic>
+        <p:nvPicPr>
+          <p:cNvPr id="4" name="Picture 3" descr="Sutton and Barto Figure 9.4: six square plots of two-dimensional Fourier cosine features over the unit square, shaded from black to white. c = (0, 1): a smooth gradient from top to bottom. c = (1, 0): a gradient from left to right. c = (1, 1): a diagonal gradient. c = (0, 5): five horizontal stripes. c = (2, 5): tilted stripes. c = (5, 2): steeper tilted stripes. Caption: A selection of six two-dimensional Fourier cosine features, each labeled by the vector c^i that defines it (s_1 is the horizontal axis, and c^i is shown with the index i omitted). After Konidaris et al. (2011).">
+            <a:extLst>
+              <a:ext uri="{FF2B5EF4-FFF2-40B4-BE49-F238E27FC236}">
+                <a16:creationId xmlns:a16="http://schemas.microsoft.com/office/drawing/2014/main" id="{BD6AC598-B007-2E2D-CAE3-EEE732E2B42B}"/>
+              </a:ext>
+            </a:extLst>
+          </p:cNvPr>
+          <p:cNvPicPr>
+            <a:picLocks noChangeAspect="1"/>
+          </p:cNvPicPr>
+          <p:nvPr/>
+        </p:nvPicPr>
+        <p:blipFill>
+          <a:blip r:embed="rId5"/>
+          <a:srcRect b="13414"/>
+          <a:stretch>
+            <a:fillRect/>
+          </a:stretch>
+        </p:blipFill>
+        <p:spPr>
+          <a:xfrm>
+            <a:off x="5138743" y="2959586"/>
+            <a:ext cx="6459944" cy="3601758"/>
+          </a:xfrm>
+          <a:prstGeom prst="rect">
+            <a:avLst/>
+          </a:prstGeom>
+        </p:spPr>
+      </p:pic>
       <p:sp>
         <p:nvSpPr>
           <p:cNvPr id="6" name="Speech Bubble: Rectangle with Corners Rounded 5">
             <a:extLst>
               <a:ext uri="{FF2B5EF4-FFF2-40B4-BE49-F238E27FC236}">
                 <a16:creationId xmlns:a16="http://schemas.microsoft.com/office/drawing/2014/main" id="{C031356C-2FE2-7864-FB2C-A4E9C96E4C56}"/>
+              </a:ext>
+              <a:ext uri="{C183D7F6-B498-43B3-948B-1728B52AA6E4}">
+                <adec:decorative xmlns:adec="http://schemas.microsoft.com/office/drawing/2017/decorative" val="1"/>
               </a:ext>
             </a:extLst>
           </p:cNvPr>
@@ -20677,6 +20656,9 @@
               <a:ext uri="{FF2B5EF4-FFF2-40B4-BE49-F238E27FC236}">
                 <a16:creationId xmlns:a16="http://schemas.microsoft.com/office/drawing/2014/main" id="{9EF2EBAC-8345-B41A-EF70-BDDB9266812C}"/>
               </a:ext>
+              <a:ext uri="{C183D7F6-B498-43B3-948B-1728B52AA6E4}">
+                <adec:decorative xmlns:adec="http://schemas.microsoft.com/office/drawing/2017/decorative" val="1"/>
+              </a:ext>
             </a:extLst>
           </p:cNvPr>
           <p:cNvSpPr/>
@@ -20723,14 +20705,17 @@
           </a:p>
         </p:txBody>
       </p:sp>
-      <mc:AlternateContent xmlns:mc="http://schemas.openxmlformats.org/markup-compatibility/2006" xmlns:a14="http://schemas.microsoft.com/office/drawing/2010/main">
-        <mc:Choice Requires="a14">
+      <mc:AlternateContent xmlns:mc="http://schemas.openxmlformats.org/markup-compatibility/2006">
+        <mc:Choice xmlns:a14="http://schemas.microsoft.com/office/drawing/2010/main" Requires="a14">
           <p:sp>
             <p:nvSpPr>
               <p:cNvPr id="41" name="TextBox 40">
                 <a:extLst>
                   <a:ext uri="{FF2B5EF4-FFF2-40B4-BE49-F238E27FC236}">
                     <a16:creationId xmlns:a16="http://schemas.microsoft.com/office/drawing/2014/main" id="{FBF9E33D-384F-C5F9-F7A6-093D384EC345}"/>
+                  </a:ext>
+                  <a:ext uri="{C183D7F6-B498-43B3-948B-1728B52AA6E4}">
+                    <adec:decorative xmlns:adec="http://schemas.microsoft.com/office/drawing/2017/decorative" val="0"/>
                   </a:ext>
                 </a:extLst>
               </p:cNvPr>
@@ -20756,10 +20741,7 @@
                 <a:pPr/>
                 <a14:m>
                   <m:oMathPara xmlns:m="http://schemas.openxmlformats.org/officeDocument/2006/math">
-                    <m:oMathParaPr>
-                      <m:jc m:val="centerGroup"/>
-                    </m:oMathParaPr>
-                    <m:oMath xmlns:m="http://schemas.openxmlformats.org/officeDocument/2006/math">
+                    <m:oMath>
                       <m:r>
                         <a:rPr lang="en-US" sz="1400" b="1" i="1" smtClean="0">
                           <a:latin typeface="Cambria Math" panose="02040503050406030204" pitchFamily="18" charset="0"/>
@@ -20893,7 +20875,7 @@
                     <m:func>
                       <m:funcPr>
                         <m:ctrlPr>
-                          <a:rPr lang="en-US" sz="1400" i="1">
+                          <a:rPr lang="en-US" sz="1400">
                             <a:latin typeface="Cambria Math" panose="02040503050406030204" pitchFamily="18" charset="0"/>
                           </a:rPr>
                         </m:ctrlPr>
@@ -20940,7 +20922,7 @@
                             <m:d>
                               <m:dPr>
                                 <m:ctrlPr>
-                                  <a:rPr lang="en-US" sz="1400" i="1" smtClean="0">
+                                  <a:rPr lang="en-US" sz="1400" b="0" i="1" smtClean="0">
                                     <a:latin typeface="Cambria Math" panose="02040503050406030204" pitchFamily="18" charset="0"/>
                                   </a:rPr>
                                 </m:ctrlPr>
@@ -21042,7 +21024,7 @@
                     <m:func>
                       <m:funcPr>
                         <m:ctrlPr>
-                          <a:rPr lang="en-US" sz="1400" i="1">
+                          <a:rPr lang="en-US" sz="1400">
                             <a:latin typeface="Cambria Math" panose="02040503050406030204" pitchFamily="18" charset="0"/>
                           </a:rPr>
                         </m:ctrlPr>
@@ -21218,7 +21200,7 @@
                     <m:func>
                       <m:funcPr>
                         <m:ctrlPr>
-                          <a:rPr lang="en-US" sz="1400" i="1">
+                          <a:rPr lang="en-US" sz="1400">
                             <a:latin typeface="Cambria Math" panose="02040503050406030204" pitchFamily="18" charset="0"/>
                           </a:rPr>
                         </m:ctrlPr>
@@ -21382,7 +21364,7 @@
                     <m:func>
                       <m:funcPr>
                         <m:ctrlPr>
-                          <a:rPr lang="en-US" sz="1400" i="1">
+                          <a:rPr lang="en-US" sz="1400">
                             <a:latin typeface="Cambria Math" panose="02040503050406030204" pitchFamily="18" charset="0"/>
                           </a:rPr>
                         </m:ctrlPr>
@@ -21546,7 +21528,7 @@
                     <m:func>
                       <m:funcPr>
                         <m:ctrlPr>
-                          <a:rPr lang="en-US" sz="1400" i="1">
+                          <a:rPr lang="en-US" sz="1400">
                             <a:latin typeface="Cambria Math" panose="02040503050406030204" pitchFamily="18" charset="0"/>
                           </a:rPr>
                         </m:ctrlPr>
@@ -21734,7 +21716,7 @@
                     <m:func>
                       <m:funcPr>
                         <m:ctrlPr>
-                          <a:rPr lang="en-US" sz="1400" i="1">
+                          <a:rPr lang="en-US" sz="1400">
                             <a:latin typeface="Cambria Math" panose="02040503050406030204" pitchFamily="18" charset="0"/>
                           </a:rPr>
                         </m:ctrlPr>
@@ -21862,13 +21844,16 @@
             </p:txBody>
           </p:sp>
         </mc:Choice>
-        <mc:Fallback xmlns="">
+        <mc:Fallback>
           <p:sp>
             <p:nvSpPr>
               <p:cNvPr id="41" name="TextBox 40">
                 <a:extLst>
                   <a:ext uri="{FF2B5EF4-FFF2-40B4-BE49-F238E27FC236}">
                     <a16:creationId xmlns:a16="http://schemas.microsoft.com/office/drawing/2014/main" id="{FBF9E33D-384F-C5F9-F7A6-093D384EC345}"/>
+                  </a:ext>
+                  <a:ext uri="{C183D7F6-B498-43B3-948B-1728B52AA6E4}">
+                    <adec:decorative xmlns:adec="http://schemas.microsoft.com/office/drawing/2017/decorative" val="0"/>
                   </a:ext>
                 </a:extLst>
               </p:cNvPr>
@@ -21886,7 +21871,7 @@
                 <a:avLst/>
               </a:prstGeom>
               <a:blipFill>
-                <a:blip r:embed="rId5"/>
+                <a:blip r:embed="rId6"/>
                 <a:stretch>
                   <a:fillRect/>
                 </a:stretch>
@@ -21909,7 +21894,7 @@
       </mc:AlternateContent>
       <p:grpSp>
         <p:nvGrpSpPr>
-          <p:cNvPr id="45" name="Group 44">
+          <p:cNvPr id="45" name="Group 44" descr="Dashed orange guide lines marking the example state s = (.5, .8) on each of the six feature plots.">
             <a:extLst>
               <a:ext uri="{FF2B5EF4-FFF2-40B4-BE49-F238E27FC236}">
                 <a16:creationId xmlns:a16="http://schemas.microsoft.com/office/drawing/2014/main" id="{DA81357C-FC4F-172C-ADFA-6EB1780ABEA7}"/>
@@ -21934,6 +21919,9 @@
                 <a:ext uri="{FF2B5EF4-FFF2-40B4-BE49-F238E27FC236}">
                   <a16:creationId xmlns:a16="http://schemas.microsoft.com/office/drawing/2014/main" id="{AF19D8E4-7428-461A-EA29-A617584B4011}"/>
                 </a:ext>
+                <a:ext uri="{C183D7F6-B498-43B3-948B-1728B52AA6E4}">
+                  <adec:decorative xmlns:adec="http://schemas.microsoft.com/office/drawing/2017/decorative" val="1"/>
+                </a:ext>
               </a:extLst>
             </p:cNvPr>
             <p:cNvGrpSpPr/>
@@ -21954,6 +21942,9 @@
                   <a:ext uri="{FF2B5EF4-FFF2-40B4-BE49-F238E27FC236}">
                     <a16:creationId xmlns:a16="http://schemas.microsoft.com/office/drawing/2014/main" id="{3C5C89D3-EE63-5400-C3FE-8BA2A82CD652}"/>
                   </a:ext>
+                  <a:ext uri="{C183D7F6-B498-43B3-948B-1728B52AA6E4}">
+                    <adec:decorative xmlns:adec="http://schemas.microsoft.com/office/drawing/2017/decorative" val="1"/>
+                  </a:ext>
                 </a:extLst>
               </p:cNvPr>
               <p:cNvGrpSpPr/>
@@ -21973,6 +21964,9 @@
                   <a:extLst>
                     <a:ext uri="{FF2B5EF4-FFF2-40B4-BE49-F238E27FC236}">
                       <a16:creationId xmlns:a16="http://schemas.microsoft.com/office/drawing/2014/main" id="{D061184B-88A1-E299-C8DF-FE3409235A74}"/>
+                    </a:ext>
+                    <a:ext uri="{C183D7F6-B498-43B3-948B-1728B52AA6E4}">
+                      <adec:decorative xmlns:adec="http://schemas.microsoft.com/office/drawing/2017/decorative" val="1"/>
                     </a:ext>
                   </a:extLst>
                 </p:cNvPr>
@@ -22019,6 +22013,9 @@
                   <a:extLst>
                     <a:ext uri="{FF2B5EF4-FFF2-40B4-BE49-F238E27FC236}">
                       <a16:creationId xmlns:a16="http://schemas.microsoft.com/office/drawing/2014/main" id="{45A6221F-D38E-F79C-45AA-22C883F4D933}"/>
+                    </a:ext>
+                    <a:ext uri="{C183D7F6-B498-43B3-948B-1728B52AA6E4}">
+                      <adec:decorative xmlns:adec="http://schemas.microsoft.com/office/drawing/2017/decorative" val="1"/>
                     </a:ext>
                   </a:extLst>
                 </p:cNvPr>
@@ -22067,6 +22064,9 @@
                   <a:extLst>
                     <a:ext uri="{FF2B5EF4-FFF2-40B4-BE49-F238E27FC236}">
                       <a16:creationId xmlns:a16="http://schemas.microsoft.com/office/drawing/2014/main" id="{A30D3973-9B73-5DA6-5531-0C47BF34B4BA}"/>
+                    </a:ext>
+                    <a:ext uri="{C183D7F6-B498-43B3-948B-1728B52AA6E4}">
+                      <adec:decorative xmlns:adec="http://schemas.microsoft.com/office/drawing/2017/decorative" val="1"/>
                     </a:ext>
                   </a:extLst>
                 </p:cNvPr>
@@ -22117,6 +22117,9 @@
                   <a:ext uri="{FF2B5EF4-FFF2-40B4-BE49-F238E27FC236}">
                     <a16:creationId xmlns:a16="http://schemas.microsoft.com/office/drawing/2014/main" id="{0CDB7F58-6E8C-3365-5CB0-2EC8C57473C1}"/>
                   </a:ext>
+                  <a:ext uri="{C183D7F6-B498-43B3-948B-1728B52AA6E4}">
+                    <adec:decorative xmlns:adec="http://schemas.microsoft.com/office/drawing/2017/decorative" val="1"/>
+                  </a:ext>
                 </a:extLst>
               </p:cNvPr>
               <p:cNvGrpSpPr/>
@@ -22136,6 +22139,9 @@
                   <a:extLst>
                     <a:ext uri="{FF2B5EF4-FFF2-40B4-BE49-F238E27FC236}">
                       <a16:creationId xmlns:a16="http://schemas.microsoft.com/office/drawing/2014/main" id="{F783979E-E824-02C0-49CD-6DDE1C8AF319}"/>
+                    </a:ext>
+                    <a:ext uri="{C183D7F6-B498-43B3-948B-1728B52AA6E4}">
+                      <adec:decorative xmlns:adec="http://schemas.microsoft.com/office/drawing/2017/decorative" val="1"/>
                     </a:ext>
                   </a:extLst>
                 </p:cNvPr>
@@ -22182,6 +22188,9 @@
                   <a:extLst>
                     <a:ext uri="{FF2B5EF4-FFF2-40B4-BE49-F238E27FC236}">
                       <a16:creationId xmlns:a16="http://schemas.microsoft.com/office/drawing/2014/main" id="{7CEDDF26-B3E0-CEEE-04A5-07F0DF5B0AD3}"/>
+                    </a:ext>
+                    <a:ext uri="{C183D7F6-B498-43B3-948B-1728B52AA6E4}">
+                      <adec:decorative xmlns:adec="http://schemas.microsoft.com/office/drawing/2017/decorative" val="1"/>
                     </a:ext>
                   </a:extLst>
                 </p:cNvPr>
@@ -22230,6 +22239,9 @@
                   <a:extLst>
                     <a:ext uri="{FF2B5EF4-FFF2-40B4-BE49-F238E27FC236}">
                       <a16:creationId xmlns:a16="http://schemas.microsoft.com/office/drawing/2014/main" id="{62807F95-C422-6F10-5149-ECE8552EFDD0}"/>
+                    </a:ext>
+                    <a:ext uri="{C183D7F6-B498-43B3-948B-1728B52AA6E4}">
+                      <adec:decorative xmlns:adec="http://schemas.microsoft.com/office/drawing/2017/decorative" val="1"/>
                     </a:ext>
                   </a:extLst>
                 </p:cNvPr>
@@ -22280,6 +22292,9 @@
                   <a:ext uri="{FF2B5EF4-FFF2-40B4-BE49-F238E27FC236}">
                     <a16:creationId xmlns:a16="http://schemas.microsoft.com/office/drawing/2014/main" id="{427BED36-7845-BE4B-09E4-12E436E10DDB}"/>
                   </a:ext>
+                  <a:ext uri="{C183D7F6-B498-43B3-948B-1728B52AA6E4}">
+                    <adec:decorative xmlns:adec="http://schemas.microsoft.com/office/drawing/2017/decorative" val="1"/>
+                  </a:ext>
                 </a:extLst>
               </p:cNvPr>
               <p:cNvGrpSpPr/>
@@ -22299,6 +22314,9 @@
                   <a:extLst>
                     <a:ext uri="{FF2B5EF4-FFF2-40B4-BE49-F238E27FC236}">
                       <a16:creationId xmlns:a16="http://schemas.microsoft.com/office/drawing/2014/main" id="{E835DC91-5805-8DAE-BB63-1B8CC6FFA2E8}"/>
+                    </a:ext>
+                    <a:ext uri="{C183D7F6-B498-43B3-948B-1728B52AA6E4}">
+                      <adec:decorative xmlns:adec="http://schemas.microsoft.com/office/drawing/2017/decorative" val="1"/>
                     </a:ext>
                   </a:extLst>
                 </p:cNvPr>
@@ -22345,6 +22363,9 @@
                   <a:extLst>
                     <a:ext uri="{FF2B5EF4-FFF2-40B4-BE49-F238E27FC236}">
                       <a16:creationId xmlns:a16="http://schemas.microsoft.com/office/drawing/2014/main" id="{87902F9A-2E37-0013-93A1-1BA57B02D809}"/>
+                    </a:ext>
+                    <a:ext uri="{C183D7F6-B498-43B3-948B-1728B52AA6E4}">
+                      <adec:decorative xmlns:adec="http://schemas.microsoft.com/office/drawing/2017/decorative" val="1"/>
                     </a:ext>
                   </a:extLst>
                 </p:cNvPr>
@@ -22393,6 +22414,9 @@
                   <a:extLst>
                     <a:ext uri="{FF2B5EF4-FFF2-40B4-BE49-F238E27FC236}">
                       <a16:creationId xmlns:a16="http://schemas.microsoft.com/office/drawing/2014/main" id="{3E0E8A7F-053D-9019-516F-DBB49D1C0221}"/>
+                    </a:ext>
+                    <a:ext uri="{C183D7F6-B498-43B3-948B-1728B52AA6E4}">
+                      <adec:decorative xmlns:adec="http://schemas.microsoft.com/office/drawing/2017/decorative" val="1"/>
                     </a:ext>
                   </a:extLst>
                 </p:cNvPr>
@@ -22443,6 +22467,9 @@
                   <a:ext uri="{FF2B5EF4-FFF2-40B4-BE49-F238E27FC236}">
                     <a16:creationId xmlns:a16="http://schemas.microsoft.com/office/drawing/2014/main" id="{E4442C98-44C1-BF57-8865-72B0CB62549A}"/>
                   </a:ext>
+                  <a:ext uri="{C183D7F6-B498-43B3-948B-1728B52AA6E4}">
+                    <adec:decorative xmlns:adec="http://schemas.microsoft.com/office/drawing/2017/decorative" val="1"/>
+                  </a:ext>
                 </a:extLst>
               </p:cNvPr>
               <p:cNvGrpSpPr/>
@@ -22462,6 +22489,9 @@
                   <a:extLst>
                     <a:ext uri="{FF2B5EF4-FFF2-40B4-BE49-F238E27FC236}">
                       <a16:creationId xmlns:a16="http://schemas.microsoft.com/office/drawing/2014/main" id="{436D42EB-ADFE-2D9E-08A6-7E7D030C239F}"/>
+                    </a:ext>
+                    <a:ext uri="{C183D7F6-B498-43B3-948B-1728B52AA6E4}">
+                      <adec:decorative xmlns:adec="http://schemas.microsoft.com/office/drawing/2017/decorative" val="1"/>
                     </a:ext>
                   </a:extLst>
                 </p:cNvPr>
@@ -22508,6 +22538,9 @@
                   <a:extLst>
                     <a:ext uri="{FF2B5EF4-FFF2-40B4-BE49-F238E27FC236}">
                       <a16:creationId xmlns:a16="http://schemas.microsoft.com/office/drawing/2014/main" id="{8D7ACAC0-06A0-E0E4-6B3D-131B1E3D75F2}"/>
+                    </a:ext>
+                    <a:ext uri="{C183D7F6-B498-43B3-948B-1728B52AA6E4}">
+                      <adec:decorative xmlns:adec="http://schemas.microsoft.com/office/drawing/2017/decorative" val="1"/>
                     </a:ext>
                   </a:extLst>
                 </p:cNvPr>
@@ -22556,6 +22589,9 @@
                   <a:extLst>
                     <a:ext uri="{FF2B5EF4-FFF2-40B4-BE49-F238E27FC236}">
                       <a16:creationId xmlns:a16="http://schemas.microsoft.com/office/drawing/2014/main" id="{78DF8B15-B0F6-1D5E-7A47-8160A1A082D7}"/>
+                    </a:ext>
+                    <a:ext uri="{C183D7F6-B498-43B3-948B-1728B52AA6E4}">
+                      <adec:decorative xmlns:adec="http://schemas.microsoft.com/office/drawing/2017/decorative" val="1"/>
                     </a:ext>
                   </a:extLst>
                 </p:cNvPr>
@@ -22606,6 +22642,9 @@
                   <a:ext uri="{FF2B5EF4-FFF2-40B4-BE49-F238E27FC236}">
                     <a16:creationId xmlns:a16="http://schemas.microsoft.com/office/drawing/2014/main" id="{9F03424E-3BD9-8378-A7BD-3B2F0FF173AE}"/>
                   </a:ext>
+                  <a:ext uri="{C183D7F6-B498-43B3-948B-1728B52AA6E4}">
+                    <adec:decorative xmlns:adec="http://schemas.microsoft.com/office/drawing/2017/decorative" val="1"/>
+                  </a:ext>
                 </a:extLst>
               </p:cNvPr>
               <p:cNvGrpSpPr/>
@@ -22625,6 +22664,9 @@
                   <a:extLst>
                     <a:ext uri="{FF2B5EF4-FFF2-40B4-BE49-F238E27FC236}">
                       <a16:creationId xmlns:a16="http://schemas.microsoft.com/office/drawing/2014/main" id="{A154AFFE-5CA3-DC57-DF01-16FFEFC4FCD7}"/>
+                    </a:ext>
+                    <a:ext uri="{C183D7F6-B498-43B3-948B-1728B52AA6E4}">
+                      <adec:decorative xmlns:adec="http://schemas.microsoft.com/office/drawing/2017/decorative" val="1"/>
                     </a:ext>
                   </a:extLst>
                 </p:cNvPr>
@@ -22671,6 +22713,9 @@
                   <a:extLst>
                     <a:ext uri="{FF2B5EF4-FFF2-40B4-BE49-F238E27FC236}">
                       <a16:creationId xmlns:a16="http://schemas.microsoft.com/office/drawing/2014/main" id="{9627EDBE-6E64-4526-8387-169CFC8CE096}"/>
+                    </a:ext>
+                    <a:ext uri="{C183D7F6-B498-43B3-948B-1728B52AA6E4}">
+                      <adec:decorative xmlns:adec="http://schemas.microsoft.com/office/drawing/2017/decorative" val="1"/>
                     </a:ext>
                   </a:extLst>
                 </p:cNvPr>
@@ -22719,6 +22764,9 @@
                   <a:extLst>
                     <a:ext uri="{FF2B5EF4-FFF2-40B4-BE49-F238E27FC236}">
                       <a16:creationId xmlns:a16="http://schemas.microsoft.com/office/drawing/2014/main" id="{9076703A-BA47-1A0C-6439-319CEF6CAEFD}"/>
+                    </a:ext>
+                    <a:ext uri="{C183D7F6-B498-43B3-948B-1728B52AA6E4}">
+                      <adec:decorative xmlns:adec="http://schemas.microsoft.com/office/drawing/2017/decorative" val="1"/>
                     </a:ext>
                   </a:extLst>
                 </p:cNvPr>
@@ -22769,6 +22817,9 @@
                   <a:ext uri="{FF2B5EF4-FFF2-40B4-BE49-F238E27FC236}">
                     <a16:creationId xmlns:a16="http://schemas.microsoft.com/office/drawing/2014/main" id="{F946C286-CAA1-6F10-661C-99C69BFF24E9}"/>
                   </a:ext>
+                  <a:ext uri="{C183D7F6-B498-43B3-948B-1728B52AA6E4}">
+                    <adec:decorative xmlns:adec="http://schemas.microsoft.com/office/drawing/2017/decorative" val="1"/>
+                  </a:ext>
                 </a:extLst>
               </p:cNvPr>
               <p:cNvGrpSpPr/>
@@ -22788,6 +22839,9 @@
                   <a:extLst>
                     <a:ext uri="{FF2B5EF4-FFF2-40B4-BE49-F238E27FC236}">
                       <a16:creationId xmlns:a16="http://schemas.microsoft.com/office/drawing/2014/main" id="{BC8131D1-EA3A-531D-E4AF-5CD673DD30A9}"/>
+                    </a:ext>
+                    <a:ext uri="{C183D7F6-B498-43B3-948B-1728B52AA6E4}">
+                      <adec:decorative xmlns:adec="http://schemas.microsoft.com/office/drawing/2017/decorative" val="1"/>
                     </a:ext>
                   </a:extLst>
                 </p:cNvPr>
@@ -22834,6 +22888,9 @@
                   <a:extLst>
                     <a:ext uri="{FF2B5EF4-FFF2-40B4-BE49-F238E27FC236}">
                       <a16:creationId xmlns:a16="http://schemas.microsoft.com/office/drawing/2014/main" id="{2805BD08-337C-3FC0-7512-5D1EF17067F2}"/>
+                    </a:ext>
+                    <a:ext uri="{C183D7F6-B498-43B3-948B-1728B52AA6E4}">
+                      <adec:decorative xmlns:adec="http://schemas.microsoft.com/office/drawing/2017/decorative" val="1"/>
                     </a:ext>
                   </a:extLst>
                 </p:cNvPr>
@@ -22882,6 +22939,9 @@
                   <a:extLst>
                     <a:ext uri="{FF2B5EF4-FFF2-40B4-BE49-F238E27FC236}">
                       <a16:creationId xmlns:a16="http://schemas.microsoft.com/office/drawing/2014/main" id="{72A6609B-DEB9-7B57-7EA4-D74C690F5E52}"/>
+                    </a:ext>
+                    <a:ext uri="{C183D7F6-B498-43B3-948B-1728B52AA6E4}">
+                      <adec:decorative xmlns:adec="http://schemas.microsoft.com/office/drawing/2017/decorative" val="1"/>
                     </a:ext>
                   </a:extLst>
                 </p:cNvPr>
@@ -22997,14 +23057,17 @@
           </p:txBody>
         </p:sp>
       </p:grpSp>
-      <mc:AlternateContent xmlns:mc="http://schemas.openxmlformats.org/markup-compatibility/2006" xmlns:a14="http://schemas.microsoft.com/office/drawing/2010/main">
-        <mc:Choice Requires="a14">
+      <mc:AlternateContent xmlns:mc="http://schemas.openxmlformats.org/markup-compatibility/2006">
+        <mc:Choice xmlns:a14="http://schemas.microsoft.com/office/drawing/2010/main" Requires="a14">
           <p:sp>
             <p:nvSpPr>
               <p:cNvPr id="46" name="Speech Bubble: Rectangle with Corners Rounded 45">
                 <a:extLst>
                   <a:ext uri="{FF2B5EF4-FFF2-40B4-BE49-F238E27FC236}">
                     <a16:creationId xmlns:a16="http://schemas.microsoft.com/office/drawing/2014/main" id="{88A2569C-E5D9-8705-BCC9-DDB51EC74D15}"/>
+                  </a:ext>
+                  <a:ext uri="{C183D7F6-B498-43B3-948B-1728B52AA6E4}">
+                    <adec:decorative xmlns:adec="http://schemas.microsoft.com/office/drawing/2017/decorative" val="1"/>
                   </a:ext>
                 </a:extLst>
               </p:cNvPr>
@@ -23090,13 +23153,16 @@
             </p:txBody>
           </p:sp>
         </mc:Choice>
-        <mc:Fallback xmlns="">
+        <mc:Fallback>
           <p:sp>
             <p:nvSpPr>
               <p:cNvPr id="46" name="Speech Bubble: Rectangle with Corners Rounded 45">
                 <a:extLst>
                   <a:ext uri="{FF2B5EF4-FFF2-40B4-BE49-F238E27FC236}">
                     <a16:creationId xmlns:a16="http://schemas.microsoft.com/office/drawing/2014/main" id="{88A2569C-E5D9-8705-BCC9-DDB51EC74D15}"/>
+                  </a:ext>
+                  <a:ext uri="{C183D7F6-B498-43B3-948B-1728B52AA6E4}">
+                    <adec:decorative xmlns:adec="http://schemas.microsoft.com/office/drawing/2017/decorative" val="1"/>
                   </a:ext>
                 </a:extLst>
               </p:cNvPr>
@@ -23118,9 +23184,9 @@
                 </a:avLst>
               </a:prstGeom>
               <a:blipFill>
-                <a:blip r:embed="rId6"/>
+                <a:blip r:embed="rId7"/>
                 <a:stretch>
-                  <a:fillRect b="-1860"/>
+                  <a:fillRect b="-952"/>
                 </a:stretch>
               </a:blipFill>
             </p:spPr>
@@ -23350,66 +23416,6 @@
           </a:p>
         </p:txBody>
       </p:sp>
-      <p:pic>
-        <p:nvPicPr>
-          <p:cNvPr id="5" name="Picture 4">
-            <a:extLst>
-              <a:ext uri="{FF2B5EF4-FFF2-40B4-BE49-F238E27FC236}">
-                <a16:creationId xmlns:a16="http://schemas.microsoft.com/office/drawing/2014/main" id="{4D337F39-86C8-E0E0-ED9A-B7AA898B5D4F}"/>
-              </a:ext>
-            </a:extLst>
-          </p:cNvPr>
-          <p:cNvPicPr>
-            <a:picLocks noChangeAspect="1"/>
-          </p:cNvPicPr>
-          <p:nvPr/>
-        </p:nvPicPr>
-        <p:blipFill>
-          <a:blip r:embed="rId2"/>
-          <a:stretch>
-            <a:fillRect/>
-          </a:stretch>
-        </p:blipFill>
-        <p:spPr>
-          <a:xfrm>
-            <a:off x="838200" y="1797904"/>
-            <a:ext cx="5133975" cy="4143375"/>
-          </a:xfrm>
-          <a:prstGeom prst="rect">
-            <a:avLst/>
-          </a:prstGeom>
-        </p:spPr>
-      </p:pic>
-      <p:pic>
-        <p:nvPicPr>
-          <p:cNvPr id="7" name="Picture 6">
-            <a:extLst>
-              <a:ext uri="{FF2B5EF4-FFF2-40B4-BE49-F238E27FC236}">
-                <a16:creationId xmlns:a16="http://schemas.microsoft.com/office/drawing/2014/main" id="{72621229-6986-1F7F-41FE-03F1D4D641BF}"/>
-              </a:ext>
-            </a:extLst>
-          </p:cNvPr>
-          <p:cNvPicPr>
-            <a:picLocks noChangeAspect="1"/>
-          </p:cNvPicPr>
-          <p:nvPr/>
-        </p:nvPicPr>
-        <p:blipFill>
-          <a:blip r:embed="rId3"/>
-          <a:stretch>
-            <a:fillRect/>
-          </a:stretch>
-        </p:blipFill>
-        <p:spPr>
-          <a:xfrm>
-            <a:off x="6196462" y="1703266"/>
-            <a:ext cx="4791075" cy="4143375"/>
-          </a:xfrm>
-          <a:prstGeom prst="rect">
-            <a:avLst/>
-          </a:prstGeom>
-        </p:spPr>
-      </p:pic>
       <p:sp>
         <p:nvSpPr>
           <p:cNvPr id="10" name="TextBox 9">
@@ -23446,6 +23452,66 @@
           </a:p>
         </p:txBody>
       </p:sp>
+      <p:pic>
+        <p:nvPicPr>
+          <p:cNvPr id="5" name="Picture 4" descr="Heat map titled Value Function over the L-maze, learned with order-2 Fourier features, colour scale from −0.9 to 0.9. Values are highest (dark red) in the upper right near the goal and fall off toward a low, pale region around (3, 3) inside the L, with curved contour lines that bend around the wall.">
+            <a:extLst>
+              <a:ext uri="{FF2B5EF4-FFF2-40B4-BE49-F238E27FC236}">
+                <a16:creationId xmlns:a16="http://schemas.microsoft.com/office/drawing/2014/main" id="{4D337F39-86C8-E0E0-ED9A-B7AA898B5D4F}"/>
+              </a:ext>
+            </a:extLst>
+          </p:cNvPr>
+          <p:cNvPicPr>
+            <a:picLocks noChangeAspect="1"/>
+          </p:cNvPicPr>
+          <p:nvPr/>
+        </p:nvPicPr>
+        <p:blipFill>
+          <a:blip r:embed="rId2"/>
+          <a:stretch>
+            <a:fillRect/>
+          </a:stretch>
+        </p:blipFill>
+        <p:spPr>
+          <a:xfrm>
+            <a:off x="838200" y="1797904"/>
+            <a:ext cx="5133975" cy="4143375"/>
+          </a:xfrm>
+          <a:prstGeom prst="rect">
+            <a:avLst/>
+          </a:prstGeom>
+        </p:spPr>
+      </p:pic>
+      <p:pic>
+        <p:nvPicPr>
+          <p:cNvPr id="7" name="Picture 6" descr="Grid titled Found Path for the L-maze with order-2 Fourier features: from S at (3, 2) the path goes down to row 0, right along the bottom row under the wall to column 8, and then straight up column 8 to the goal G at (8, 8). The maze is solved.">
+            <a:extLst>
+              <a:ext uri="{FF2B5EF4-FFF2-40B4-BE49-F238E27FC236}">
+                <a16:creationId xmlns:a16="http://schemas.microsoft.com/office/drawing/2014/main" id="{72621229-6986-1F7F-41FE-03F1D4D641BF}"/>
+              </a:ext>
+            </a:extLst>
+          </p:cNvPr>
+          <p:cNvPicPr>
+            <a:picLocks noChangeAspect="1"/>
+          </p:cNvPicPr>
+          <p:nvPr/>
+        </p:nvPicPr>
+        <p:blipFill>
+          <a:blip r:embed="rId3"/>
+          <a:stretch>
+            <a:fillRect/>
+          </a:stretch>
+        </p:blipFill>
+        <p:spPr>
+          <a:xfrm>
+            <a:off x="6196462" y="1703266"/>
+            <a:ext cx="4791075" cy="4143375"/>
+          </a:xfrm>
+          <a:prstGeom prst="rect">
+            <a:avLst/>
+          </a:prstGeom>
+        </p:spPr>
+      </p:pic>
     </p:spTree>
     <p:extLst>
       <p:ext uri="{BB962C8B-B14F-4D97-AF65-F5344CB8AC3E}">
@@ -23508,7 +23574,7 @@
         <mc:Choice Requires="a14">
           <p:sp>
             <p:nvSpPr>
-              <p:cNvPr id="3" name="Content Placeholder 2">
+              <p:cNvPr id="3" name="Content Placeholder 2" descr="Partition the space using several overlapping grids. Represent the state by the “active” tiles in the grids. Similar states will share active tiles. Leads to a local generalization. alpha is typically chosen to be small since a change will also affect neighboring states. Popular: alpha equals the fraction 1, over 10 #tilings, end fraction">
                 <a:extLst>
                   <a:ext uri="{FF2B5EF4-FFF2-40B4-BE49-F238E27FC236}">
                     <a16:creationId xmlns:a16="http://schemas.microsoft.com/office/drawing/2014/main" id="{FBFD9809-8770-2E37-A840-29088246A6D3}"/>
@@ -23637,16 +23703,7 @@
                           <a:rPr lang="en-US" b="0" i="0" smtClean="0">
                             <a:latin typeface="Cambria Math" panose="02040503050406030204" pitchFamily="18" charset="0"/>
                           </a:rPr>
-                          <m:t>#</m:t>
-                        </m:r>
-                        <m:r>
-                          <m:rPr>
-                            <m:nor/>
-                          </m:rPr>
-                          <a:rPr lang="en-US" b="0" i="0" smtClean="0">
-                            <a:latin typeface="Cambria Math" panose="02040503050406030204" pitchFamily="18" charset="0"/>
-                          </a:rPr>
-                          <m:t>tilings</m:t>
+                          <m:t>#tilings</m:t>
                         </m:r>
                       </m:den>
                     </m:f>
@@ -23666,7 +23723,7 @@
         <mc:Fallback xmlns="">
           <p:sp>
             <p:nvSpPr>
-              <p:cNvPr id="3" name="Content Placeholder 2">
+              <p:cNvPr id="3" name="Content Placeholder 2" descr="Partition the space using several overlapping grids. Represent the state by the “active” tiles in the grids. Similar states will share active tiles. Leads to a local generalization. alpha is typically chosen to be small since a change will also affect neighboring states. Popular: alpha equals the fraction 1, over 10 #tilings, end fraction">
                 <a:extLst>
                   <a:ext uri="{FF2B5EF4-FFF2-40B4-BE49-F238E27FC236}">
                     <a16:creationId xmlns:a16="http://schemas.microsoft.com/office/drawing/2014/main" id="{FBFD9809-8770-2E37-A840-29088246A6D3}"/>
@@ -23707,52 +23764,9 @@
           </p:sp>
         </mc:Fallback>
       </mc:AlternateContent>
-      <p:sp>
-        <p:nvSpPr>
-          <p:cNvPr id="9" name="TextBox 8">
-            <a:extLst>
-              <a:ext uri="{FF2B5EF4-FFF2-40B4-BE49-F238E27FC236}">
-                <a16:creationId xmlns:a16="http://schemas.microsoft.com/office/drawing/2014/main" id="{6C16D6BC-D653-3084-48E6-D30B7A3E47B8}"/>
-              </a:ext>
-            </a:extLst>
-          </p:cNvPr>
-          <p:cNvSpPr txBox="1"/>
-          <p:nvPr/>
-        </p:nvSpPr>
-        <p:spPr>
-          <a:xfrm>
-            <a:off x="838199" y="5907977"/>
-            <a:ext cx="10651131" cy="646331"/>
-          </a:xfrm>
-          <a:prstGeom prst="rect">
-            <a:avLst/>
-          </a:prstGeom>
-          <a:noFill/>
-        </p:spPr>
-        <p:txBody>
-          <a:bodyPr wrap="square">
-            <a:spAutoFit/>
-          </a:bodyPr>
-          <a:lstStyle/>
-          <a:p>
-            <a:pPr marL="285750" indent="-285750">
-              <a:buFont typeface="Arial" panose="020B0604020202020204" pitchFamily="34" charset="0"/>
-              <a:buChar char="•"/>
-            </a:pPr>
-            <a:r>
-              <a:rPr lang="en-US" b="1" dirty="0"/>
-              <a:t>Issue</a:t>
-            </a:r>
-            <a:r>
-              <a:rPr lang="en-US" dirty="0"/>
-              <a:t>: High-dimensional state spaces lead to too long sparse feature vectors. Idea: Use index hash tables with limited capacity to focus on more frequently encountered states. </a:t>
-            </a:r>
-          </a:p>
-        </p:txBody>
-      </p:sp>
       <p:grpSp>
         <p:nvGrpSpPr>
-          <p:cNvPr id="11" name="Group 10">
+          <p:cNvPr id="11" name="Group 10" descr="Tile coding (Sutton and Barto Figure 9.9). Left: a continuous 2D state space covered by one grid, Tiling 1, with a point in state space to be represented. Right: four overlapping tilings (Tiling 1 blue, Tiling 2 orange, Tiling 3 red, Tiling 4 green), each offset slightly from the others. The point falls into exactly one tile of each tiling, highlighted with a thick outline: these four active tiles, or features, overlap the point and are used to represent it. Labels: Example:. State has two components. 4 4 times 4 overlapping tilings give 64 squares. State features: 60 0s and only the four active tiles have a 1; 0; 1.">
             <a:extLst>
               <a:ext uri="{FF2B5EF4-FFF2-40B4-BE49-F238E27FC236}">
                 <a16:creationId xmlns:a16="http://schemas.microsoft.com/office/drawing/2014/main" id="{D437D3AF-9CD5-44B6-815F-6BBB79164F9B}"/>
@@ -23772,7 +23786,7 @@
         </p:grpSpPr>
         <p:pic>
           <p:nvPicPr>
-            <p:cNvPr id="5" name="Picture 4">
+            <p:cNvPr id="5" name="Picture 4" descr="Tile coding (Sutton and Barto Figure 9.9). Left: a continuous 2D state space covered by one grid, Tiling 1, with a point in state space to be represented. Right: four overlapping tilings (Tiling 1 blue, Tiling 2 orange, Tiling 3 red, Tiling 4 green), each offset slightly from the others. The point falls into exactly one tile of each tiling, highlighted with a thick outline: these four active tiles, or features, overlap the point and are used to represent it.">
               <a:extLst>
                 <a:ext uri="{FF2B5EF4-FFF2-40B4-BE49-F238E27FC236}">
                   <a16:creationId xmlns:a16="http://schemas.microsoft.com/office/drawing/2014/main" id="{AD66987A-C1A2-C925-E70B-BB4DA616A482}"/>
@@ -23804,7 +23818,7 @@
           <mc:Choice Requires="a14">
             <p:sp>
               <p:nvSpPr>
-                <p:cNvPr id="6" name="TextBox 5">
+                <p:cNvPr id="6" name="TextBox 5" descr="Example:. State has two components. 4 4 times 4 overlapping tilings give 64 squares. State features: 60 0s and only the four active tiles have a 1">
                   <a:extLst>
                     <a:ext uri="{FF2B5EF4-FFF2-40B4-BE49-F238E27FC236}">
                       <a16:creationId xmlns:a16="http://schemas.microsoft.com/office/drawing/2014/main" id="{E82E76E1-445B-0C86-262C-5EA0DD4E509D}"/>
@@ -23897,7 +23911,7 @@
           <mc:Fallback xmlns="">
             <p:sp>
               <p:nvSpPr>
-                <p:cNvPr id="6" name="TextBox 5">
+                <p:cNvPr id="6" name="TextBox 5" descr="Example:. State has two components. 4 4 times 4 overlapping tilings give 64 squares. State features: 60 0s and only the four active tiles have a 1">
                   <a:extLst>
                     <a:ext uri="{FF2B5EF4-FFF2-40B4-BE49-F238E27FC236}">
                       <a16:creationId xmlns:a16="http://schemas.microsoft.com/office/drawing/2014/main" id="{E82E76E1-445B-0C86-262C-5EA0DD4E509D}"/>
@@ -23946,6 +23960,9 @@
                 <a:ext uri="{FF2B5EF4-FFF2-40B4-BE49-F238E27FC236}">
                   <a16:creationId xmlns:a16="http://schemas.microsoft.com/office/drawing/2014/main" id="{67A12649-C2C4-ED5F-5094-B6C4AD7830E1}"/>
                 </a:ext>
+                <a:ext uri="{C183D7F6-B498-43B3-948B-1728B52AA6E4}">
+                  <adec:decorative xmlns:adec="http://schemas.microsoft.com/office/drawing/2017/decorative" val="1"/>
+                </a:ext>
               </a:extLst>
             </p:cNvPr>
             <p:cNvGrpSpPr/>
@@ -23965,6 +23982,9 @@
                 <a:extLst>
                   <a:ext uri="{FF2B5EF4-FFF2-40B4-BE49-F238E27FC236}">
                     <a16:creationId xmlns:a16="http://schemas.microsoft.com/office/drawing/2014/main" id="{C5E45CF6-7235-3CD1-7DE8-C6E0659A42AE}"/>
+                  </a:ext>
+                  <a:ext uri="{C183D7F6-B498-43B3-948B-1728B52AA6E4}">
+                    <adec:decorative xmlns:adec="http://schemas.microsoft.com/office/drawing/2017/decorative" val="1"/>
                   </a:ext>
                 </a:extLst>
               </p:cNvPr>
@@ -24013,6 +24033,9 @@
                   <a:ext uri="{FF2B5EF4-FFF2-40B4-BE49-F238E27FC236}">
                     <a16:creationId xmlns:a16="http://schemas.microsoft.com/office/drawing/2014/main" id="{D1ADE3D4-6EA3-99E2-AB67-C986C31EB857}"/>
                   </a:ext>
+                  <a:ext uri="{C183D7F6-B498-43B3-948B-1728B52AA6E4}">
+                    <adec:decorative xmlns:adec="http://schemas.microsoft.com/office/drawing/2017/decorative" val="1"/>
+                  </a:ext>
                 </a:extLst>
               </p:cNvPr>
               <p:cNvCxnSpPr>
@@ -24056,7 +24079,7 @@
         </p:grpSp>
         <p:grpSp>
           <p:nvGrpSpPr>
-            <p:cNvPr id="39" name="Group 38">
+            <p:cNvPr id="39" name="Group 38" descr="Feature vector of one 4 by 4 tiling: 16 tiles, all 0 except the single active tile, which is 1.">
               <a:extLst>
                 <a:ext uri="{FF2B5EF4-FFF2-40B4-BE49-F238E27FC236}">
                   <a16:creationId xmlns:a16="http://schemas.microsoft.com/office/drawing/2014/main" id="{C7F69C6B-93B1-2F6A-CDA0-FB2EBF5957B9}"/>
@@ -24076,7 +24099,7 @@
           </p:grpSpPr>
           <p:grpSp>
             <p:nvGrpSpPr>
-              <p:cNvPr id="22" name="Group 21">
+              <p:cNvPr id="22" name="Group 21" descr="Row of four tile features: 0, 0, 0, 0.">
                 <a:extLst>
                   <a:ext uri="{FF2B5EF4-FFF2-40B4-BE49-F238E27FC236}">
                     <a16:creationId xmlns:a16="http://schemas.microsoft.com/office/drawing/2014/main" id="{7752AD79-CCF2-693C-5120-EF04065CEDF9}"/>
@@ -24253,7 +24276,7 @@
           </p:grpSp>
           <p:grpSp>
             <p:nvGrpSpPr>
-              <p:cNvPr id="23" name="Group 22">
+              <p:cNvPr id="23" name="Group 22" descr="Row of four tile features: 0, 0, 1, 0.">
                 <a:extLst>
                   <a:ext uri="{FF2B5EF4-FFF2-40B4-BE49-F238E27FC236}">
                     <a16:creationId xmlns:a16="http://schemas.microsoft.com/office/drawing/2014/main" id="{9B927CF8-AF38-CDF8-A9EF-EDEFC6BDA07E}"/>
@@ -24430,7 +24453,7 @@
           </p:grpSp>
           <p:grpSp>
             <p:nvGrpSpPr>
-              <p:cNvPr id="28" name="Group 27">
+              <p:cNvPr id="28" name="Group 27" descr="Row of four tile features: 0, 0, 0, 0.">
                 <a:extLst>
                   <a:ext uri="{FF2B5EF4-FFF2-40B4-BE49-F238E27FC236}">
                     <a16:creationId xmlns:a16="http://schemas.microsoft.com/office/drawing/2014/main" id="{EE4B4C3A-C9DE-6BCC-E353-0E9585FE87C7}"/>
@@ -24607,7 +24630,7 @@
           </p:grpSp>
           <p:grpSp>
             <p:nvGrpSpPr>
-              <p:cNvPr id="33" name="Group 32">
+              <p:cNvPr id="33" name="Group 32" descr="Row of four tile features: 0, 0, 0, 0.">
                 <a:extLst>
                   <a:ext uri="{FF2B5EF4-FFF2-40B4-BE49-F238E27FC236}">
                     <a16:creationId xmlns:a16="http://schemas.microsoft.com/office/drawing/2014/main" id="{959E18F5-BC4F-0096-E7F1-99D143FB7D6F}"/>
@@ -24790,6 +24813,9 @@
                 <a:ext uri="{FF2B5EF4-FFF2-40B4-BE49-F238E27FC236}">
                   <a16:creationId xmlns:a16="http://schemas.microsoft.com/office/drawing/2014/main" id="{F4907E4A-8165-469A-2D7D-2A9F070FAF6B}"/>
                 </a:ext>
+                <a:ext uri="{C183D7F6-B498-43B3-948B-1728B52AA6E4}">
+                  <adec:decorative xmlns:adec="http://schemas.microsoft.com/office/drawing/2017/decorative" val="1"/>
+                </a:ext>
               </a:extLst>
             </p:cNvPr>
             <p:cNvSpPr/>
@@ -24838,6 +24864,49 @@
           </p:txBody>
         </p:sp>
       </p:grpSp>
+      <p:sp>
+        <p:nvSpPr>
+          <p:cNvPr id="9" name="TextBox 8">
+            <a:extLst>
+              <a:ext uri="{FF2B5EF4-FFF2-40B4-BE49-F238E27FC236}">
+                <a16:creationId xmlns:a16="http://schemas.microsoft.com/office/drawing/2014/main" id="{6C16D6BC-D653-3084-48E6-D30B7A3E47B8}"/>
+              </a:ext>
+            </a:extLst>
+          </p:cNvPr>
+          <p:cNvSpPr txBox="1"/>
+          <p:nvPr/>
+        </p:nvSpPr>
+        <p:spPr>
+          <a:xfrm>
+            <a:off x="838199" y="5907977"/>
+            <a:ext cx="10651131" cy="646331"/>
+          </a:xfrm>
+          <a:prstGeom prst="rect">
+            <a:avLst/>
+          </a:prstGeom>
+          <a:noFill/>
+        </p:spPr>
+        <p:txBody>
+          <a:bodyPr wrap="square">
+            <a:spAutoFit/>
+          </a:bodyPr>
+          <a:lstStyle/>
+          <a:p>
+            <a:pPr marL="285750" indent="-285750">
+              <a:buFont typeface="Arial" panose="020B0604020202020204" pitchFamily="34" charset="0"/>
+              <a:buChar char="•"/>
+            </a:pPr>
+            <a:r>
+              <a:rPr lang="en-US" b="1" dirty="0"/>
+              <a:t>Issue</a:t>
+            </a:r>
+            <a:r>
+              <a:rPr lang="en-US" dirty="0"/>
+              <a:t>: High-dimensional state spaces lead to too long sparse feature vectors. Idea: Use index hash tables with limited capacity to focus on more frequently encountered states. </a:t>
+            </a:r>
+          </a:p>
+        </p:txBody>
+      </p:sp>
     </p:spTree>
     <p:extLst>
       <p:ext uri="{BB962C8B-B14F-4D97-AF65-F5344CB8AC3E}">
@@ -24950,7 +25019,7 @@
       </p:sp>
       <p:pic>
         <p:nvPicPr>
-          <p:cNvPr id="4" name="Picture 3">
+          <p:cNvPr id="4" name="Picture 3" descr="Heat map titled Value Function over the L-maze, learned with tile coding (4 tilings, 4 tiles per dimension), colour scale from −0.9 to 0.9. Values are near zero over the left part of the maze and rise in blocky, tile-shaped steps toward a dark red peak around (7, 8) next to the goal.">
             <a:extLst>
               <a:ext uri="{FF2B5EF4-FFF2-40B4-BE49-F238E27FC236}">
                 <a16:creationId xmlns:a16="http://schemas.microsoft.com/office/drawing/2014/main" id="{FE08F3D6-8964-CAE2-4ADA-BAAE74BB05BD}"/>
@@ -24980,7 +25049,7 @@
       </p:pic>
       <p:pic>
         <p:nvPicPr>
-          <p:cNvPr id="8" name="Picture 7">
+          <p:cNvPr id="8" name="Picture 7" descr="Grid titled Found Path for the L-maze with tile coding: from S at (3, 2) the path goes down to row 0, right along the bottom to column 7, up column 7, then over to column 8 and up to the goal G at (8, 8). The maze is solved.">
             <a:extLst>
               <a:ext uri="{FF2B5EF4-FFF2-40B4-BE49-F238E27FC236}">
                 <a16:creationId xmlns:a16="http://schemas.microsoft.com/office/drawing/2014/main" id="{51DFED3D-EFF1-6553-1DCD-D229508CD3A0}"/>
@@ -25010,10 +25079,13 @@
       </p:pic>
       <p:sp>
         <p:nvSpPr>
-          <p:cNvPr id="7" name="Rectangle 6">
+          <p:cNvPr id="13" name="Rectangle 12">
             <a:extLst>
               <a:ext uri="{FF2B5EF4-FFF2-40B4-BE49-F238E27FC236}">
-                <a16:creationId xmlns:a16="http://schemas.microsoft.com/office/drawing/2014/main" id="{E94AC593-803B-989F-4D87-FCF5A79AE08B}"/>
+                <a16:creationId xmlns:a16="http://schemas.microsoft.com/office/drawing/2014/main" id="{6A5D3011-61ED-2F34-FB57-19C3D99CB1AA}"/>
+              </a:ext>
+              <a:ext uri="{C183D7F6-B498-43B3-948B-1728B52AA6E4}">
+                <adec:decorative xmlns:adec="http://schemas.microsoft.com/office/drawing/2017/decorative" val="1"/>
               </a:ext>
             </a:extLst>
           </p:cNvPr>
@@ -25022,7 +25094,7 @@
         </p:nvSpPr>
         <p:spPr>
           <a:xfrm>
-            <a:off x="1247335" y="4562623"/>
+            <a:off x="1445895" y="4335195"/>
             <a:ext cx="1022253" cy="961292"/>
           </a:xfrm>
           <a:prstGeom prst="rect">
@@ -25064,10 +25136,13 @@
       </p:sp>
       <p:sp>
         <p:nvSpPr>
-          <p:cNvPr id="13" name="Rectangle 12">
+          <p:cNvPr id="7" name="Rectangle 6">
             <a:extLst>
               <a:ext uri="{FF2B5EF4-FFF2-40B4-BE49-F238E27FC236}">
-                <a16:creationId xmlns:a16="http://schemas.microsoft.com/office/drawing/2014/main" id="{6A5D3011-61ED-2F34-FB57-19C3D99CB1AA}"/>
+                <a16:creationId xmlns:a16="http://schemas.microsoft.com/office/drawing/2014/main" id="{E94AC593-803B-989F-4D87-FCF5A79AE08B}"/>
+              </a:ext>
+              <a:ext uri="{C183D7F6-B498-43B3-948B-1728B52AA6E4}">
+                <adec:decorative xmlns:adec="http://schemas.microsoft.com/office/drawing/2017/decorative" val="1"/>
               </a:ext>
             </a:extLst>
           </p:cNvPr>
@@ -25076,7 +25151,7 @@
         </p:nvSpPr>
         <p:spPr>
           <a:xfrm>
-            <a:off x="1445895" y="4335195"/>
+            <a:off x="1247335" y="4562623"/>
             <a:ext cx="1022253" cy="961292"/>
           </a:xfrm>
           <a:prstGeom prst="rect">
@@ -25516,7 +25591,668 @@
         <mc:Choice Requires="a14">
           <p:sp>
             <p:nvSpPr>
-              <p:cNvPr id="3" name="Content Placeholder 2">
+              <p:cNvPr id="10" name="TextBox 9" descr="General. X capital letters: random variables x, p lower-case letters: realizations of random variables or scalar functions. w Bold lower-case letters: real-valued vectors (even if random variables). W bold capitals: matrices. alpha Greek letters: parameters (vectors if in bolt). Pr{X equals x} probability that a random variable X takes on the value x. X~p random variable X selected from distribution p (x) equals Pr{X equals x}. E[X] expectation of a random variable X, i.e., E [X] equals the sum over x, of p (x) x. argmax sub a f(a) a value of action a at which f(a) takes its maximal value">
+                <a:extLst>
+                  <a:ext uri="{FF2B5EF4-FFF2-40B4-BE49-F238E27FC236}">
+                    <a16:creationId xmlns:a16="http://schemas.microsoft.com/office/drawing/2014/main" id="{5CD475E5-BE3B-5594-57DC-46A17411F2F9}"/>
+                  </a:ext>
+                </a:extLst>
+              </p:cNvPr>
+              <p:cNvSpPr txBox="1"/>
+              <p:nvPr/>
+            </p:nvSpPr>
+            <p:spPr>
+              <a:xfrm>
+                <a:off x="822820" y="1124198"/>
+                <a:ext cx="5273179" cy="2308324"/>
+              </a:xfrm>
+              <a:prstGeom prst="rect">
+                <a:avLst/>
+              </a:prstGeom>
+            </p:spPr>
+            <p:style>
+              <a:lnRef idx="2">
+                <a:schemeClr val="accent2"/>
+              </a:lnRef>
+              <a:fillRef idx="1">
+                <a:schemeClr val="lt1"/>
+              </a:fillRef>
+              <a:effectRef idx="0">
+                <a:schemeClr val="accent2"/>
+              </a:effectRef>
+              <a:fontRef idx="minor">
+                <a:schemeClr val="dk1"/>
+              </a:fontRef>
+            </p:style>
+            <p:txBody>
+              <a:bodyPr wrap="square">
+                <a:spAutoFit/>
+              </a:bodyPr>
+              <a:lstStyle/>
+              <a:p>
+                <a:r>
+                  <a:rPr lang="en-US" sz="1200" b="1" dirty="0"/>
+                  <a:t>General</a:t>
+                </a:r>
+                <a:endParaRPr lang="en-US" sz="1200" dirty="0"/>
+              </a:p>
+              <a:p>
+                <a14:m>
+                  <m:oMath xmlns:m="http://schemas.openxmlformats.org/officeDocument/2006/math">
+                    <m:r>
+                      <a:rPr lang="en-US" sz="1200" i="1" dirty="0" smtClean="0">
+                        <a:latin typeface="Cambria Math" panose="02040503050406030204" pitchFamily="18" charset="0"/>
+                      </a:rPr>
+                      <m:t>𝑋</m:t>
+                    </m:r>
+                  </m:oMath>
+                </a14:m>
+                <a:r>
+                  <a:rPr lang="en-US" sz="1200" dirty="0"/>
+                  <a:t>	capital letters: random variables</a:t>
+                </a:r>
+                <a:br>
+                  <a:rPr lang="en-US" sz="1200" dirty="0"/>
+                </a:br>
+                <a14:m>
+                  <m:oMath xmlns:m="http://schemas.openxmlformats.org/officeDocument/2006/math">
+                    <m:r>
+                      <a:rPr lang="en-US" sz="1200" b="0" i="1" smtClean="0">
+                        <a:latin typeface="Cambria Math" panose="02040503050406030204" pitchFamily="18" charset="0"/>
+                      </a:rPr>
+                      <m:t>𝑥</m:t>
+                    </m:r>
+                    <m:r>
+                      <a:rPr lang="en-US" sz="1200" b="0" i="0" smtClean="0">
+                        <a:latin typeface="Cambria Math" panose="02040503050406030204" pitchFamily="18" charset="0"/>
+                      </a:rPr>
+                      <m:t>, </m:t>
+                    </m:r>
+                    <m:r>
+                      <a:rPr lang="en-US" sz="1200" b="0" i="1" smtClean="0">
+                        <a:latin typeface="Cambria Math" panose="02040503050406030204" pitchFamily="18" charset="0"/>
+                      </a:rPr>
+                      <m:t>𝑝</m:t>
+                    </m:r>
+                  </m:oMath>
+                </a14:m>
+                <a:r>
+                  <a:rPr lang="en-US" sz="1200" dirty="0"/>
+                  <a:t>	lower-case letters: realizations of random variables </a:t>
+                </a:r>
+                <a:br>
+                  <a:rPr lang="en-US" sz="1200" dirty="0"/>
+                </a:br>
+                <a:r>
+                  <a:rPr lang="en-US" sz="1200" dirty="0"/>
+                  <a:t>	or scalar functions</a:t>
+                </a:r>
+              </a:p>
+              <a:p>
+                <a14:m>
+                  <m:oMath xmlns:m="http://schemas.openxmlformats.org/officeDocument/2006/math">
+                    <m:r>
+                      <a:rPr lang="en-US" sz="1200" b="1" i="1" smtClean="0">
+                        <a:latin typeface="Cambria Math" panose="02040503050406030204" pitchFamily="18" charset="0"/>
+                      </a:rPr>
+                      <m:t>𝒘</m:t>
+                    </m:r>
+                  </m:oMath>
+                </a14:m>
+                <a:r>
+                  <a:rPr lang="en-US" sz="1200" dirty="0"/>
+                  <a:t> 	Bold lower-case letters: real-valued vectors </a:t>
+                </a:r>
+                <a:br>
+                  <a:rPr lang="en-US" sz="1200" dirty="0"/>
+                </a:br>
+                <a:r>
+                  <a:rPr lang="en-US" sz="1200" dirty="0"/>
+                  <a:t>	(even if random variables)</a:t>
+                </a:r>
+              </a:p>
+              <a:p>
+                <a14:m>
+                  <m:oMath xmlns:m="http://schemas.openxmlformats.org/officeDocument/2006/math">
+                    <m:r>
+                      <a:rPr lang="en-US" sz="1200" b="1" i="1" smtClean="0">
+                        <a:latin typeface="Cambria Math" panose="02040503050406030204" pitchFamily="18" charset="0"/>
+                      </a:rPr>
+                      <m:t>𝑾</m:t>
+                    </m:r>
+                  </m:oMath>
+                </a14:m>
+                <a:r>
+                  <a:rPr lang="en-US" sz="1200" dirty="0"/>
+                  <a:t>	bold capitals: matrices</a:t>
+                </a:r>
+              </a:p>
+              <a:p>
+                <a14:m>
+                  <m:oMath xmlns:m="http://schemas.openxmlformats.org/officeDocument/2006/math">
+                    <m:r>
+                      <a:rPr lang="en-US" sz="1200" b="0" i="1" smtClean="0">
+                        <a:latin typeface="Cambria Math" panose="02040503050406030204" pitchFamily="18" charset="0"/>
+                      </a:rPr>
+                      <m:t>𝛼</m:t>
+                    </m:r>
+                  </m:oMath>
+                </a14:m>
+                <a:r>
+                  <a:rPr lang="en-US" sz="1200" dirty="0"/>
+                  <a:t>	Greek letters: parameters (vectors if in bolt)</a:t>
+                </a:r>
+              </a:p>
+              <a:p>
+                <a14:m>
+                  <m:oMath xmlns:m="http://schemas.openxmlformats.org/officeDocument/2006/math">
+                    <m:r>
+                      <m:rPr>
+                        <m:sty m:val="p"/>
+                      </m:rPr>
+                      <a:rPr lang="en-US" sz="1200" i="1" dirty="0">
+                        <a:latin typeface="Cambria Math" panose="02040503050406030204" pitchFamily="18" charset="0"/>
+                      </a:rPr>
+                      <m:t>Pr</m:t>
+                    </m:r>
+                    <m:r>
+                      <a:rPr lang="en-US" sz="1200" i="1" dirty="0">
+                        <a:latin typeface="Cambria Math" panose="02040503050406030204" pitchFamily="18" charset="0"/>
+                      </a:rPr>
+                      <m:t>⁡{</m:t>
+                    </m:r>
+                    <m:r>
+                      <a:rPr lang="en-US" sz="1200" i="1" dirty="0">
+                        <a:latin typeface="Cambria Math" panose="02040503050406030204" pitchFamily="18" charset="0"/>
+                      </a:rPr>
+                      <m:t>𝑋</m:t>
+                    </m:r>
+                    <m:r>
+                      <a:rPr lang="en-US" sz="1200" i="1" dirty="0">
+                        <a:latin typeface="Cambria Math" panose="02040503050406030204" pitchFamily="18" charset="0"/>
+                      </a:rPr>
+                      <m:t>=</m:t>
+                    </m:r>
+                    <m:r>
+                      <a:rPr lang="en-US" sz="1200" i="1" dirty="0">
+                        <a:latin typeface="Cambria Math" panose="02040503050406030204" pitchFamily="18" charset="0"/>
+                      </a:rPr>
+                      <m:t>𝑥</m:t>
+                    </m:r>
+                    <m:r>
+                      <a:rPr lang="en-US" sz="1200" i="1" dirty="0">
+                        <a:latin typeface="Cambria Math" panose="02040503050406030204" pitchFamily="18" charset="0"/>
+                      </a:rPr>
+                      <m:t>}</m:t>
+                    </m:r>
+                  </m:oMath>
+                </a14:m>
+                <a:r>
+                  <a:rPr lang="en-US" sz="1200" dirty="0"/>
+                  <a:t>	probability that a random variable </a:t>
+                </a:r>
+                <a14:m>
+                  <m:oMath xmlns:m="http://schemas.openxmlformats.org/officeDocument/2006/math">
+                    <m:r>
+                      <a:rPr lang="en-US" sz="1200" i="1" dirty="0">
+                        <a:latin typeface="Cambria Math" panose="02040503050406030204" pitchFamily="18" charset="0"/>
+                      </a:rPr>
+                      <m:t>𝑋</m:t>
+                    </m:r>
+                  </m:oMath>
+                </a14:m>
+                <a:r>
+                  <a:rPr lang="en-US" sz="1200" dirty="0"/>
+                  <a:t> takes on the value </a:t>
+                </a:r>
+                <a14:m>
+                  <m:oMath xmlns:m="http://schemas.openxmlformats.org/officeDocument/2006/math">
+                    <m:r>
+                      <a:rPr lang="en-US" sz="1200" i="1" dirty="0">
+                        <a:latin typeface="Cambria Math" panose="02040503050406030204" pitchFamily="18" charset="0"/>
+                      </a:rPr>
+                      <m:t>𝑥</m:t>
+                    </m:r>
+                  </m:oMath>
+                </a14:m>
+                <a:endParaRPr lang="en-US" sz="1200" dirty="0"/>
+              </a:p>
+              <a:p>
+                <a14:m>
+                  <m:oMath xmlns:m="http://schemas.openxmlformats.org/officeDocument/2006/math">
+                    <m:r>
+                      <a:rPr lang="en-US" sz="1200" i="1" dirty="0">
+                        <a:latin typeface="Cambria Math" panose="02040503050406030204" pitchFamily="18" charset="0"/>
+                      </a:rPr>
+                      <m:t>𝑋</m:t>
+                    </m:r>
+                    <m:r>
+                      <a:rPr lang="en-US" sz="1200" i="1" dirty="0">
+                        <a:latin typeface="Cambria Math" panose="02040503050406030204" pitchFamily="18" charset="0"/>
+                      </a:rPr>
+                      <m:t>~</m:t>
+                    </m:r>
+                    <m:r>
+                      <a:rPr lang="en-US" sz="1200" i="1" dirty="0">
+                        <a:latin typeface="Cambria Math" panose="02040503050406030204" pitchFamily="18" charset="0"/>
+                      </a:rPr>
+                      <m:t>𝑝</m:t>
+                    </m:r>
+                  </m:oMath>
+                </a14:m>
+                <a:r>
+                  <a:rPr lang="en-US" sz="1200" dirty="0"/>
+                  <a:t>	random variable </a:t>
+                </a:r>
+                <a14:m>
+                  <m:oMath xmlns:m="http://schemas.openxmlformats.org/officeDocument/2006/math">
+                    <m:r>
+                      <a:rPr lang="en-US" sz="1200" i="1" dirty="0">
+                        <a:latin typeface="Cambria Math" panose="02040503050406030204" pitchFamily="18" charset="0"/>
+                      </a:rPr>
+                      <m:t>𝑋</m:t>
+                    </m:r>
+                  </m:oMath>
+                </a14:m>
+                <a:r>
+                  <a:rPr lang="en-US" sz="1200" dirty="0"/>
+                  <a:t> selected from distribution </a:t>
+                </a:r>
+                <a14:m>
+                  <m:oMath xmlns:m="http://schemas.openxmlformats.org/officeDocument/2006/math">
+                    <m:r>
+                      <a:rPr lang="en-US" sz="1200" i="1">
+                        <a:latin typeface="Cambria Math" panose="02040503050406030204" pitchFamily="18" charset="0"/>
+                      </a:rPr>
+                      <m:t>𝑝</m:t>
+                    </m:r>
+                    <m:d>
+                      <m:dPr>
+                        <m:ctrlPr>
+                          <a:rPr lang="en-US" sz="1200" i="1">
+                            <a:latin typeface="Cambria Math" panose="02040503050406030204" pitchFamily="18" charset="0"/>
+                          </a:rPr>
+                        </m:ctrlPr>
+                      </m:dPr>
+                      <m:e>
+                        <m:r>
+                          <a:rPr lang="en-US" sz="1200" i="1">
+                            <a:latin typeface="Cambria Math" panose="02040503050406030204" pitchFamily="18" charset="0"/>
+                          </a:rPr>
+                          <m:t>𝑥</m:t>
+                        </m:r>
+                      </m:e>
+                    </m:d>
+                    <m:r>
+                      <a:rPr lang="en-US" sz="1200" i="1">
+                        <a:latin typeface="Cambria Math" panose="02040503050406030204" pitchFamily="18" charset="0"/>
+                      </a:rPr>
+                      <m:t>=</m:t>
+                    </m:r>
+                    <m:r>
+                      <m:rPr>
+                        <m:sty m:val="p"/>
+                      </m:rPr>
+                      <a:rPr lang="en-US" sz="1200">
+                        <a:latin typeface="Cambria Math" panose="02040503050406030204" pitchFamily="18" charset="0"/>
+                      </a:rPr>
+                      <m:t>Pr</m:t>
+                    </m:r>
+                    <m:r>
+                      <a:rPr lang="en-US" sz="1200" i="1">
+                        <a:latin typeface="Cambria Math" panose="02040503050406030204" pitchFamily="18" charset="0"/>
+                      </a:rPr>
+                      <m:t>⁡{</m:t>
+                    </m:r>
+                    <m:r>
+                      <a:rPr lang="en-US" sz="1200" i="1">
+                        <a:latin typeface="Cambria Math" panose="02040503050406030204" pitchFamily="18" charset="0"/>
+                      </a:rPr>
+                      <m:t>𝑋</m:t>
+                    </m:r>
+                    <m:r>
+                      <a:rPr lang="en-US" sz="1200" i="1">
+                        <a:latin typeface="Cambria Math" panose="02040503050406030204" pitchFamily="18" charset="0"/>
+                      </a:rPr>
+                      <m:t>=</m:t>
+                    </m:r>
+                    <m:r>
+                      <a:rPr lang="en-US" sz="1200" i="1">
+                        <a:latin typeface="Cambria Math" panose="02040503050406030204" pitchFamily="18" charset="0"/>
+                      </a:rPr>
+                      <m:t>𝑥</m:t>
+                    </m:r>
+                    <m:r>
+                      <a:rPr lang="en-US" sz="1200" i="1">
+                        <a:latin typeface="Cambria Math" panose="02040503050406030204" pitchFamily="18" charset="0"/>
+                      </a:rPr>
+                      <m:t>}</m:t>
+                    </m:r>
+                  </m:oMath>
+                </a14:m>
+                <a:endParaRPr lang="en-US" sz="1200" dirty="0"/>
+              </a:p>
+              <a:p>
+                <a14:m>
+                  <m:oMath xmlns:m="http://schemas.openxmlformats.org/officeDocument/2006/math">
+                    <m:r>
+                      <a:rPr lang="en-US" sz="1200" i="1">
+                        <a:latin typeface="Cambria Math" panose="02040503050406030204" pitchFamily="18" charset="0"/>
+                        <a:ea typeface="Cambria Math" panose="02040503050406030204" pitchFamily="18" charset="0"/>
+                      </a:rPr>
+                      <m:t>𝔼</m:t>
+                    </m:r>
+                    <m:r>
+                      <a:rPr lang="en-US" sz="1200" i="1">
+                        <a:latin typeface="Cambria Math" panose="02040503050406030204" pitchFamily="18" charset="0"/>
+                        <a:ea typeface="Cambria Math" panose="02040503050406030204" pitchFamily="18" charset="0"/>
+                      </a:rPr>
+                      <m:t>[</m:t>
+                    </m:r>
+                    <m:r>
+                      <a:rPr lang="en-US" sz="1200" i="1">
+                        <a:latin typeface="Cambria Math" panose="02040503050406030204" pitchFamily="18" charset="0"/>
+                        <a:ea typeface="Cambria Math" panose="02040503050406030204" pitchFamily="18" charset="0"/>
+                      </a:rPr>
+                      <m:t>𝑋</m:t>
+                    </m:r>
+                    <m:r>
+                      <a:rPr lang="en-US" sz="1200" i="1">
+                        <a:latin typeface="Cambria Math" panose="02040503050406030204" pitchFamily="18" charset="0"/>
+                        <a:ea typeface="Cambria Math" panose="02040503050406030204" pitchFamily="18" charset="0"/>
+                      </a:rPr>
+                      <m:t>]</m:t>
+                    </m:r>
+                  </m:oMath>
+                </a14:m>
+                <a:r>
+                  <a:rPr lang="en-US" sz="1200" dirty="0"/>
+                  <a:t>	expectation of a random variable </a:t>
+                </a:r>
+                <a14:m>
+                  <m:oMath xmlns:m="http://schemas.openxmlformats.org/officeDocument/2006/math">
+                    <m:r>
+                      <a:rPr lang="en-US" sz="1200" i="1" dirty="0">
+                        <a:latin typeface="Cambria Math" panose="02040503050406030204" pitchFamily="18" charset="0"/>
+                      </a:rPr>
+                      <m:t>𝑋</m:t>
+                    </m:r>
+                  </m:oMath>
+                </a14:m>
+                <a:r>
+                  <a:rPr lang="en-US" sz="1200" dirty="0"/>
+                  <a:t>, i.e., </a:t>
+                </a:r>
+                <a14:m>
+                  <m:oMath xmlns:m="http://schemas.openxmlformats.org/officeDocument/2006/math">
+                    <m:r>
+                      <a:rPr lang="en-US" sz="1200" i="1">
+                        <a:latin typeface="Cambria Math" panose="02040503050406030204" pitchFamily="18" charset="0"/>
+                        <a:ea typeface="Cambria Math" panose="02040503050406030204" pitchFamily="18" charset="0"/>
+                      </a:rPr>
+                      <m:t>𝔼</m:t>
+                    </m:r>
+                    <m:d>
+                      <m:dPr>
+                        <m:begChr m:val="["/>
+                        <m:endChr m:val="]"/>
+                        <m:ctrlPr>
+                          <a:rPr lang="en-US" sz="1200" i="1">
+                            <a:latin typeface="Cambria Math" panose="02040503050406030204" pitchFamily="18" charset="0"/>
+                            <a:ea typeface="Cambria Math" panose="02040503050406030204" pitchFamily="18" charset="0"/>
+                          </a:rPr>
+                        </m:ctrlPr>
+                      </m:dPr>
+                      <m:e>
+                        <m:r>
+                          <a:rPr lang="en-US" sz="1200" i="1">
+                            <a:latin typeface="Cambria Math" panose="02040503050406030204" pitchFamily="18" charset="0"/>
+                            <a:ea typeface="Cambria Math" panose="02040503050406030204" pitchFamily="18" charset="0"/>
+                          </a:rPr>
+                          <m:t>𝑋</m:t>
+                        </m:r>
+                      </m:e>
+                    </m:d>
+                    <m:r>
+                      <a:rPr lang="en-US" sz="1200" i="1">
+                        <a:latin typeface="Cambria Math" panose="02040503050406030204" pitchFamily="18" charset="0"/>
+                        <a:ea typeface="Cambria Math" panose="02040503050406030204" pitchFamily="18" charset="0"/>
+                      </a:rPr>
+                      <m:t>=</m:t>
+                    </m:r>
+                    <m:nary>
+                      <m:naryPr>
+                        <m:chr m:val="∑"/>
+                        <m:supHide m:val="on"/>
+                        <m:ctrlPr>
+                          <a:rPr lang="en-US" sz="1200" i="1">
+                            <a:latin typeface="Cambria Math" panose="02040503050406030204" pitchFamily="18" charset="0"/>
+                            <a:ea typeface="Cambria Math" panose="02040503050406030204" pitchFamily="18" charset="0"/>
+                          </a:rPr>
+                        </m:ctrlPr>
+                      </m:naryPr>
+                      <m:sub>
+                        <m:r>
+                          <a:rPr lang="en-US" sz="1200" i="1">
+                            <a:latin typeface="Cambria Math" panose="02040503050406030204" pitchFamily="18" charset="0"/>
+                            <a:ea typeface="Cambria Math" panose="02040503050406030204" pitchFamily="18" charset="0"/>
+                          </a:rPr>
+                          <m:t>𝑥</m:t>
+                        </m:r>
+                      </m:sub>
+                      <m:sup/>
+                      <m:e>
+                        <m:r>
+                          <a:rPr lang="en-US" sz="1200" i="1">
+                            <a:latin typeface="Cambria Math" panose="02040503050406030204" pitchFamily="18" charset="0"/>
+                            <a:ea typeface="Cambria Math" panose="02040503050406030204" pitchFamily="18" charset="0"/>
+                          </a:rPr>
+                          <m:t>𝑝</m:t>
+                        </m:r>
+                        <m:d>
+                          <m:dPr>
+                            <m:ctrlPr>
+                              <a:rPr lang="en-US" sz="1200" i="1">
+                                <a:latin typeface="Cambria Math" panose="02040503050406030204" pitchFamily="18" charset="0"/>
+                                <a:ea typeface="Cambria Math" panose="02040503050406030204" pitchFamily="18" charset="0"/>
+                              </a:rPr>
+                            </m:ctrlPr>
+                          </m:dPr>
+                          <m:e>
+                            <m:r>
+                              <a:rPr lang="en-US" sz="1200" i="1">
+                                <a:latin typeface="Cambria Math" panose="02040503050406030204" pitchFamily="18" charset="0"/>
+                                <a:ea typeface="Cambria Math" panose="02040503050406030204" pitchFamily="18" charset="0"/>
+                              </a:rPr>
+                              <m:t>𝑥</m:t>
+                            </m:r>
+                          </m:e>
+                        </m:d>
+                        <m:r>
+                          <a:rPr lang="en-US" sz="1200" i="1">
+                            <a:latin typeface="Cambria Math" panose="02040503050406030204" pitchFamily="18" charset="0"/>
+                            <a:ea typeface="Cambria Math" panose="02040503050406030204" pitchFamily="18" charset="0"/>
+                          </a:rPr>
+                          <m:t>𝑥</m:t>
+                        </m:r>
+                      </m:e>
+                    </m:nary>
+                  </m:oMath>
+                </a14:m>
+                <a:endParaRPr lang="en-US" sz="1200" dirty="0">
+                  <a:ea typeface="Cambria Math" panose="02040503050406030204" pitchFamily="18" charset="0"/>
+                </a:endParaRPr>
+              </a:p>
+              <a:p>
+                <a14:m>
+                  <m:oMath xmlns:m="http://schemas.openxmlformats.org/officeDocument/2006/math">
+                    <m:sSub>
+                      <m:sSubPr>
+                        <m:ctrlPr>
+                          <a:rPr lang="en-US" sz="1200" dirty="0">
+                            <a:latin typeface="Cambria Math" panose="02040503050406030204" pitchFamily="18" charset="0"/>
+                          </a:rPr>
+                        </m:ctrlPr>
+                      </m:sSubPr>
+                      <m:e>
+                        <m:r>
+                          <m:rPr>
+                            <m:sty m:val="p"/>
+                          </m:rPr>
+                          <a:rPr lang="en-US" sz="1200" dirty="0">
+                            <a:latin typeface="Cambria Math" panose="02040503050406030204" pitchFamily="18" charset="0"/>
+                          </a:rPr>
+                          <m:t>argmax</m:t>
+                        </m:r>
+                      </m:e>
+                      <m:sub>
+                        <m:r>
+                          <m:rPr>
+                            <m:sty m:val="p"/>
+                          </m:rPr>
+                          <a:rPr lang="en-US" sz="1200" dirty="0">
+                            <a:latin typeface="Cambria Math" panose="02040503050406030204" pitchFamily="18" charset="0"/>
+                          </a:rPr>
+                          <m:t>a</m:t>
+                        </m:r>
+                      </m:sub>
+                    </m:sSub>
+                    <m:r>
+                      <a:rPr lang="en-US" sz="1200" dirty="0">
+                        <a:latin typeface="Cambria Math" panose="02040503050406030204" pitchFamily="18" charset="0"/>
+                      </a:rPr>
+                      <m:t> </m:t>
+                    </m:r>
+                    <m:r>
+                      <a:rPr lang="en-US" sz="1200" i="1" dirty="0">
+                        <a:latin typeface="Cambria Math" panose="02040503050406030204" pitchFamily="18" charset="0"/>
+                      </a:rPr>
+                      <m:t>𝑓</m:t>
+                    </m:r>
+                    <m:r>
+                      <a:rPr lang="en-US" sz="1200" i="1" dirty="0">
+                        <a:latin typeface="Cambria Math" panose="02040503050406030204" pitchFamily="18" charset="0"/>
+                      </a:rPr>
+                      <m:t>(</m:t>
+                    </m:r>
+                    <m:r>
+                      <a:rPr lang="en-US" sz="1200" i="1" dirty="0">
+                        <a:latin typeface="Cambria Math" panose="02040503050406030204" pitchFamily="18" charset="0"/>
+                      </a:rPr>
+                      <m:t>𝑎</m:t>
+                    </m:r>
+                    <m:r>
+                      <a:rPr lang="en-US" sz="1200" i="1" dirty="0">
+                        <a:latin typeface="Cambria Math" panose="02040503050406030204" pitchFamily="18" charset="0"/>
+                      </a:rPr>
+                      <m:t>)</m:t>
+                    </m:r>
+                  </m:oMath>
+                </a14:m>
+                <a:r>
+                  <a:rPr lang="en-US" sz="1200" dirty="0"/>
+                  <a:t> a value of action </a:t>
+                </a:r>
+                <a14:m>
+                  <m:oMath xmlns:m="http://schemas.openxmlformats.org/officeDocument/2006/math">
+                    <m:r>
+                      <a:rPr lang="en-US" sz="1200" i="1" dirty="0">
+                        <a:latin typeface="Cambria Math" panose="02040503050406030204" pitchFamily="18" charset="0"/>
+                      </a:rPr>
+                      <m:t>𝑎</m:t>
+                    </m:r>
+                  </m:oMath>
+                </a14:m>
+                <a:r>
+                  <a:rPr lang="en-US" sz="1200" dirty="0"/>
+                  <a:t> at which </a:t>
+                </a:r>
+                <a14:m>
+                  <m:oMath xmlns:m="http://schemas.openxmlformats.org/officeDocument/2006/math">
+                    <m:r>
+                      <a:rPr lang="en-US" sz="1200" i="1" dirty="0">
+                        <a:latin typeface="Cambria Math" panose="02040503050406030204" pitchFamily="18" charset="0"/>
+                      </a:rPr>
+                      <m:t>𝑓</m:t>
+                    </m:r>
+                    <m:r>
+                      <a:rPr lang="en-US" sz="1200" i="1" dirty="0">
+                        <a:latin typeface="Cambria Math" panose="02040503050406030204" pitchFamily="18" charset="0"/>
+                      </a:rPr>
+                      <m:t>(</m:t>
+                    </m:r>
+                    <m:r>
+                      <a:rPr lang="en-US" sz="1200" i="1" dirty="0">
+                        <a:latin typeface="Cambria Math" panose="02040503050406030204" pitchFamily="18" charset="0"/>
+                      </a:rPr>
+                      <m:t>𝑎</m:t>
+                    </m:r>
+                    <m:r>
+                      <a:rPr lang="en-US" sz="1200" i="1" dirty="0">
+                        <a:latin typeface="Cambria Math" panose="02040503050406030204" pitchFamily="18" charset="0"/>
+                      </a:rPr>
+                      <m:t>)</m:t>
+                    </m:r>
+                  </m:oMath>
+                </a14:m>
+                <a:r>
+                  <a:rPr lang="en-US" sz="1200" dirty="0"/>
+                  <a:t> takes its maximal value</a:t>
+                </a:r>
+              </a:p>
+            </p:txBody>
+          </p:sp>
+        </mc:Choice>
+        <mc:Fallback xmlns="">
+          <p:sp>
+            <p:nvSpPr>
+              <p:cNvPr id="10" name="TextBox 9" descr="General. X capital letters: random variables x, p lower-case letters: realizations of random variables or scalar functions. w Bold lower-case letters: real-valued vectors (even if random variables). W bold capitals: matrices. alpha Greek letters: parameters (vectors if in bolt). Pr{X equals x} probability that a random variable X takes on the value x. X~p random variable X selected from distribution p (x) equals Pr{X equals x}. E[X] expectation of a random variable X, i.e., E [X] equals the sum over x, of p (x) x. argmax sub a f(a) a value of action a at which f(a) takes its maximal value">
+                <a:extLst>
+                  <a:ext uri="{FF2B5EF4-FFF2-40B4-BE49-F238E27FC236}">
+                    <a16:creationId xmlns:a16="http://schemas.microsoft.com/office/drawing/2014/main" id="{5CD475E5-BE3B-5594-57DC-46A17411F2F9}"/>
+                  </a:ext>
+                </a:extLst>
+              </p:cNvPr>
+              <p:cNvSpPr txBox="1">
+                <a:spLocks noRot="1" noChangeAspect="1" noMove="1" noResize="1" noEditPoints="1" noAdjustHandles="1" noChangeArrowheads="1" noChangeShapeType="1" noTextEdit="1"/>
+              </p:cNvSpPr>
+              <p:nvPr/>
+            </p:nvSpPr>
+            <p:spPr>
+              <a:xfrm>
+                <a:off x="822820" y="1124198"/>
+                <a:ext cx="5273179" cy="2308324"/>
+              </a:xfrm>
+              <a:prstGeom prst="rect">
+                <a:avLst/>
+              </a:prstGeom>
+              <a:blipFill>
+                <a:blip r:embed="rId3"/>
+                <a:stretch>
+                  <a:fillRect b="-9424"/>
+                </a:stretch>
+              </a:blipFill>
+            </p:spPr>
+            <p:txBody>
+              <a:bodyPr/>
+              <a:lstStyle/>
+              <a:p>
+                <a:r>
+                  <a:rPr lang="en-US">
+                    <a:noFill/>
+                  </a:rPr>
+                  <a:t> </a:t>
+                </a:r>
+              </a:p>
+            </p:txBody>
+          </p:sp>
+        </mc:Fallback>
+      </mc:AlternateContent>
+      <mc:AlternateContent xmlns:mc="http://schemas.openxmlformats.org/markup-compatibility/2006" xmlns:a14="http://schemas.microsoft.com/office/drawing/2010/main">
+        <mc:Choice Requires="a14">
+          <p:sp>
+            <p:nvSpPr>
+              <p:cNvPr id="3" name="Content Placeholder 2" descr="Value Function. G sub t return (cumulative reward) following time t. G sub t:h return from t to h (discounted and corrected). v sub pi (s) value of state s under policy pi (expected return). v sub star (s) value of state s under the optimal policy. q sub pi (s,a) value of taking action a in state s under policy pi. q sub star (s,a) value of taking action a in state s under the optimal policy. V, V sub t array estimates of state-value function v sub pi or v sub star. Q,Q sub t array estimates of action-value function q sub pi or v sub star">
                 <a:extLst>
                   <a:ext uri="{FF2B5EF4-FFF2-40B4-BE49-F238E27FC236}">
                     <a16:creationId xmlns:a16="http://schemas.microsoft.com/office/drawing/2014/main" id="{47E69C9C-42B6-9B0F-9AE0-20D17703E490}"/>
@@ -25588,7 +26324,7 @@
                     <m:sSub>
                       <m:sSubPr>
                         <m:ctrlPr>
-                          <a:rPr lang="en-US" sz="1200" i="1" dirty="0" smtClean="0">
+                          <a:rPr lang="en-US" sz="1200" i="1" dirty="0">
                             <a:latin typeface="Cambria Math" panose="02040503050406030204" pitchFamily="18" charset="0"/>
                           </a:rPr>
                         </m:ctrlPr>
@@ -25688,7 +26424,7 @@
                             </a:solidFill>
                             <a:latin typeface="Cambria Math" panose="02040503050406030204" pitchFamily="18" charset="0"/>
                           </a:rPr>
-                          <m:t>h</m:t>
+                          <m:t>ℎ</m:t>
                         </m:r>
                       </m:sub>
                     </m:sSub>
@@ -25732,7 +26468,7 @@
                         </a:solidFill>
                         <a:latin typeface="Cambria Math" panose="02040503050406030204" pitchFamily="18" charset="0"/>
                       </a:rPr>
-                      <m:t>h</m:t>
+                      <m:t>ℎ</m:t>
                     </m:r>
                   </m:oMath>
                 </a14:m>
@@ -26500,7 +27236,7 @@
         <mc:Fallback xmlns="">
           <p:sp>
             <p:nvSpPr>
-              <p:cNvPr id="3" name="Content Placeholder 2">
+              <p:cNvPr id="3" name="Content Placeholder 2" descr="Value Function. G sub t return (cumulative reward) following time t. G sub t:h return from t to h (discounted and corrected). v sub pi (s) value of state s under policy pi (expected return). v sub star (s) value of state s under the optimal policy. q sub pi (s,a) value of taking action a in state s under policy pi. q sub star (s,a) value of taking action a in state s under the optimal policy. V, V sub t array estimates of state-value function v sub pi or v sub star. Q,Q sub t array estimates of action-value function q sub pi or v sub star">
                 <a:extLst>
                   <a:ext uri="{FF2B5EF4-FFF2-40B4-BE49-F238E27FC236}">
                     <a16:creationId xmlns:a16="http://schemas.microsoft.com/office/drawing/2014/main" id="{47E69C9C-42B6-9B0F-9AE0-20D17703E490}"/>
@@ -26545,2064 +27281,7 @@
         <mc:Choice Requires="a14">
           <p:sp>
             <p:nvSpPr>
-              <p:cNvPr id="10" name="TextBox 9">
-                <a:extLst>
-                  <a:ext uri="{FF2B5EF4-FFF2-40B4-BE49-F238E27FC236}">
-                    <a16:creationId xmlns:a16="http://schemas.microsoft.com/office/drawing/2014/main" id="{5CD475E5-BE3B-5594-57DC-46A17411F2F9}"/>
-                  </a:ext>
-                </a:extLst>
-              </p:cNvPr>
-              <p:cNvSpPr txBox="1"/>
-              <p:nvPr/>
-            </p:nvSpPr>
-            <p:spPr>
-              <a:xfrm>
-                <a:off x="822820" y="1124198"/>
-                <a:ext cx="5273179" cy="2308324"/>
-              </a:xfrm>
-              <a:prstGeom prst="rect">
-                <a:avLst/>
-              </a:prstGeom>
-            </p:spPr>
-            <p:style>
-              <a:lnRef idx="2">
-                <a:schemeClr val="accent2"/>
-              </a:lnRef>
-              <a:fillRef idx="1">
-                <a:schemeClr val="lt1"/>
-              </a:fillRef>
-              <a:effectRef idx="0">
-                <a:schemeClr val="accent2"/>
-              </a:effectRef>
-              <a:fontRef idx="minor">
-                <a:schemeClr val="dk1"/>
-              </a:fontRef>
-            </p:style>
-            <p:txBody>
-              <a:bodyPr wrap="square">
-                <a:spAutoFit/>
-              </a:bodyPr>
-              <a:lstStyle/>
-              <a:p>
-                <a:r>
-                  <a:rPr lang="en-US" sz="1200" b="1" dirty="0"/>
-                  <a:t>General</a:t>
-                </a:r>
-                <a:endParaRPr lang="en-US" sz="1200" dirty="0"/>
-              </a:p>
-              <a:p>
-                <a14:m>
-                  <m:oMath xmlns:m="http://schemas.openxmlformats.org/officeDocument/2006/math">
-                    <m:r>
-                      <a:rPr lang="en-US" sz="1200" i="1" dirty="0" smtClean="0">
-                        <a:latin typeface="Cambria Math" panose="02040503050406030204" pitchFamily="18" charset="0"/>
-                      </a:rPr>
-                      <m:t>𝑋</m:t>
-                    </m:r>
-                  </m:oMath>
-                </a14:m>
-                <a:r>
-                  <a:rPr lang="en-US" sz="1200" dirty="0"/>
-                  <a:t>	capital letters: random variables</a:t>
-                </a:r>
-                <a:br>
-                  <a:rPr lang="en-US" sz="1200" dirty="0"/>
-                </a:br>
-                <a14:m>
-                  <m:oMath xmlns:m="http://schemas.openxmlformats.org/officeDocument/2006/math">
-                    <m:r>
-                      <a:rPr lang="en-US" sz="1200" b="0" i="1" smtClean="0">
-                        <a:latin typeface="Cambria Math" panose="02040503050406030204" pitchFamily="18" charset="0"/>
-                      </a:rPr>
-                      <m:t>𝑥</m:t>
-                    </m:r>
-                    <m:r>
-                      <a:rPr lang="en-US" sz="1200" b="0" i="0" smtClean="0">
-                        <a:latin typeface="Cambria Math" panose="02040503050406030204" pitchFamily="18" charset="0"/>
-                      </a:rPr>
-                      <m:t>, </m:t>
-                    </m:r>
-                    <m:r>
-                      <a:rPr lang="en-US" sz="1200" b="0" i="1" smtClean="0">
-                        <a:latin typeface="Cambria Math" panose="02040503050406030204" pitchFamily="18" charset="0"/>
-                      </a:rPr>
-                      <m:t>𝑝</m:t>
-                    </m:r>
-                  </m:oMath>
-                </a14:m>
-                <a:r>
-                  <a:rPr lang="en-US" sz="1200" dirty="0"/>
-                  <a:t>	lower-case letters: realizations of random variables </a:t>
-                </a:r>
-                <a:br>
-                  <a:rPr lang="en-US" sz="1200" dirty="0"/>
-                </a:br>
-                <a:r>
-                  <a:rPr lang="en-US" sz="1200" dirty="0"/>
-                  <a:t>	or scalar functions</a:t>
-                </a:r>
-              </a:p>
-              <a:p>
-                <a14:m>
-                  <m:oMath xmlns:m="http://schemas.openxmlformats.org/officeDocument/2006/math">
-                    <m:r>
-                      <a:rPr lang="en-US" sz="1200" b="1" i="1" smtClean="0">
-                        <a:latin typeface="Cambria Math" panose="02040503050406030204" pitchFamily="18" charset="0"/>
-                      </a:rPr>
-                      <m:t>𝒘</m:t>
-                    </m:r>
-                  </m:oMath>
-                </a14:m>
-                <a:r>
-                  <a:rPr lang="en-US" sz="1200" dirty="0"/>
-                  <a:t> 	Bold lower-case letters: real-valued vectors </a:t>
-                </a:r>
-                <a:br>
-                  <a:rPr lang="en-US" sz="1200" dirty="0"/>
-                </a:br>
-                <a:r>
-                  <a:rPr lang="en-US" sz="1200" dirty="0"/>
-                  <a:t>	(even if random variables)</a:t>
-                </a:r>
-              </a:p>
-              <a:p>
-                <a14:m>
-                  <m:oMath xmlns:m="http://schemas.openxmlformats.org/officeDocument/2006/math">
-                    <m:r>
-                      <a:rPr lang="en-US" sz="1200" b="1" i="1" smtClean="0">
-                        <a:latin typeface="Cambria Math" panose="02040503050406030204" pitchFamily="18" charset="0"/>
-                      </a:rPr>
-                      <m:t>𝑾</m:t>
-                    </m:r>
-                  </m:oMath>
-                </a14:m>
-                <a:r>
-                  <a:rPr lang="en-US" sz="1200" dirty="0"/>
-                  <a:t>	bold capitals: matrices</a:t>
-                </a:r>
-              </a:p>
-              <a:p>
-                <a14:m>
-                  <m:oMath xmlns:m="http://schemas.openxmlformats.org/officeDocument/2006/math">
-                    <m:r>
-                      <a:rPr lang="en-US" sz="1200" b="0" i="1" smtClean="0">
-                        <a:latin typeface="Cambria Math" panose="02040503050406030204" pitchFamily="18" charset="0"/>
-                      </a:rPr>
-                      <m:t>𝛼</m:t>
-                    </m:r>
-                  </m:oMath>
-                </a14:m>
-                <a:r>
-                  <a:rPr lang="en-US" sz="1200" dirty="0"/>
-                  <a:t>	Greek letters: parameters (vectors if in bolt)</a:t>
-                </a:r>
-              </a:p>
-              <a:p>
-                <a14:m>
-                  <m:oMath xmlns:m="http://schemas.openxmlformats.org/officeDocument/2006/math">
-                    <m:r>
-                      <m:rPr>
-                        <m:sty m:val="p"/>
-                      </m:rPr>
-                      <a:rPr lang="en-US" sz="1200" i="1" dirty="0">
-                        <a:latin typeface="Cambria Math" panose="02040503050406030204" pitchFamily="18" charset="0"/>
-                      </a:rPr>
-                      <m:t>Pr</m:t>
-                    </m:r>
-                    <m:r>
-                      <a:rPr lang="en-US" sz="1200" i="1" dirty="0">
-                        <a:latin typeface="Cambria Math" panose="02040503050406030204" pitchFamily="18" charset="0"/>
-                      </a:rPr>
-                      <m:t>⁡{</m:t>
-                    </m:r>
-                    <m:r>
-                      <a:rPr lang="en-US" sz="1200" i="1" dirty="0">
-                        <a:latin typeface="Cambria Math" panose="02040503050406030204" pitchFamily="18" charset="0"/>
-                      </a:rPr>
-                      <m:t>𝑋</m:t>
-                    </m:r>
-                    <m:r>
-                      <a:rPr lang="en-US" sz="1200" i="1" dirty="0">
-                        <a:latin typeface="Cambria Math" panose="02040503050406030204" pitchFamily="18" charset="0"/>
-                      </a:rPr>
-                      <m:t>=</m:t>
-                    </m:r>
-                    <m:r>
-                      <a:rPr lang="en-US" sz="1200" i="1" dirty="0">
-                        <a:latin typeface="Cambria Math" panose="02040503050406030204" pitchFamily="18" charset="0"/>
-                      </a:rPr>
-                      <m:t>𝑥</m:t>
-                    </m:r>
-                    <m:r>
-                      <a:rPr lang="en-US" sz="1200" i="1" dirty="0">
-                        <a:latin typeface="Cambria Math" panose="02040503050406030204" pitchFamily="18" charset="0"/>
-                      </a:rPr>
-                      <m:t>}</m:t>
-                    </m:r>
-                  </m:oMath>
-                </a14:m>
-                <a:r>
-                  <a:rPr lang="en-US" sz="1200" dirty="0"/>
-                  <a:t>	probability that a random variable </a:t>
-                </a:r>
-                <a14:m>
-                  <m:oMath xmlns:m="http://schemas.openxmlformats.org/officeDocument/2006/math">
-                    <m:r>
-                      <a:rPr lang="en-US" sz="1200" i="1" dirty="0">
-                        <a:latin typeface="Cambria Math" panose="02040503050406030204" pitchFamily="18" charset="0"/>
-                      </a:rPr>
-                      <m:t>𝑋</m:t>
-                    </m:r>
-                  </m:oMath>
-                </a14:m>
-                <a:r>
-                  <a:rPr lang="en-US" sz="1200" dirty="0"/>
-                  <a:t> takes on the value </a:t>
-                </a:r>
-                <a14:m>
-                  <m:oMath xmlns:m="http://schemas.openxmlformats.org/officeDocument/2006/math">
-                    <m:r>
-                      <a:rPr lang="en-US" sz="1200" i="1" dirty="0">
-                        <a:latin typeface="Cambria Math" panose="02040503050406030204" pitchFamily="18" charset="0"/>
-                      </a:rPr>
-                      <m:t>𝑥</m:t>
-                    </m:r>
-                  </m:oMath>
-                </a14:m>
-                <a:endParaRPr lang="en-US" sz="1200" dirty="0"/>
-              </a:p>
-              <a:p>
-                <a14:m>
-                  <m:oMath xmlns:m="http://schemas.openxmlformats.org/officeDocument/2006/math">
-                    <m:r>
-                      <a:rPr lang="en-US" sz="1200" i="1" dirty="0">
-                        <a:latin typeface="Cambria Math" panose="02040503050406030204" pitchFamily="18" charset="0"/>
-                      </a:rPr>
-                      <m:t>𝑋</m:t>
-                    </m:r>
-                    <m:r>
-                      <a:rPr lang="en-US" sz="1200" i="1" dirty="0">
-                        <a:latin typeface="Cambria Math" panose="02040503050406030204" pitchFamily="18" charset="0"/>
-                      </a:rPr>
-                      <m:t>~</m:t>
-                    </m:r>
-                    <m:r>
-                      <a:rPr lang="en-US" sz="1200" i="1" dirty="0">
-                        <a:latin typeface="Cambria Math" panose="02040503050406030204" pitchFamily="18" charset="0"/>
-                      </a:rPr>
-                      <m:t>𝑝</m:t>
-                    </m:r>
-                  </m:oMath>
-                </a14:m>
-                <a:r>
-                  <a:rPr lang="en-US" sz="1200" dirty="0"/>
-                  <a:t>	random variable </a:t>
-                </a:r>
-                <a14:m>
-                  <m:oMath xmlns:m="http://schemas.openxmlformats.org/officeDocument/2006/math">
-                    <m:r>
-                      <a:rPr lang="en-US" sz="1200" i="1" dirty="0">
-                        <a:latin typeface="Cambria Math" panose="02040503050406030204" pitchFamily="18" charset="0"/>
-                      </a:rPr>
-                      <m:t>𝑋</m:t>
-                    </m:r>
-                  </m:oMath>
-                </a14:m>
-                <a:r>
-                  <a:rPr lang="en-US" sz="1200" dirty="0"/>
-                  <a:t> selected from distribution </a:t>
-                </a:r>
-                <a14:m>
-                  <m:oMath xmlns:m="http://schemas.openxmlformats.org/officeDocument/2006/math">
-                    <m:r>
-                      <a:rPr lang="en-US" sz="1200" i="1">
-                        <a:latin typeface="Cambria Math" panose="02040503050406030204" pitchFamily="18" charset="0"/>
-                      </a:rPr>
-                      <m:t>𝑝</m:t>
-                    </m:r>
-                    <m:d>
-                      <m:dPr>
-                        <m:ctrlPr>
-                          <a:rPr lang="en-US" sz="1200" i="1">
-                            <a:latin typeface="Cambria Math" panose="02040503050406030204" pitchFamily="18" charset="0"/>
-                          </a:rPr>
-                        </m:ctrlPr>
-                      </m:dPr>
-                      <m:e>
-                        <m:r>
-                          <a:rPr lang="en-US" sz="1200" i="1">
-                            <a:latin typeface="Cambria Math" panose="02040503050406030204" pitchFamily="18" charset="0"/>
-                          </a:rPr>
-                          <m:t>𝑥</m:t>
-                        </m:r>
-                      </m:e>
-                    </m:d>
-                    <m:r>
-                      <a:rPr lang="en-US" sz="1200" i="1">
-                        <a:latin typeface="Cambria Math" panose="02040503050406030204" pitchFamily="18" charset="0"/>
-                      </a:rPr>
-                      <m:t>=</m:t>
-                    </m:r>
-                    <m:r>
-                      <m:rPr>
-                        <m:sty m:val="p"/>
-                      </m:rPr>
-                      <a:rPr lang="en-US" sz="1200">
-                        <a:latin typeface="Cambria Math" panose="02040503050406030204" pitchFamily="18" charset="0"/>
-                      </a:rPr>
-                      <m:t>Pr</m:t>
-                    </m:r>
-                    <m:r>
-                      <a:rPr lang="en-US" sz="1200" i="1">
-                        <a:latin typeface="Cambria Math" panose="02040503050406030204" pitchFamily="18" charset="0"/>
-                      </a:rPr>
-                      <m:t>⁡{</m:t>
-                    </m:r>
-                    <m:r>
-                      <a:rPr lang="en-US" sz="1200" i="1">
-                        <a:latin typeface="Cambria Math" panose="02040503050406030204" pitchFamily="18" charset="0"/>
-                      </a:rPr>
-                      <m:t>𝑋</m:t>
-                    </m:r>
-                    <m:r>
-                      <a:rPr lang="en-US" sz="1200" i="1">
-                        <a:latin typeface="Cambria Math" panose="02040503050406030204" pitchFamily="18" charset="0"/>
-                      </a:rPr>
-                      <m:t>=</m:t>
-                    </m:r>
-                    <m:r>
-                      <a:rPr lang="en-US" sz="1200" i="1">
-                        <a:latin typeface="Cambria Math" panose="02040503050406030204" pitchFamily="18" charset="0"/>
-                      </a:rPr>
-                      <m:t>𝑥</m:t>
-                    </m:r>
-                    <m:r>
-                      <a:rPr lang="en-US" sz="1200" i="1">
-                        <a:latin typeface="Cambria Math" panose="02040503050406030204" pitchFamily="18" charset="0"/>
-                      </a:rPr>
-                      <m:t>}</m:t>
-                    </m:r>
-                  </m:oMath>
-                </a14:m>
-                <a:endParaRPr lang="en-US" sz="1200" dirty="0"/>
-              </a:p>
-              <a:p>
-                <a14:m>
-                  <m:oMath xmlns:m="http://schemas.openxmlformats.org/officeDocument/2006/math">
-                    <m:r>
-                      <a:rPr lang="en-US" sz="1200" i="1">
-                        <a:latin typeface="Cambria Math" panose="02040503050406030204" pitchFamily="18" charset="0"/>
-                        <a:ea typeface="Cambria Math" panose="02040503050406030204" pitchFamily="18" charset="0"/>
-                      </a:rPr>
-                      <m:t>𝔼</m:t>
-                    </m:r>
-                    <m:r>
-                      <a:rPr lang="en-US" sz="1200" i="1">
-                        <a:latin typeface="Cambria Math" panose="02040503050406030204" pitchFamily="18" charset="0"/>
-                        <a:ea typeface="Cambria Math" panose="02040503050406030204" pitchFamily="18" charset="0"/>
-                      </a:rPr>
-                      <m:t>[</m:t>
-                    </m:r>
-                    <m:r>
-                      <a:rPr lang="en-US" sz="1200" i="1">
-                        <a:latin typeface="Cambria Math" panose="02040503050406030204" pitchFamily="18" charset="0"/>
-                        <a:ea typeface="Cambria Math" panose="02040503050406030204" pitchFamily="18" charset="0"/>
-                      </a:rPr>
-                      <m:t>𝑋</m:t>
-                    </m:r>
-                    <m:r>
-                      <a:rPr lang="en-US" sz="1200" i="1">
-                        <a:latin typeface="Cambria Math" panose="02040503050406030204" pitchFamily="18" charset="0"/>
-                        <a:ea typeface="Cambria Math" panose="02040503050406030204" pitchFamily="18" charset="0"/>
-                      </a:rPr>
-                      <m:t>]</m:t>
-                    </m:r>
-                  </m:oMath>
-                </a14:m>
-                <a:r>
-                  <a:rPr lang="en-US" sz="1200" dirty="0"/>
-                  <a:t>	expectation of a random variable </a:t>
-                </a:r>
-                <a14:m>
-                  <m:oMath xmlns:m="http://schemas.openxmlformats.org/officeDocument/2006/math">
-                    <m:r>
-                      <a:rPr lang="en-US" sz="1200" i="1" dirty="0">
-                        <a:latin typeface="Cambria Math" panose="02040503050406030204" pitchFamily="18" charset="0"/>
-                      </a:rPr>
-                      <m:t>𝑋</m:t>
-                    </m:r>
-                  </m:oMath>
-                </a14:m>
-                <a:r>
-                  <a:rPr lang="en-US" sz="1200" dirty="0"/>
-                  <a:t>, i.e., </a:t>
-                </a:r>
-                <a14:m>
-                  <m:oMath xmlns:m="http://schemas.openxmlformats.org/officeDocument/2006/math">
-                    <m:r>
-                      <a:rPr lang="en-US" sz="1200" i="1">
-                        <a:latin typeface="Cambria Math" panose="02040503050406030204" pitchFamily="18" charset="0"/>
-                        <a:ea typeface="Cambria Math" panose="02040503050406030204" pitchFamily="18" charset="0"/>
-                      </a:rPr>
-                      <m:t>𝔼</m:t>
-                    </m:r>
-                    <m:d>
-                      <m:dPr>
-                        <m:begChr m:val="["/>
-                        <m:endChr m:val="]"/>
-                        <m:ctrlPr>
-                          <a:rPr lang="en-US" sz="1200" i="1">
-                            <a:latin typeface="Cambria Math" panose="02040503050406030204" pitchFamily="18" charset="0"/>
-                            <a:ea typeface="Cambria Math" panose="02040503050406030204" pitchFamily="18" charset="0"/>
-                          </a:rPr>
-                        </m:ctrlPr>
-                      </m:dPr>
-                      <m:e>
-                        <m:r>
-                          <a:rPr lang="en-US" sz="1200" i="1">
-                            <a:latin typeface="Cambria Math" panose="02040503050406030204" pitchFamily="18" charset="0"/>
-                            <a:ea typeface="Cambria Math" panose="02040503050406030204" pitchFamily="18" charset="0"/>
-                          </a:rPr>
-                          <m:t>𝑋</m:t>
-                        </m:r>
-                      </m:e>
-                    </m:d>
-                    <m:r>
-                      <a:rPr lang="en-US" sz="1200" i="1">
-                        <a:latin typeface="Cambria Math" panose="02040503050406030204" pitchFamily="18" charset="0"/>
-                        <a:ea typeface="Cambria Math" panose="02040503050406030204" pitchFamily="18" charset="0"/>
-                      </a:rPr>
-                      <m:t>=</m:t>
-                    </m:r>
-                    <m:nary>
-                      <m:naryPr>
-                        <m:chr m:val="∑"/>
-                        <m:supHide m:val="on"/>
-                        <m:ctrlPr>
-                          <a:rPr lang="en-US" sz="1200" i="1">
-                            <a:latin typeface="Cambria Math" panose="02040503050406030204" pitchFamily="18" charset="0"/>
-                            <a:ea typeface="Cambria Math" panose="02040503050406030204" pitchFamily="18" charset="0"/>
-                          </a:rPr>
-                        </m:ctrlPr>
-                      </m:naryPr>
-                      <m:sub>
-                        <m:r>
-                          <a:rPr lang="en-US" sz="1200" i="1">
-                            <a:latin typeface="Cambria Math" panose="02040503050406030204" pitchFamily="18" charset="0"/>
-                            <a:ea typeface="Cambria Math" panose="02040503050406030204" pitchFamily="18" charset="0"/>
-                          </a:rPr>
-                          <m:t>𝑥</m:t>
-                        </m:r>
-                      </m:sub>
-                      <m:sup/>
-                      <m:e>
-                        <m:r>
-                          <a:rPr lang="en-US" sz="1200" i="1">
-                            <a:latin typeface="Cambria Math" panose="02040503050406030204" pitchFamily="18" charset="0"/>
-                            <a:ea typeface="Cambria Math" panose="02040503050406030204" pitchFamily="18" charset="0"/>
-                          </a:rPr>
-                          <m:t>𝑝</m:t>
-                        </m:r>
-                        <m:d>
-                          <m:dPr>
-                            <m:ctrlPr>
-                              <a:rPr lang="en-US" sz="1200" i="1">
-                                <a:latin typeface="Cambria Math" panose="02040503050406030204" pitchFamily="18" charset="0"/>
-                                <a:ea typeface="Cambria Math" panose="02040503050406030204" pitchFamily="18" charset="0"/>
-                              </a:rPr>
-                            </m:ctrlPr>
-                          </m:dPr>
-                          <m:e>
-                            <m:r>
-                              <a:rPr lang="en-US" sz="1200" i="1">
-                                <a:latin typeface="Cambria Math" panose="02040503050406030204" pitchFamily="18" charset="0"/>
-                                <a:ea typeface="Cambria Math" panose="02040503050406030204" pitchFamily="18" charset="0"/>
-                              </a:rPr>
-                              <m:t>𝑥</m:t>
-                            </m:r>
-                          </m:e>
-                        </m:d>
-                        <m:r>
-                          <a:rPr lang="en-US" sz="1200" i="1">
-                            <a:latin typeface="Cambria Math" panose="02040503050406030204" pitchFamily="18" charset="0"/>
-                            <a:ea typeface="Cambria Math" panose="02040503050406030204" pitchFamily="18" charset="0"/>
-                          </a:rPr>
-                          <m:t>𝑥</m:t>
-                        </m:r>
-                      </m:e>
-                    </m:nary>
-                  </m:oMath>
-                </a14:m>
-                <a:endParaRPr lang="en-US" sz="1200" dirty="0">
-                  <a:ea typeface="Cambria Math" panose="02040503050406030204" pitchFamily="18" charset="0"/>
-                </a:endParaRPr>
-              </a:p>
-              <a:p>
-                <a14:m>
-                  <m:oMath xmlns:m="http://schemas.openxmlformats.org/officeDocument/2006/math">
-                    <m:sSub>
-                      <m:sSubPr>
-                        <m:ctrlPr>
-                          <a:rPr lang="en-US" sz="1200" i="1" dirty="0">
-                            <a:latin typeface="Cambria Math" panose="02040503050406030204" pitchFamily="18" charset="0"/>
-                          </a:rPr>
-                        </m:ctrlPr>
-                      </m:sSubPr>
-                      <m:e>
-                        <m:r>
-                          <m:rPr>
-                            <m:sty m:val="p"/>
-                          </m:rPr>
-                          <a:rPr lang="en-US" sz="1200" dirty="0">
-                            <a:latin typeface="Cambria Math" panose="02040503050406030204" pitchFamily="18" charset="0"/>
-                          </a:rPr>
-                          <m:t>argmax</m:t>
-                        </m:r>
-                      </m:e>
-                      <m:sub>
-                        <m:r>
-                          <m:rPr>
-                            <m:sty m:val="p"/>
-                          </m:rPr>
-                          <a:rPr lang="en-US" sz="1200" dirty="0">
-                            <a:latin typeface="Cambria Math" panose="02040503050406030204" pitchFamily="18" charset="0"/>
-                          </a:rPr>
-                          <m:t>a</m:t>
-                        </m:r>
-                      </m:sub>
-                    </m:sSub>
-                    <m:r>
-                      <a:rPr lang="en-US" sz="1200" dirty="0">
-                        <a:latin typeface="Cambria Math" panose="02040503050406030204" pitchFamily="18" charset="0"/>
-                      </a:rPr>
-                      <m:t> </m:t>
-                    </m:r>
-                    <m:r>
-                      <a:rPr lang="en-US" sz="1200" i="1" dirty="0">
-                        <a:latin typeface="Cambria Math" panose="02040503050406030204" pitchFamily="18" charset="0"/>
-                      </a:rPr>
-                      <m:t>𝑓</m:t>
-                    </m:r>
-                    <m:r>
-                      <a:rPr lang="en-US" sz="1200" i="1" dirty="0">
-                        <a:latin typeface="Cambria Math" panose="02040503050406030204" pitchFamily="18" charset="0"/>
-                      </a:rPr>
-                      <m:t>(</m:t>
-                    </m:r>
-                    <m:r>
-                      <a:rPr lang="en-US" sz="1200" i="1" dirty="0">
-                        <a:latin typeface="Cambria Math" panose="02040503050406030204" pitchFamily="18" charset="0"/>
-                      </a:rPr>
-                      <m:t>𝑎</m:t>
-                    </m:r>
-                    <m:r>
-                      <a:rPr lang="en-US" sz="1200" i="1" dirty="0">
-                        <a:latin typeface="Cambria Math" panose="02040503050406030204" pitchFamily="18" charset="0"/>
-                      </a:rPr>
-                      <m:t>)</m:t>
-                    </m:r>
-                  </m:oMath>
-                </a14:m>
-                <a:r>
-                  <a:rPr lang="en-US" sz="1200" dirty="0"/>
-                  <a:t> a value of action </a:t>
-                </a:r>
-                <a14:m>
-                  <m:oMath xmlns:m="http://schemas.openxmlformats.org/officeDocument/2006/math">
-                    <m:r>
-                      <a:rPr lang="en-US" sz="1200" i="1" dirty="0">
-                        <a:latin typeface="Cambria Math" panose="02040503050406030204" pitchFamily="18" charset="0"/>
-                      </a:rPr>
-                      <m:t>𝑎</m:t>
-                    </m:r>
-                  </m:oMath>
-                </a14:m>
-                <a:r>
-                  <a:rPr lang="en-US" sz="1200" dirty="0"/>
-                  <a:t> at which </a:t>
-                </a:r>
-                <a14:m>
-                  <m:oMath xmlns:m="http://schemas.openxmlformats.org/officeDocument/2006/math">
-                    <m:r>
-                      <a:rPr lang="en-US" sz="1200" i="1" dirty="0">
-                        <a:latin typeface="Cambria Math" panose="02040503050406030204" pitchFamily="18" charset="0"/>
-                      </a:rPr>
-                      <m:t>𝑓</m:t>
-                    </m:r>
-                    <m:r>
-                      <a:rPr lang="en-US" sz="1200" i="1" dirty="0">
-                        <a:latin typeface="Cambria Math" panose="02040503050406030204" pitchFamily="18" charset="0"/>
-                      </a:rPr>
-                      <m:t>(</m:t>
-                    </m:r>
-                    <m:r>
-                      <a:rPr lang="en-US" sz="1200" i="1" dirty="0">
-                        <a:latin typeface="Cambria Math" panose="02040503050406030204" pitchFamily="18" charset="0"/>
-                      </a:rPr>
-                      <m:t>𝑎</m:t>
-                    </m:r>
-                    <m:r>
-                      <a:rPr lang="en-US" sz="1200" i="1" dirty="0">
-                        <a:latin typeface="Cambria Math" panose="02040503050406030204" pitchFamily="18" charset="0"/>
-                      </a:rPr>
-                      <m:t>)</m:t>
-                    </m:r>
-                  </m:oMath>
-                </a14:m>
-                <a:r>
-                  <a:rPr lang="en-US" sz="1200" dirty="0"/>
-                  <a:t> takes its maximal value</a:t>
-                </a:r>
-              </a:p>
-            </p:txBody>
-          </p:sp>
-        </mc:Choice>
-        <mc:Fallback xmlns="">
-          <p:sp>
-            <p:nvSpPr>
-              <p:cNvPr id="10" name="TextBox 9">
-                <a:extLst>
-                  <a:ext uri="{FF2B5EF4-FFF2-40B4-BE49-F238E27FC236}">
-                    <a16:creationId xmlns:a16="http://schemas.microsoft.com/office/drawing/2014/main" id="{5CD475E5-BE3B-5594-57DC-46A17411F2F9}"/>
-                  </a:ext>
-                </a:extLst>
-              </p:cNvPr>
-              <p:cNvSpPr txBox="1">
-                <a:spLocks noRot="1" noChangeAspect="1" noMove="1" noResize="1" noEditPoints="1" noAdjustHandles="1" noChangeArrowheads="1" noChangeShapeType="1" noTextEdit="1"/>
-              </p:cNvSpPr>
-              <p:nvPr/>
-            </p:nvSpPr>
-            <p:spPr>
-              <a:xfrm>
-                <a:off x="822820" y="1124198"/>
-                <a:ext cx="5273179" cy="2308324"/>
-              </a:xfrm>
-              <a:prstGeom prst="rect">
-                <a:avLst/>
-              </a:prstGeom>
-              <a:blipFill>
-                <a:blip r:embed="rId3"/>
-                <a:stretch>
-                  <a:fillRect b="-9424"/>
-                </a:stretch>
-              </a:blipFill>
-            </p:spPr>
-            <p:txBody>
-              <a:bodyPr/>
-              <a:lstStyle/>
-              <a:p>
-                <a:r>
-                  <a:rPr lang="en-US">
-                    <a:noFill/>
-                  </a:rPr>
-                  <a:t> </a:t>
-                </a:r>
-              </a:p>
-            </p:txBody>
-          </p:sp>
-        </mc:Fallback>
-      </mc:AlternateContent>
-      <mc:AlternateContent xmlns:mc="http://schemas.openxmlformats.org/markup-compatibility/2006" xmlns:a14="http://schemas.microsoft.com/office/drawing/2010/main">
-        <mc:Choice Requires="a14">
-          <p:sp>
-            <p:nvSpPr>
-              <p:cNvPr id="11" name="Content Placeholder 2">
-                <a:extLst>
-                  <a:ext uri="{FF2B5EF4-FFF2-40B4-BE49-F238E27FC236}">
-                    <a16:creationId xmlns:a16="http://schemas.microsoft.com/office/drawing/2014/main" id="{6F45EA4F-65F9-5141-0B09-C395CF9CA7A0}"/>
-                  </a:ext>
-                </a:extLst>
-              </p:cNvPr>
-              <p:cNvSpPr txBox="1">
-                <a:spLocks/>
-              </p:cNvSpPr>
-              <p:nvPr/>
-            </p:nvSpPr>
-            <p:spPr>
-              <a:xfrm>
-                <a:off x="6267338" y="1124198"/>
-                <a:ext cx="5273179" cy="3693383"/>
-              </a:xfrm>
-              <a:prstGeom prst="rect">
-                <a:avLst/>
-              </a:prstGeom>
-            </p:spPr>
-            <p:style>
-              <a:lnRef idx="2">
-                <a:schemeClr val="accent2"/>
-              </a:lnRef>
-              <a:fillRef idx="1">
-                <a:schemeClr val="lt1"/>
-              </a:fillRef>
-              <a:effectRef idx="0">
-                <a:schemeClr val="accent2"/>
-              </a:effectRef>
-              <a:fontRef idx="minor">
-                <a:schemeClr val="dk1"/>
-              </a:fontRef>
-            </p:style>
-            <p:txBody>
-              <a:bodyPr vert="horz" wrap="square" lIns="91440" tIns="45720" rIns="91440" bIns="45720" rtlCol="0">
-                <a:spAutoFit/>
-              </a:bodyPr>
-              <a:lstStyle>
-                <a:lvl1pPr marL="228600" indent="-228600" algn="l" defTabSz="914400" rtl="0" eaLnBrk="1" latinLnBrk="0" hangingPunct="1">
-                  <a:lnSpc>
-                    <a:spcPct val="90000"/>
-                  </a:lnSpc>
-                  <a:spcBef>
-                    <a:spcPts val="1000"/>
-                  </a:spcBef>
-                  <a:buFont typeface="Arial" panose="020B0604020202020204" pitchFamily="34" charset="0"/>
-                  <a:buChar char="•"/>
-                  <a:defRPr sz="2800" kern="1200">
-                    <a:solidFill>
-                      <a:schemeClr val="tx1"/>
-                    </a:solidFill>
-                    <a:latin typeface="+mn-lt"/>
-                    <a:ea typeface="+mn-ea"/>
-                    <a:cs typeface="+mn-cs"/>
-                  </a:defRPr>
-                </a:lvl1pPr>
-                <a:lvl2pPr marL="685800" indent="-228600" algn="l" defTabSz="914400" rtl="0" eaLnBrk="1" latinLnBrk="0" hangingPunct="1">
-                  <a:lnSpc>
-                    <a:spcPct val="90000"/>
-                  </a:lnSpc>
-                  <a:spcBef>
-                    <a:spcPts val="500"/>
-                  </a:spcBef>
-                  <a:buFont typeface="Arial" panose="020B0604020202020204" pitchFamily="34" charset="0"/>
-                  <a:buChar char="•"/>
-                  <a:defRPr sz="2400" kern="1200">
-                    <a:solidFill>
-                      <a:schemeClr val="tx1"/>
-                    </a:solidFill>
-                    <a:latin typeface="+mn-lt"/>
-                    <a:ea typeface="+mn-ea"/>
-                    <a:cs typeface="+mn-cs"/>
-                  </a:defRPr>
-                </a:lvl2pPr>
-                <a:lvl3pPr marL="1143000" indent="-228600" algn="l" defTabSz="914400" rtl="0" eaLnBrk="1" latinLnBrk="0" hangingPunct="1">
-                  <a:lnSpc>
-                    <a:spcPct val="90000"/>
-                  </a:lnSpc>
-                  <a:spcBef>
-                    <a:spcPts val="500"/>
-                  </a:spcBef>
-                  <a:buFont typeface="Arial" panose="020B0604020202020204" pitchFamily="34" charset="0"/>
-                  <a:buChar char="•"/>
-                  <a:defRPr sz="2000" kern="1200">
-                    <a:solidFill>
-                      <a:schemeClr val="tx1"/>
-                    </a:solidFill>
-                    <a:latin typeface="+mn-lt"/>
-                    <a:ea typeface="+mn-ea"/>
-                    <a:cs typeface="+mn-cs"/>
-                  </a:defRPr>
-                </a:lvl3pPr>
-                <a:lvl4pPr marL="1600200" indent="-228600" algn="l" defTabSz="914400" rtl="0" eaLnBrk="1" latinLnBrk="0" hangingPunct="1">
-                  <a:lnSpc>
-                    <a:spcPct val="90000"/>
-                  </a:lnSpc>
-                  <a:spcBef>
-                    <a:spcPts val="500"/>
-                  </a:spcBef>
-                  <a:buFont typeface="Arial" panose="020B0604020202020204" pitchFamily="34" charset="0"/>
-                  <a:buChar char="•"/>
-                  <a:defRPr sz="1800" kern="1200">
-                    <a:solidFill>
-                      <a:schemeClr val="tx1"/>
-                    </a:solidFill>
-                    <a:latin typeface="+mn-lt"/>
-                    <a:ea typeface="+mn-ea"/>
-                    <a:cs typeface="+mn-cs"/>
-                  </a:defRPr>
-                </a:lvl4pPr>
-                <a:lvl5pPr marL="2057400" indent="-228600" algn="l" defTabSz="914400" rtl="0" eaLnBrk="1" latinLnBrk="0" hangingPunct="1">
-                  <a:lnSpc>
-                    <a:spcPct val="90000"/>
-                  </a:lnSpc>
-                  <a:spcBef>
-                    <a:spcPts val="500"/>
-                  </a:spcBef>
-                  <a:buFont typeface="Arial" panose="020B0604020202020204" pitchFamily="34" charset="0"/>
-                  <a:buChar char="•"/>
-                  <a:defRPr sz="1800" kern="1200">
-                    <a:solidFill>
-                      <a:schemeClr val="tx1"/>
-                    </a:solidFill>
-                    <a:latin typeface="+mn-lt"/>
-                    <a:ea typeface="+mn-ea"/>
-                    <a:cs typeface="+mn-cs"/>
-                  </a:defRPr>
-                </a:lvl5pPr>
-                <a:lvl6pPr marL="2514600" indent="-228600" algn="l" defTabSz="914400" rtl="0" eaLnBrk="1" latinLnBrk="0" hangingPunct="1">
-                  <a:lnSpc>
-                    <a:spcPct val="90000"/>
-                  </a:lnSpc>
-                  <a:spcBef>
-                    <a:spcPts val="500"/>
-                  </a:spcBef>
-                  <a:buFont typeface="Arial" panose="020B0604020202020204" pitchFamily="34" charset="0"/>
-                  <a:buChar char="•"/>
-                  <a:defRPr sz="1800" kern="1200">
-                    <a:solidFill>
-                      <a:schemeClr val="tx1"/>
-                    </a:solidFill>
-                    <a:latin typeface="+mn-lt"/>
-                    <a:ea typeface="+mn-ea"/>
-                    <a:cs typeface="+mn-cs"/>
-                  </a:defRPr>
-                </a:lvl6pPr>
-                <a:lvl7pPr marL="2971800" indent="-228600" algn="l" defTabSz="914400" rtl="0" eaLnBrk="1" latinLnBrk="0" hangingPunct="1">
-                  <a:lnSpc>
-                    <a:spcPct val="90000"/>
-                  </a:lnSpc>
-                  <a:spcBef>
-                    <a:spcPts val="500"/>
-                  </a:spcBef>
-                  <a:buFont typeface="Arial" panose="020B0604020202020204" pitchFamily="34" charset="0"/>
-                  <a:buChar char="•"/>
-                  <a:defRPr sz="1800" kern="1200">
-                    <a:solidFill>
-                      <a:schemeClr val="tx1"/>
-                    </a:solidFill>
-                    <a:latin typeface="+mn-lt"/>
-                    <a:ea typeface="+mn-ea"/>
-                    <a:cs typeface="+mn-cs"/>
-                  </a:defRPr>
-                </a:lvl7pPr>
-                <a:lvl8pPr marL="3429000" indent="-228600" algn="l" defTabSz="914400" rtl="0" eaLnBrk="1" latinLnBrk="0" hangingPunct="1">
-                  <a:lnSpc>
-                    <a:spcPct val="90000"/>
-                  </a:lnSpc>
-                  <a:spcBef>
-                    <a:spcPts val="500"/>
-                  </a:spcBef>
-                  <a:buFont typeface="Arial" panose="020B0604020202020204" pitchFamily="34" charset="0"/>
-                  <a:buChar char="•"/>
-                  <a:defRPr sz="1800" kern="1200">
-                    <a:solidFill>
-                      <a:schemeClr val="tx1"/>
-                    </a:solidFill>
-                    <a:latin typeface="+mn-lt"/>
-                    <a:ea typeface="+mn-ea"/>
-                    <a:cs typeface="+mn-cs"/>
-                  </a:defRPr>
-                </a:lvl8pPr>
-                <a:lvl9pPr marL="3886200" indent="-228600" algn="l" defTabSz="914400" rtl="0" eaLnBrk="1" latinLnBrk="0" hangingPunct="1">
-                  <a:lnSpc>
-                    <a:spcPct val="90000"/>
-                  </a:lnSpc>
-                  <a:spcBef>
-                    <a:spcPts val="500"/>
-                  </a:spcBef>
-                  <a:buFont typeface="Arial" panose="020B0604020202020204" pitchFamily="34" charset="0"/>
-                  <a:buChar char="•"/>
-                  <a:defRPr sz="1800" kern="1200">
-                    <a:solidFill>
-                      <a:schemeClr val="tx1"/>
-                    </a:solidFill>
-                    <a:latin typeface="+mn-lt"/>
-                    <a:ea typeface="+mn-ea"/>
-                    <a:cs typeface="+mn-cs"/>
-                  </a:defRPr>
-                </a:lvl9pPr>
-              </a:lstStyle>
-              <a:p>
-                <a:pPr marL="0" indent="0">
-                  <a:spcBef>
-                    <a:spcPts val="0"/>
-                  </a:spcBef>
-                  <a:buNone/>
-                </a:pPr>
-                <a:r>
-                  <a:rPr lang="en-US" sz="1200" b="1" dirty="0"/>
-                  <a:t>MDP</a:t>
-                </a:r>
-              </a:p>
-              <a:p>
-                <a:pPr marL="0" indent="0">
-                  <a:spcBef>
-                    <a:spcPts val="0"/>
-                  </a:spcBef>
-                  <a:buNone/>
-                </a:pPr>
-                <a14:m>
-                  <m:oMath xmlns:m="http://schemas.openxmlformats.org/officeDocument/2006/math">
-                    <m:r>
-                      <a:rPr lang="en-US" sz="1200" i="1" dirty="0" smtClean="0">
-                        <a:latin typeface="Cambria Math" panose="02040503050406030204" pitchFamily="18" charset="0"/>
-                      </a:rPr>
-                      <m:t>𝑠</m:t>
-                    </m:r>
-                    <m:r>
-                      <a:rPr lang="en-US" sz="1200" i="1" dirty="0" smtClean="0">
-                        <a:latin typeface="Cambria Math" panose="02040503050406030204" pitchFamily="18" charset="0"/>
-                      </a:rPr>
-                      <m:t>, </m:t>
-                    </m:r>
-                    <m:r>
-                      <a:rPr lang="en-US" sz="1200" i="1" dirty="0" smtClean="0">
-                        <a:latin typeface="Cambria Math" panose="02040503050406030204" pitchFamily="18" charset="0"/>
-                      </a:rPr>
-                      <m:t>𝑠</m:t>
-                    </m:r>
-                    <m:r>
-                      <a:rPr lang="en-US" sz="1200" b="0" i="1" dirty="0" smtClean="0">
-                        <a:latin typeface="Cambria Math" panose="02040503050406030204" pitchFamily="18" charset="0"/>
-                      </a:rPr>
-                      <m:t>′</m:t>
-                    </m:r>
-                  </m:oMath>
-                </a14:m>
-                <a:r>
-                  <a:rPr lang="en-US" sz="1200" dirty="0"/>
-                  <a:t> 	states</a:t>
-                </a:r>
-              </a:p>
-              <a:p>
-                <a:pPr marL="0" indent="0">
-                  <a:spcBef>
-                    <a:spcPts val="0"/>
-                  </a:spcBef>
-                  <a:buNone/>
-                </a:pPr>
-                <a14:m>
-                  <m:oMath xmlns:m="http://schemas.openxmlformats.org/officeDocument/2006/math">
-                    <m:r>
-                      <a:rPr lang="en-US" sz="1200" i="1" dirty="0" smtClean="0">
-                        <a:latin typeface="Cambria Math" panose="02040503050406030204" pitchFamily="18" charset="0"/>
-                      </a:rPr>
-                      <m:t>𝑎</m:t>
-                    </m:r>
-                  </m:oMath>
-                </a14:m>
-                <a:r>
-                  <a:rPr lang="en-US" sz="1200" dirty="0"/>
-                  <a:t> 	an action</a:t>
-                </a:r>
-              </a:p>
-              <a:p>
-                <a:pPr marL="0" indent="0">
-                  <a:spcBef>
-                    <a:spcPts val="0"/>
-                  </a:spcBef>
-                  <a:buNone/>
-                </a:pPr>
-                <a14:m>
-                  <m:oMath xmlns:m="http://schemas.openxmlformats.org/officeDocument/2006/math">
-                    <m:r>
-                      <a:rPr lang="en-US" sz="1200" i="1" dirty="0" smtClean="0">
-                        <a:latin typeface="Cambria Math" panose="02040503050406030204" pitchFamily="18" charset="0"/>
-                      </a:rPr>
-                      <m:t>𝑟</m:t>
-                    </m:r>
-                  </m:oMath>
-                </a14:m>
-                <a:r>
-                  <a:rPr lang="en-US" sz="1200" dirty="0"/>
-                  <a:t> 	a reward</a:t>
-                </a:r>
-              </a:p>
-              <a:p>
-                <a:pPr marL="0" indent="0">
-                  <a:spcBef>
-                    <a:spcPts val="0"/>
-                  </a:spcBef>
-                  <a:buNone/>
-                </a:pPr>
-                <a14:m>
-                  <m:oMath xmlns:m="http://schemas.openxmlformats.org/officeDocument/2006/math">
-                    <m:r>
-                      <a:rPr lang="en-US" sz="1200" i="1" dirty="0" smtClean="0">
-                        <a:latin typeface="Cambria Math" panose="02040503050406030204" pitchFamily="18" charset="0"/>
-                        <a:ea typeface="Cambria Math" panose="02040503050406030204" pitchFamily="18" charset="0"/>
-                      </a:rPr>
-                      <m:t>𝒮</m:t>
-                    </m:r>
-                  </m:oMath>
-                </a14:m>
-                <a:r>
-                  <a:rPr lang="en-US" sz="1200" dirty="0"/>
-                  <a:t> 	set of all (nonterminal) states, </a:t>
-                </a:r>
-                <a14:m>
-                  <m:oMath xmlns:m="http://schemas.openxmlformats.org/officeDocument/2006/math">
-                    <m:sSup>
-                      <m:sSupPr>
-                        <m:ctrlPr>
-                          <a:rPr lang="en-US" sz="1200" b="0" i="1" dirty="0" smtClean="0">
-                            <a:latin typeface="Cambria Math" panose="02040503050406030204" pitchFamily="18" charset="0"/>
-                            <a:ea typeface="Cambria Math" panose="02040503050406030204" pitchFamily="18" charset="0"/>
-                          </a:rPr>
-                        </m:ctrlPr>
-                      </m:sSupPr>
-                      <m:e>
-                        <m:r>
-                          <a:rPr lang="en-US" sz="1200" i="1" dirty="0">
-                            <a:latin typeface="Cambria Math" panose="02040503050406030204" pitchFamily="18" charset="0"/>
-                            <a:ea typeface="Cambria Math" panose="02040503050406030204" pitchFamily="18" charset="0"/>
-                          </a:rPr>
-                          <m:t>𝒮</m:t>
-                        </m:r>
-                      </m:e>
-                      <m:sup>
-                        <m:r>
-                          <a:rPr lang="en-US" sz="1200" b="0" i="1" dirty="0" smtClean="0">
-                            <a:latin typeface="Cambria Math" panose="02040503050406030204" pitchFamily="18" charset="0"/>
-                            <a:ea typeface="Cambria Math" panose="02040503050406030204" pitchFamily="18" charset="0"/>
-                          </a:rPr>
-                          <m:t>+</m:t>
-                        </m:r>
-                      </m:sup>
-                    </m:sSup>
-                  </m:oMath>
-                </a14:m>
-                <a:r>
-                  <a:rPr lang="en-US" sz="1200" dirty="0"/>
-                  <a:t> are all states </a:t>
-                </a:r>
-              </a:p>
-              <a:p>
-                <a:pPr marL="0" indent="0">
-                  <a:spcBef>
-                    <a:spcPts val="0"/>
-                  </a:spcBef>
-                  <a:buNone/>
-                </a:pPr>
-                <a14:m>
-                  <m:oMath xmlns:m="http://schemas.openxmlformats.org/officeDocument/2006/math">
-                    <m:r>
-                      <a:rPr lang="en-US" sz="1200" i="1" dirty="0" smtClean="0">
-                        <a:latin typeface="Cambria Math" panose="02040503050406030204" pitchFamily="18" charset="0"/>
-                        <a:ea typeface="Cambria Math" panose="02040503050406030204" pitchFamily="18" charset="0"/>
-                      </a:rPr>
-                      <m:t>𝒜</m:t>
-                    </m:r>
-                    <m:r>
-                      <a:rPr lang="en-US" sz="1200" i="1" dirty="0">
-                        <a:latin typeface="Cambria Math" panose="02040503050406030204" pitchFamily="18" charset="0"/>
-                      </a:rPr>
-                      <m:t>(</m:t>
-                    </m:r>
-                    <m:r>
-                      <a:rPr lang="en-US" sz="1200" i="1" dirty="0">
-                        <a:latin typeface="Cambria Math" panose="02040503050406030204" pitchFamily="18" charset="0"/>
-                      </a:rPr>
-                      <m:t>𝑠</m:t>
-                    </m:r>
-                    <m:r>
-                      <a:rPr lang="en-US" sz="1200" i="1" dirty="0">
-                        <a:latin typeface="Cambria Math" panose="02040503050406030204" pitchFamily="18" charset="0"/>
-                      </a:rPr>
-                      <m:t>)</m:t>
-                    </m:r>
-                  </m:oMath>
-                </a14:m>
-                <a:r>
-                  <a:rPr lang="en-US" sz="1200" dirty="0"/>
-                  <a:t>	set of all actions available in state </a:t>
-                </a:r>
-                <a14:m>
-                  <m:oMath xmlns:m="http://schemas.openxmlformats.org/officeDocument/2006/math">
-                    <m:r>
-                      <a:rPr lang="en-US" sz="1200" i="1" dirty="0" smtClean="0">
-                        <a:latin typeface="Cambria Math" panose="02040503050406030204" pitchFamily="18" charset="0"/>
-                      </a:rPr>
-                      <m:t>𝑠</m:t>
-                    </m:r>
-                  </m:oMath>
-                </a14:m>
-                <a:endParaRPr lang="en-US" sz="1200" dirty="0"/>
-              </a:p>
-              <a:p>
-                <a:pPr marL="0" indent="0">
-                  <a:spcBef>
-                    <a:spcPts val="0"/>
-                  </a:spcBef>
-                  <a:buNone/>
-                </a:pPr>
-                <a14:m>
-                  <m:oMath xmlns:m="http://schemas.openxmlformats.org/officeDocument/2006/math">
-                    <m:r>
-                      <a:rPr lang="en-US" sz="1200" i="1">
-                        <a:latin typeface="Cambria Math" panose="02040503050406030204" pitchFamily="18" charset="0"/>
-                      </a:rPr>
-                      <m:t>𝛾</m:t>
-                    </m:r>
-                  </m:oMath>
-                </a14:m>
-                <a:r>
-                  <a:rPr lang="en-US" sz="1200" dirty="0"/>
-                  <a:t> 	discount-rate parameter</a:t>
-                </a:r>
-                <a:endParaRPr lang="en-US" sz="1200" i="1" dirty="0">
-                  <a:latin typeface="Cambria Math" panose="02040503050406030204" pitchFamily="18" charset="0"/>
-                </a:endParaRPr>
-              </a:p>
-              <a:p>
-                <a:pPr marL="0" indent="0">
-                  <a:spcBef>
-                    <a:spcPts val="0"/>
-                  </a:spcBef>
-                  <a:buNone/>
-                </a:pPr>
-                <a14:m>
-                  <m:oMath xmlns:m="http://schemas.openxmlformats.org/officeDocument/2006/math">
-                    <m:r>
-                      <a:rPr lang="en-US" sz="1200" i="1" dirty="0" smtClean="0">
-                        <a:latin typeface="Cambria Math" panose="02040503050406030204" pitchFamily="18" charset="0"/>
-                      </a:rPr>
-                      <m:t>𝑡</m:t>
-                    </m:r>
-                  </m:oMath>
-                </a14:m>
-                <a:r>
-                  <a:rPr lang="en-US" sz="1200" dirty="0"/>
-                  <a:t> 	discrete time step</a:t>
-                </a:r>
-              </a:p>
-              <a:p>
-                <a:pPr marL="0" indent="0">
-                  <a:spcBef>
-                    <a:spcPts val="0"/>
-                  </a:spcBef>
-                  <a:buNone/>
-                </a:pPr>
-                <a14:m>
-                  <m:oMath xmlns:m="http://schemas.openxmlformats.org/officeDocument/2006/math">
-                    <m:r>
-                      <a:rPr lang="en-US" sz="1200" i="1" dirty="0" smtClean="0">
-                        <a:latin typeface="Cambria Math" panose="02040503050406030204" pitchFamily="18" charset="0"/>
-                      </a:rPr>
-                      <m:t>𝑇</m:t>
-                    </m:r>
-                  </m:oMath>
-                </a14:m>
-                <a:r>
-                  <a:rPr lang="en-US" sz="1200" dirty="0"/>
-                  <a:t> 	final time step of an episode (a.k.a. horizon)</a:t>
-                </a:r>
-              </a:p>
-              <a:p>
-                <a:pPr marL="0" indent="0">
-                  <a:spcBef>
-                    <a:spcPts val="0"/>
-                  </a:spcBef>
-                  <a:buNone/>
-                </a:pPr>
-                <a14:m>
-                  <m:oMath xmlns:m="http://schemas.openxmlformats.org/officeDocument/2006/math">
-                    <m:sSub>
-                      <m:sSubPr>
-                        <m:ctrlPr>
-                          <a:rPr lang="en-US" sz="1200" b="0" i="1" dirty="0" smtClean="0">
-                            <a:latin typeface="Cambria Math" panose="02040503050406030204" pitchFamily="18" charset="0"/>
-                          </a:rPr>
-                        </m:ctrlPr>
-                      </m:sSubPr>
-                      <m:e>
-                        <m:r>
-                          <a:rPr lang="en-US" sz="1200" i="1" dirty="0" smtClean="0">
-                            <a:latin typeface="Cambria Math" panose="02040503050406030204" pitchFamily="18" charset="0"/>
-                          </a:rPr>
-                          <m:t>𝐴</m:t>
-                        </m:r>
-                      </m:e>
-                      <m:sub>
-                        <m:r>
-                          <a:rPr lang="en-US" sz="1200" b="0" i="1" dirty="0" smtClean="0">
-                            <a:latin typeface="Cambria Math" panose="02040503050406030204" pitchFamily="18" charset="0"/>
-                          </a:rPr>
-                          <m:t>𝑡</m:t>
-                        </m:r>
-                      </m:sub>
-                    </m:sSub>
-                  </m:oMath>
-                </a14:m>
-                <a:r>
-                  <a:rPr lang="en-US" sz="1200" dirty="0"/>
-                  <a:t> 	random variable for the action at time </a:t>
-                </a:r>
-                <a14:m>
-                  <m:oMath xmlns:m="http://schemas.openxmlformats.org/officeDocument/2006/math">
-                    <m:r>
-                      <a:rPr lang="en-US" sz="1200" i="1" dirty="0" smtClean="0">
-                        <a:latin typeface="Cambria Math" panose="02040503050406030204" pitchFamily="18" charset="0"/>
-                      </a:rPr>
-                      <m:t>𝑡</m:t>
-                    </m:r>
-                  </m:oMath>
-                </a14:m>
-                <a:endParaRPr lang="en-US" sz="1200" dirty="0"/>
-              </a:p>
-              <a:p>
-                <a:pPr marL="0" indent="0">
-                  <a:spcBef>
-                    <a:spcPts val="0"/>
-                  </a:spcBef>
-                  <a:buNone/>
-                </a:pPr>
-                <a14:m>
-                  <m:oMath xmlns:m="http://schemas.openxmlformats.org/officeDocument/2006/math">
-                    <m:sSub>
-                      <m:sSubPr>
-                        <m:ctrlPr>
-                          <a:rPr lang="en-US" sz="1200" b="0" i="1" dirty="0" smtClean="0">
-                            <a:latin typeface="Cambria Math" panose="02040503050406030204" pitchFamily="18" charset="0"/>
-                          </a:rPr>
-                        </m:ctrlPr>
-                      </m:sSubPr>
-                      <m:e>
-                        <m:r>
-                          <a:rPr lang="en-US" sz="1200" i="1" dirty="0" smtClean="0">
-                            <a:latin typeface="Cambria Math" panose="02040503050406030204" pitchFamily="18" charset="0"/>
-                          </a:rPr>
-                          <m:t>𝑆</m:t>
-                        </m:r>
-                      </m:e>
-                      <m:sub>
-                        <m:r>
-                          <a:rPr lang="en-US" sz="1200" b="0" i="1" dirty="0" smtClean="0">
-                            <a:latin typeface="Cambria Math" panose="02040503050406030204" pitchFamily="18" charset="0"/>
-                          </a:rPr>
-                          <m:t>𝑡</m:t>
-                        </m:r>
-                      </m:sub>
-                    </m:sSub>
-                  </m:oMath>
-                </a14:m>
-                <a:r>
-                  <a:rPr lang="en-US" sz="1200" dirty="0"/>
-                  <a:t>	random variable for the state at time </a:t>
-                </a:r>
-                <a14:m>
-                  <m:oMath xmlns:m="http://schemas.openxmlformats.org/officeDocument/2006/math">
-                    <m:r>
-                      <a:rPr lang="en-US" sz="1200" i="1" dirty="0" smtClean="0">
-                        <a:latin typeface="Cambria Math" panose="02040503050406030204" pitchFamily="18" charset="0"/>
-                      </a:rPr>
-                      <m:t>𝑡</m:t>
-                    </m:r>
-                  </m:oMath>
-                </a14:m>
-                <a:endParaRPr lang="en-US" sz="1200" dirty="0"/>
-              </a:p>
-              <a:p>
-                <a:pPr marL="0" indent="0">
-                  <a:spcBef>
-                    <a:spcPts val="0"/>
-                  </a:spcBef>
-                  <a:buNone/>
-                </a:pPr>
-                <a14:m>
-                  <m:oMath xmlns:m="http://schemas.openxmlformats.org/officeDocument/2006/math">
-                    <m:sSub>
-                      <m:sSubPr>
-                        <m:ctrlPr>
-                          <a:rPr lang="en-US" sz="1200" b="0" i="1" dirty="0" smtClean="0">
-                            <a:latin typeface="Cambria Math" panose="02040503050406030204" pitchFamily="18" charset="0"/>
-                          </a:rPr>
-                        </m:ctrlPr>
-                      </m:sSubPr>
-                      <m:e>
-                        <m:r>
-                          <a:rPr lang="en-US" sz="1200" i="1" dirty="0" smtClean="0">
-                            <a:latin typeface="Cambria Math" panose="02040503050406030204" pitchFamily="18" charset="0"/>
-                          </a:rPr>
-                          <m:t>𝑅</m:t>
-                        </m:r>
-                      </m:e>
-                      <m:sub>
-                        <m:r>
-                          <a:rPr lang="en-US" sz="1200" b="0" i="1" dirty="0" smtClean="0">
-                            <a:latin typeface="Cambria Math" panose="02040503050406030204" pitchFamily="18" charset="0"/>
-                          </a:rPr>
-                          <m:t>𝑡</m:t>
-                        </m:r>
-                      </m:sub>
-                    </m:sSub>
-                  </m:oMath>
-                </a14:m>
-                <a:r>
-                  <a:rPr lang="en-US" sz="1200" dirty="0"/>
-                  <a:t> 	random variable for the reward at time </a:t>
-                </a:r>
-                <a14:m>
-                  <m:oMath xmlns:m="http://schemas.openxmlformats.org/officeDocument/2006/math">
-                    <m:r>
-                      <a:rPr lang="en-US" sz="1200" i="1" dirty="0" smtClean="0">
-                        <a:latin typeface="Cambria Math" panose="02040503050406030204" pitchFamily="18" charset="0"/>
-                      </a:rPr>
-                      <m:t>𝑡</m:t>
-                    </m:r>
-                  </m:oMath>
-                </a14:m>
-                <a:endParaRPr lang="en-US" sz="1200" dirty="0"/>
-              </a:p>
-              <a:p>
-                <a:pPr marL="0" indent="0">
-                  <a:lnSpc>
-                    <a:spcPct val="100000"/>
-                  </a:lnSpc>
-                  <a:spcBef>
-                    <a:spcPts val="0"/>
-                  </a:spcBef>
-                  <a:buNone/>
-                </a:pPr>
-                <a:endParaRPr lang="en-US" sz="1200" i="1" dirty="0">
-                  <a:latin typeface="Cambria Math" panose="02040503050406030204" pitchFamily="18" charset="0"/>
-                </a:endParaRPr>
-              </a:p>
-              <a:p>
-                <a:pPr marL="0" indent="0">
-                  <a:lnSpc>
-                    <a:spcPct val="100000"/>
-                  </a:lnSpc>
-                  <a:spcBef>
-                    <a:spcPts val="0"/>
-                  </a:spcBef>
-                  <a:buNone/>
-                </a:pPr>
-                <a14:m>
-                  <m:oMath xmlns:m="http://schemas.openxmlformats.org/officeDocument/2006/math">
-                    <m:r>
-                      <a:rPr lang="en-US" sz="1200" i="1" dirty="0">
-                        <a:latin typeface="Cambria Math" panose="02040503050406030204" pitchFamily="18" charset="0"/>
-                      </a:rPr>
-                      <m:t>𝑝</m:t>
-                    </m:r>
-                    <m:d>
-                      <m:dPr>
-                        <m:endChr m:val="|"/>
-                        <m:ctrlPr>
-                          <a:rPr lang="en-US" sz="1200" i="1" dirty="0">
-                            <a:latin typeface="Cambria Math" panose="02040503050406030204" pitchFamily="18" charset="0"/>
-                          </a:rPr>
-                        </m:ctrlPr>
-                      </m:dPr>
-                      <m:e>
-                        <m:sSup>
-                          <m:sSupPr>
-                            <m:ctrlPr>
-                              <a:rPr lang="en-US" sz="1200" i="1" dirty="0">
-                                <a:latin typeface="Cambria Math" panose="02040503050406030204" pitchFamily="18" charset="0"/>
-                              </a:rPr>
-                            </m:ctrlPr>
-                          </m:sSupPr>
-                          <m:e>
-                            <m:r>
-                              <a:rPr lang="en-US" sz="1200" i="1" dirty="0">
-                                <a:latin typeface="Cambria Math" panose="02040503050406030204" pitchFamily="18" charset="0"/>
-                              </a:rPr>
-                              <m:t>𝑠</m:t>
-                            </m:r>
-                          </m:e>
-                          <m:sup>
-                            <m:r>
-                              <a:rPr lang="en-US" sz="1200" i="1" dirty="0">
-                                <a:latin typeface="Cambria Math" panose="02040503050406030204" pitchFamily="18" charset="0"/>
-                              </a:rPr>
-                              <m:t>′</m:t>
-                            </m:r>
-                          </m:sup>
-                        </m:sSup>
-                        <m:r>
-                          <a:rPr lang="en-US" sz="1200" b="0" i="1" dirty="0" smtClean="0">
-                            <a:latin typeface="Cambria Math" panose="02040503050406030204" pitchFamily="18" charset="0"/>
-                          </a:rPr>
-                          <m:t>,</m:t>
-                        </m:r>
-                        <m:r>
-                          <a:rPr lang="en-US" sz="1200" b="0" i="1" dirty="0" smtClean="0">
-                            <a:latin typeface="Cambria Math" panose="02040503050406030204" pitchFamily="18" charset="0"/>
-                          </a:rPr>
-                          <m:t>𝑟</m:t>
-                        </m:r>
-                        <m:r>
-                          <a:rPr lang="en-US" sz="1200" i="1" dirty="0">
-                            <a:latin typeface="Cambria Math" panose="02040503050406030204" pitchFamily="18" charset="0"/>
-                          </a:rPr>
-                          <m:t> </m:t>
-                        </m:r>
-                      </m:e>
-                    </m:d>
-                    <m:r>
-                      <a:rPr lang="en-US" sz="1200" i="1" dirty="0">
-                        <a:latin typeface="Cambria Math" panose="02040503050406030204" pitchFamily="18" charset="0"/>
-                      </a:rPr>
-                      <m:t>𝑠</m:t>
-                    </m:r>
-                    <m:r>
-                      <a:rPr lang="en-US" sz="1200" i="1" dirty="0">
-                        <a:latin typeface="Cambria Math" panose="02040503050406030204" pitchFamily="18" charset="0"/>
-                      </a:rPr>
-                      <m:t>, </m:t>
-                    </m:r>
-                    <m:r>
-                      <a:rPr lang="en-US" sz="1200" i="1" dirty="0">
-                        <a:latin typeface="Cambria Math" panose="02040503050406030204" pitchFamily="18" charset="0"/>
-                      </a:rPr>
-                      <m:t>𝑎</m:t>
-                    </m:r>
-                    <m:r>
-                      <a:rPr lang="en-US" sz="1200" i="1" dirty="0">
-                        <a:latin typeface="Cambria Math" panose="02040503050406030204" pitchFamily="18" charset="0"/>
-                      </a:rPr>
-                      <m:t>)</m:t>
-                    </m:r>
-                  </m:oMath>
-                </a14:m>
-                <a:r>
-                  <a:rPr lang="en-US" sz="1200" dirty="0"/>
-                  <a:t>	probability of transition to state </a:t>
-                </a:r>
-                <a14:m>
-                  <m:oMath xmlns:m="http://schemas.openxmlformats.org/officeDocument/2006/math">
-                    <m:r>
-                      <a:rPr lang="en-US" sz="1200" i="1" dirty="0">
-                        <a:latin typeface="Cambria Math" panose="02040503050406030204" pitchFamily="18" charset="0"/>
-                      </a:rPr>
-                      <m:t>𝑠</m:t>
-                    </m:r>
-                    <m:r>
-                      <a:rPr lang="en-US" sz="1200" i="1" dirty="0">
-                        <a:latin typeface="Cambria Math" panose="02040503050406030204" pitchFamily="18" charset="0"/>
-                      </a:rPr>
-                      <m:t>′</m:t>
-                    </m:r>
-                  </m:oMath>
-                </a14:m>
-                <a:r>
-                  <a:rPr lang="en-US" sz="1200" dirty="0"/>
-                  <a:t> and receiving reward </a:t>
-                </a:r>
-                <a14:m>
-                  <m:oMath xmlns:m="http://schemas.openxmlformats.org/officeDocument/2006/math">
-                    <m:r>
-                      <a:rPr lang="en-US" sz="1200" b="0" i="1" smtClean="0">
-                        <a:latin typeface="Cambria Math" panose="02040503050406030204" pitchFamily="18" charset="0"/>
-                      </a:rPr>
-                      <m:t>𝑟</m:t>
-                    </m:r>
-                  </m:oMath>
-                </a14:m>
-                <a:r>
-                  <a:rPr lang="en-US" sz="1200" dirty="0"/>
-                  <a:t>, </a:t>
-                </a:r>
-                <a:br>
-                  <a:rPr lang="en-US" sz="1200" dirty="0"/>
-                </a:br>
-                <a:r>
-                  <a:rPr lang="en-US" sz="1200" dirty="0"/>
-                  <a:t>	from state </a:t>
-                </a:r>
-                <a14:m>
-                  <m:oMath xmlns:m="http://schemas.openxmlformats.org/officeDocument/2006/math">
-                    <m:r>
-                      <a:rPr lang="en-US" sz="1200" i="1" dirty="0">
-                        <a:latin typeface="Cambria Math" panose="02040503050406030204" pitchFamily="18" charset="0"/>
-                      </a:rPr>
-                      <m:t>𝑠</m:t>
-                    </m:r>
-                  </m:oMath>
-                </a14:m>
-                <a:r>
-                  <a:rPr lang="en-US" sz="1200" dirty="0"/>
-                  <a:t> taking action </a:t>
-                </a:r>
-                <a14:m>
-                  <m:oMath xmlns:m="http://schemas.openxmlformats.org/officeDocument/2006/math">
-                    <m:r>
-                      <a:rPr lang="en-US" sz="1200" i="1" dirty="0">
-                        <a:latin typeface="Cambria Math" panose="02040503050406030204" pitchFamily="18" charset="0"/>
-                      </a:rPr>
-                      <m:t>𝑎</m:t>
-                    </m:r>
-                  </m:oMath>
-                </a14:m>
-                <a:r>
-                  <a:rPr lang="en-US" sz="1200" dirty="0"/>
-                  <a:t>.</a:t>
-                </a:r>
-              </a:p>
-              <a:p>
-                <a:pPr marL="0" indent="0">
-                  <a:lnSpc>
-                    <a:spcPct val="100000"/>
-                  </a:lnSpc>
-                  <a:spcBef>
-                    <a:spcPts val="0"/>
-                  </a:spcBef>
-                  <a:buNone/>
-                </a:pPr>
-                <a14:m>
-                  <m:oMath xmlns:m="http://schemas.openxmlformats.org/officeDocument/2006/math">
-                    <m:r>
-                      <a:rPr lang="en-US" sz="1200" i="1" dirty="0">
-                        <a:latin typeface="Cambria Math" panose="02040503050406030204" pitchFamily="18" charset="0"/>
-                      </a:rPr>
-                      <m:t>𝑝</m:t>
-                    </m:r>
-                    <m:d>
-                      <m:dPr>
-                        <m:endChr m:val="|"/>
-                        <m:ctrlPr>
-                          <a:rPr lang="en-US" sz="1200" i="1" dirty="0">
-                            <a:latin typeface="Cambria Math" panose="02040503050406030204" pitchFamily="18" charset="0"/>
-                          </a:rPr>
-                        </m:ctrlPr>
-                      </m:dPr>
-                      <m:e>
-                        <m:sSup>
-                          <m:sSupPr>
-                            <m:ctrlPr>
-                              <a:rPr lang="en-US" sz="1200" i="1" dirty="0">
-                                <a:latin typeface="Cambria Math" panose="02040503050406030204" pitchFamily="18" charset="0"/>
-                              </a:rPr>
-                            </m:ctrlPr>
-                          </m:sSupPr>
-                          <m:e>
-                            <m:r>
-                              <a:rPr lang="en-US" sz="1200" i="1" dirty="0">
-                                <a:latin typeface="Cambria Math" panose="02040503050406030204" pitchFamily="18" charset="0"/>
-                              </a:rPr>
-                              <m:t>𝑠</m:t>
-                            </m:r>
-                          </m:e>
-                          <m:sup>
-                            <m:r>
-                              <a:rPr lang="en-US" sz="1200" i="1" dirty="0">
-                                <a:latin typeface="Cambria Math" panose="02040503050406030204" pitchFamily="18" charset="0"/>
-                              </a:rPr>
-                              <m:t>′</m:t>
-                            </m:r>
-                          </m:sup>
-                        </m:sSup>
-                      </m:e>
-                    </m:d>
-                    <m:r>
-                      <a:rPr lang="en-US" sz="1200" i="1" dirty="0">
-                        <a:latin typeface="Cambria Math" panose="02040503050406030204" pitchFamily="18" charset="0"/>
-                      </a:rPr>
-                      <m:t>𝑠</m:t>
-                    </m:r>
-                    <m:r>
-                      <a:rPr lang="en-US" sz="1200" i="1" dirty="0">
-                        <a:latin typeface="Cambria Math" panose="02040503050406030204" pitchFamily="18" charset="0"/>
-                      </a:rPr>
-                      <m:t>, </m:t>
-                    </m:r>
-                    <m:r>
-                      <a:rPr lang="en-US" sz="1200" i="1" dirty="0">
-                        <a:latin typeface="Cambria Math" panose="02040503050406030204" pitchFamily="18" charset="0"/>
-                      </a:rPr>
-                      <m:t>𝑎</m:t>
-                    </m:r>
-                    <m:r>
-                      <a:rPr lang="en-US" sz="1200" i="1" dirty="0">
-                        <a:latin typeface="Cambria Math" panose="02040503050406030204" pitchFamily="18" charset="0"/>
-                      </a:rPr>
-                      <m:t>)</m:t>
-                    </m:r>
-                  </m:oMath>
-                </a14:m>
-                <a:r>
-                  <a:rPr lang="en-US" sz="1200" dirty="0"/>
-                  <a:t> 	probability of transition to state </a:t>
-                </a:r>
-                <a14:m>
-                  <m:oMath xmlns:m="http://schemas.openxmlformats.org/officeDocument/2006/math">
-                    <m:r>
-                      <a:rPr lang="en-US" sz="1200" i="1" dirty="0">
-                        <a:latin typeface="Cambria Math" panose="02040503050406030204" pitchFamily="18" charset="0"/>
-                      </a:rPr>
-                      <m:t>𝑠</m:t>
-                    </m:r>
-                    <m:r>
-                      <a:rPr lang="en-US" sz="1200" i="1" dirty="0">
-                        <a:latin typeface="Cambria Math" panose="02040503050406030204" pitchFamily="18" charset="0"/>
-                      </a:rPr>
-                      <m:t>′</m:t>
-                    </m:r>
-                  </m:oMath>
-                </a14:m>
-                <a:r>
-                  <a:rPr lang="en-US" sz="1200" dirty="0"/>
-                  <a:t> fom state </a:t>
-                </a:r>
-                <a14:m>
-                  <m:oMath xmlns:m="http://schemas.openxmlformats.org/officeDocument/2006/math">
-                    <m:r>
-                      <a:rPr lang="en-US" sz="1200" i="1" dirty="0">
-                        <a:latin typeface="Cambria Math" panose="02040503050406030204" pitchFamily="18" charset="0"/>
-                      </a:rPr>
-                      <m:t>𝑠</m:t>
-                    </m:r>
-                  </m:oMath>
-                </a14:m>
-                <a:r>
-                  <a:rPr lang="en-US" sz="1200" dirty="0"/>
-                  <a:t> taking action </a:t>
-                </a:r>
-                <a14:m>
-                  <m:oMath xmlns:m="http://schemas.openxmlformats.org/officeDocument/2006/math">
-                    <m:r>
-                      <a:rPr lang="en-US" sz="1200" i="1" dirty="0">
-                        <a:latin typeface="Cambria Math" panose="02040503050406030204" pitchFamily="18" charset="0"/>
-                      </a:rPr>
-                      <m:t>𝑎</m:t>
-                    </m:r>
-                  </m:oMath>
-                </a14:m>
-                <a:r>
-                  <a:rPr lang="en-US" sz="1200" dirty="0"/>
-                  <a:t>.</a:t>
-                </a:r>
-              </a:p>
-              <a:p>
-                <a:pPr marL="0" indent="0">
-                  <a:lnSpc>
-                    <a:spcPct val="100000"/>
-                  </a:lnSpc>
-                  <a:spcBef>
-                    <a:spcPts val="0"/>
-                  </a:spcBef>
-                  <a:buNone/>
-                </a:pPr>
-                <a14:m>
-                  <m:oMath xmlns:m="http://schemas.openxmlformats.org/officeDocument/2006/math">
-                    <m:r>
-                      <a:rPr lang="en-US" sz="1200" b="0" i="1" smtClean="0">
-                        <a:latin typeface="Cambria Math" panose="02040503050406030204" pitchFamily="18" charset="0"/>
-                      </a:rPr>
-                      <m:t>𝑟</m:t>
-                    </m:r>
-                    <m:r>
-                      <a:rPr lang="en-US" sz="1200" b="0" i="1" smtClean="0">
-                        <a:latin typeface="Cambria Math" panose="02040503050406030204" pitchFamily="18" charset="0"/>
-                      </a:rPr>
-                      <m:t>(</m:t>
-                    </m:r>
-                    <m:r>
-                      <a:rPr lang="en-US" sz="1200" b="0" i="1" smtClean="0">
-                        <a:latin typeface="Cambria Math" panose="02040503050406030204" pitchFamily="18" charset="0"/>
-                      </a:rPr>
-                      <m:t>𝑠</m:t>
-                    </m:r>
-                    <m:r>
-                      <a:rPr lang="en-US" sz="1200" b="0" i="1" smtClean="0">
-                        <a:latin typeface="Cambria Math" panose="02040503050406030204" pitchFamily="18" charset="0"/>
-                      </a:rPr>
-                      <m:t>,</m:t>
-                    </m:r>
-                    <m:r>
-                      <a:rPr lang="en-US" sz="1200" b="0" i="1" smtClean="0">
-                        <a:latin typeface="Cambria Math" panose="02040503050406030204" pitchFamily="18" charset="0"/>
-                      </a:rPr>
-                      <m:t>𝑎</m:t>
-                    </m:r>
-                    <m:r>
-                      <a:rPr lang="en-US" sz="1200" b="0" i="1" smtClean="0">
-                        <a:latin typeface="Cambria Math" panose="02040503050406030204" pitchFamily="18" charset="0"/>
-                      </a:rPr>
-                      <m:t>)</m:t>
-                    </m:r>
-                  </m:oMath>
-                </a14:m>
-                <a:r>
-                  <a:rPr lang="en-US" sz="1200" dirty="0"/>
-                  <a:t>	expected immediate reward from state </a:t>
-                </a:r>
-                <a14:m>
-                  <m:oMath xmlns:m="http://schemas.openxmlformats.org/officeDocument/2006/math">
-                    <m:r>
-                      <a:rPr lang="en-US" sz="1200" i="1" dirty="0">
-                        <a:latin typeface="Cambria Math" panose="02040503050406030204" pitchFamily="18" charset="0"/>
-                      </a:rPr>
-                      <m:t>𝑠</m:t>
-                    </m:r>
-                  </m:oMath>
-                </a14:m>
-                <a:r>
-                  <a:rPr lang="en-US" sz="1200" dirty="0"/>
-                  <a:t> after action </a:t>
-                </a:r>
-                <a14:m>
-                  <m:oMath xmlns:m="http://schemas.openxmlformats.org/officeDocument/2006/math">
-                    <m:r>
-                      <a:rPr lang="en-US" sz="1200" i="1" dirty="0">
-                        <a:latin typeface="Cambria Math" panose="02040503050406030204" pitchFamily="18" charset="0"/>
-                      </a:rPr>
-                      <m:t>𝑎</m:t>
-                    </m:r>
-                    <m:r>
-                      <a:rPr lang="en-US" sz="1200" b="0" i="1" dirty="0" smtClean="0">
-                        <a:latin typeface="Cambria Math" panose="02040503050406030204" pitchFamily="18" charset="0"/>
-                      </a:rPr>
-                      <m:t>.</m:t>
-                    </m:r>
-                  </m:oMath>
-                </a14:m>
-                <a:endParaRPr lang="en-US" sz="1200" b="0" dirty="0"/>
-              </a:p>
-              <a:p>
-                <a:pPr marL="0" indent="0">
-                  <a:lnSpc>
-                    <a:spcPct val="100000"/>
-                  </a:lnSpc>
-                  <a:spcBef>
-                    <a:spcPts val="0"/>
-                  </a:spcBef>
-                  <a:buNone/>
-                </a:pPr>
-                <a14:m>
-                  <m:oMath xmlns:m="http://schemas.openxmlformats.org/officeDocument/2006/math">
-                    <m:r>
-                      <a:rPr lang="en-US" sz="1200" i="1">
-                        <a:latin typeface="Cambria Math" panose="02040503050406030204" pitchFamily="18" charset="0"/>
-                      </a:rPr>
-                      <m:t>𝑟</m:t>
-                    </m:r>
-                    <m:r>
-                      <a:rPr lang="en-US" sz="1200" i="1">
-                        <a:latin typeface="Cambria Math" panose="02040503050406030204" pitchFamily="18" charset="0"/>
-                      </a:rPr>
-                      <m:t>(</m:t>
-                    </m:r>
-                    <m:r>
-                      <a:rPr lang="en-US" sz="1200" i="1">
-                        <a:latin typeface="Cambria Math" panose="02040503050406030204" pitchFamily="18" charset="0"/>
-                      </a:rPr>
-                      <m:t>𝑠</m:t>
-                    </m:r>
-                    <m:r>
-                      <a:rPr lang="en-US" sz="1200" i="1">
-                        <a:latin typeface="Cambria Math" panose="02040503050406030204" pitchFamily="18" charset="0"/>
-                      </a:rPr>
-                      <m:t>,</m:t>
-                    </m:r>
-                    <m:r>
-                      <a:rPr lang="en-US" sz="1200" i="1">
-                        <a:latin typeface="Cambria Math" panose="02040503050406030204" pitchFamily="18" charset="0"/>
-                      </a:rPr>
-                      <m:t>𝑎</m:t>
-                    </m:r>
-                    <m:r>
-                      <a:rPr lang="en-US" sz="1200" b="0" i="1" smtClean="0">
-                        <a:latin typeface="Cambria Math" panose="02040503050406030204" pitchFamily="18" charset="0"/>
-                      </a:rPr>
-                      <m:t>,</m:t>
-                    </m:r>
-                    <m:r>
-                      <a:rPr lang="en-US" sz="1200" b="0" i="1" smtClean="0">
-                        <a:latin typeface="Cambria Math" panose="02040503050406030204" pitchFamily="18" charset="0"/>
-                      </a:rPr>
-                      <m:t>𝑠</m:t>
-                    </m:r>
-                    <m:r>
-                      <a:rPr lang="en-US" sz="1200" b="0" i="1" smtClean="0">
-                        <a:latin typeface="Cambria Math" panose="02040503050406030204" pitchFamily="18" charset="0"/>
-                      </a:rPr>
-                      <m:t>′)</m:t>
-                    </m:r>
-                  </m:oMath>
-                </a14:m>
-                <a:r>
-                  <a:rPr lang="en-US" sz="1200" dirty="0"/>
-                  <a:t>	expected immediate reward from state </a:t>
-                </a:r>
-                <a14:m>
-                  <m:oMath xmlns:m="http://schemas.openxmlformats.org/officeDocument/2006/math">
-                    <m:r>
-                      <a:rPr lang="en-US" sz="1200" i="1" dirty="0">
-                        <a:latin typeface="Cambria Math" panose="02040503050406030204" pitchFamily="18" charset="0"/>
-                      </a:rPr>
-                      <m:t>𝑠</m:t>
-                    </m:r>
-                  </m:oMath>
-                </a14:m>
-                <a:r>
-                  <a:rPr lang="en-US" sz="1200" dirty="0"/>
-                  <a:t> to </a:t>
-                </a:r>
-                <a14:m>
-                  <m:oMath xmlns:m="http://schemas.openxmlformats.org/officeDocument/2006/math">
-                    <m:sSup>
-                      <m:sSupPr>
-                        <m:ctrlPr>
-                          <a:rPr lang="en-US" sz="1200" b="0" i="1" smtClean="0">
-                            <a:latin typeface="Cambria Math" panose="02040503050406030204" pitchFamily="18" charset="0"/>
-                          </a:rPr>
-                        </m:ctrlPr>
-                      </m:sSupPr>
-                      <m:e>
-                        <m:r>
-                          <a:rPr lang="en-US" sz="1200" b="0" i="1" smtClean="0">
-                            <a:latin typeface="Cambria Math" panose="02040503050406030204" pitchFamily="18" charset="0"/>
-                          </a:rPr>
-                          <m:t>𝑠</m:t>
-                        </m:r>
-                      </m:e>
-                      <m:sup>
-                        <m:r>
-                          <a:rPr lang="en-US" sz="1200" b="0" i="1" smtClean="0">
-                            <a:latin typeface="Cambria Math" panose="02040503050406030204" pitchFamily="18" charset="0"/>
-                          </a:rPr>
-                          <m:t>′</m:t>
-                        </m:r>
-                      </m:sup>
-                    </m:sSup>
-                  </m:oMath>
-                </a14:m>
-                <a:r>
-                  <a:rPr lang="en-US" sz="1200" dirty="0"/>
-                  <a:t> with action </a:t>
-                </a:r>
-                <a14:m>
-                  <m:oMath xmlns:m="http://schemas.openxmlformats.org/officeDocument/2006/math">
-                    <m:r>
-                      <a:rPr lang="en-US" sz="1200" i="1" dirty="0">
-                        <a:latin typeface="Cambria Math" panose="02040503050406030204" pitchFamily="18" charset="0"/>
-                      </a:rPr>
-                      <m:t>𝑎</m:t>
-                    </m:r>
-                    <m:r>
-                      <a:rPr lang="en-US" sz="1200" b="0" i="1" dirty="0" smtClean="0">
-                        <a:latin typeface="Cambria Math" panose="02040503050406030204" pitchFamily="18" charset="0"/>
-                      </a:rPr>
-                      <m:t>.</m:t>
-                    </m:r>
-                  </m:oMath>
-                </a14:m>
-                <a:endParaRPr lang="en-US" sz="1200" i="1" dirty="0">
-                  <a:latin typeface="Cambria Math" panose="02040503050406030204" pitchFamily="18" charset="0"/>
-                </a:endParaRPr>
-              </a:p>
-              <a:p>
-                <a:pPr marL="0" indent="0">
-                  <a:spcBef>
-                    <a:spcPts val="0"/>
-                  </a:spcBef>
-                  <a:buNone/>
-                </a:pPr>
-                <a:endParaRPr lang="en-US" sz="1200" i="1" dirty="0">
-                  <a:latin typeface="Cambria Math" panose="02040503050406030204" pitchFamily="18" charset="0"/>
-                </a:endParaRPr>
-              </a:p>
-              <a:p>
-                <a:pPr marL="0" indent="0">
-                  <a:spcBef>
-                    <a:spcPts val="0"/>
-                  </a:spcBef>
-                  <a:buNone/>
-                </a:pPr>
-                <a14:m>
-                  <m:oMath xmlns:m="http://schemas.openxmlformats.org/officeDocument/2006/math">
-                    <m:r>
-                      <a:rPr lang="en-US" sz="1200" i="1" dirty="0">
-                        <a:latin typeface="Cambria Math" panose="02040503050406030204" pitchFamily="18" charset="0"/>
-                      </a:rPr>
-                      <m:t>𝜋</m:t>
-                    </m:r>
-                    <m:r>
-                      <a:rPr lang="en-US" sz="1200" i="1" dirty="0">
-                        <a:latin typeface="Cambria Math" panose="02040503050406030204" pitchFamily="18" charset="0"/>
-                      </a:rPr>
-                      <m:t>(</m:t>
-                    </m:r>
-                    <m:r>
-                      <a:rPr lang="en-US" sz="1200" i="1" dirty="0" err="1">
-                        <a:latin typeface="Cambria Math" panose="02040503050406030204" pitchFamily="18" charset="0"/>
-                      </a:rPr>
-                      <m:t>𝑎</m:t>
-                    </m:r>
-                    <m:r>
-                      <a:rPr lang="en-US" sz="1200" i="1" dirty="0" err="1">
-                        <a:latin typeface="Cambria Math" panose="02040503050406030204" pitchFamily="18" charset="0"/>
-                      </a:rPr>
-                      <m:t>|</m:t>
-                    </m:r>
-                    <m:r>
-                      <a:rPr lang="en-US" sz="1200" i="1" dirty="0" err="1">
-                        <a:latin typeface="Cambria Math" panose="02040503050406030204" pitchFamily="18" charset="0"/>
-                      </a:rPr>
-                      <m:t>𝑠</m:t>
-                    </m:r>
-                    <m:r>
-                      <a:rPr lang="en-US" sz="1200" i="1" dirty="0">
-                        <a:latin typeface="Cambria Math" panose="02040503050406030204" pitchFamily="18" charset="0"/>
-                      </a:rPr>
-                      <m:t>)</m:t>
-                    </m:r>
-                  </m:oMath>
-                </a14:m>
-                <a:r>
-                  <a:rPr lang="en-US" sz="1200" dirty="0"/>
-                  <a:t>	probability of taking action </a:t>
-                </a:r>
-                <a14:m>
-                  <m:oMath xmlns:m="http://schemas.openxmlformats.org/officeDocument/2006/math">
-                    <m:r>
-                      <a:rPr lang="en-US" sz="1200" i="1" dirty="0">
-                        <a:latin typeface="Cambria Math" panose="02040503050406030204" pitchFamily="18" charset="0"/>
-                      </a:rPr>
-                      <m:t>𝑎</m:t>
-                    </m:r>
-                  </m:oMath>
-                </a14:m>
-                <a:r>
-                  <a:rPr lang="en-US" sz="1200" dirty="0"/>
-                  <a:t> in state </a:t>
-                </a:r>
-                <a14:m>
-                  <m:oMath xmlns:m="http://schemas.openxmlformats.org/officeDocument/2006/math">
-                    <m:r>
-                      <a:rPr lang="en-US" sz="1200" i="1" dirty="0">
-                        <a:latin typeface="Cambria Math" panose="02040503050406030204" pitchFamily="18" charset="0"/>
-                      </a:rPr>
-                      <m:t>𝑠</m:t>
-                    </m:r>
-                  </m:oMath>
-                </a14:m>
-                <a:r>
-                  <a:rPr lang="en-US" sz="1200" dirty="0"/>
-                  <a:t> under stochastic policy </a:t>
-                </a:r>
-                <a14:m>
-                  <m:oMath xmlns:m="http://schemas.openxmlformats.org/officeDocument/2006/math">
-                    <m:r>
-                      <a:rPr lang="en-US" sz="1200" i="1" dirty="0">
-                        <a:latin typeface="Cambria Math" panose="02040503050406030204" pitchFamily="18" charset="0"/>
-                      </a:rPr>
-                      <m:t>𝜋</m:t>
-                    </m:r>
-                  </m:oMath>
-                </a14:m>
-                <a:endParaRPr lang="en-US" sz="1200" dirty="0">
-                  <a:ea typeface="Cambria Math" panose="02040503050406030204" pitchFamily="18" charset="0"/>
-                </a:endParaRPr>
-              </a:p>
-              <a:p>
-                <a:pPr marL="0" indent="0">
-                  <a:spcBef>
-                    <a:spcPts val="0"/>
-                  </a:spcBef>
-                  <a:buNone/>
-                </a:pPr>
-                <a14:m>
-                  <m:oMath xmlns:m="http://schemas.openxmlformats.org/officeDocument/2006/math">
-                    <m:r>
-                      <a:rPr lang="en-US" sz="1200" i="1" dirty="0" smtClean="0">
-                        <a:latin typeface="Cambria Math" panose="02040503050406030204" pitchFamily="18" charset="0"/>
-                      </a:rPr>
-                      <m:t>𝜋</m:t>
-                    </m:r>
-                    <m:r>
-                      <a:rPr lang="en-US" sz="1200" i="1" dirty="0" smtClean="0">
-                        <a:latin typeface="Cambria Math" panose="02040503050406030204" pitchFamily="18" charset="0"/>
-                      </a:rPr>
-                      <m:t>(</m:t>
-                    </m:r>
-                    <m:r>
-                      <a:rPr lang="en-US" sz="1200" i="1" dirty="0" smtClean="0">
-                        <a:latin typeface="Cambria Math" panose="02040503050406030204" pitchFamily="18" charset="0"/>
-                      </a:rPr>
-                      <m:t>𝑠</m:t>
-                    </m:r>
-                    <m:r>
-                      <a:rPr lang="en-US" sz="1200" i="1" dirty="0" smtClean="0">
-                        <a:latin typeface="Cambria Math" panose="02040503050406030204" pitchFamily="18" charset="0"/>
-                      </a:rPr>
-                      <m:t>)</m:t>
-                    </m:r>
-                  </m:oMath>
-                </a14:m>
-                <a:r>
-                  <a:rPr lang="en-US" sz="1200" dirty="0"/>
-                  <a:t>	action taken in state </a:t>
-                </a:r>
-                <a14:m>
-                  <m:oMath xmlns:m="http://schemas.openxmlformats.org/officeDocument/2006/math">
-                    <m:r>
-                      <a:rPr lang="en-US" sz="1200" i="1" dirty="0" smtClean="0">
-                        <a:latin typeface="Cambria Math" panose="02040503050406030204" pitchFamily="18" charset="0"/>
-                      </a:rPr>
-                      <m:t>𝑠</m:t>
-                    </m:r>
-                  </m:oMath>
-                </a14:m>
-                <a:r>
-                  <a:rPr lang="en-US" sz="1200" dirty="0"/>
-                  <a:t> under deterministic policy </a:t>
-                </a:r>
-                <a14:m>
-                  <m:oMath xmlns:m="http://schemas.openxmlformats.org/officeDocument/2006/math">
-                    <m:r>
-                      <a:rPr lang="en-US" sz="1200" b="0" i="1" dirty="0" smtClean="0">
-                        <a:latin typeface="Cambria Math" panose="02040503050406030204" pitchFamily="18" charset="0"/>
-                      </a:rPr>
-                      <m:t>𝜋</m:t>
-                    </m:r>
-                  </m:oMath>
-                </a14:m>
-                <a:endParaRPr lang="en-US" sz="1200" dirty="0"/>
-              </a:p>
-            </p:txBody>
-          </p:sp>
-        </mc:Choice>
-        <mc:Fallback xmlns="">
-          <p:sp>
-            <p:nvSpPr>
-              <p:cNvPr id="11" name="Content Placeholder 2">
-                <a:extLst>
-                  <a:ext uri="{FF2B5EF4-FFF2-40B4-BE49-F238E27FC236}">
-                    <a16:creationId xmlns:a16="http://schemas.microsoft.com/office/drawing/2014/main" id="{6F45EA4F-65F9-5141-0B09-C395CF9CA7A0}"/>
-                  </a:ext>
-                </a:extLst>
-              </p:cNvPr>
-              <p:cNvSpPr txBox="1">
-                <a:spLocks noRot="1" noChangeAspect="1" noMove="1" noResize="1" noEditPoints="1" noAdjustHandles="1" noChangeArrowheads="1" noChangeShapeType="1" noTextEdit="1"/>
-              </p:cNvSpPr>
-              <p:nvPr/>
-            </p:nvSpPr>
-            <p:spPr>
-              <a:xfrm>
-                <a:off x="6267338" y="1124198"/>
-                <a:ext cx="5273179" cy="3693383"/>
-              </a:xfrm>
-              <a:prstGeom prst="rect">
-                <a:avLst/>
-              </a:prstGeom>
-              <a:blipFill>
-                <a:blip r:embed="rId4"/>
-                <a:stretch>
-                  <a:fillRect t="-328"/>
-                </a:stretch>
-              </a:blipFill>
-            </p:spPr>
-            <p:txBody>
-              <a:bodyPr/>
-              <a:lstStyle/>
-              <a:p>
-                <a:r>
-                  <a:rPr lang="en-US">
-                    <a:noFill/>
-                  </a:rPr>
-                  <a:t> </a:t>
-                </a:r>
-              </a:p>
-            </p:txBody>
-          </p:sp>
-        </mc:Fallback>
-      </mc:AlternateContent>
-      <mc:AlternateContent xmlns:mc="http://schemas.openxmlformats.org/markup-compatibility/2006" xmlns:a14="http://schemas.microsoft.com/office/drawing/2010/main">
-        <mc:Choice Requires="a14">
-          <p:sp>
-            <p:nvSpPr>
-              <p:cNvPr id="4" name="Content Placeholder 2">
+              <p:cNvPr id="4" name="Content Placeholder 2" descr="Temporal Difference Learning. U sub t target for estimate at time t. delta sub t TD error">
                 <a:extLst>
                   <a:ext uri="{FF2B5EF4-FFF2-40B4-BE49-F238E27FC236}">
                     <a16:creationId xmlns:a16="http://schemas.microsoft.com/office/drawing/2014/main" id="{4C5E539A-F9A7-F959-ACD3-4ADE5900F587}"/>
@@ -28923,7 +27602,7 @@
                     <m:sSub>
                       <m:sSubPr>
                         <m:ctrlPr>
-                          <a:rPr lang="en-US" sz="1200" i="1" dirty="0">
+                          <a:rPr lang="en-US" sz="1200" b="0" i="1" dirty="0" smtClean="0">
                             <a:solidFill>
                               <a:schemeClr val="tx1"/>
                             </a:solidFill>
@@ -28971,7 +27650,7 @@
         <mc:Fallback xmlns="">
           <p:sp>
             <p:nvSpPr>
-              <p:cNvPr id="4" name="Content Placeholder 2">
+              <p:cNvPr id="4" name="Content Placeholder 2" descr="Temporal Difference Learning. U sub t target for estimate at time t. delta sub t TD error">
                 <a:extLst>
                   <a:ext uri="{FF2B5EF4-FFF2-40B4-BE49-F238E27FC236}">
                     <a16:creationId xmlns:a16="http://schemas.microsoft.com/office/drawing/2014/main" id="{4C5E539A-F9A7-F959-ACD3-4ADE5900F587}"/>
@@ -29017,7 +27696,1403 @@
         <mc:Choice Requires="a14">
           <p:sp>
             <p:nvSpPr>
-              <p:cNvPr id="5" name="Content Placeholder 2">
+              <p:cNvPr id="11" name="Content Placeholder 2" descr="MDP. s, s prime states. a an action. r a reward. S set of all (nonterminal) states, S to the power plus are all states. A(s) set of all actions available in state s. gamma discount-rate parameter. t discrete time step. T final time step of an episode (a.k.a. horizon). A sub t random variable for the action at time t. S sub t random variable for the state at time t. R sub t random variable for the reward at time t. p (s prime,r | s, a) probability of transition to state s prime and receiving reward r, from state s taking action a . p (s prime | s, a) probability of transition to state s prime fom state s taking action a . r(s,a) expected immediate reward from state s after action a. r(s,a,s prime) expected immediate reward from state s to s prime with action a. pi (a given s) probability of taking action a in state s under stochastic policy pi. pi (s) action taken in state s under deterministic policy pi">
+                <a:extLst>
+                  <a:ext uri="{FF2B5EF4-FFF2-40B4-BE49-F238E27FC236}">
+                    <a16:creationId xmlns:a16="http://schemas.microsoft.com/office/drawing/2014/main" id="{6F45EA4F-65F9-5141-0B09-C395CF9CA7A0}"/>
+                  </a:ext>
+                </a:extLst>
+              </p:cNvPr>
+              <p:cNvSpPr txBox="1">
+                <a:spLocks/>
+              </p:cNvSpPr>
+              <p:nvPr/>
+            </p:nvSpPr>
+            <p:spPr>
+              <a:xfrm>
+                <a:off x="6267338" y="1124198"/>
+                <a:ext cx="5273179" cy="3693383"/>
+              </a:xfrm>
+              <a:prstGeom prst="rect">
+                <a:avLst/>
+              </a:prstGeom>
+            </p:spPr>
+            <p:style>
+              <a:lnRef idx="2">
+                <a:schemeClr val="accent2"/>
+              </a:lnRef>
+              <a:fillRef idx="1">
+                <a:schemeClr val="lt1"/>
+              </a:fillRef>
+              <a:effectRef idx="0">
+                <a:schemeClr val="accent2"/>
+              </a:effectRef>
+              <a:fontRef idx="minor">
+                <a:schemeClr val="dk1"/>
+              </a:fontRef>
+            </p:style>
+            <p:txBody>
+              <a:bodyPr vert="horz" wrap="square" lIns="91440" tIns="45720" rIns="91440" bIns="45720" rtlCol="0">
+                <a:spAutoFit/>
+              </a:bodyPr>
+              <a:lstStyle>
+                <a:lvl1pPr marL="228600" indent="-228600" algn="l" defTabSz="914400" rtl="0" eaLnBrk="1" latinLnBrk="0" hangingPunct="1">
+                  <a:lnSpc>
+                    <a:spcPct val="90000"/>
+                  </a:lnSpc>
+                  <a:spcBef>
+                    <a:spcPts val="1000"/>
+                  </a:spcBef>
+                  <a:buFont typeface="Arial" panose="020B0604020202020204" pitchFamily="34" charset="0"/>
+                  <a:buChar char="•"/>
+                  <a:defRPr sz="2800" kern="1200">
+                    <a:solidFill>
+                      <a:schemeClr val="tx1"/>
+                    </a:solidFill>
+                    <a:latin typeface="+mn-lt"/>
+                    <a:ea typeface="+mn-ea"/>
+                    <a:cs typeface="+mn-cs"/>
+                  </a:defRPr>
+                </a:lvl1pPr>
+                <a:lvl2pPr marL="685800" indent="-228600" algn="l" defTabSz="914400" rtl="0" eaLnBrk="1" latinLnBrk="0" hangingPunct="1">
+                  <a:lnSpc>
+                    <a:spcPct val="90000"/>
+                  </a:lnSpc>
+                  <a:spcBef>
+                    <a:spcPts val="500"/>
+                  </a:spcBef>
+                  <a:buFont typeface="Arial" panose="020B0604020202020204" pitchFamily="34" charset="0"/>
+                  <a:buChar char="•"/>
+                  <a:defRPr sz="2400" kern="1200">
+                    <a:solidFill>
+                      <a:schemeClr val="tx1"/>
+                    </a:solidFill>
+                    <a:latin typeface="+mn-lt"/>
+                    <a:ea typeface="+mn-ea"/>
+                    <a:cs typeface="+mn-cs"/>
+                  </a:defRPr>
+                </a:lvl2pPr>
+                <a:lvl3pPr marL="1143000" indent="-228600" algn="l" defTabSz="914400" rtl="0" eaLnBrk="1" latinLnBrk="0" hangingPunct="1">
+                  <a:lnSpc>
+                    <a:spcPct val="90000"/>
+                  </a:lnSpc>
+                  <a:spcBef>
+                    <a:spcPts val="500"/>
+                  </a:spcBef>
+                  <a:buFont typeface="Arial" panose="020B0604020202020204" pitchFamily="34" charset="0"/>
+                  <a:buChar char="•"/>
+                  <a:defRPr sz="2000" kern="1200">
+                    <a:solidFill>
+                      <a:schemeClr val="tx1"/>
+                    </a:solidFill>
+                    <a:latin typeface="+mn-lt"/>
+                    <a:ea typeface="+mn-ea"/>
+                    <a:cs typeface="+mn-cs"/>
+                  </a:defRPr>
+                </a:lvl3pPr>
+                <a:lvl4pPr marL="1600200" indent="-228600" algn="l" defTabSz="914400" rtl="0" eaLnBrk="1" latinLnBrk="0" hangingPunct="1">
+                  <a:lnSpc>
+                    <a:spcPct val="90000"/>
+                  </a:lnSpc>
+                  <a:spcBef>
+                    <a:spcPts val="500"/>
+                  </a:spcBef>
+                  <a:buFont typeface="Arial" panose="020B0604020202020204" pitchFamily="34" charset="0"/>
+                  <a:buChar char="•"/>
+                  <a:defRPr sz="1800" kern="1200">
+                    <a:solidFill>
+                      <a:schemeClr val="tx1"/>
+                    </a:solidFill>
+                    <a:latin typeface="+mn-lt"/>
+                    <a:ea typeface="+mn-ea"/>
+                    <a:cs typeface="+mn-cs"/>
+                  </a:defRPr>
+                </a:lvl4pPr>
+                <a:lvl5pPr marL="2057400" indent="-228600" algn="l" defTabSz="914400" rtl="0" eaLnBrk="1" latinLnBrk="0" hangingPunct="1">
+                  <a:lnSpc>
+                    <a:spcPct val="90000"/>
+                  </a:lnSpc>
+                  <a:spcBef>
+                    <a:spcPts val="500"/>
+                  </a:spcBef>
+                  <a:buFont typeface="Arial" panose="020B0604020202020204" pitchFamily="34" charset="0"/>
+                  <a:buChar char="•"/>
+                  <a:defRPr sz="1800" kern="1200">
+                    <a:solidFill>
+                      <a:schemeClr val="tx1"/>
+                    </a:solidFill>
+                    <a:latin typeface="+mn-lt"/>
+                    <a:ea typeface="+mn-ea"/>
+                    <a:cs typeface="+mn-cs"/>
+                  </a:defRPr>
+                </a:lvl5pPr>
+                <a:lvl6pPr marL="2514600" indent="-228600" algn="l" defTabSz="914400" rtl="0" eaLnBrk="1" latinLnBrk="0" hangingPunct="1">
+                  <a:lnSpc>
+                    <a:spcPct val="90000"/>
+                  </a:lnSpc>
+                  <a:spcBef>
+                    <a:spcPts val="500"/>
+                  </a:spcBef>
+                  <a:buFont typeface="Arial" panose="020B0604020202020204" pitchFamily="34" charset="0"/>
+                  <a:buChar char="•"/>
+                  <a:defRPr sz="1800" kern="1200">
+                    <a:solidFill>
+                      <a:schemeClr val="tx1"/>
+                    </a:solidFill>
+                    <a:latin typeface="+mn-lt"/>
+                    <a:ea typeface="+mn-ea"/>
+                    <a:cs typeface="+mn-cs"/>
+                  </a:defRPr>
+                </a:lvl6pPr>
+                <a:lvl7pPr marL="2971800" indent="-228600" algn="l" defTabSz="914400" rtl="0" eaLnBrk="1" latinLnBrk="0" hangingPunct="1">
+                  <a:lnSpc>
+                    <a:spcPct val="90000"/>
+                  </a:lnSpc>
+                  <a:spcBef>
+                    <a:spcPts val="500"/>
+                  </a:spcBef>
+                  <a:buFont typeface="Arial" panose="020B0604020202020204" pitchFamily="34" charset="0"/>
+                  <a:buChar char="•"/>
+                  <a:defRPr sz="1800" kern="1200">
+                    <a:solidFill>
+                      <a:schemeClr val="tx1"/>
+                    </a:solidFill>
+                    <a:latin typeface="+mn-lt"/>
+                    <a:ea typeface="+mn-ea"/>
+                    <a:cs typeface="+mn-cs"/>
+                  </a:defRPr>
+                </a:lvl7pPr>
+                <a:lvl8pPr marL="3429000" indent="-228600" algn="l" defTabSz="914400" rtl="0" eaLnBrk="1" latinLnBrk="0" hangingPunct="1">
+                  <a:lnSpc>
+                    <a:spcPct val="90000"/>
+                  </a:lnSpc>
+                  <a:spcBef>
+                    <a:spcPts val="500"/>
+                  </a:spcBef>
+                  <a:buFont typeface="Arial" panose="020B0604020202020204" pitchFamily="34" charset="0"/>
+                  <a:buChar char="•"/>
+                  <a:defRPr sz="1800" kern="1200">
+                    <a:solidFill>
+                      <a:schemeClr val="tx1"/>
+                    </a:solidFill>
+                    <a:latin typeface="+mn-lt"/>
+                    <a:ea typeface="+mn-ea"/>
+                    <a:cs typeface="+mn-cs"/>
+                  </a:defRPr>
+                </a:lvl8pPr>
+                <a:lvl9pPr marL="3886200" indent="-228600" algn="l" defTabSz="914400" rtl="0" eaLnBrk="1" latinLnBrk="0" hangingPunct="1">
+                  <a:lnSpc>
+                    <a:spcPct val="90000"/>
+                  </a:lnSpc>
+                  <a:spcBef>
+                    <a:spcPts val="500"/>
+                  </a:spcBef>
+                  <a:buFont typeface="Arial" panose="020B0604020202020204" pitchFamily="34" charset="0"/>
+                  <a:buChar char="•"/>
+                  <a:defRPr sz="1800" kern="1200">
+                    <a:solidFill>
+                      <a:schemeClr val="tx1"/>
+                    </a:solidFill>
+                    <a:latin typeface="+mn-lt"/>
+                    <a:ea typeface="+mn-ea"/>
+                    <a:cs typeface="+mn-cs"/>
+                  </a:defRPr>
+                </a:lvl9pPr>
+              </a:lstStyle>
+              <a:p>
+                <a:pPr marL="0" indent="0">
+                  <a:spcBef>
+                    <a:spcPts val="0"/>
+                  </a:spcBef>
+                  <a:buNone/>
+                </a:pPr>
+                <a:r>
+                  <a:rPr lang="en-US" sz="1200" b="1" dirty="0"/>
+                  <a:t>MDP</a:t>
+                </a:r>
+              </a:p>
+              <a:p>
+                <a:pPr marL="0" indent="0">
+                  <a:spcBef>
+                    <a:spcPts val="0"/>
+                  </a:spcBef>
+                  <a:buNone/>
+                </a:pPr>
+                <a14:m>
+                  <m:oMath xmlns:m="http://schemas.openxmlformats.org/officeDocument/2006/math">
+                    <m:r>
+                      <a:rPr lang="en-US" sz="1200" i="1" dirty="0" smtClean="0">
+                        <a:latin typeface="Cambria Math" panose="02040503050406030204" pitchFamily="18" charset="0"/>
+                      </a:rPr>
+                      <m:t>𝑠</m:t>
+                    </m:r>
+                    <m:r>
+                      <a:rPr lang="en-US" sz="1200" i="1" dirty="0" smtClean="0">
+                        <a:latin typeface="Cambria Math" panose="02040503050406030204" pitchFamily="18" charset="0"/>
+                      </a:rPr>
+                      <m:t>, </m:t>
+                    </m:r>
+                    <m:r>
+                      <a:rPr lang="en-US" sz="1200" i="1" dirty="0" smtClean="0">
+                        <a:latin typeface="Cambria Math" panose="02040503050406030204" pitchFamily="18" charset="0"/>
+                      </a:rPr>
+                      <m:t>𝑠</m:t>
+                    </m:r>
+                    <m:r>
+                      <a:rPr lang="en-US" sz="1200" b="0" i="1" dirty="0" smtClean="0">
+                        <a:latin typeface="Cambria Math" panose="02040503050406030204" pitchFamily="18" charset="0"/>
+                      </a:rPr>
+                      <m:t>′</m:t>
+                    </m:r>
+                  </m:oMath>
+                </a14:m>
+                <a:r>
+                  <a:rPr lang="en-US" sz="1200" dirty="0"/>
+                  <a:t> 	states</a:t>
+                </a:r>
+              </a:p>
+              <a:p>
+                <a:pPr marL="0" indent="0">
+                  <a:spcBef>
+                    <a:spcPts val="0"/>
+                  </a:spcBef>
+                  <a:buNone/>
+                </a:pPr>
+                <a14:m>
+                  <m:oMath xmlns:m="http://schemas.openxmlformats.org/officeDocument/2006/math">
+                    <m:r>
+                      <a:rPr lang="en-US" sz="1200" i="1" dirty="0" smtClean="0">
+                        <a:latin typeface="Cambria Math" panose="02040503050406030204" pitchFamily="18" charset="0"/>
+                      </a:rPr>
+                      <m:t>𝑎</m:t>
+                    </m:r>
+                  </m:oMath>
+                </a14:m>
+                <a:r>
+                  <a:rPr lang="en-US" sz="1200" dirty="0"/>
+                  <a:t> 	an action</a:t>
+                </a:r>
+              </a:p>
+              <a:p>
+                <a:pPr marL="0" indent="0">
+                  <a:spcBef>
+                    <a:spcPts val="0"/>
+                  </a:spcBef>
+                  <a:buNone/>
+                </a:pPr>
+                <a14:m>
+                  <m:oMath xmlns:m="http://schemas.openxmlformats.org/officeDocument/2006/math">
+                    <m:r>
+                      <a:rPr lang="en-US" sz="1200" i="1" dirty="0" smtClean="0">
+                        <a:latin typeface="Cambria Math" panose="02040503050406030204" pitchFamily="18" charset="0"/>
+                      </a:rPr>
+                      <m:t>𝑟</m:t>
+                    </m:r>
+                  </m:oMath>
+                </a14:m>
+                <a:r>
+                  <a:rPr lang="en-US" sz="1200" dirty="0"/>
+                  <a:t> 	a reward</a:t>
+                </a:r>
+              </a:p>
+              <a:p>
+                <a:pPr marL="0" indent="0">
+                  <a:spcBef>
+                    <a:spcPts val="0"/>
+                  </a:spcBef>
+                  <a:buNone/>
+                </a:pPr>
+                <a14:m>
+                  <m:oMath xmlns:m="http://schemas.openxmlformats.org/officeDocument/2006/math">
+                    <m:r>
+                      <a:rPr lang="en-US" sz="1200" i="1" dirty="0" smtClean="0">
+                        <a:latin typeface="Cambria Math" panose="02040503050406030204" pitchFamily="18" charset="0"/>
+                        <a:ea typeface="Cambria Math" panose="02040503050406030204" pitchFamily="18" charset="0"/>
+                      </a:rPr>
+                      <m:t>𝒮</m:t>
+                    </m:r>
+                  </m:oMath>
+                </a14:m>
+                <a:r>
+                  <a:rPr lang="en-US" sz="1200" dirty="0"/>
+                  <a:t> 	set of all (nonterminal) states, </a:t>
+                </a:r>
+                <a14:m>
+                  <m:oMath xmlns:m="http://schemas.openxmlformats.org/officeDocument/2006/math">
+                    <m:sSup>
+                      <m:sSupPr>
+                        <m:ctrlPr>
+                          <a:rPr lang="en-US" sz="1200" i="1" dirty="0">
+                            <a:latin typeface="Cambria Math" panose="02040503050406030204" pitchFamily="18" charset="0"/>
+                            <a:ea typeface="Cambria Math" panose="02040503050406030204" pitchFamily="18" charset="0"/>
+                          </a:rPr>
+                        </m:ctrlPr>
+                      </m:sSupPr>
+                      <m:e>
+                        <m:r>
+                          <a:rPr lang="en-US" sz="1200" i="1" dirty="0">
+                            <a:latin typeface="Cambria Math" panose="02040503050406030204" pitchFamily="18" charset="0"/>
+                            <a:ea typeface="Cambria Math" panose="02040503050406030204" pitchFamily="18" charset="0"/>
+                          </a:rPr>
+                          <m:t>𝒮</m:t>
+                        </m:r>
+                      </m:e>
+                      <m:sup>
+                        <m:r>
+                          <a:rPr lang="en-US" sz="1200" b="0" i="1" dirty="0" smtClean="0">
+                            <a:latin typeface="Cambria Math" panose="02040503050406030204" pitchFamily="18" charset="0"/>
+                            <a:ea typeface="Cambria Math" panose="02040503050406030204" pitchFamily="18" charset="0"/>
+                          </a:rPr>
+                          <m:t>+</m:t>
+                        </m:r>
+                      </m:sup>
+                    </m:sSup>
+                  </m:oMath>
+                </a14:m>
+                <a:r>
+                  <a:rPr lang="en-US" sz="1200" dirty="0"/>
+                  <a:t> are all states </a:t>
+                </a:r>
+              </a:p>
+              <a:p>
+                <a:pPr marL="0" indent="0">
+                  <a:spcBef>
+                    <a:spcPts val="0"/>
+                  </a:spcBef>
+                  <a:buNone/>
+                </a:pPr>
+                <a14:m>
+                  <m:oMath xmlns:m="http://schemas.openxmlformats.org/officeDocument/2006/math">
+                    <m:r>
+                      <a:rPr lang="en-US" sz="1200" i="1" dirty="0" smtClean="0">
+                        <a:latin typeface="Cambria Math" panose="02040503050406030204" pitchFamily="18" charset="0"/>
+                        <a:ea typeface="Cambria Math" panose="02040503050406030204" pitchFamily="18" charset="0"/>
+                      </a:rPr>
+                      <m:t>𝒜</m:t>
+                    </m:r>
+                    <m:r>
+                      <a:rPr lang="en-US" sz="1200" i="1" dirty="0">
+                        <a:latin typeface="Cambria Math" panose="02040503050406030204" pitchFamily="18" charset="0"/>
+                      </a:rPr>
+                      <m:t>(</m:t>
+                    </m:r>
+                    <m:r>
+                      <a:rPr lang="en-US" sz="1200" i="1" dirty="0">
+                        <a:latin typeface="Cambria Math" panose="02040503050406030204" pitchFamily="18" charset="0"/>
+                      </a:rPr>
+                      <m:t>𝑠</m:t>
+                    </m:r>
+                    <m:r>
+                      <a:rPr lang="en-US" sz="1200" i="1" dirty="0">
+                        <a:latin typeface="Cambria Math" panose="02040503050406030204" pitchFamily="18" charset="0"/>
+                      </a:rPr>
+                      <m:t>)</m:t>
+                    </m:r>
+                  </m:oMath>
+                </a14:m>
+                <a:r>
+                  <a:rPr lang="en-US" sz="1200" dirty="0"/>
+                  <a:t>	set of all actions available in state </a:t>
+                </a:r>
+                <a14:m>
+                  <m:oMath xmlns:m="http://schemas.openxmlformats.org/officeDocument/2006/math">
+                    <m:r>
+                      <a:rPr lang="en-US" sz="1200" i="1" dirty="0" smtClean="0">
+                        <a:latin typeface="Cambria Math" panose="02040503050406030204" pitchFamily="18" charset="0"/>
+                      </a:rPr>
+                      <m:t>𝑠</m:t>
+                    </m:r>
+                  </m:oMath>
+                </a14:m>
+                <a:endParaRPr lang="en-US" sz="1200" dirty="0"/>
+              </a:p>
+              <a:p>
+                <a:pPr marL="0" indent="0">
+                  <a:spcBef>
+                    <a:spcPts val="0"/>
+                  </a:spcBef>
+                  <a:buNone/>
+                </a:pPr>
+                <a14:m>
+                  <m:oMath xmlns:m="http://schemas.openxmlformats.org/officeDocument/2006/math">
+                    <m:r>
+                      <a:rPr lang="en-US" sz="1200" i="1">
+                        <a:latin typeface="Cambria Math" panose="02040503050406030204" pitchFamily="18" charset="0"/>
+                      </a:rPr>
+                      <m:t>𝛾</m:t>
+                    </m:r>
+                  </m:oMath>
+                </a14:m>
+                <a:r>
+                  <a:rPr lang="en-US" sz="1200" dirty="0"/>
+                  <a:t> 	discount-rate parameter</a:t>
+                </a:r>
+                <a:endParaRPr lang="en-US" sz="1200" i="1" dirty="0">
+                  <a:latin typeface="Cambria Math" panose="02040503050406030204" pitchFamily="18" charset="0"/>
+                </a:endParaRPr>
+              </a:p>
+              <a:p>
+                <a:pPr marL="0" indent="0">
+                  <a:spcBef>
+                    <a:spcPts val="0"/>
+                  </a:spcBef>
+                  <a:buNone/>
+                </a:pPr>
+                <a14:m>
+                  <m:oMath xmlns:m="http://schemas.openxmlformats.org/officeDocument/2006/math">
+                    <m:r>
+                      <a:rPr lang="en-US" sz="1200" i="1" dirty="0" smtClean="0">
+                        <a:latin typeface="Cambria Math" panose="02040503050406030204" pitchFamily="18" charset="0"/>
+                      </a:rPr>
+                      <m:t>𝑡</m:t>
+                    </m:r>
+                  </m:oMath>
+                </a14:m>
+                <a:r>
+                  <a:rPr lang="en-US" sz="1200" dirty="0"/>
+                  <a:t> 	discrete time step</a:t>
+                </a:r>
+              </a:p>
+              <a:p>
+                <a:pPr marL="0" indent="0">
+                  <a:spcBef>
+                    <a:spcPts val="0"/>
+                  </a:spcBef>
+                  <a:buNone/>
+                </a:pPr>
+                <a14:m>
+                  <m:oMath xmlns:m="http://schemas.openxmlformats.org/officeDocument/2006/math">
+                    <m:r>
+                      <a:rPr lang="en-US" sz="1200" i="1" dirty="0" smtClean="0">
+                        <a:latin typeface="Cambria Math" panose="02040503050406030204" pitchFamily="18" charset="0"/>
+                      </a:rPr>
+                      <m:t>𝑇</m:t>
+                    </m:r>
+                  </m:oMath>
+                </a14:m>
+                <a:r>
+                  <a:rPr lang="en-US" sz="1200" dirty="0"/>
+                  <a:t> 	final time step of an episode (a.k.a. horizon)</a:t>
+                </a:r>
+              </a:p>
+              <a:p>
+                <a:pPr marL="0" indent="0">
+                  <a:spcBef>
+                    <a:spcPts val="0"/>
+                  </a:spcBef>
+                  <a:buNone/>
+                </a:pPr>
+                <a14:m>
+                  <m:oMath xmlns:m="http://schemas.openxmlformats.org/officeDocument/2006/math">
+                    <m:sSub>
+                      <m:sSubPr>
+                        <m:ctrlPr>
+                          <a:rPr lang="en-US" sz="1200" i="1" dirty="0" smtClean="0">
+                            <a:latin typeface="Cambria Math" panose="02040503050406030204" pitchFamily="18" charset="0"/>
+                          </a:rPr>
+                        </m:ctrlPr>
+                      </m:sSubPr>
+                      <m:e>
+                        <m:r>
+                          <a:rPr lang="en-US" sz="1200" i="1" dirty="0" smtClean="0">
+                            <a:latin typeface="Cambria Math" panose="02040503050406030204" pitchFamily="18" charset="0"/>
+                          </a:rPr>
+                          <m:t>𝐴</m:t>
+                        </m:r>
+                      </m:e>
+                      <m:sub>
+                        <m:r>
+                          <a:rPr lang="en-US" sz="1200" b="0" i="1" dirty="0" smtClean="0">
+                            <a:latin typeface="Cambria Math" panose="02040503050406030204" pitchFamily="18" charset="0"/>
+                          </a:rPr>
+                          <m:t>𝑡</m:t>
+                        </m:r>
+                      </m:sub>
+                    </m:sSub>
+                  </m:oMath>
+                </a14:m>
+                <a:r>
+                  <a:rPr lang="en-US" sz="1200" dirty="0"/>
+                  <a:t> 	random variable for the action at time </a:t>
+                </a:r>
+                <a14:m>
+                  <m:oMath xmlns:m="http://schemas.openxmlformats.org/officeDocument/2006/math">
+                    <m:r>
+                      <a:rPr lang="en-US" sz="1200" i="1" dirty="0" smtClean="0">
+                        <a:latin typeface="Cambria Math" panose="02040503050406030204" pitchFamily="18" charset="0"/>
+                      </a:rPr>
+                      <m:t>𝑡</m:t>
+                    </m:r>
+                  </m:oMath>
+                </a14:m>
+                <a:endParaRPr lang="en-US" sz="1200" dirty="0"/>
+              </a:p>
+              <a:p>
+                <a:pPr marL="0" indent="0">
+                  <a:spcBef>
+                    <a:spcPts val="0"/>
+                  </a:spcBef>
+                  <a:buNone/>
+                </a:pPr>
+                <a14:m>
+                  <m:oMath xmlns:m="http://schemas.openxmlformats.org/officeDocument/2006/math">
+                    <m:sSub>
+                      <m:sSubPr>
+                        <m:ctrlPr>
+                          <a:rPr lang="en-US" sz="1200" i="1" dirty="0" smtClean="0">
+                            <a:latin typeface="Cambria Math" panose="02040503050406030204" pitchFamily="18" charset="0"/>
+                          </a:rPr>
+                        </m:ctrlPr>
+                      </m:sSubPr>
+                      <m:e>
+                        <m:r>
+                          <a:rPr lang="en-US" sz="1200" i="1" dirty="0" smtClean="0">
+                            <a:latin typeface="Cambria Math" panose="02040503050406030204" pitchFamily="18" charset="0"/>
+                          </a:rPr>
+                          <m:t>𝑆</m:t>
+                        </m:r>
+                      </m:e>
+                      <m:sub>
+                        <m:r>
+                          <a:rPr lang="en-US" sz="1200" b="0" i="1" dirty="0" smtClean="0">
+                            <a:latin typeface="Cambria Math" panose="02040503050406030204" pitchFamily="18" charset="0"/>
+                          </a:rPr>
+                          <m:t>𝑡</m:t>
+                        </m:r>
+                      </m:sub>
+                    </m:sSub>
+                  </m:oMath>
+                </a14:m>
+                <a:r>
+                  <a:rPr lang="en-US" sz="1200" dirty="0"/>
+                  <a:t>	random variable for the state at time </a:t>
+                </a:r>
+                <a14:m>
+                  <m:oMath xmlns:m="http://schemas.openxmlformats.org/officeDocument/2006/math">
+                    <m:r>
+                      <a:rPr lang="en-US" sz="1200" i="1" dirty="0" smtClean="0">
+                        <a:latin typeface="Cambria Math" panose="02040503050406030204" pitchFamily="18" charset="0"/>
+                      </a:rPr>
+                      <m:t>𝑡</m:t>
+                    </m:r>
+                  </m:oMath>
+                </a14:m>
+                <a:endParaRPr lang="en-US" sz="1200" dirty="0"/>
+              </a:p>
+              <a:p>
+                <a:pPr marL="0" indent="0">
+                  <a:spcBef>
+                    <a:spcPts val="0"/>
+                  </a:spcBef>
+                  <a:buNone/>
+                </a:pPr>
+                <a14:m>
+                  <m:oMath xmlns:m="http://schemas.openxmlformats.org/officeDocument/2006/math">
+                    <m:sSub>
+                      <m:sSubPr>
+                        <m:ctrlPr>
+                          <a:rPr lang="en-US" sz="1200" i="1" dirty="0" smtClean="0">
+                            <a:latin typeface="Cambria Math" panose="02040503050406030204" pitchFamily="18" charset="0"/>
+                          </a:rPr>
+                        </m:ctrlPr>
+                      </m:sSubPr>
+                      <m:e>
+                        <m:r>
+                          <a:rPr lang="en-US" sz="1200" i="1" dirty="0" smtClean="0">
+                            <a:latin typeface="Cambria Math" panose="02040503050406030204" pitchFamily="18" charset="0"/>
+                          </a:rPr>
+                          <m:t>𝑅</m:t>
+                        </m:r>
+                      </m:e>
+                      <m:sub>
+                        <m:r>
+                          <a:rPr lang="en-US" sz="1200" b="0" i="1" dirty="0" smtClean="0">
+                            <a:latin typeface="Cambria Math" panose="02040503050406030204" pitchFamily="18" charset="0"/>
+                          </a:rPr>
+                          <m:t>𝑡</m:t>
+                        </m:r>
+                      </m:sub>
+                    </m:sSub>
+                  </m:oMath>
+                </a14:m>
+                <a:r>
+                  <a:rPr lang="en-US" sz="1200" dirty="0"/>
+                  <a:t> 	random variable for the reward at time </a:t>
+                </a:r>
+                <a14:m>
+                  <m:oMath xmlns:m="http://schemas.openxmlformats.org/officeDocument/2006/math">
+                    <m:r>
+                      <a:rPr lang="en-US" sz="1200" i="1" dirty="0" smtClean="0">
+                        <a:latin typeface="Cambria Math" panose="02040503050406030204" pitchFamily="18" charset="0"/>
+                      </a:rPr>
+                      <m:t>𝑡</m:t>
+                    </m:r>
+                  </m:oMath>
+                </a14:m>
+                <a:endParaRPr lang="en-US" sz="1200" dirty="0"/>
+              </a:p>
+              <a:p>
+                <a:pPr marL="0" indent="0">
+                  <a:lnSpc>
+                    <a:spcPct val="100000"/>
+                  </a:lnSpc>
+                  <a:spcBef>
+                    <a:spcPts val="0"/>
+                  </a:spcBef>
+                  <a:buNone/>
+                </a:pPr>
+                <a:endParaRPr lang="en-US" sz="1200" i="1" dirty="0">
+                  <a:latin typeface="Cambria Math" panose="02040503050406030204" pitchFamily="18" charset="0"/>
+                </a:endParaRPr>
+              </a:p>
+              <a:p>
+                <a:pPr marL="0" indent="0">
+                  <a:lnSpc>
+                    <a:spcPct val="100000"/>
+                  </a:lnSpc>
+                  <a:spcBef>
+                    <a:spcPts val="0"/>
+                  </a:spcBef>
+                  <a:buNone/>
+                </a:pPr>
+                <a14:m>
+                  <m:oMath xmlns:m="http://schemas.openxmlformats.org/officeDocument/2006/math">
+                    <m:r>
+                      <a:rPr lang="en-US" sz="1200" i="1" dirty="0">
+                        <a:latin typeface="Cambria Math" panose="02040503050406030204" pitchFamily="18" charset="0"/>
+                      </a:rPr>
+                      <m:t>𝑝</m:t>
+                    </m:r>
+                    <m:d>
+                      <m:dPr>
+                        <m:endChr m:val="|"/>
+                        <m:ctrlPr>
+                          <a:rPr lang="en-US" sz="1200" i="1" dirty="0">
+                            <a:latin typeface="Cambria Math" panose="02040503050406030204" pitchFamily="18" charset="0"/>
+                          </a:rPr>
+                        </m:ctrlPr>
+                      </m:dPr>
+                      <m:e>
+                        <m:sSup>
+                          <m:sSupPr>
+                            <m:ctrlPr>
+                              <a:rPr lang="en-US" sz="1200" i="1" dirty="0">
+                                <a:latin typeface="Cambria Math" panose="02040503050406030204" pitchFamily="18" charset="0"/>
+                              </a:rPr>
+                            </m:ctrlPr>
+                          </m:sSupPr>
+                          <m:e>
+                            <m:r>
+                              <a:rPr lang="en-US" sz="1200" i="1" dirty="0">
+                                <a:latin typeface="Cambria Math" panose="02040503050406030204" pitchFamily="18" charset="0"/>
+                              </a:rPr>
+                              <m:t>𝑠</m:t>
+                            </m:r>
+                          </m:e>
+                          <m:sup>
+                            <m:r>
+                              <a:rPr lang="en-US" sz="1200" i="1" dirty="0">
+                                <a:latin typeface="Cambria Math" panose="02040503050406030204" pitchFamily="18" charset="0"/>
+                              </a:rPr>
+                              <m:t>′</m:t>
+                            </m:r>
+                          </m:sup>
+                        </m:sSup>
+                        <m:r>
+                          <a:rPr lang="en-US" sz="1200" b="0" i="1" dirty="0" smtClean="0">
+                            <a:latin typeface="Cambria Math" panose="02040503050406030204" pitchFamily="18" charset="0"/>
+                          </a:rPr>
+                          <m:t>,</m:t>
+                        </m:r>
+                        <m:r>
+                          <a:rPr lang="en-US" sz="1200" b="0" i="1" dirty="0" smtClean="0">
+                            <a:latin typeface="Cambria Math" panose="02040503050406030204" pitchFamily="18" charset="0"/>
+                          </a:rPr>
+                          <m:t>𝑟</m:t>
+                        </m:r>
+                        <m:r>
+                          <a:rPr lang="en-US" sz="1200" i="1" dirty="0">
+                            <a:latin typeface="Cambria Math" panose="02040503050406030204" pitchFamily="18" charset="0"/>
+                          </a:rPr>
+                          <m:t> </m:t>
+                        </m:r>
+                      </m:e>
+                    </m:d>
+                    <m:r>
+                      <a:rPr lang="en-US" sz="1200" i="1" dirty="0">
+                        <a:latin typeface="Cambria Math" panose="02040503050406030204" pitchFamily="18" charset="0"/>
+                      </a:rPr>
+                      <m:t>𝑠</m:t>
+                    </m:r>
+                    <m:r>
+                      <a:rPr lang="en-US" sz="1200" i="1" dirty="0">
+                        <a:latin typeface="Cambria Math" panose="02040503050406030204" pitchFamily="18" charset="0"/>
+                      </a:rPr>
+                      <m:t>, </m:t>
+                    </m:r>
+                    <m:r>
+                      <a:rPr lang="en-US" sz="1200" i="1" dirty="0">
+                        <a:latin typeface="Cambria Math" panose="02040503050406030204" pitchFamily="18" charset="0"/>
+                      </a:rPr>
+                      <m:t>𝑎</m:t>
+                    </m:r>
+                    <m:r>
+                      <a:rPr lang="en-US" sz="1200" i="1" dirty="0">
+                        <a:latin typeface="Cambria Math" panose="02040503050406030204" pitchFamily="18" charset="0"/>
+                      </a:rPr>
+                      <m:t>)</m:t>
+                    </m:r>
+                  </m:oMath>
+                </a14:m>
+                <a:r>
+                  <a:rPr lang="en-US" sz="1200" dirty="0"/>
+                  <a:t>	probability of transition to state </a:t>
+                </a:r>
+                <a14:m>
+                  <m:oMath xmlns:m="http://schemas.openxmlformats.org/officeDocument/2006/math">
+                    <m:r>
+                      <a:rPr lang="en-US" sz="1200" i="1" dirty="0">
+                        <a:latin typeface="Cambria Math" panose="02040503050406030204" pitchFamily="18" charset="0"/>
+                      </a:rPr>
+                      <m:t>𝑠</m:t>
+                    </m:r>
+                    <m:r>
+                      <a:rPr lang="en-US" sz="1200" i="1" dirty="0">
+                        <a:latin typeface="Cambria Math" panose="02040503050406030204" pitchFamily="18" charset="0"/>
+                      </a:rPr>
+                      <m:t>′</m:t>
+                    </m:r>
+                  </m:oMath>
+                </a14:m>
+                <a:r>
+                  <a:rPr lang="en-US" sz="1200" dirty="0"/>
+                  <a:t> and receiving reward </a:t>
+                </a:r>
+                <a14:m>
+                  <m:oMath xmlns:m="http://schemas.openxmlformats.org/officeDocument/2006/math">
+                    <m:r>
+                      <a:rPr lang="en-US" sz="1200" b="0" i="1" smtClean="0">
+                        <a:latin typeface="Cambria Math" panose="02040503050406030204" pitchFamily="18" charset="0"/>
+                      </a:rPr>
+                      <m:t>𝑟</m:t>
+                    </m:r>
+                  </m:oMath>
+                </a14:m>
+                <a:r>
+                  <a:rPr lang="en-US" sz="1200" dirty="0"/>
+                  <a:t>, </a:t>
+                </a:r>
+                <a:br>
+                  <a:rPr lang="en-US" sz="1200" dirty="0"/>
+                </a:br>
+                <a:r>
+                  <a:rPr lang="en-US" sz="1200" dirty="0"/>
+                  <a:t>	from state </a:t>
+                </a:r>
+                <a14:m>
+                  <m:oMath xmlns:m="http://schemas.openxmlformats.org/officeDocument/2006/math">
+                    <m:r>
+                      <a:rPr lang="en-US" sz="1200" i="1" dirty="0">
+                        <a:latin typeface="Cambria Math" panose="02040503050406030204" pitchFamily="18" charset="0"/>
+                      </a:rPr>
+                      <m:t>𝑠</m:t>
+                    </m:r>
+                  </m:oMath>
+                </a14:m>
+                <a:r>
+                  <a:rPr lang="en-US" sz="1200" dirty="0"/>
+                  <a:t> taking action </a:t>
+                </a:r>
+                <a14:m>
+                  <m:oMath xmlns:m="http://schemas.openxmlformats.org/officeDocument/2006/math">
+                    <m:r>
+                      <a:rPr lang="en-US" sz="1200" i="1" dirty="0">
+                        <a:latin typeface="Cambria Math" panose="02040503050406030204" pitchFamily="18" charset="0"/>
+                      </a:rPr>
+                      <m:t>𝑎</m:t>
+                    </m:r>
+                  </m:oMath>
+                </a14:m>
+                <a:r>
+                  <a:rPr lang="en-US" sz="1200" dirty="0"/>
+                  <a:t>.</a:t>
+                </a:r>
+              </a:p>
+              <a:p>
+                <a:pPr marL="0" indent="0">
+                  <a:lnSpc>
+                    <a:spcPct val="100000"/>
+                  </a:lnSpc>
+                  <a:spcBef>
+                    <a:spcPts val="0"/>
+                  </a:spcBef>
+                  <a:buNone/>
+                </a:pPr>
+                <a14:m>
+                  <m:oMath xmlns:m="http://schemas.openxmlformats.org/officeDocument/2006/math">
+                    <m:r>
+                      <a:rPr lang="en-US" sz="1200" i="1" dirty="0">
+                        <a:latin typeface="Cambria Math" panose="02040503050406030204" pitchFamily="18" charset="0"/>
+                      </a:rPr>
+                      <m:t>𝑝</m:t>
+                    </m:r>
+                    <m:d>
+                      <m:dPr>
+                        <m:endChr m:val="|"/>
+                        <m:ctrlPr>
+                          <a:rPr lang="en-US" sz="1200" i="1" dirty="0">
+                            <a:latin typeface="Cambria Math" panose="02040503050406030204" pitchFamily="18" charset="0"/>
+                          </a:rPr>
+                        </m:ctrlPr>
+                      </m:dPr>
+                      <m:e>
+                        <m:sSup>
+                          <m:sSupPr>
+                            <m:ctrlPr>
+                              <a:rPr lang="en-US" sz="1200" i="1" dirty="0">
+                                <a:latin typeface="Cambria Math" panose="02040503050406030204" pitchFamily="18" charset="0"/>
+                              </a:rPr>
+                            </m:ctrlPr>
+                          </m:sSupPr>
+                          <m:e>
+                            <m:r>
+                              <a:rPr lang="en-US" sz="1200" i="1" dirty="0">
+                                <a:latin typeface="Cambria Math" panose="02040503050406030204" pitchFamily="18" charset="0"/>
+                              </a:rPr>
+                              <m:t>𝑠</m:t>
+                            </m:r>
+                          </m:e>
+                          <m:sup>
+                            <m:r>
+                              <a:rPr lang="en-US" sz="1200" i="1" dirty="0">
+                                <a:latin typeface="Cambria Math" panose="02040503050406030204" pitchFamily="18" charset="0"/>
+                              </a:rPr>
+                              <m:t>′</m:t>
+                            </m:r>
+                          </m:sup>
+                        </m:sSup>
+                      </m:e>
+                    </m:d>
+                    <m:r>
+                      <a:rPr lang="en-US" sz="1200" i="1" dirty="0">
+                        <a:latin typeface="Cambria Math" panose="02040503050406030204" pitchFamily="18" charset="0"/>
+                      </a:rPr>
+                      <m:t>𝑠</m:t>
+                    </m:r>
+                    <m:r>
+                      <a:rPr lang="en-US" sz="1200" i="1" dirty="0">
+                        <a:latin typeface="Cambria Math" panose="02040503050406030204" pitchFamily="18" charset="0"/>
+                      </a:rPr>
+                      <m:t>, </m:t>
+                    </m:r>
+                    <m:r>
+                      <a:rPr lang="en-US" sz="1200" i="1" dirty="0">
+                        <a:latin typeface="Cambria Math" panose="02040503050406030204" pitchFamily="18" charset="0"/>
+                      </a:rPr>
+                      <m:t>𝑎</m:t>
+                    </m:r>
+                    <m:r>
+                      <a:rPr lang="en-US" sz="1200" i="1" dirty="0">
+                        <a:latin typeface="Cambria Math" panose="02040503050406030204" pitchFamily="18" charset="0"/>
+                      </a:rPr>
+                      <m:t>)</m:t>
+                    </m:r>
+                  </m:oMath>
+                </a14:m>
+                <a:r>
+                  <a:rPr lang="en-US" sz="1200" dirty="0"/>
+                  <a:t> 	probability of transition to state </a:t>
+                </a:r>
+                <a14:m>
+                  <m:oMath xmlns:m="http://schemas.openxmlformats.org/officeDocument/2006/math">
+                    <m:r>
+                      <a:rPr lang="en-US" sz="1200" i="1" dirty="0">
+                        <a:latin typeface="Cambria Math" panose="02040503050406030204" pitchFamily="18" charset="0"/>
+                      </a:rPr>
+                      <m:t>𝑠</m:t>
+                    </m:r>
+                    <m:r>
+                      <a:rPr lang="en-US" sz="1200" i="1" dirty="0">
+                        <a:latin typeface="Cambria Math" panose="02040503050406030204" pitchFamily="18" charset="0"/>
+                      </a:rPr>
+                      <m:t>′</m:t>
+                    </m:r>
+                  </m:oMath>
+                </a14:m>
+                <a:r>
+                  <a:rPr lang="en-US" sz="1200" dirty="0"/>
+                  <a:t> fom state </a:t>
+                </a:r>
+                <a14:m>
+                  <m:oMath xmlns:m="http://schemas.openxmlformats.org/officeDocument/2006/math">
+                    <m:r>
+                      <a:rPr lang="en-US" sz="1200" i="1" dirty="0">
+                        <a:latin typeface="Cambria Math" panose="02040503050406030204" pitchFamily="18" charset="0"/>
+                      </a:rPr>
+                      <m:t>𝑠</m:t>
+                    </m:r>
+                  </m:oMath>
+                </a14:m>
+                <a:r>
+                  <a:rPr lang="en-US" sz="1200" dirty="0"/>
+                  <a:t> taking action </a:t>
+                </a:r>
+                <a14:m>
+                  <m:oMath xmlns:m="http://schemas.openxmlformats.org/officeDocument/2006/math">
+                    <m:r>
+                      <a:rPr lang="en-US" sz="1200" i="1" dirty="0">
+                        <a:latin typeface="Cambria Math" panose="02040503050406030204" pitchFamily="18" charset="0"/>
+                      </a:rPr>
+                      <m:t>𝑎</m:t>
+                    </m:r>
+                  </m:oMath>
+                </a14:m>
+                <a:r>
+                  <a:rPr lang="en-US" sz="1200" dirty="0"/>
+                  <a:t>.</a:t>
+                </a:r>
+              </a:p>
+              <a:p>
+                <a:pPr marL="0" indent="0">
+                  <a:lnSpc>
+                    <a:spcPct val="100000"/>
+                  </a:lnSpc>
+                  <a:spcBef>
+                    <a:spcPts val="0"/>
+                  </a:spcBef>
+                  <a:buNone/>
+                </a:pPr>
+                <a14:m>
+                  <m:oMath xmlns:m="http://schemas.openxmlformats.org/officeDocument/2006/math">
+                    <m:r>
+                      <a:rPr lang="en-US" sz="1200" b="0" i="1" smtClean="0">
+                        <a:latin typeface="Cambria Math" panose="02040503050406030204" pitchFamily="18" charset="0"/>
+                      </a:rPr>
+                      <m:t>𝑟</m:t>
+                    </m:r>
+                    <m:r>
+                      <a:rPr lang="en-US" sz="1200" b="0" i="1" smtClean="0">
+                        <a:latin typeface="Cambria Math" panose="02040503050406030204" pitchFamily="18" charset="0"/>
+                      </a:rPr>
+                      <m:t>(</m:t>
+                    </m:r>
+                    <m:r>
+                      <a:rPr lang="en-US" sz="1200" b="0" i="1" smtClean="0">
+                        <a:latin typeface="Cambria Math" panose="02040503050406030204" pitchFamily="18" charset="0"/>
+                      </a:rPr>
+                      <m:t>𝑠</m:t>
+                    </m:r>
+                    <m:r>
+                      <a:rPr lang="en-US" sz="1200" b="0" i="1" smtClean="0">
+                        <a:latin typeface="Cambria Math" panose="02040503050406030204" pitchFamily="18" charset="0"/>
+                      </a:rPr>
+                      <m:t>,</m:t>
+                    </m:r>
+                    <m:r>
+                      <a:rPr lang="en-US" sz="1200" b="0" i="1" smtClean="0">
+                        <a:latin typeface="Cambria Math" panose="02040503050406030204" pitchFamily="18" charset="0"/>
+                      </a:rPr>
+                      <m:t>𝑎</m:t>
+                    </m:r>
+                    <m:r>
+                      <a:rPr lang="en-US" sz="1200" b="0" i="1" smtClean="0">
+                        <a:latin typeface="Cambria Math" panose="02040503050406030204" pitchFamily="18" charset="0"/>
+                      </a:rPr>
+                      <m:t>)</m:t>
+                    </m:r>
+                  </m:oMath>
+                </a14:m>
+                <a:r>
+                  <a:rPr lang="en-US" sz="1200" dirty="0"/>
+                  <a:t>	expected immediate reward from state </a:t>
+                </a:r>
+                <a14:m>
+                  <m:oMath xmlns:m="http://schemas.openxmlformats.org/officeDocument/2006/math">
+                    <m:r>
+                      <a:rPr lang="en-US" sz="1200" i="1" dirty="0">
+                        <a:latin typeface="Cambria Math" panose="02040503050406030204" pitchFamily="18" charset="0"/>
+                      </a:rPr>
+                      <m:t>𝑠</m:t>
+                    </m:r>
+                  </m:oMath>
+                </a14:m>
+                <a:r>
+                  <a:rPr lang="en-US" sz="1200" dirty="0"/>
+                  <a:t> after action </a:t>
+                </a:r>
+                <a14:m>
+                  <m:oMath xmlns:m="http://schemas.openxmlformats.org/officeDocument/2006/math">
+                    <m:r>
+                      <a:rPr lang="en-US" sz="1200" i="1" dirty="0">
+                        <a:latin typeface="Cambria Math" panose="02040503050406030204" pitchFamily="18" charset="0"/>
+                      </a:rPr>
+                      <m:t>𝑎</m:t>
+                    </m:r>
+                    <m:r>
+                      <a:rPr lang="en-US" sz="1200" b="0" i="1" dirty="0" smtClean="0">
+                        <a:latin typeface="Cambria Math" panose="02040503050406030204" pitchFamily="18" charset="0"/>
+                      </a:rPr>
+                      <m:t>.</m:t>
+                    </m:r>
+                  </m:oMath>
+                </a14:m>
+                <a:endParaRPr lang="en-US" sz="1200" b="0" dirty="0"/>
+              </a:p>
+              <a:p>
+                <a:pPr marL="0" indent="0">
+                  <a:lnSpc>
+                    <a:spcPct val="100000"/>
+                  </a:lnSpc>
+                  <a:spcBef>
+                    <a:spcPts val="0"/>
+                  </a:spcBef>
+                  <a:buNone/>
+                </a:pPr>
+                <a14:m>
+                  <m:oMath xmlns:m="http://schemas.openxmlformats.org/officeDocument/2006/math">
+                    <m:r>
+                      <a:rPr lang="en-US" sz="1200" i="1">
+                        <a:latin typeface="Cambria Math" panose="02040503050406030204" pitchFamily="18" charset="0"/>
+                      </a:rPr>
+                      <m:t>𝑟</m:t>
+                    </m:r>
+                    <m:r>
+                      <a:rPr lang="en-US" sz="1200" i="1">
+                        <a:latin typeface="Cambria Math" panose="02040503050406030204" pitchFamily="18" charset="0"/>
+                      </a:rPr>
+                      <m:t>(</m:t>
+                    </m:r>
+                    <m:r>
+                      <a:rPr lang="en-US" sz="1200" i="1">
+                        <a:latin typeface="Cambria Math" panose="02040503050406030204" pitchFamily="18" charset="0"/>
+                      </a:rPr>
+                      <m:t>𝑠</m:t>
+                    </m:r>
+                    <m:r>
+                      <a:rPr lang="en-US" sz="1200" i="1">
+                        <a:latin typeface="Cambria Math" panose="02040503050406030204" pitchFamily="18" charset="0"/>
+                      </a:rPr>
+                      <m:t>,</m:t>
+                    </m:r>
+                    <m:r>
+                      <a:rPr lang="en-US" sz="1200" i="1">
+                        <a:latin typeface="Cambria Math" panose="02040503050406030204" pitchFamily="18" charset="0"/>
+                      </a:rPr>
+                      <m:t>𝑎</m:t>
+                    </m:r>
+                    <m:r>
+                      <a:rPr lang="en-US" sz="1200" b="0" i="1" smtClean="0">
+                        <a:latin typeface="Cambria Math" panose="02040503050406030204" pitchFamily="18" charset="0"/>
+                      </a:rPr>
+                      <m:t>,</m:t>
+                    </m:r>
+                    <m:r>
+                      <a:rPr lang="en-US" sz="1200" b="0" i="1" smtClean="0">
+                        <a:latin typeface="Cambria Math" panose="02040503050406030204" pitchFamily="18" charset="0"/>
+                      </a:rPr>
+                      <m:t>𝑠</m:t>
+                    </m:r>
+                    <m:r>
+                      <a:rPr lang="en-US" sz="1200" b="0" i="1" smtClean="0">
+                        <a:latin typeface="Cambria Math" panose="02040503050406030204" pitchFamily="18" charset="0"/>
+                      </a:rPr>
+                      <m:t>′)</m:t>
+                    </m:r>
+                  </m:oMath>
+                </a14:m>
+                <a:r>
+                  <a:rPr lang="en-US" sz="1200" dirty="0"/>
+                  <a:t>	expected immediate reward from state </a:t>
+                </a:r>
+                <a14:m>
+                  <m:oMath xmlns:m="http://schemas.openxmlformats.org/officeDocument/2006/math">
+                    <m:r>
+                      <a:rPr lang="en-US" sz="1200" i="1" dirty="0">
+                        <a:latin typeface="Cambria Math" panose="02040503050406030204" pitchFamily="18" charset="0"/>
+                      </a:rPr>
+                      <m:t>𝑠</m:t>
+                    </m:r>
+                  </m:oMath>
+                </a14:m>
+                <a:r>
+                  <a:rPr lang="en-US" sz="1200" dirty="0"/>
+                  <a:t> to </a:t>
+                </a:r>
+                <a14:m>
+                  <m:oMath xmlns:m="http://schemas.openxmlformats.org/officeDocument/2006/math">
+                    <m:sSup>
+                      <m:sSupPr>
+                        <m:ctrlPr>
+                          <a:rPr lang="en-US" sz="1200" b="0" i="1" smtClean="0">
+                            <a:latin typeface="Cambria Math" panose="02040503050406030204" pitchFamily="18" charset="0"/>
+                          </a:rPr>
+                        </m:ctrlPr>
+                      </m:sSupPr>
+                      <m:e>
+                        <m:r>
+                          <a:rPr lang="en-US" sz="1200" b="0" i="1" smtClean="0">
+                            <a:latin typeface="Cambria Math" panose="02040503050406030204" pitchFamily="18" charset="0"/>
+                          </a:rPr>
+                          <m:t>𝑠</m:t>
+                        </m:r>
+                      </m:e>
+                      <m:sup>
+                        <m:r>
+                          <a:rPr lang="en-US" sz="1200" b="0" i="1" smtClean="0">
+                            <a:latin typeface="Cambria Math" panose="02040503050406030204" pitchFamily="18" charset="0"/>
+                          </a:rPr>
+                          <m:t>′</m:t>
+                        </m:r>
+                      </m:sup>
+                    </m:sSup>
+                  </m:oMath>
+                </a14:m>
+                <a:r>
+                  <a:rPr lang="en-US" sz="1200" dirty="0"/>
+                  <a:t> with action </a:t>
+                </a:r>
+                <a14:m>
+                  <m:oMath xmlns:m="http://schemas.openxmlformats.org/officeDocument/2006/math">
+                    <m:r>
+                      <a:rPr lang="en-US" sz="1200" i="1" dirty="0">
+                        <a:latin typeface="Cambria Math" panose="02040503050406030204" pitchFamily="18" charset="0"/>
+                      </a:rPr>
+                      <m:t>𝑎</m:t>
+                    </m:r>
+                    <m:r>
+                      <a:rPr lang="en-US" sz="1200" b="0" i="1" dirty="0" smtClean="0">
+                        <a:latin typeface="Cambria Math" panose="02040503050406030204" pitchFamily="18" charset="0"/>
+                      </a:rPr>
+                      <m:t>.</m:t>
+                    </m:r>
+                  </m:oMath>
+                </a14:m>
+                <a:endParaRPr lang="en-US" sz="1200" i="1" dirty="0">
+                  <a:latin typeface="Cambria Math" panose="02040503050406030204" pitchFamily="18" charset="0"/>
+                </a:endParaRPr>
+              </a:p>
+              <a:p>
+                <a:pPr marL="0" indent="0">
+                  <a:spcBef>
+                    <a:spcPts val="0"/>
+                  </a:spcBef>
+                  <a:buNone/>
+                </a:pPr>
+                <a:endParaRPr lang="en-US" sz="1200" i="1" dirty="0">
+                  <a:latin typeface="Cambria Math" panose="02040503050406030204" pitchFamily="18" charset="0"/>
+                </a:endParaRPr>
+              </a:p>
+              <a:p>
+                <a:pPr marL="0" indent="0">
+                  <a:spcBef>
+                    <a:spcPts val="0"/>
+                  </a:spcBef>
+                  <a:buNone/>
+                </a:pPr>
+                <a14:m>
+                  <m:oMath xmlns:m="http://schemas.openxmlformats.org/officeDocument/2006/math">
+                    <m:r>
+                      <a:rPr lang="en-US" sz="1200" i="1" dirty="0">
+                        <a:latin typeface="Cambria Math" panose="02040503050406030204" pitchFamily="18" charset="0"/>
+                      </a:rPr>
+                      <m:t>𝜋</m:t>
+                    </m:r>
+                    <m:r>
+                      <a:rPr lang="en-US" sz="1200" i="1" dirty="0">
+                        <a:latin typeface="Cambria Math" panose="02040503050406030204" pitchFamily="18" charset="0"/>
+                      </a:rPr>
+                      <m:t>(</m:t>
+                    </m:r>
+                    <m:r>
+                      <a:rPr lang="en-US" sz="1200" i="1" dirty="0" err="1">
+                        <a:latin typeface="Cambria Math" panose="02040503050406030204" pitchFamily="18" charset="0"/>
+                      </a:rPr>
+                      <m:t>𝑎</m:t>
+                    </m:r>
+                    <m:r>
+                      <a:rPr lang="en-US" sz="1200" i="1" dirty="0" err="1">
+                        <a:latin typeface="Cambria Math" panose="02040503050406030204" pitchFamily="18" charset="0"/>
+                      </a:rPr>
+                      <m:t>|</m:t>
+                    </m:r>
+                    <m:r>
+                      <a:rPr lang="en-US" sz="1200" i="1" dirty="0" err="1">
+                        <a:latin typeface="Cambria Math" panose="02040503050406030204" pitchFamily="18" charset="0"/>
+                      </a:rPr>
+                      <m:t>𝑠</m:t>
+                    </m:r>
+                    <m:r>
+                      <a:rPr lang="en-US" sz="1200" i="1" dirty="0">
+                        <a:latin typeface="Cambria Math" panose="02040503050406030204" pitchFamily="18" charset="0"/>
+                      </a:rPr>
+                      <m:t>)</m:t>
+                    </m:r>
+                  </m:oMath>
+                </a14:m>
+                <a:r>
+                  <a:rPr lang="en-US" sz="1200" dirty="0"/>
+                  <a:t>	probability of taking action </a:t>
+                </a:r>
+                <a14:m>
+                  <m:oMath xmlns:m="http://schemas.openxmlformats.org/officeDocument/2006/math">
+                    <m:r>
+                      <a:rPr lang="en-US" sz="1200" i="1" dirty="0">
+                        <a:latin typeface="Cambria Math" panose="02040503050406030204" pitchFamily="18" charset="0"/>
+                      </a:rPr>
+                      <m:t>𝑎</m:t>
+                    </m:r>
+                  </m:oMath>
+                </a14:m>
+                <a:r>
+                  <a:rPr lang="en-US" sz="1200" dirty="0"/>
+                  <a:t> in state </a:t>
+                </a:r>
+                <a14:m>
+                  <m:oMath xmlns:m="http://schemas.openxmlformats.org/officeDocument/2006/math">
+                    <m:r>
+                      <a:rPr lang="en-US" sz="1200" i="1" dirty="0">
+                        <a:latin typeface="Cambria Math" panose="02040503050406030204" pitchFamily="18" charset="0"/>
+                      </a:rPr>
+                      <m:t>𝑠</m:t>
+                    </m:r>
+                  </m:oMath>
+                </a14:m>
+                <a:r>
+                  <a:rPr lang="en-US" sz="1200" dirty="0"/>
+                  <a:t> under stochastic policy </a:t>
+                </a:r>
+                <a14:m>
+                  <m:oMath xmlns:m="http://schemas.openxmlformats.org/officeDocument/2006/math">
+                    <m:r>
+                      <a:rPr lang="en-US" sz="1200" i="1" dirty="0">
+                        <a:latin typeface="Cambria Math" panose="02040503050406030204" pitchFamily="18" charset="0"/>
+                      </a:rPr>
+                      <m:t>𝜋</m:t>
+                    </m:r>
+                  </m:oMath>
+                </a14:m>
+                <a:endParaRPr lang="en-US" sz="1200" dirty="0">
+                  <a:ea typeface="Cambria Math" panose="02040503050406030204" pitchFamily="18" charset="0"/>
+                </a:endParaRPr>
+              </a:p>
+              <a:p>
+                <a:pPr marL="0" indent="0">
+                  <a:spcBef>
+                    <a:spcPts val="0"/>
+                  </a:spcBef>
+                  <a:buNone/>
+                </a:pPr>
+                <a14:m>
+                  <m:oMath xmlns:m="http://schemas.openxmlformats.org/officeDocument/2006/math">
+                    <m:r>
+                      <a:rPr lang="en-US" sz="1200" i="1" dirty="0" smtClean="0">
+                        <a:latin typeface="Cambria Math" panose="02040503050406030204" pitchFamily="18" charset="0"/>
+                      </a:rPr>
+                      <m:t>𝜋</m:t>
+                    </m:r>
+                    <m:r>
+                      <a:rPr lang="en-US" sz="1200" i="1" dirty="0" smtClean="0">
+                        <a:latin typeface="Cambria Math" panose="02040503050406030204" pitchFamily="18" charset="0"/>
+                      </a:rPr>
+                      <m:t>(</m:t>
+                    </m:r>
+                    <m:r>
+                      <a:rPr lang="en-US" sz="1200" i="1" dirty="0" smtClean="0">
+                        <a:latin typeface="Cambria Math" panose="02040503050406030204" pitchFamily="18" charset="0"/>
+                      </a:rPr>
+                      <m:t>𝑠</m:t>
+                    </m:r>
+                    <m:r>
+                      <a:rPr lang="en-US" sz="1200" i="1" dirty="0" smtClean="0">
+                        <a:latin typeface="Cambria Math" panose="02040503050406030204" pitchFamily="18" charset="0"/>
+                      </a:rPr>
+                      <m:t>)</m:t>
+                    </m:r>
+                  </m:oMath>
+                </a14:m>
+                <a:r>
+                  <a:rPr lang="en-US" sz="1200" dirty="0"/>
+                  <a:t>	action taken in state </a:t>
+                </a:r>
+                <a14:m>
+                  <m:oMath xmlns:m="http://schemas.openxmlformats.org/officeDocument/2006/math">
+                    <m:r>
+                      <a:rPr lang="en-US" sz="1200" i="1" dirty="0" smtClean="0">
+                        <a:latin typeface="Cambria Math" panose="02040503050406030204" pitchFamily="18" charset="0"/>
+                      </a:rPr>
+                      <m:t>𝑠</m:t>
+                    </m:r>
+                  </m:oMath>
+                </a14:m>
+                <a:r>
+                  <a:rPr lang="en-US" sz="1200" dirty="0"/>
+                  <a:t> under deterministic policy </a:t>
+                </a:r>
+                <a14:m>
+                  <m:oMath xmlns:m="http://schemas.openxmlformats.org/officeDocument/2006/math">
+                    <m:r>
+                      <a:rPr lang="en-US" sz="1200" b="0" i="1" dirty="0" smtClean="0">
+                        <a:latin typeface="Cambria Math" panose="02040503050406030204" pitchFamily="18" charset="0"/>
+                      </a:rPr>
+                      <m:t>𝜋</m:t>
+                    </m:r>
+                  </m:oMath>
+                </a14:m>
+                <a:endParaRPr lang="en-US" sz="1200" dirty="0"/>
+              </a:p>
+            </p:txBody>
+          </p:sp>
+        </mc:Choice>
+        <mc:Fallback xmlns="">
+          <p:sp>
+            <p:nvSpPr>
+              <p:cNvPr id="11" name="Content Placeholder 2" descr="MDP. s, s prime states. a an action. r a reward. S set of all (nonterminal) states, S to the power plus are all states. A(s) set of all actions available in state s. gamma discount-rate parameter. t discrete time step. T final time step of an episode (a.k.a. horizon). A sub t random variable for the action at time t. S sub t random variable for the state at time t. R sub t random variable for the reward at time t. p (s prime,r | s, a) probability of transition to state s prime and receiving reward r, from state s taking action a . p (s prime | s, a) probability of transition to state s prime fom state s taking action a . r(s,a) expected immediate reward from state s after action a. r(s,a,s prime) expected immediate reward from state s to s prime with action a. pi (a given s) probability of taking action a in state s under stochastic policy pi. pi (s) action taken in state s under deterministic policy pi">
+                <a:extLst>
+                  <a:ext uri="{FF2B5EF4-FFF2-40B4-BE49-F238E27FC236}">
+                    <a16:creationId xmlns:a16="http://schemas.microsoft.com/office/drawing/2014/main" id="{6F45EA4F-65F9-5141-0B09-C395CF9CA7A0}"/>
+                  </a:ext>
+                </a:extLst>
+              </p:cNvPr>
+              <p:cNvSpPr txBox="1">
+                <a:spLocks noRot="1" noChangeAspect="1" noMove="1" noResize="1" noEditPoints="1" noAdjustHandles="1" noChangeArrowheads="1" noChangeShapeType="1" noTextEdit="1"/>
+              </p:cNvSpPr>
+              <p:nvPr/>
+            </p:nvSpPr>
+            <p:spPr>
+              <a:xfrm>
+                <a:off x="6267338" y="1124198"/>
+                <a:ext cx="5273179" cy="3693383"/>
+              </a:xfrm>
+              <a:prstGeom prst="rect">
+                <a:avLst/>
+              </a:prstGeom>
+              <a:blipFill>
+                <a:blip r:embed="rId4"/>
+                <a:stretch>
+                  <a:fillRect t="-328"/>
+                </a:stretch>
+              </a:blipFill>
+            </p:spPr>
+            <p:txBody>
+              <a:bodyPr/>
+              <a:lstStyle/>
+              <a:p>
+                <a:r>
+                  <a:rPr lang="en-US">
+                    <a:noFill/>
+                  </a:rPr>
+                  <a:t> </a:t>
+                </a:r>
+              </a:p>
+            </p:txBody>
+          </p:sp>
+        </mc:Fallback>
+      </mc:AlternateContent>
+      <mc:AlternateContent xmlns:mc="http://schemas.openxmlformats.org/markup-compatibility/2006" xmlns:a14="http://schemas.microsoft.com/office/drawing/2010/main">
+        <mc:Choice Requires="a14">
+          <p:sp>
+            <p:nvSpPr>
+              <p:cNvPr id="5" name="Content Placeholder 2" descr="Approximation. mu (s) on policy distribution (fraction of time spent in state). alpha step size (gradient descent learning rate). v hat (s, w) approximate value function q hat (s, a, w) approximate action-value function pi (a given s, theta) approximate policy. VE hat mean squared value error. gradient of f(x) gradient of function f evaluated at x">
                 <a:extLst>
                   <a:ext uri="{FF2B5EF4-FFF2-40B4-BE49-F238E27FC236}">
                     <a16:creationId xmlns:a16="http://schemas.microsoft.com/office/drawing/2014/main" id="{9FA76CFB-B55E-EFC6-DA3D-BEB7A8763838}"/>
@@ -29346,7 +29421,7 @@
                       <m:accPr>
                         <m:chr m:val="̂"/>
                         <m:ctrlPr>
-                          <a:rPr lang="en-US" sz="1200" i="1" dirty="0" smtClean="0">
+                          <a:rPr lang="en-US" sz="1200" b="0" i="1" dirty="0" smtClean="0">
                             <a:solidFill>
                               <a:schemeClr val="tx1"/>
                             </a:solidFill>
@@ -29425,7 +29500,7 @@
                       <m:accPr>
                         <m:chr m:val="̂"/>
                         <m:ctrlPr>
-                          <a:rPr lang="en-US" sz="1200" i="1" dirty="0">
+                          <a:rPr lang="en-US" sz="1200" b="0" i="1" dirty="0" smtClean="0">
                             <a:solidFill>
                               <a:schemeClr val="tx1"/>
                             </a:solidFill>
@@ -29611,7 +29686,7 @@
                       <m:accPr>
                         <m:chr m:val="̂"/>
                         <m:ctrlPr>
-                          <a:rPr lang="en-US" sz="1200" i="1" dirty="0" smtClean="0">
+                          <a:rPr lang="en-US" sz="1200" b="0" i="1" dirty="0" smtClean="0">
                             <a:solidFill>
                               <a:schemeClr val="tx1"/>
                             </a:solidFill>
@@ -29763,7 +29838,7 @@
         <mc:Fallback xmlns="">
           <p:sp>
             <p:nvSpPr>
-              <p:cNvPr id="5" name="Content Placeholder 2">
+              <p:cNvPr id="5" name="Content Placeholder 2" descr="Approximation. mu (s) on policy distribution (fraction of time spent in state). alpha step size (gradient descent learning rate). v hat (s, w) approximate value function q hat (s, a, w) approximate action-value function pi (a given s, theta) approximate policy. VE hat mean squared value error. gradient of f(x) gradient of function f evaluated at x">
                 <a:extLst>
                   <a:ext uri="{FF2B5EF4-FFF2-40B4-BE49-F238E27FC236}">
                     <a16:creationId xmlns:a16="http://schemas.microsoft.com/office/drawing/2014/main" id="{9FA76CFB-B55E-EFC6-DA3D-BEB7A8763838}"/>
@@ -29986,13 +30061,10 @@
       </p:sp>
       <p:grpSp>
         <p:nvGrpSpPr>
-          <p:cNvPr id="5" name="Group 4">
+          <p:cNvPr id="5" name="Group 4" descr="Q-network: the state s enters a neural network (input layer S, hidden layers, output layer A) that outputs Q(s, a) for every action.">
             <a:extLst>
               <a:ext uri="{FF2B5EF4-FFF2-40B4-BE49-F238E27FC236}">
                 <a16:creationId xmlns:a16="http://schemas.microsoft.com/office/drawing/2014/main" id="{0257D9AD-0CBD-4A1C-5DC3-AB0B9432D641}"/>
-              </a:ext>
-              <a:ext uri="{C183D7F6-B498-43B3-948B-1728B52AA6E4}">
-                <adec:decorative xmlns:adec="http://schemas.microsoft.com/office/drawing/2017/decorative" val="1"/>
               </a:ext>
             </a:extLst>
           </p:cNvPr>
@@ -30076,6 +30148,9 @@
                   <a:ext uri="{FF2B5EF4-FFF2-40B4-BE49-F238E27FC236}">
                     <a16:creationId xmlns:a16="http://schemas.microsoft.com/office/drawing/2014/main" id="{7FB21E2A-FC1F-C47C-298D-A8BE4E31C4B6}"/>
                   </a:ext>
+                  <a:ext uri="{C183D7F6-B498-43B3-948B-1728B52AA6E4}">
+                    <adec:decorative xmlns:adec="http://schemas.microsoft.com/office/drawing/2017/decorative" val="1"/>
+                  </a:ext>
                 </a:extLst>
               </p:cNvPr>
               <p:cNvSpPr/>
@@ -30121,6 +30196,9 @@
                 <a:extLst>
                   <a:ext uri="{FF2B5EF4-FFF2-40B4-BE49-F238E27FC236}">
                     <a16:creationId xmlns:a16="http://schemas.microsoft.com/office/drawing/2014/main" id="{3BAD4EA1-AE93-3F2B-EC3E-F51B2C66811C}"/>
+                  </a:ext>
+                  <a:ext uri="{C183D7F6-B498-43B3-948B-1728B52AA6E4}">
+                    <adec:decorative xmlns:adec="http://schemas.microsoft.com/office/drawing/2017/decorative" val="1"/>
                   </a:ext>
                 </a:extLst>
               </p:cNvPr>
@@ -30168,6 +30246,9 @@
                   <a:ext uri="{FF2B5EF4-FFF2-40B4-BE49-F238E27FC236}">
                     <a16:creationId xmlns:a16="http://schemas.microsoft.com/office/drawing/2014/main" id="{E3C39F9D-742D-29FD-62B5-DCCFB700DAFE}"/>
                   </a:ext>
+                  <a:ext uri="{C183D7F6-B498-43B3-948B-1728B52AA6E4}">
+                    <adec:decorative xmlns:adec="http://schemas.microsoft.com/office/drawing/2017/decorative" val="1"/>
+                  </a:ext>
                 </a:extLst>
               </p:cNvPr>
               <p:cNvSpPr/>
@@ -30213,6 +30294,9 @@
                 <a:extLst>
                   <a:ext uri="{FF2B5EF4-FFF2-40B4-BE49-F238E27FC236}">
                     <a16:creationId xmlns:a16="http://schemas.microsoft.com/office/drawing/2014/main" id="{639BE8FB-3F89-4604-BFD7-75A85BD6D11C}"/>
+                  </a:ext>
+                  <a:ext uri="{C183D7F6-B498-43B3-948B-1728B52AA6E4}">
+                    <adec:decorative xmlns:adec="http://schemas.microsoft.com/office/drawing/2017/decorative" val="1"/>
                   </a:ext>
                 </a:extLst>
               </p:cNvPr>
@@ -30260,6 +30344,9 @@
                   <a:ext uri="{FF2B5EF4-FFF2-40B4-BE49-F238E27FC236}">
                     <a16:creationId xmlns:a16="http://schemas.microsoft.com/office/drawing/2014/main" id="{A4EC46C8-4F64-09FC-B2F0-A56DD6F92E13}"/>
                   </a:ext>
+                  <a:ext uri="{C183D7F6-B498-43B3-948B-1728B52AA6E4}">
+                    <adec:decorative xmlns:adec="http://schemas.microsoft.com/office/drawing/2017/decorative" val="1"/>
+                  </a:ext>
                 </a:extLst>
               </p:cNvPr>
               <p:cNvSpPr/>
@@ -30305,6 +30392,9 @@
                 <a:extLst>
                   <a:ext uri="{FF2B5EF4-FFF2-40B4-BE49-F238E27FC236}">
                     <a16:creationId xmlns:a16="http://schemas.microsoft.com/office/drawing/2014/main" id="{EC7B4CEF-D65D-35AC-4A87-5A2F28622CC6}"/>
+                  </a:ext>
+                  <a:ext uri="{C183D7F6-B498-43B3-948B-1728B52AA6E4}">
+                    <adec:decorative xmlns:adec="http://schemas.microsoft.com/office/drawing/2017/decorative" val="1"/>
                   </a:ext>
                 </a:extLst>
               </p:cNvPr>
@@ -30352,6 +30442,9 @@
                   <a:ext uri="{FF2B5EF4-FFF2-40B4-BE49-F238E27FC236}">
                     <a16:creationId xmlns:a16="http://schemas.microsoft.com/office/drawing/2014/main" id="{60546C22-9126-A64F-1E08-4A0774EC5C52}"/>
                   </a:ext>
+                  <a:ext uri="{C183D7F6-B498-43B3-948B-1728B52AA6E4}">
+                    <adec:decorative xmlns:adec="http://schemas.microsoft.com/office/drawing/2017/decorative" val="1"/>
+                  </a:ext>
                 </a:extLst>
               </p:cNvPr>
               <p:cNvSpPr/>
@@ -30397,6 +30490,9 @@
                 <a:extLst>
                   <a:ext uri="{FF2B5EF4-FFF2-40B4-BE49-F238E27FC236}">
                     <a16:creationId xmlns:a16="http://schemas.microsoft.com/office/drawing/2014/main" id="{9711B356-C322-9A0F-23AA-24070E83601E}"/>
+                  </a:ext>
+                  <a:ext uri="{C183D7F6-B498-43B3-948B-1728B52AA6E4}">
+                    <adec:decorative xmlns:adec="http://schemas.microsoft.com/office/drawing/2017/decorative" val="1"/>
                   </a:ext>
                 </a:extLst>
               </p:cNvPr>
@@ -30444,6 +30540,9 @@
                   <a:ext uri="{FF2B5EF4-FFF2-40B4-BE49-F238E27FC236}">
                     <a16:creationId xmlns:a16="http://schemas.microsoft.com/office/drawing/2014/main" id="{321E1B89-F118-CEDE-1ACF-AE210F91AD89}"/>
                   </a:ext>
+                  <a:ext uri="{C183D7F6-B498-43B3-948B-1728B52AA6E4}">
+                    <adec:decorative xmlns:adec="http://schemas.microsoft.com/office/drawing/2017/decorative" val="1"/>
+                  </a:ext>
                 </a:extLst>
               </p:cNvPr>
               <p:cNvSpPr/>
@@ -30489,6 +30588,9 @@
                 <a:extLst>
                   <a:ext uri="{FF2B5EF4-FFF2-40B4-BE49-F238E27FC236}">
                     <a16:creationId xmlns:a16="http://schemas.microsoft.com/office/drawing/2014/main" id="{5F536921-5DB2-C484-80A6-5E9CF04774B8}"/>
+                  </a:ext>
+                  <a:ext uri="{C183D7F6-B498-43B3-948B-1728B52AA6E4}">
+                    <adec:decorative xmlns:adec="http://schemas.microsoft.com/office/drawing/2017/decorative" val="1"/>
                   </a:ext>
                 </a:extLst>
               </p:cNvPr>
@@ -30536,6 +30638,9 @@
                   <a:ext uri="{FF2B5EF4-FFF2-40B4-BE49-F238E27FC236}">
                     <a16:creationId xmlns:a16="http://schemas.microsoft.com/office/drawing/2014/main" id="{476A5DB0-1825-8BF6-77D6-0FF244514DE9}"/>
                   </a:ext>
+                  <a:ext uri="{C183D7F6-B498-43B3-948B-1728B52AA6E4}">
+                    <adec:decorative xmlns:adec="http://schemas.microsoft.com/office/drawing/2017/decorative" val="1"/>
+                  </a:ext>
                 </a:extLst>
               </p:cNvPr>
               <p:cNvSpPr/>
@@ -30581,6 +30686,9 @@
                 <a:extLst>
                   <a:ext uri="{FF2B5EF4-FFF2-40B4-BE49-F238E27FC236}">
                     <a16:creationId xmlns:a16="http://schemas.microsoft.com/office/drawing/2014/main" id="{260347EC-E155-6D6A-8B70-F0ED6F48A3E7}"/>
+                  </a:ext>
+                  <a:ext uri="{C183D7F6-B498-43B3-948B-1728B52AA6E4}">
+                    <adec:decorative xmlns:adec="http://schemas.microsoft.com/office/drawing/2017/decorative" val="1"/>
                   </a:ext>
                 </a:extLst>
               </p:cNvPr>
@@ -30628,6 +30736,9 @@
                   <a:ext uri="{FF2B5EF4-FFF2-40B4-BE49-F238E27FC236}">
                     <a16:creationId xmlns:a16="http://schemas.microsoft.com/office/drawing/2014/main" id="{8A82D0AB-4B22-7144-C127-03639736A49C}"/>
                   </a:ext>
+                  <a:ext uri="{C183D7F6-B498-43B3-948B-1728B52AA6E4}">
+                    <adec:decorative xmlns:adec="http://schemas.microsoft.com/office/drawing/2017/decorative" val="1"/>
+                  </a:ext>
                 </a:extLst>
               </p:cNvPr>
               <p:cNvSpPr/>
@@ -30673,6 +30784,9 @@
                 <a:extLst>
                   <a:ext uri="{FF2B5EF4-FFF2-40B4-BE49-F238E27FC236}">
                     <a16:creationId xmlns:a16="http://schemas.microsoft.com/office/drawing/2014/main" id="{D2F65F11-4D6B-FB28-45ED-118C8249D263}"/>
+                  </a:ext>
+                  <a:ext uri="{C183D7F6-B498-43B3-948B-1728B52AA6E4}">
+                    <adec:decorative xmlns:adec="http://schemas.microsoft.com/office/drawing/2017/decorative" val="1"/>
                   </a:ext>
                 </a:extLst>
               </p:cNvPr>
@@ -30720,6 +30834,9 @@
                   <a:ext uri="{FF2B5EF4-FFF2-40B4-BE49-F238E27FC236}">
                     <a16:creationId xmlns:a16="http://schemas.microsoft.com/office/drawing/2014/main" id="{27796F2B-63A7-0E97-6307-14CC5EC0C7EF}"/>
                   </a:ext>
+                  <a:ext uri="{C183D7F6-B498-43B3-948B-1728B52AA6E4}">
+                    <adec:decorative xmlns:adec="http://schemas.microsoft.com/office/drawing/2017/decorative" val="1"/>
+                  </a:ext>
                 </a:extLst>
               </p:cNvPr>
               <p:cNvCxnSpPr>
@@ -30761,6 +30878,9 @@
                 <a:extLst>
                   <a:ext uri="{FF2B5EF4-FFF2-40B4-BE49-F238E27FC236}">
                     <a16:creationId xmlns:a16="http://schemas.microsoft.com/office/drawing/2014/main" id="{C3F73F8A-57DC-A45F-80D1-597D8D1E7A7C}"/>
+                  </a:ext>
+                  <a:ext uri="{C183D7F6-B498-43B3-948B-1728B52AA6E4}">
+                    <adec:decorative xmlns:adec="http://schemas.microsoft.com/office/drawing/2017/decorative" val="1"/>
                   </a:ext>
                 </a:extLst>
               </p:cNvPr>
@@ -30804,6 +30924,9 @@
                   <a:ext uri="{FF2B5EF4-FFF2-40B4-BE49-F238E27FC236}">
                     <a16:creationId xmlns:a16="http://schemas.microsoft.com/office/drawing/2014/main" id="{D5DB5C0F-C3BC-E7BF-2F36-26E6DF3833FB}"/>
                   </a:ext>
+                  <a:ext uri="{C183D7F6-B498-43B3-948B-1728B52AA6E4}">
+                    <adec:decorative xmlns:adec="http://schemas.microsoft.com/office/drawing/2017/decorative" val="1"/>
+                  </a:ext>
                 </a:extLst>
               </p:cNvPr>
               <p:cNvCxnSpPr>
@@ -30845,6 +30968,9 @@
                 <a:extLst>
                   <a:ext uri="{FF2B5EF4-FFF2-40B4-BE49-F238E27FC236}">
                     <a16:creationId xmlns:a16="http://schemas.microsoft.com/office/drawing/2014/main" id="{F39FF92C-6BBC-294B-AFCF-1E61772F3555}"/>
+                  </a:ext>
+                  <a:ext uri="{C183D7F6-B498-43B3-948B-1728B52AA6E4}">
+                    <adec:decorative xmlns:adec="http://schemas.microsoft.com/office/drawing/2017/decorative" val="1"/>
                   </a:ext>
                 </a:extLst>
               </p:cNvPr>
@@ -30888,6 +31014,9 @@
                   <a:ext uri="{FF2B5EF4-FFF2-40B4-BE49-F238E27FC236}">
                     <a16:creationId xmlns:a16="http://schemas.microsoft.com/office/drawing/2014/main" id="{304B9364-CECA-C424-2C90-35A01CFD7A25}"/>
                   </a:ext>
+                  <a:ext uri="{C183D7F6-B498-43B3-948B-1728B52AA6E4}">
+                    <adec:decorative xmlns:adec="http://schemas.microsoft.com/office/drawing/2017/decorative" val="1"/>
+                  </a:ext>
                 </a:extLst>
               </p:cNvPr>
               <p:cNvCxnSpPr>
@@ -30929,6 +31058,9 @@
                 <a:extLst>
                   <a:ext uri="{FF2B5EF4-FFF2-40B4-BE49-F238E27FC236}">
                     <a16:creationId xmlns:a16="http://schemas.microsoft.com/office/drawing/2014/main" id="{BA59CCCC-0AE5-2C78-1EA0-C8E66CD0B57E}"/>
+                  </a:ext>
+                  <a:ext uri="{C183D7F6-B498-43B3-948B-1728B52AA6E4}">
+                    <adec:decorative xmlns:adec="http://schemas.microsoft.com/office/drawing/2017/decorative" val="1"/>
                   </a:ext>
                 </a:extLst>
               </p:cNvPr>
@@ -30972,6 +31104,9 @@
                   <a:ext uri="{FF2B5EF4-FFF2-40B4-BE49-F238E27FC236}">
                     <a16:creationId xmlns:a16="http://schemas.microsoft.com/office/drawing/2014/main" id="{4A3D70BA-B5F3-FBDA-53EC-95B34536CA9D}"/>
                   </a:ext>
+                  <a:ext uri="{C183D7F6-B498-43B3-948B-1728B52AA6E4}">
+                    <adec:decorative xmlns:adec="http://schemas.microsoft.com/office/drawing/2017/decorative" val="1"/>
+                  </a:ext>
                 </a:extLst>
               </p:cNvPr>
               <p:cNvCxnSpPr>
@@ -31013,6 +31148,9 @@
                 <a:extLst>
                   <a:ext uri="{FF2B5EF4-FFF2-40B4-BE49-F238E27FC236}">
                     <a16:creationId xmlns:a16="http://schemas.microsoft.com/office/drawing/2014/main" id="{34FC3790-1DF2-D828-D120-0BF4696D2466}"/>
+                  </a:ext>
+                  <a:ext uri="{C183D7F6-B498-43B3-948B-1728B52AA6E4}">
+                    <adec:decorative xmlns:adec="http://schemas.microsoft.com/office/drawing/2017/decorative" val="1"/>
                   </a:ext>
                 </a:extLst>
               </p:cNvPr>
@@ -31056,6 +31194,9 @@
                   <a:ext uri="{FF2B5EF4-FFF2-40B4-BE49-F238E27FC236}">
                     <a16:creationId xmlns:a16="http://schemas.microsoft.com/office/drawing/2014/main" id="{4B3FE80B-AAF9-65B2-6618-6FBA7687BD74}"/>
                   </a:ext>
+                  <a:ext uri="{C183D7F6-B498-43B3-948B-1728B52AA6E4}">
+                    <adec:decorative xmlns:adec="http://schemas.microsoft.com/office/drawing/2017/decorative" val="1"/>
+                  </a:ext>
                 </a:extLst>
               </p:cNvPr>
               <p:cNvCxnSpPr>
@@ -31097,6 +31238,9 @@
                 <a:extLst>
                   <a:ext uri="{FF2B5EF4-FFF2-40B4-BE49-F238E27FC236}">
                     <a16:creationId xmlns:a16="http://schemas.microsoft.com/office/drawing/2014/main" id="{60381267-2CEF-0E11-929C-DD78D5BF1536}"/>
+                  </a:ext>
+                  <a:ext uri="{C183D7F6-B498-43B3-948B-1728B52AA6E4}">
+                    <adec:decorative xmlns:adec="http://schemas.microsoft.com/office/drawing/2017/decorative" val="1"/>
                   </a:ext>
                 </a:extLst>
               </p:cNvPr>
@@ -31140,6 +31284,9 @@
                   <a:ext uri="{FF2B5EF4-FFF2-40B4-BE49-F238E27FC236}">
                     <a16:creationId xmlns:a16="http://schemas.microsoft.com/office/drawing/2014/main" id="{801AFF4B-B3F2-B01A-3B78-D854F556ACEC}"/>
                   </a:ext>
+                  <a:ext uri="{C183D7F6-B498-43B3-948B-1728B52AA6E4}">
+                    <adec:decorative xmlns:adec="http://schemas.microsoft.com/office/drawing/2017/decorative" val="1"/>
+                  </a:ext>
                 </a:extLst>
               </p:cNvPr>
               <p:cNvCxnSpPr>
@@ -31181,6 +31328,9 @@
                 <a:extLst>
                   <a:ext uri="{FF2B5EF4-FFF2-40B4-BE49-F238E27FC236}">
                     <a16:creationId xmlns:a16="http://schemas.microsoft.com/office/drawing/2014/main" id="{8559B934-D7F1-93EE-752D-3B2FFF4009A7}"/>
+                  </a:ext>
+                  <a:ext uri="{C183D7F6-B498-43B3-948B-1728B52AA6E4}">
+                    <adec:decorative xmlns:adec="http://schemas.microsoft.com/office/drawing/2017/decorative" val="1"/>
                   </a:ext>
                 </a:extLst>
               </p:cNvPr>
@@ -31224,6 +31374,9 @@
                   <a:ext uri="{FF2B5EF4-FFF2-40B4-BE49-F238E27FC236}">
                     <a16:creationId xmlns:a16="http://schemas.microsoft.com/office/drawing/2014/main" id="{EBB7651F-3179-6134-080A-D638453A6BF9}"/>
                   </a:ext>
+                  <a:ext uri="{C183D7F6-B498-43B3-948B-1728B52AA6E4}">
+                    <adec:decorative xmlns:adec="http://schemas.microsoft.com/office/drawing/2017/decorative" val="1"/>
+                  </a:ext>
                 </a:extLst>
               </p:cNvPr>
               <p:cNvCxnSpPr>
@@ -31265,6 +31418,9 @@
                 <a:extLst>
                   <a:ext uri="{FF2B5EF4-FFF2-40B4-BE49-F238E27FC236}">
                     <a16:creationId xmlns:a16="http://schemas.microsoft.com/office/drawing/2014/main" id="{97768FA7-7107-9EE3-4CF5-BED604BA12B4}"/>
+                  </a:ext>
+                  <a:ext uri="{C183D7F6-B498-43B3-948B-1728B52AA6E4}">
+                    <adec:decorative xmlns:adec="http://schemas.microsoft.com/office/drawing/2017/decorative" val="1"/>
                   </a:ext>
                 </a:extLst>
               </p:cNvPr>
@@ -31308,6 +31464,9 @@
                   <a:ext uri="{FF2B5EF4-FFF2-40B4-BE49-F238E27FC236}">
                     <a16:creationId xmlns:a16="http://schemas.microsoft.com/office/drawing/2014/main" id="{095E9CCD-ABC3-13F9-ECC9-827AF855E2C0}"/>
                   </a:ext>
+                  <a:ext uri="{C183D7F6-B498-43B3-948B-1728B52AA6E4}">
+                    <adec:decorative xmlns:adec="http://schemas.microsoft.com/office/drawing/2017/decorative" val="1"/>
+                  </a:ext>
                 </a:extLst>
               </p:cNvPr>
               <p:cNvCxnSpPr>
@@ -31349,6 +31508,9 @@
                 <a:extLst>
                   <a:ext uri="{FF2B5EF4-FFF2-40B4-BE49-F238E27FC236}">
                     <a16:creationId xmlns:a16="http://schemas.microsoft.com/office/drawing/2014/main" id="{422BC3BC-0F09-E9C3-3E7B-7A68129217BF}"/>
+                  </a:ext>
+                  <a:ext uri="{C183D7F6-B498-43B3-948B-1728B52AA6E4}">
+                    <adec:decorative xmlns:adec="http://schemas.microsoft.com/office/drawing/2017/decorative" val="1"/>
                   </a:ext>
                 </a:extLst>
               </p:cNvPr>
@@ -31392,6 +31554,9 @@
                   <a:ext uri="{FF2B5EF4-FFF2-40B4-BE49-F238E27FC236}">
                     <a16:creationId xmlns:a16="http://schemas.microsoft.com/office/drawing/2014/main" id="{4CF7CFB2-1A13-84D6-B350-16A20A15ABE7}"/>
                   </a:ext>
+                  <a:ext uri="{C183D7F6-B498-43B3-948B-1728B52AA6E4}">
+                    <adec:decorative xmlns:adec="http://schemas.microsoft.com/office/drawing/2017/decorative" val="1"/>
+                  </a:ext>
                 </a:extLst>
               </p:cNvPr>
               <p:cNvCxnSpPr>
@@ -31433,6 +31598,9 @@
                 <a:extLst>
                   <a:ext uri="{FF2B5EF4-FFF2-40B4-BE49-F238E27FC236}">
                     <a16:creationId xmlns:a16="http://schemas.microsoft.com/office/drawing/2014/main" id="{08E1EA95-D224-CC1B-A05D-B02B7F97D75D}"/>
+                  </a:ext>
+                  <a:ext uri="{C183D7F6-B498-43B3-948B-1728B52AA6E4}">
+                    <adec:decorative xmlns:adec="http://schemas.microsoft.com/office/drawing/2017/decorative" val="1"/>
                   </a:ext>
                 </a:extLst>
               </p:cNvPr>
@@ -31476,6 +31644,9 @@
                   <a:ext uri="{FF2B5EF4-FFF2-40B4-BE49-F238E27FC236}">
                     <a16:creationId xmlns:a16="http://schemas.microsoft.com/office/drawing/2014/main" id="{0188BEB8-B6D3-254E-9973-3B815ECA03F5}"/>
                   </a:ext>
+                  <a:ext uri="{C183D7F6-B498-43B3-948B-1728B52AA6E4}">
+                    <adec:decorative xmlns:adec="http://schemas.microsoft.com/office/drawing/2017/decorative" val="1"/>
+                  </a:ext>
                 </a:extLst>
               </p:cNvPr>
               <p:cNvCxnSpPr>
@@ -31517,6 +31688,9 @@
                 <a:extLst>
                   <a:ext uri="{FF2B5EF4-FFF2-40B4-BE49-F238E27FC236}">
                     <a16:creationId xmlns:a16="http://schemas.microsoft.com/office/drawing/2014/main" id="{1D17DFB6-AA71-8F68-FF79-EC751F089E90}"/>
+                  </a:ext>
+                  <a:ext uri="{C183D7F6-B498-43B3-948B-1728B52AA6E4}">
+                    <adec:decorative xmlns:adec="http://schemas.microsoft.com/office/drawing/2017/decorative" val="1"/>
                   </a:ext>
                 </a:extLst>
               </p:cNvPr>
@@ -31560,6 +31734,9 @@
                   <a:ext uri="{FF2B5EF4-FFF2-40B4-BE49-F238E27FC236}">
                     <a16:creationId xmlns:a16="http://schemas.microsoft.com/office/drawing/2014/main" id="{78F68341-3125-C0C0-1673-D12F007B60CC}"/>
                   </a:ext>
+                  <a:ext uri="{C183D7F6-B498-43B3-948B-1728B52AA6E4}">
+                    <adec:decorative xmlns:adec="http://schemas.microsoft.com/office/drawing/2017/decorative" val="1"/>
+                  </a:ext>
                 </a:extLst>
               </p:cNvPr>
               <p:cNvCxnSpPr>
@@ -31601,6 +31778,9 @@
                 <a:extLst>
                   <a:ext uri="{FF2B5EF4-FFF2-40B4-BE49-F238E27FC236}">
                     <a16:creationId xmlns:a16="http://schemas.microsoft.com/office/drawing/2014/main" id="{7A57FBA7-07FD-305A-4785-EA97B8F9368A}"/>
+                  </a:ext>
+                  <a:ext uri="{C183D7F6-B498-43B3-948B-1728B52AA6E4}">
+                    <adec:decorative xmlns:adec="http://schemas.microsoft.com/office/drawing/2017/decorative" val="1"/>
                   </a:ext>
                 </a:extLst>
               </p:cNvPr>
@@ -31644,6 +31824,9 @@
                   <a:ext uri="{FF2B5EF4-FFF2-40B4-BE49-F238E27FC236}">
                     <a16:creationId xmlns:a16="http://schemas.microsoft.com/office/drawing/2014/main" id="{98003135-66B0-AD7D-0DA6-5196EE358797}"/>
                   </a:ext>
+                  <a:ext uri="{C183D7F6-B498-43B3-948B-1728B52AA6E4}">
+                    <adec:decorative xmlns:adec="http://schemas.microsoft.com/office/drawing/2017/decorative" val="1"/>
+                  </a:ext>
                 </a:extLst>
               </p:cNvPr>
               <p:cNvCxnSpPr>
@@ -31685,6 +31868,9 @@
                 <a:extLst>
                   <a:ext uri="{FF2B5EF4-FFF2-40B4-BE49-F238E27FC236}">
                     <a16:creationId xmlns:a16="http://schemas.microsoft.com/office/drawing/2014/main" id="{6C7D412B-882B-04FD-338F-41824C21705E}"/>
+                  </a:ext>
+                  <a:ext uri="{C183D7F6-B498-43B3-948B-1728B52AA6E4}">
+                    <adec:decorative xmlns:adec="http://schemas.microsoft.com/office/drawing/2017/decorative" val="1"/>
                   </a:ext>
                 </a:extLst>
               </p:cNvPr>
@@ -31728,6 +31914,9 @@
                   <a:ext uri="{FF2B5EF4-FFF2-40B4-BE49-F238E27FC236}">
                     <a16:creationId xmlns:a16="http://schemas.microsoft.com/office/drawing/2014/main" id="{F55FE66B-71A4-C4B6-21FA-2A6C559C0915}"/>
                   </a:ext>
+                  <a:ext uri="{C183D7F6-B498-43B3-948B-1728B52AA6E4}">
+                    <adec:decorative xmlns:adec="http://schemas.microsoft.com/office/drawing/2017/decorative" val="1"/>
+                  </a:ext>
                 </a:extLst>
               </p:cNvPr>
               <p:cNvCxnSpPr>
@@ -31769,6 +31958,9 @@
                 <a:extLst>
                   <a:ext uri="{FF2B5EF4-FFF2-40B4-BE49-F238E27FC236}">
                     <a16:creationId xmlns:a16="http://schemas.microsoft.com/office/drawing/2014/main" id="{E6E60BE8-2F9D-83F8-D75B-9A56A6804C1F}"/>
+                  </a:ext>
+                  <a:ext uri="{C183D7F6-B498-43B3-948B-1728B52AA6E4}">
+                    <adec:decorative xmlns:adec="http://schemas.microsoft.com/office/drawing/2017/decorative" val="1"/>
                   </a:ext>
                 </a:extLst>
               </p:cNvPr>
@@ -31812,6 +32004,9 @@
                   <a:ext uri="{FF2B5EF4-FFF2-40B4-BE49-F238E27FC236}">
                     <a16:creationId xmlns:a16="http://schemas.microsoft.com/office/drawing/2014/main" id="{50DCD506-4009-4481-F793-B6A53AE2C895}"/>
                   </a:ext>
+                  <a:ext uri="{C183D7F6-B498-43B3-948B-1728B52AA6E4}">
+                    <adec:decorative xmlns:adec="http://schemas.microsoft.com/office/drawing/2017/decorative" val="1"/>
+                  </a:ext>
                 </a:extLst>
               </p:cNvPr>
               <p:cNvCxnSpPr>
@@ -31853,6 +32048,9 @@
                 <a:extLst>
                   <a:ext uri="{FF2B5EF4-FFF2-40B4-BE49-F238E27FC236}">
                     <a16:creationId xmlns:a16="http://schemas.microsoft.com/office/drawing/2014/main" id="{00C28748-FF53-E351-27D0-0D444FD49688}"/>
+                  </a:ext>
+                  <a:ext uri="{C183D7F6-B498-43B3-948B-1728B52AA6E4}">
+                    <adec:decorative xmlns:adec="http://schemas.microsoft.com/office/drawing/2017/decorative" val="1"/>
                   </a:ext>
                 </a:extLst>
               </p:cNvPr>
@@ -31900,6 +32098,9 @@
                   <a:ext uri="{FF2B5EF4-FFF2-40B4-BE49-F238E27FC236}">
                     <a16:creationId xmlns:a16="http://schemas.microsoft.com/office/drawing/2014/main" id="{4A8D2B5D-45F5-3DA8-8B01-D6A7AF787EC4}"/>
                   </a:ext>
+                  <a:ext uri="{C183D7F6-B498-43B3-948B-1728B52AA6E4}">
+                    <adec:decorative xmlns:adec="http://schemas.microsoft.com/office/drawing/2017/decorative" val="1"/>
+                  </a:ext>
                 </a:extLst>
               </p:cNvPr>
               <p:cNvSpPr/>
@@ -31945,6 +32146,9 @@
                 <a:extLst>
                   <a:ext uri="{FF2B5EF4-FFF2-40B4-BE49-F238E27FC236}">
                     <a16:creationId xmlns:a16="http://schemas.microsoft.com/office/drawing/2014/main" id="{61340BA5-0FA4-2B48-A20F-446C4E67EFA9}"/>
+                  </a:ext>
+                  <a:ext uri="{C183D7F6-B498-43B3-948B-1728B52AA6E4}">
+                    <adec:decorative xmlns:adec="http://schemas.microsoft.com/office/drawing/2017/decorative" val="1"/>
                   </a:ext>
                 </a:extLst>
               </p:cNvPr>
@@ -31992,6 +32196,9 @@
                   <a:ext uri="{FF2B5EF4-FFF2-40B4-BE49-F238E27FC236}">
                     <a16:creationId xmlns:a16="http://schemas.microsoft.com/office/drawing/2014/main" id="{01F66A9F-4E4A-C01B-AEE5-737E36093FA6}"/>
                   </a:ext>
+                  <a:ext uri="{C183D7F6-B498-43B3-948B-1728B52AA6E4}">
+                    <adec:decorative xmlns:adec="http://schemas.microsoft.com/office/drawing/2017/decorative" val="1"/>
+                  </a:ext>
                 </a:extLst>
               </p:cNvPr>
               <p:cNvSpPr/>
@@ -32037,6 +32244,9 @@
                 <a:extLst>
                   <a:ext uri="{FF2B5EF4-FFF2-40B4-BE49-F238E27FC236}">
                     <a16:creationId xmlns:a16="http://schemas.microsoft.com/office/drawing/2014/main" id="{314720C6-6CE3-C5D5-F9DE-FABFCB0C5D7B}"/>
+                  </a:ext>
+                  <a:ext uri="{C183D7F6-B498-43B3-948B-1728B52AA6E4}">
+                    <adec:decorative xmlns:adec="http://schemas.microsoft.com/office/drawing/2017/decorative" val="1"/>
                   </a:ext>
                 </a:extLst>
               </p:cNvPr>
@@ -32084,6 +32294,9 @@
                   <a:ext uri="{FF2B5EF4-FFF2-40B4-BE49-F238E27FC236}">
                     <a16:creationId xmlns:a16="http://schemas.microsoft.com/office/drawing/2014/main" id="{489773CD-21BD-3EE0-360D-51D67D8A5C6F}"/>
                   </a:ext>
+                  <a:ext uri="{C183D7F6-B498-43B3-948B-1728B52AA6E4}">
+                    <adec:decorative xmlns:adec="http://schemas.microsoft.com/office/drawing/2017/decorative" val="1"/>
+                  </a:ext>
                 </a:extLst>
               </p:cNvPr>
               <p:cNvSpPr/>
@@ -32130,6 +32343,9 @@
                   <a:ext uri="{FF2B5EF4-FFF2-40B4-BE49-F238E27FC236}">
                     <a16:creationId xmlns:a16="http://schemas.microsoft.com/office/drawing/2014/main" id="{BB414F5E-8241-5027-4E23-4A12B53B57B8}"/>
                   </a:ext>
+                  <a:ext uri="{C183D7F6-B498-43B3-948B-1728B52AA6E4}">
+                    <adec:decorative xmlns:adec="http://schemas.microsoft.com/office/drawing/2017/decorative" val="1"/>
+                  </a:ext>
                 </a:extLst>
               </p:cNvPr>
               <p:cNvCxnSpPr>
@@ -32171,6 +32387,9 @@
                 <a:extLst>
                   <a:ext uri="{FF2B5EF4-FFF2-40B4-BE49-F238E27FC236}">
                     <a16:creationId xmlns:a16="http://schemas.microsoft.com/office/drawing/2014/main" id="{D90444DD-A8C4-5857-E3B0-85BB598A7AFD}"/>
+                  </a:ext>
+                  <a:ext uri="{C183D7F6-B498-43B3-948B-1728B52AA6E4}">
+                    <adec:decorative xmlns:adec="http://schemas.microsoft.com/office/drawing/2017/decorative" val="1"/>
                   </a:ext>
                 </a:extLst>
               </p:cNvPr>
@@ -32214,6 +32433,9 @@
                   <a:ext uri="{FF2B5EF4-FFF2-40B4-BE49-F238E27FC236}">
                     <a16:creationId xmlns:a16="http://schemas.microsoft.com/office/drawing/2014/main" id="{3BB81A97-E6EE-C92D-14E5-FD6C8F2B51EA}"/>
                   </a:ext>
+                  <a:ext uri="{C183D7F6-B498-43B3-948B-1728B52AA6E4}">
+                    <adec:decorative xmlns:adec="http://schemas.microsoft.com/office/drawing/2017/decorative" val="1"/>
+                  </a:ext>
                 </a:extLst>
               </p:cNvPr>
               <p:cNvCxnSpPr>
@@ -32255,6 +32477,9 @@
                 <a:extLst>
                   <a:ext uri="{FF2B5EF4-FFF2-40B4-BE49-F238E27FC236}">
                     <a16:creationId xmlns:a16="http://schemas.microsoft.com/office/drawing/2014/main" id="{6F4BCBB8-7FBC-A678-BB24-8FDA8C2BD55D}"/>
+                  </a:ext>
+                  <a:ext uri="{C183D7F6-B498-43B3-948B-1728B52AA6E4}">
+                    <adec:decorative xmlns:adec="http://schemas.microsoft.com/office/drawing/2017/decorative" val="1"/>
                   </a:ext>
                 </a:extLst>
               </p:cNvPr>
@@ -32298,6 +32523,9 @@
                   <a:ext uri="{FF2B5EF4-FFF2-40B4-BE49-F238E27FC236}">
                     <a16:creationId xmlns:a16="http://schemas.microsoft.com/office/drawing/2014/main" id="{A8852BA3-C2AC-80FC-4FED-933262B58AE3}"/>
                   </a:ext>
+                  <a:ext uri="{C183D7F6-B498-43B3-948B-1728B52AA6E4}">
+                    <adec:decorative xmlns:adec="http://schemas.microsoft.com/office/drawing/2017/decorative" val="1"/>
+                  </a:ext>
                 </a:extLst>
               </p:cNvPr>
               <p:cNvCxnSpPr>
@@ -32339,6 +32567,9 @@
                 <a:extLst>
                   <a:ext uri="{FF2B5EF4-FFF2-40B4-BE49-F238E27FC236}">
                     <a16:creationId xmlns:a16="http://schemas.microsoft.com/office/drawing/2014/main" id="{FE1F15E3-558E-DB8C-B876-0F6075AEC866}"/>
+                  </a:ext>
+                  <a:ext uri="{C183D7F6-B498-43B3-948B-1728B52AA6E4}">
+                    <adec:decorative xmlns:adec="http://schemas.microsoft.com/office/drawing/2017/decorative" val="1"/>
                   </a:ext>
                 </a:extLst>
               </p:cNvPr>
@@ -32382,6 +32613,9 @@
                   <a:ext uri="{FF2B5EF4-FFF2-40B4-BE49-F238E27FC236}">
                     <a16:creationId xmlns:a16="http://schemas.microsoft.com/office/drawing/2014/main" id="{1FCA1830-B362-5F50-9E34-8813C17EDC6C}"/>
                   </a:ext>
+                  <a:ext uri="{C183D7F6-B498-43B3-948B-1728B52AA6E4}">
+                    <adec:decorative xmlns:adec="http://schemas.microsoft.com/office/drawing/2017/decorative" val="1"/>
+                  </a:ext>
                 </a:extLst>
               </p:cNvPr>
               <p:cNvCxnSpPr>
@@ -32423,6 +32657,9 @@
                 <a:extLst>
                   <a:ext uri="{FF2B5EF4-FFF2-40B4-BE49-F238E27FC236}">
                     <a16:creationId xmlns:a16="http://schemas.microsoft.com/office/drawing/2014/main" id="{1EF48651-4159-154A-6453-8B9938BDA8B4}"/>
+                  </a:ext>
+                  <a:ext uri="{C183D7F6-B498-43B3-948B-1728B52AA6E4}">
+                    <adec:decorative xmlns:adec="http://schemas.microsoft.com/office/drawing/2017/decorative" val="1"/>
                   </a:ext>
                 </a:extLst>
               </p:cNvPr>
@@ -32466,6 +32703,9 @@
                   <a:ext uri="{FF2B5EF4-FFF2-40B4-BE49-F238E27FC236}">
                     <a16:creationId xmlns:a16="http://schemas.microsoft.com/office/drawing/2014/main" id="{80448020-70A1-A910-082E-59929EA1FF25}"/>
                   </a:ext>
+                  <a:ext uri="{C183D7F6-B498-43B3-948B-1728B52AA6E4}">
+                    <adec:decorative xmlns:adec="http://schemas.microsoft.com/office/drawing/2017/decorative" val="1"/>
+                  </a:ext>
                 </a:extLst>
               </p:cNvPr>
               <p:cNvCxnSpPr>
@@ -32507,6 +32747,9 @@
                 <a:extLst>
                   <a:ext uri="{FF2B5EF4-FFF2-40B4-BE49-F238E27FC236}">
                     <a16:creationId xmlns:a16="http://schemas.microsoft.com/office/drawing/2014/main" id="{7265FB6E-3B91-CCDD-D22A-D5C44BD12B6C}"/>
+                  </a:ext>
+                  <a:ext uri="{C183D7F6-B498-43B3-948B-1728B52AA6E4}">
+                    <adec:decorative xmlns:adec="http://schemas.microsoft.com/office/drawing/2017/decorative" val="1"/>
                   </a:ext>
                 </a:extLst>
               </p:cNvPr>
@@ -32550,6 +32793,9 @@
                   <a:ext uri="{FF2B5EF4-FFF2-40B4-BE49-F238E27FC236}">
                     <a16:creationId xmlns:a16="http://schemas.microsoft.com/office/drawing/2014/main" id="{FA4F705C-5542-F763-441D-BFF2A498D292}"/>
                   </a:ext>
+                  <a:ext uri="{C183D7F6-B498-43B3-948B-1728B52AA6E4}">
+                    <adec:decorative xmlns:adec="http://schemas.microsoft.com/office/drawing/2017/decorative" val="1"/>
+                  </a:ext>
                 </a:extLst>
               </p:cNvPr>
               <p:cNvCxnSpPr>
@@ -32591,6 +32837,9 @@
                 <a:extLst>
                   <a:ext uri="{FF2B5EF4-FFF2-40B4-BE49-F238E27FC236}">
                     <a16:creationId xmlns:a16="http://schemas.microsoft.com/office/drawing/2014/main" id="{4DD1EE5A-DBDA-A435-A0FE-B0F46195C9FE}"/>
+                  </a:ext>
+                  <a:ext uri="{C183D7F6-B498-43B3-948B-1728B52AA6E4}">
+                    <adec:decorative xmlns:adec="http://schemas.microsoft.com/office/drawing/2017/decorative" val="1"/>
                   </a:ext>
                 </a:extLst>
               </p:cNvPr>
@@ -32634,6 +32883,9 @@
                   <a:ext uri="{FF2B5EF4-FFF2-40B4-BE49-F238E27FC236}">
                     <a16:creationId xmlns:a16="http://schemas.microsoft.com/office/drawing/2014/main" id="{F2CD7630-D715-77D3-4388-FEC10B362B3E}"/>
                   </a:ext>
+                  <a:ext uri="{C183D7F6-B498-43B3-948B-1728B52AA6E4}">
+                    <adec:decorative xmlns:adec="http://schemas.microsoft.com/office/drawing/2017/decorative" val="1"/>
+                  </a:ext>
                 </a:extLst>
               </p:cNvPr>
               <p:cNvCxnSpPr>
@@ -32675,6 +32927,9 @@
                 <a:extLst>
                   <a:ext uri="{FF2B5EF4-FFF2-40B4-BE49-F238E27FC236}">
                     <a16:creationId xmlns:a16="http://schemas.microsoft.com/office/drawing/2014/main" id="{BD975B8D-9E37-8D2F-28BA-F3EDE1F7EE16}"/>
+                  </a:ext>
+                  <a:ext uri="{C183D7F6-B498-43B3-948B-1728B52AA6E4}">
+                    <adec:decorative xmlns:adec="http://schemas.microsoft.com/office/drawing/2017/decorative" val="1"/>
                   </a:ext>
                 </a:extLst>
               </p:cNvPr>
@@ -32763,13 +33018,10 @@
           <mc:Choice Requires="a14">
             <p:sp>
               <p:nvSpPr>
-                <p:cNvPr id="10" name="TextBox 9">
+                <p:cNvPr id="10" name="TextBox 9" descr="Equation: s">
                   <a:extLst>
                     <a:ext uri="{FF2B5EF4-FFF2-40B4-BE49-F238E27FC236}">
                       <a16:creationId xmlns:a16="http://schemas.microsoft.com/office/drawing/2014/main" id="{D5B92B9B-D738-DDDF-6386-B86A4D93CD90}"/>
-                    </a:ext>
-                    <a:ext uri="{C183D7F6-B498-43B3-948B-1728B52AA6E4}">
-                      <adec:decorative xmlns:adec="http://schemas.microsoft.com/office/drawing/2017/decorative" val="1"/>
                     </a:ext>
                   </a:extLst>
                 </p:cNvPr>
@@ -32795,10 +33047,7 @@
                   <a:pPr/>
                   <a14:m>
                     <m:oMathPara xmlns:m="http://schemas.openxmlformats.org/officeDocument/2006/math">
-                      <m:oMathParaPr>
-                        <m:jc m:val="centerGroup"/>
-                      </m:oMathParaPr>
-                      <m:oMath xmlns:m="http://schemas.openxmlformats.org/officeDocument/2006/math">
+                      <m:oMath>
                         <m:r>
                           <a:rPr lang="en-US" i="1" dirty="0" smtClean="0">
                             <a:latin typeface="Cambria Math" panose="02040503050406030204" pitchFamily="18" charset="0"/>
@@ -32912,13 +33161,10 @@
           <mc:Choice Requires="a14">
             <p:sp>
               <p:nvSpPr>
-                <p:cNvPr id="12" name="TextBox 11">
+                <p:cNvPr id="12" name="TextBox 11" descr="Equation: Q(s, a)">
                   <a:extLst>
                     <a:ext uri="{FF2B5EF4-FFF2-40B4-BE49-F238E27FC236}">
                       <a16:creationId xmlns:a16="http://schemas.microsoft.com/office/drawing/2014/main" id="{D3E0B561-EBCC-0059-D5AC-D92389C66148}"/>
-                    </a:ext>
-                    <a:ext uri="{C183D7F6-B498-43B3-948B-1728B52AA6E4}">
-                      <adec:decorative xmlns:adec="http://schemas.microsoft.com/office/drawing/2017/decorative" val="1"/>
                     </a:ext>
                   </a:extLst>
                 </p:cNvPr>
@@ -32944,10 +33190,7 @@
                   <a:pPr/>
                   <a14:m>
                     <m:oMathPara xmlns:m="http://schemas.openxmlformats.org/officeDocument/2006/math">
-                      <m:oMathParaPr>
-                        <m:jc m:val="centerGroup"/>
-                      </m:oMathParaPr>
-                      <m:oMath xmlns:m="http://schemas.openxmlformats.org/officeDocument/2006/math">
+                      <m:oMath>
                         <m:r>
                           <a:rPr lang="en-US" b="0" i="1" dirty="0" smtClean="0">
                             <a:latin typeface="Cambria Math" panose="02040503050406030204" pitchFamily="18" charset="0"/>
@@ -33044,13 +33287,10 @@
           <mc:Choice Requires="a14">
             <p:sp>
               <p:nvSpPr>
-                <p:cNvPr id="13" name="TextBox 12">
+                <p:cNvPr id="13" name="TextBox 12" descr="Equation: S">
                   <a:extLst>
                     <a:ext uri="{FF2B5EF4-FFF2-40B4-BE49-F238E27FC236}">
                       <a16:creationId xmlns:a16="http://schemas.microsoft.com/office/drawing/2014/main" id="{F255FDF8-7D33-04F7-B561-C50954518D66}"/>
-                    </a:ext>
-                    <a:ext uri="{C183D7F6-B498-43B3-948B-1728B52AA6E4}">
-                      <adec:decorative xmlns:adec="http://schemas.microsoft.com/office/drawing/2017/decorative" val="1"/>
                     </a:ext>
                   </a:extLst>
                 </p:cNvPr>
@@ -33076,10 +33316,7 @@
                   <a:pPr/>
                   <a14:m>
                     <m:oMathPara xmlns:m="http://schemas.openxmlformats.org/officeDocument/2006/math">
-                      <m:oMathParaPr>
-                        <m:jc m:val="centerGroup"/>
-                      </m:oMathParaPr>
-                      <m:oMath xmlns:m="http://schemas.openxmlformats.org/officeDocument/2006/math">
+                      <m:oMath>
                         <m:r>
                           <a:rPr lang="en-US" b="0" i="1" dirty="0" smtClean="0">
                             <a:latin typeface="Cambria Math" panose="02040503050406030204" pitchFamily="18" charset="0"/>
@@ -33146,13 +33383,10 @@
           <mc:Choice Requires="a14">
             <p:sp>
               <p:nvSpPr>
-                <p:cNvPr id="14" name="TextBox 13">
+                <p:cNvPr id="14" name="TextBox 13" descr="Equation: A">
                   <a:extLst>
                     <a:ext uri="{FF2B5EF4-FFF2-40B4-BE49-F238E27FC236}">
                       <a16:creationId xmlns:a16="http://schemas.microsoft.com/office/drawing/2014/main" id="{2157799B-2D3B-C607-6CF1-8B0D8B6AB88C}"/>
-                    </a:ext>
-                    <a:ext uri="{C183D7F6-B498-43B3-948B-1728B52AA6E4}">
-                      <adec:decorative xmlns:adec="http://schemas.microsoft.com/office/drawing/2017/decorative" val="1"/>
                     </a:ext>
                   </a:extLst>
                 </p:cNvPr>
@@ -33178,10 +33412,7 @@
                   <a:pPr/>
                   <a14:m>
                     <m:oMathPara xmlns:m="http://schemas.openxmlformats.org/officeDocument/2006/math">
-                      <m:oMathParaPr>
-                        <m:jc m:val="centerGroup"/>
-                      </m:oMathParaPr>
-                      <m:oMath xmlns:m="http://schemas.openxmlformats.org/officeDocument/2006/math">
+                      <m:oMath>
                         <m:r>
                           <a:rPr lang="en-US" b="0" i="1" dirty="0" smtClean="0">
                             <a:latin typeface="Cambria Math" panose="02040503050406030204" pitchFamily="18" charset="0"/>
@@ -33440,7 +33671,7 @@
         <mc:Choice Requires="a14">
           <p:sp>
             <p:nvSpPr>
-              <p:cNvPr id="5" name="Content Placeholder 4">
+              <p:cNvPr id="5" name="Content Placeholder 4" descr="Estimate a parametric approximation for value-action function. q hat (s,a,w) is approximately q sub star (s,a). Training data: S sub t,A sub t maps to U sub t. Update: w sub t plus 1, equals w sub t plus alpha [U sub t minus q hat (S sub t,A sub t, w sub t)] gradient of q hat (S sub t,A sub t,w sub t). U sub t can be any approximation:. MC: U sub t equals G sub t. 1-step TD: U sub t equals R sub t plus 1, plus gamma q hat (S sub t, A sub t,w sub t). …. Policy improvement: update policy with greedy action A star sub t plus 1 equals argmax over a, of q hat (S sub t plus 1,a, w sub t). For on-policy control, use a soft approximation to the greedy policy (e.g., epsilon -greedy)">
                 <a:extLst>
                   <a:ext uri="{FF2B5EF4-FFF2-40B4-BE49-F238E27FC236}">
                     <a16:creationId xmlns:a16="http://schemas.microsoft.com/office/drawing/2014/main" id="{DF5B41B1-2FAA-67FF-A039-06F08FE693F6}"/>
@@ -33726,7 +33957,7 @@
                     <m:sSub>
                       <m:sSubPr>
                         <m:ctrlPr>
-                          <a:rPr lang="en-US" i="1">
+                          <a:rPr lang="en-US" b="1" i="1" smtClean="0">
                             <a:latin typeface="Cambria Math" panose="02040503050406030204" pitchFamily="18" charset="0"/>
                           </a:rPr>
                         </m:ctrlPr>
@@ -33769,7 +34000,7 @@
                     <m:sSub>
                       <m:sSubPr>
                         <m:ctrlPr>
-                          <a:rPr lang="en-US" i="1">
+                          <a:rPr lang="en-US" b="1" i="1">
                             <a:latin typeface="Cambria Math" panose="02040503050406030204" pitchFamily="18" charset="0"/>
                           </a:rPr>
                         </m:ctrlPr>
@@ -33854,7 +34085,7 @@
                           <m:accPr>
                             <m:chr m:val="̂"/>
                             <m:ctrlPr>
-                              <a:rPr lang="en-US" i="1">
+                              <a:rPr lang="en-US" b="0" i="1" smtClean="0">
                                 <a:latin typeface="Cambria Math" panose="02040503050406030204" pitchFamily="18" charset="0"/>
                                 <a:ea typeface="Cambria Math" panose="02040503050406030204" pitchFamily="18" charset="0"/>
                               </a:rPr>
@@ -33953,7 +34184,7 @@
                             <m:sSub>
                               <m:sSubPr>
                                 <m:ctrlPr>
-                                  <a:rPr lang="en-US" i="1">
+                                  <a:rPr lang="en-US" b="1" i="1">
                                     <a:latin typeface="Cambria Math" panose="02040503050406030204" pitchFamily="18" charset="0"/>
                                     <a:ea typeface="Cambria Math" panose="02040503050406030204" pitchFamily="18" charset="0"/>
                                   </a:rPr>
@@ -34016,7 +34247,7 @@
                       <m:accPr>
                         <m:chr m:val="̂"/>
                         <m:ctrlPr>
-                          <a:rPr lang="en-US" i="1">
+                          <a:rPr lang="en-US" b="0" i="1" smtClean="0">
                             <a:latin typeface="Cambria Math" panose="02040503050406030204" pitchFamily="18" charset="0"/>
                             <a:ea typeface="Cambria Math" panose="02040503050406030204" pitchFamily="18" charset="0"/>
                           </a:rPr>
@@ -34115,7 +34346,7 @@
                         <m:sSub>
                           <m:sSubPr>
                             <m:ctrlPr>
-                              <a:rPr lang="en-US" i="1">
+                              <a:rPr lang="en-US" b="1" i="1">
                                 <a:latin typeface="Cambria Math" panose="02040503050406030204" pitchFamily="18" charset="0"/>
                                 <a:ea typeface="Cambria Math" panose="02040503050406030204" pitchFamily="18" charset="0"/>
                               </a:rPr>
@@ -34421,7 +34652,7 @@
                     <m:sSub>
                       <m:sSubPr>
                         <m:ctrlPr>
-                          <a:rPr lang="en-US" b="0" i="1" smtClean="0">
+                          <a:rPr lang="en-US" b="1" i="1" smtClean="0">
                             <a:latin typeface="Cambria Math" panose="02040503050406030204" pitchFamily="18" charset="0"/>
                           </a:rPr>
                         </m:ctrlPr>
@@ -34541,7 +34772,7 @@
                         <m:limLow>
                           <m:limLowPr>
                             <m:ctrlPr>
-                              <a:rPr lang="en-US" b="0" i="1" smtClean="0">
+                              <a:rPr lang="en-US" b="0" i="0" smtClean="0">
                                 <a:latin typeface="Cambria Math" panose="02040503050406030204" pitchFamily="18" charset="0"/>
                               </a:rPr>
                             </m:ctrlPr>
@@ -34644,7 +34875,7 @@
                         <m:sSub>
                           <m:sSubPr>
                             <m:ctrlPr>
-                              <a:rPr lang="en-US" b="0" i="1" dirty="0" smtClean="0">
+                              <a:rPr lang="en-US" b="1" i="1" dirty="0" smtClean="0">
                                 <a:latin typeface="Cambria Math" panose="02040503050406030204" pitchFamily="18" charset="0"/>
                               </a:rPr>
                             </m:ctrlPr>
@@ -34707,7 +34938,7 @@
         <mc:Fallback xmlns="">
           <p:sp>
             <p:nvSpPr>
-              <p:cNvPr id="5" name="Content Placeholder 4">
+              <p:cNvPr id="5" name="Content Placeholder 4" descr="Estimate a parametric approximation for value-action function. q hat (s,a,w) is approximately q sub star (s,a). Training data: S sub t,A sub t maps to U sub t. Update: w sub t plus 1, equals w sub t plus alpha [U sub t minus q hat (S sub t,A sub t, w sub t)] gradient of q hat (S sub t,A sub t,w sub t). U sub t can be any approximation:. MC: U sub t equals G sub t. 1-step TD: U sub t equals R sub t plus 1, plus gamma q hat (S sub t, A sub t,w sub t). …. Policy improvement: update policy with greedy action A star sub t plus 1 equals argmax over a, of q hat (S sub t plus 1,a, w sub t). For on-policy control, use a soft approximation to the greedy policy (e.g., epsilon -greedy)">
                 <a:extLst>
                   <a:ext uri="{FF2B5EF4-FFF2-40B4-BE49-F238E27FC236}">
                     <a16:creationId xmlns:a16="http://schemas.microsoft.com/office/drawing/2014/main" id="{DF5B41B1-2FAA-67FF-A039-06F08FE693F6}"/>
@@ -35285,11 +35516,11 @@
           </a:p>
         </p:txBody>
       </p:sp>
-      <mc:AlternateContent xmlns:mc="http://schemas.openxmlformats.org/markup-compatibility/2006">
-        <mc:Choice xmlns:a14="http://schemas.microsoft.com/office/drawing/2010/main" Requires="a14">
+      <mc:AlternateContent xmlns:mc="http://schemas.openxmlformats.org/markup-compatibility/2006" xmlns:a14="http://schemas.microsoft.com/office/drawing/2010/main">
+        <mc:Choice Requires="a14">
           <p:sp>
             <p:nvSpPr>
-              <p:cNvPr id="3" name="Content Placeholder 2">
+              <p:cNvPr id="3" name="Content Placeholder 2" descr="We need to learn to predict q hat (s,a,w) which should have a different value for each action. Geramifard et al. (2013)* suggest to have different state-feature weights for each action. Example: A state described by x and y and three actions, the weight vector would be w equals (w sub intercept, w sub x,action1, w sub y,action1, w sub x,action2, w sub y,action2, w sub x,action3, w sub y,action3). In the prediction/update, only the intercept and the weights belonging to the action are used">
                 <a:extLst>
                   <a:ext uri="{FF2B5EF4-FFF2-40B4-BE49-F238E27FC236}">
                     <a16:creationId xmlns:a16="http://schemas.microsoft.com/office/drawing/2014/main" id="{715F4879-4D97-8E21-D252-963C52345972}"/>
@@ -35452,7 +35683,7 @@
                     <m:sSub>
                       <m:sSubPr>
                         <m:ctrlPr>
-                          <a:rPr lang="en-US" b="0" i="1" smtClean="0">
+                          <a:rPr lang="en-US" b="0" i="0" smtClean="0">
                             <a:latin typeface="Cambria Math" panose="02040503050406030204" pitchFamily="18" charset="0"/>
                           </a:rPr>
                         </m:ctrlPr>
@@ -35489,7 +35720,7 @@
                     <m:sSub>
                       <m:sSubPr>
                         <m:ctrlPr>
-                          <a:rPr lang="en-US" b="0" i="1" smtClean="0">
+                          <a:rPr lang="en-US" b="0" i="0" smtClean="0">
                             <a:latin typeface="Cambria Math" panose="02040503050406030204" pitchFamily="18" charset="0"/>
                           </a:rPr>
                         </m:ctrlPr>
@@ -35541,7 +35772,7 @@
                     <m:sSub>
                       <m:sSubPr>
                         <m:ctrlPr>
-                          <a:rPr lang="en-US" i="1">
+                          <a:rPr lang="en-US">
                             <a:latin typeface="Cambria Math" panose="02040503050406030204" pitchFamily="18" charset="0"/>
                           </a:rPr>
                         </m:ctrlPr>
@@ -35593,7 +35824,7 @@
                     <m:sSub>
                       <m:sSubPr>
                         <m:ctrlPr>
-                          <a:rPr lang="en-US" i="1">
+                          <a:rPr lang="en-US">
                             <a:latin typeface="Cambria Math" panose="02040503050406030204" pitchFamily="18" charset="0"/>
                           </a:rPr>
                         </m:ctrlPr>
@@ -35651,7 +35882,7 @@
                     <m:sSub>
                       <m:sSubPr>
                         <m:ctrlPr>
-                          <a:rPr lang="en-US" i="1">
+                          <a:rPr lang="en-US">
                             <a:latin typeface="Cambria Math" panose="02040503050406030204" pitchFamily="18" charset="0"/>
                           </a:rPr>
                         </m:ctrlPr>
@@ -35709,7 +35940,7 @@
                     <m:sSub>
                       <m:sSubPr>
                         <m:ctrlPr>
-                          <a:rPr lang="en-US" i="1">
+                          <a:rPr lang="en-US">
                             <a:latin typeface="Cambria Math" panose="02040503050406030204" pitchFamily="18" charset="0"/>
                           </a:rPr>
                         </m:ctrlPr>
@@ -35767,7 +35998,7 @@
                     <m:sSub>
                       <m:sSubPr>
                         <m:ctrlPr>
-                          <a:rPr lang="en-US" i="1">
+                          <a:rPr lang="en-US">
                             <a:latin typeface="Cambria Math" panose="02040503050406030204" pitchFamily="18" charset="0"/>
                           </a:rPr>
                         </m:ctrlPr>
@@ -35844,10 +36075,10 @@
             </p:txBody>
           </p:sp>
         </mc:Choice>
-        <mc:Fallback>
+        <mc:Fallback xmlns="">
           <p:sp>
             <p:nvSpPr>
-              <p:cNvPr id="3" name="Content Placeholder 2">
+              <p:cNvPr id="3" name="Content Placeholder 2" descr="We need to learn to predict q hat (s,a,w) which should have a different value for each action. Geramifard et al. (2013)* suggest to have different state-feature weights for each action. Example: A state described by x and y and three actions, the weight vector would be w equals (w sub intercept, w sub x,action1, w sub y,action1, w sub x,action2, w sub y,action2, w sub x,action3, w sub y,action3). In the prediction/update, only the intercept and the weights belonging to the action are used">
                 <a:extLst>
                   <a:ext uri="{FF2B5EF4-FFF2-40B4-BE49-F238E27FC236}">
                     <a16:creationId xmlns:a16="http://schemas.microsoft.com/office/drawing/2014/main" id="{715F4879-4D97-8E21-D252-963C52345972}"/>
@@ -35995,7 +36226,7 @@
       </p:sp>
       <p:pic>
         <p:nvPicPr>
-          <p:cNvPr id="2" name="Picture 1">
+          <p:cNvPr id="2" name="Picture 1" descr="Algorithm box: Semi-gradient TD(0) for estimating v hat ≈ v pi. Input: the policy pi to be evaluated. Input: a differentiable function v hat: S plus × R^d → R such that v hat(terminal, ·) = 0. Algorithm parameter: step size alpha &gt; 0. Initialize value-function weights w in R^d arbitrarily (e.g., w = 0). Loop for each episode: Initialize S; Loop for each step of episode: Choose A ~ pi(· | S); Take action A, observe R, S′; w ← w + alpha [R + gamma v hat(S′, w) − v hat(S, w)] times the gradient of v hat(S, w); S ← S′; until S is terminal.">
             <a:extLst>
               <a:ext uri="{FF2B5EF4-FFF2-40B4-BE49-F238E27FC236}">
                 <a16:creationId xmlns:a16="http://schemas.microsoft.com/office/drawing/2014/main" id="{3193575F-E8F9-5F2D-1974-DE55A1327E88}"/>
@@ -36025,7 +36256,7 @@
       </p:pic>
       <p:pic>
         <p:nvPicPr>
-          <p:cNvPr id="7" name="Picture 6">
+          <p:cNvPr id="7" name="Picture 6" descr="Algorithm box: Episodic Semi-gradient Sarsa for Estimating q hat ≈ q star. Input: a differentiable action-value function parameterization q hat: S × A × R^d → R. Algorithm parameters: step size alpha &gt; 0, small epsilon &gt; 0. Initialize value-function weights w in R^d arbitrarily (e.g., w = 0). Loop for each episode: S, A ← initial state and action of episode (e.g., epsilon-greedy); Loop for each step of episode: Take action A, observe R, S′; If S′ is terminal: w ← w + alpha [R − q hat(S, A, w)] times the gradient of q hat(S, A, w); Go to next episode. Choose A′ as a function of q hat(S′, ·, w) (e.g., epsilon-greedy); w ← w + alpha [R + gamma q hat(S′, A′, w) − q hat(S, A, w)] times the gradient of q hat(S, A, w); S ← S′; A ← A′.">
             <a:extLst>
               <a:ext uri="{FF2B5EF4-FFF2-40B4-BE49-F238E27FC236}">
                 <a16:creationId xmlns:a16="http://schemas.microsoft.com/office/drawing/2014/main" id="{1DA48653-5D6C-7EF0-B7C4-A8F581FE1A54}"/>
@@ -36054,86 +36285,15 @@
           </a:prstGeom>
         </p:spPr>
       </p:pic>
-      <p:cxnSp>
-        <p:nvCxnSpPr>
-          <p:cNvPr id="5" name="Straight Connector 4">
-            <a:extLst>
-              <a:ext uri="{FF2B5EF4-FFF2-40B4-BE49-F238E27FC236}">
-                <a16:creationId xmlns:a16="http://schemas.microsoft.com/office/drawing/2014/main" id="{19ABAE24-325C-3516-E8B7-56FE6C1F323D}"/>
-              </a:ext>
-            </a:extLst>
-          </p:cNvPr>
-          <p:cNvCxnSpPr/>
-          <p:nvPr/>
-        </p:nvCxnSpPr>
-        <p:spPr>
-          <a:xfrm>
-            <a:off x="2565243" y="4189682"/>
-            <a:ext cx="679508" cy="0"/>
-          </a:xfrm>
-          <a:prstGeom prst="line">
-            <a:avLst/>
-          </a:prstGeom>
-        </p:spPr>
-        <p:style>
-          <a:lnRef idx="2">
-            <a:schemeClr val="accent2"/>
-          </a:lnRef>
-          <a:fillRef idx="0">
-            <a:schemeClr val="accent2"/>
-          </a:fillRef>
-          <a:effectRef idx="1">
-            <a:schemeClr val="accent2"/>
-          </a:effectRef>
-          <a:fontRef idx="minor">
-            <a:schemeClr val="tx1"/>
-          </a:fontRef>
-        </p:style>
-      </p:cxnSp>
-      <p:cxnSp>
-        <p:nvCxnSpPr>
-          <p:cNvPr id="6" name="Straight Connector 5">
-            <a:extLst>
-              <a:ext uri="{FF2B5EF4-FFF2-40B4-BE49-F238E27FC236}">
-                <a16:creationId xmlns:a16="http://schemas.microsoft.com/office/drawing/2014/main" id="{9246A066-BD10-513C-EF26-FA8D503A0BAB}"/>
-              </a:ext>
-            </a:extLst>
-          </p:cNvPr>
-          <p:cNvCxnSpPr>
-            <a:cxnSpLocks/>
-          </p:cNvCxnSpPr>
-          <p:nvPr/>
-        </p:nvCxnSpPr>
-        <p:spPr>
-          <a:xfrm>
-            <a:off x="6088505" y="5943531"/>
-            <a:ext cx="1136754" cy="0"/>
-          </a:xfrm>
-          <a:prstGeom prst="line">
-            <a:avLst/>
-          </a:prstGeom>
-        </p:spPr>
-        <p:style>
-          <a:lnRef idx="2">
-            <a:schemeClr val="accent2"/>
-          </a:lnRef>
-          <a:fillRef idx="0">
-            <a:schemeClr val="accent2"/>
-          </a:fillRef>
-          <a:effectRef idx="1">
-            <a:schemeClr val="accent2"/>
-          </a:effectRef>
-          <a:fontRef idx="minor">
-            <a:schemeClr val="tx1"/>
-          </a:fontRef>
-        </p:style>
-      </p:cxnSp>
       <p:sp>
         <p:nvSpPr>
           <p:cNvPr id="9" name="Arrow: Right 8">
             <a:extLst>
               <a:ext uri="{FF2B5EF4-FFF2-40B4-BE49-F238E27FC236}">
                 <a16:creationId xmlns:a16="http://schemas.microsoft.com/office/drawing/2014/main" id="{56C5154D-4D1E-F9B2-DAE2-2A9F1475F6A5}"/>
+              </a:ext>
+              <a:ext uri="{C183D7F6-B498-43B3-948B-1728B52AA6E4}">
+                <adec:decorative xmlns:adec="http://schemas.microsoft.com/office/drawing/2017/decorative" val="1"/>
               </a:ext>
             </a:extLst>
           </p:cNvPr>
@@ -36174,6 +36334,86 @@
           </a:p>
         </p:txBody>
       </p:sp>
+      <p:cxnSp>
+        <p:nvCxnSpPr>
+          <p:cNvPr id="5" name="Straight Connector 4">
+            <a:extLst>
+              <a:ext uri="{FF2B5EF4-FFF2-40B4-BE49-F238E27FC236}">
+                <a16:creationId xmlns:a16="http://schemas.microsoft.com/office/drawing/2014/main" id="{19ABAE24-325C-3516-E8B7-56FE6C1F323D}"/>
+              </a:ext>
+              <a:ext uri="{C183D7F6-B498-43B3-948B-1728B52AA6E4}">
+                <adec:decorative xmlns:adec="http://schemas.microsoft.com/office/drawing/2017/decorative" val="1"/>
+              </a:ext>
+            </a:extLst>
+          </p:cNvPr>
+          <p:cNvCxnSpPr/>
+          <p:nvPr/>
+        </p:nvCxnSpPr>
+        <p:spPr>
+          <a:xfrm>
+            <a:off x="2565243" y="4189682"/>
+            <a:ext cx="679508" cy="0"/>
+          </a:xfrm>
+          <a:prstGeom prst="line">
+            <a:avLst/>
+          </a:prstGeom>
+        </p:spPr>
+        <p:style>
+          <a:lnRef idx="2">
+            <a:schemeClr val="accent2"/>
+          </a:lnRef>
+          <a:fillRef idx="0">
+            <a:schemeClr val="accent2"/>
+          </a:fillRef>
+          <a:effectRef idx="1">
+            <a:schemeClr val="accent2"/>
+          </a:effectRef>
+          <a:fontRef idx="minor">
+            <a:schemeClr val="tx1"/>
+          </a:fontRef>
+        </p:style>
+      </p:cxnSp>
+      <p:cxnSp>
+        <p:nvCxnSpPr>
+          <p:cNvPr id="6" name="Straight Connector 5">
+            <a:extLst>
+              <a:ext uri="{FF2B5EF4-FFF2-40B4-BE49-F238E27FC236}">
+                <a16:creationId xmlns:a16="http://schemas.microsoft.com/office/drawing/2014/main" id="{9246A066-BD10-513C-EF26-FA8D503A0BAB}"/>
+              </a:ext>
+              <a:ext uri="{C183D7F6-B498-43B3-948B-1728B52AA6E4}">
+                <adec:decorative xmlns:adec="http://schemas.microsoft.com/office/drawing/2017/decorative" val="1"/>
+              </a:ext>
+            </a:extLst>
+          </p:cNvPr>
+          <p:cNvCxnSpPr>
+            <a:cxnSpLocks/>
+          </p:cNvCxnSpPr>
+          <p:nvPr/>
+        </p:nvCxnSpPr>
+        <p:spPr>
+          <a:xfrm>
+            <a:off x="6088505" y="5943531"/>
+            <a:ext cx="1136754" cy="0"/>
+          </a:xfrm>
+          <a:prstGeom prst="line">
+            <a:avLst/>
+          </a:prstGeom>
+        </p:spPr>
+        <p:style>
+          <a:lnRef idx="2">
+            <a:schemeClr val="accent2"/>
+          </a:lnRef>
+          <a:fillRef idx="0">
+            <a:schemeClr val="accent2"/>
+          </a:fillRef>
+          <a:effectRef idx="1">
+            <a:schemeClr val="accent2"/>
+          </a:effectRef>
+          <a:fontRef idx="minor">
+            <a:schemeClr val="tx1"/>
+          </a:fontRef>
+        </p:style>
+      </p:cxnSp>
     </p:spTree>
     <p:extLst>
       <p:ext uri="{BB962C8B-B14F-4D97-AF65-F5344CB8AC3E}">
@@ -36236,7 +36476,7 @@
         <mc:Choice Requires="a14">
           <p:sp>
             <p:nvSpPr>
-              <p:cNvPr id="3" name="Content Placeholder 2">
+              <p:cNvPr id="3" name="Content Placeholder 2" descr="Discounting vs. Average Reward. Discounted rewards (gamma -returns) are used for tabular methods because returns for each state are separately identified and averaged. G sub t equals R sub t plus 1, plus gamma R sub t plus 2, plus gamma squared R sub t plus 3, plus dot dot dot. With approximation, returns are shared (generalized) between states and it is often better to focus on the long-run average reward per time step. r (pi) equals lim over T to infinity, of 1 over T the sum over t equals 1 to T, of R sub t. Differential Returns. It is often helpful to use differences between the immediate rewards and the average reward given policy pi . G sub t equals the sum over k equals 1 to infinity, of (R sub t plus k plus 1, minus r (pi)). This leads to a differential value function">
                 <a:extLst>
                   <a:ext uri="{FF2B5EF4-FFF2-40B4-BE49-F238E27FC236}">
                     <a16:creationId xmlns:a16="http://schemas.microsoft.com/office/drawing/2014/main" id="{0C30AAAA-FA41-809A-C5AC-E6A61E335C30}"/>
@@ -36403,7 +36643,7 @@
                     <m:sSup>
                       <m:sSupPr>
                         <m:ctrlPr>
-                          <a:rPr lang="en-US" b="0" i="1" smtClean="0">
+                          <a:rPr lang="en-US" i="1">
                             <a:latin typeface="Cambria Math" panose="02040503050406030204" pitchFamily="18" charset="0"/>
                           </a:rPr>
                         </m:ctrlPr>
@@ -36531,7 +36771,7 @@
                         <m:limLow>
                           <m:limLowPr>
                             <m:ctrlPr>
-                              <a:rPr lang="en-US" b="0" i="1" smtClean="0">
+                              <a:rPr lang="en-US" b="0" i="0" smtClean="0">
                                 <a:latin typeface="Cambria Math" panose="02040503050406030204" pitchFamily="18" charset="0"/>
                               </a:rPr>
                             </m:ctrlPr>
@@ -36700,7 +36940,7 @@
                     <m:sSub>
                       <m:sSubPr>
                         <m:ctrlPr>
-                          <a:rPr lang="en-US" b="0" i="1" smtClean="0">
+                          <a:rPr lang="en-US" b="0" i="0" smtClean="0">
                             <a:latin typeface="Cambria Math" panose="02040503050406030204" pitchFamily="18" charset="0"/>
                           </a:rPr>
                         </m:ctrlPr>
@@ -36871,7 +37111,7 @@
         <mc:Fallback xmlns="">
           <p:sp>
             <p:nvSpPr>
-              <p:cNvPr id="3" name="Content Placeholder 2">
+              <p:cNvPr id="3" name="Content Placeholder 2" descr="Discounting vs. Average Reward. Discounted rewards (gamma -returns) are used for tabular methods because returns for each state are separately identified and averaged. G sub t equals R sub t plus 1, plus gamma R sub t plus 2, plus gamma squared R sub t plus 3, plus dot dot dot. With approximation, returns are shared (generalized) between states and it is often better to focus on the long-run average reward per time step. r (pi) equals lim over T to infinity, of 1 over T the sum over t equals 1 to T, of R sub t. Differential Returns. It is often helpful to use differences between the immediate rewards and the average reward given policy pi . G sub t equals the sum over k equals 1 to infinity, of (R sub t plus k plus 1, minus r (pi)). This leads to a differential value function">
                 <a:extLst>
                   <a:ext uri="{FF2B5EF4-FFF2-40B4-BE49-F238E27FC236}">
                     <a16:creationId xmlns:a16="http://schemas.microsoft.com/office/drawing/2014/main" id="{0C30AAAA-FA41-809A-C5AC-E6A61E335C30}"/>
@@ -37443,7 +37683,7 @@
         <mc:Choice Requires="a14">
           <p:sp>
             <p:nvSpPr>
-              <p:cNvPr id="3" name="Content Placeholder 2">
+              <p:cNvPr id="3" name="Content Placeholder 2" descr="Approximate the value function using parametrized functions: v hat (s,w) or q hat (s,a,w). For linear approximation, we need to create features that take non-linearities and the interaction of state components into account. Popular are:. Fourier basis features. Tile coding. Use SGD or semi-gradient descent to learn w from samples by minimizing VE bar . The samples already follow the on-policy distribution mu (s) . Issue: Convergence. Biased target estimates?. Linear vs. non-linear approximation. choice of alpha">
                 <a:extLst>
                   <a:ext uri="{FF2B5EF4-FFF2-40B4-BE49-F238E27FC236}">
                     <a16:creationId xmlns:a16="http://schemas.microsoft.com/office/drawing/2014/main" id="{609A1CBE-008E-3619-0BBC-A7F9B6DA6878}"/>
@@ -37498,7 +37738,7 @@
                       <m:accPr>
                         <m:chr m:val="̂"/>
                         <m:ctrlPr>
-                          <a:rPr lang="en-US" sz="1700" i="1">
+                          <a:rPr lang="en-US" sz="1700" b="0" i="1">
                             <a:latin typeface="Cambria Math" panose="02040503050406030204" pitchFamily="18" charset="0"/>
                           </a:rPr>
                         </m:ctrlPr>
@@ -37791,7 +38031,7 @@
         <mc:Fallback xmlns="">
           <p:sp>
             <p:nvSpPr>
-              <p:cNvPr id="3" name="Content Placeholder 2">
+              <p:cNvPr id="3" name="Content Placeholder 2" descr="Approximate the value function using parametrized functions: v hat (s,w) or q hat (s,a,w). For linear approximation, we need to create features that take non-linearities and the interaction of state components into account. Popular are:. Fourier basis features. Tile coding. Use SGD or semi-gradient descent to learn w from samples by minimizing VE bar . The samples already follow the on-policy distribution mu (s) . Issue: Convergence. Biased target estimates?. Linear vs. non-linear approximation. choice of alpha">
                 <a:extLst>
                   <a:ext uri="{FF2B5EF4-FFF2-40B4-BE49-F238E27FC236}">
                     <a16:creationId xmlns:a16="http://schemas.microsoft.com/office/drawing/2014/main" id="{609A1CBE-008E-3619-0BBC-A7F9B6DA6878}"/>
@@ -38370,7 +38610,7 @@
         <mc:Choice Requires="a14">
           <p:sp>
             <p:nvSpPr>
-              <p:cNvPr id="5" name="Content Placeholder 4">
+              <p:cNvPr id="5" name="Content Placeholder 4" descr="Issue: Tabular methods do not scale for large state spaces. Space complexity: Memory needed for storing the value function with O(given S given) entries as a table. No Generalization: Many states will never be encountered during learning and therefore cannot be predicted. Idea: Try to find an approximate value function for policy pi :. v hat (s,w) is approximately v sub pi with w in the real numbers to the power d. Requirements:. The function needs to have a manageable number of parameters, the weight vector w. I.e., d is much less than given S given . The function can only depend on features of state s . The function needs to generalize, so states with similar features get a similar value. Note: Approximation functions do this automatically, since all states share the weight vector and will be affected by changes in the weights">
                 <a:extLst>
                   <a:ext uri="{FF2B5EF4-FFF2-40B4-BE49-F238E27FC236}">
                     <a16:creationId xmlns:a16="http://schemas.microsoft.com/office/drawing/2014/main" id="{2CDE1EFF-EEB7-45A5-C0AF-4014AF66241B}"/>
@@ -38503,10 +38743,7 @@
                 </a:br>
                 <a14:m>
                   <m:oMathPara xmlns:m="http://schemas.openxmlformats.org/officeDocument/2006/math">
-                    <m:oMathParaPr>
-                      <m:jc m:val="centerGroup"/>
-                    </m:oMathParaPr>
-                    <m:oMath xmlns:m="http://schemas.openxmlformats.org/officeDocument/2006/math">
+                    <m:oMath>
                       <m:acc>
                         <m:accPr>
                           <m:chr m:val="̂"/>
@@ -38528,7 +38765,7 @@
                       <m:d>
                         <m:dPr>
                           <m:ctrlPr>
-                            <a:rPr lang="en-US" b="0" i="1" dirty="0" smtClean="0">
+                            <a:rPr lang="en-US" i="1">
                               <a:latin typeface="Cambria Math" panose="02040503050406030204" pitchFamily="18" charset="0"/>
                             </a:rPr>
                           </m:ctrlPr>
@@ -38598,16 +38835,7 @@
                         <a:rPr lang="en-US" b="0" i="0" smtClean="0">
                           <a:latin typeface="Cambria Math" panose="02040503050406030204" pitchFamily="18" charset="0"/>
                         </a:rPr>
-                        <m:t>with</m:t>
-                      </m:r>
-                      <m:r>
-                        <m:rPr>
-                          <m:nor/>
-                        </m:rPr>
-                        <a:rPr lang="en-US" b="0" i="0" smtClean="0">
-                          <a:latin typeface="Cambria Math" panose="02040503050406030204" pitchFamily="18" charset="0"/>
-                        </a:rPr>
-                        <m:t> </m:t>
+                        <m:t>with </m:t>
                       </m:r>
                       <m:r>
                         <a:rPr lang="en-US" b="1" i="1" smtClean="0">
@@ -38801,7 +39029,7 @@
         <mc:Fallback xmlns="">
           <p:sp>
             <p:nvSpPr>
-              <p:cNvPr id="5" name="Content Placeholder 4">
+              <p:cNvPr id="5" name="Content Placeholder 4" descr="Issue: Tabular methods do not scale for large state spaces. Space complexity: Memory needed for storing the value function with O(given S given) entries as a table. No Generalization: Many states will never be encountered during learning and therefore cannot be predicted. Idea: Try to find an approximate value function for policy pi :. v hat (s,w) is approximately v sub pi with w in the real numbers to the power d. Requirements:. The function needs to have a manageable number of parameters, the weight vector w. I.e., d is much less than given S given . The function can only depend on features of state s . The function needs to generalize, so states with similar features get a similar value. Note: Approximation functions do this automatically, since all states share the weight vector and will be affected by changes in the weights">
                 <a:extLst>
                   <a:ext uri="{FF2B5EF4-FFF2-40B4-BE49-F238E27FC236}">
                     <a16:creationId xmlns:a16="http://schemas.microsoft.com/office/drawing/2014/main" id="{2CDE1EFF-EEB7-45A5-C0AF-4014AF66241B}"/>
@@ -39320,7 +39548,7 @@
         <mc:Choice Requires="a14">
           <p:sp>
             <p:nvSpPr>
-              <p:cNvPr id="3" name="Content Placeholder 2">
+              <p:cNvPr id="3" name="Content Placeholder 2" descr="Approach: Use function approximation (supervised learning). We need training data in the form of s maps to u where the target u is a “backed-up value” representing the desired value. Some options for training data S sub t maps to U :. MC: S sub t maps to G sub t. TD(0): S sub t maps to R sub t plus 1, plus gamma v hat (S sub t plus 1,w sub t). DP: S sub t maps to E sub pi [R sub t plus 1, plus gamma v hat (S sub t plus 1,w sub t)]">
                 <a:extLst>
                   <a:ext uri="{FF2B5EF4-FFF2-40B4-BE49-F238E27FC236}">
                     <a16:creationId xmlns:a16="http://schemas.microsoft.com/office/drawing/2014/main" id="{DC945A54-7468-EEEB-5DC1-3FF613070C42}"/>
@@ -39459,7 +39687,7 @@
                     <m:sSub>
                       <m:sSubPr>
                         <m:ctrlPr>
-                          <a:rPr lang="en-US" b="0" i="1" smtClean="0">
+                          <a:rPr lang="en-US" b="0" i="0" smtClean="0">
                             <a:latin typeface="Cambria Math" panose="02040503050406030204" pitchFamily="18" charset="0"/>
                             <a:ea typeface="Cambria Math" panose="02040503050406030204" pitchFamily="18" charset="0"/>
                           </a:rPr>
@@ -39522,7 +39750,7 @@
                     <m:sSub>
                       <m:sSubPr>
                         <m:ctrlPr>
-                          <a:rPr lang="en-US" i="1">
+                          <a:rPr lang="en-US">
                             <a:latin typeface="Cambria Math" panose="02040503050406030204" pitchFamily="18" charset="0"/>
                             <a:ea typeface="Cambria Math" panose="02040503050406030204" pitchFamily="18" charset="0"/>
                           </a:rPr>
@@ -39603,7 +39831,7 @@
                     <m:sSub>
                       <m:sSubPr>
                         <m:ctrlPr>
-                          <a:rPr lang="en-US" i="1">
+                          <a:rPr lang="en-US">
                             <a:latin typeface="Cambria Math" panose="02040503050406030204" pitchFamily="18" charset="0"/>
                             <a:ea typeface="Cambria Math" panose="02040503050406030204" pitchFamily="18" charset="0"/>
                           </a:rPr>
@@ -39768,7 +39996,7 @@
                         <m:sSub>
                           <m:sSubPr>
                             <m:ctrlPr>
-                              <a:rPr lang="en-US" b="0" i="1" smtClean="0">
+                              <a:rPr lang="en-US" b="1" i="1" smtClean="0">
                                 <a:latin typeface="Cambria Math" panose="02040503050406030204" pitchFamily="18" charset="0"/>
                                 <a:ea typeface="Cambria Math" panose="02040503050406030204" pitchFamily="18" charset="0"/>
                               </a:rPr>
@@ -39812,7 +40040,7 @@
                     <m:sSub>
                       <m:sSubPr>
                         <m:ctrlPr>
-                          <a:rPr lang="en-US" i="1">
+                          <a:rPr lang="en-US">
                             <a:latin typeface="Cambria Math" panose="02040503050406030204" pitchFamily="18" charset="0"/>
                             <a:ea typeface="Cambria Math" panose="02040503050406030204" pitchFamily="18" charset="0"/>
                           </a:rPr>
@@ -40012,7 +40240,7 @@
                         <m:sSub>
                           <m:sSubPr>
                             <m:ctrlPr>
-                              <a:rPr lang="en-US" i="1">
+                              <a:rPr lang="en-US" b="1" i="1">
                                 <a:latin typeface="Cambria Math" panose="02040503050406030204" pitchFamily="18" charset="0"/>
                                 <a:ea typeface="Cambria Math" panose="02040503050406030204" pitchFamily="18" charset="0"/>
                               </a:rPr>
@@ -40056,7 +40284,7 @@
         <mc:Fallback xmlns="">
           <p:sp>
             <p:nvSpPr>
-              <p:cNvPr id="3" name="Content Placeholder 2">
+              <p:cNvPr id="3" name="Content Placeholder 2" descr="Approach: Use function approximation (supervised learning). We need training data in the form of s maps to u where the target u is a “backed-up value” representing the desired value. Some options for training data S sub t maps to U :. MC: S sub t maps to G sub t. TD(0): S sub t maps to R sub t plus 1, plus gamma v hat (S sub t plus 1,w sub t). DP: S sub t maps to E sub pi [R sub t plus 1, plus gamma v hat (S sub t plus 1,w sub t)]">
                 <a:extLst>
                   <a:ext uri="{FF2B5EF4-FFF2-40B4-BE49-F238E27FC236}">
                     <a16:creationId xmlns:a16="http://schemas.microsoft.com/office/drawing/2014/main" id="{DC945A54-7468-EEEB-5DC1-3FF613070C42}"/>
@@ -40097,7 +40325,7 @@
         <mc:Choice Requires="a14">
           <p:sp>
             <p:nvSpPr>
-              <p:cNvPr id="4" name="TextBox 3">
+              <p:cNvPr id="4" name="TextBox 3" descr="Note: The subscript t for w indicates when the update happens during learning. The subscript is often dropped (we only keep track of the current w)">
                 <a:extLst>
                   <a:ext uri="{FF2B5EF4-FFF2-40B4-BE49-F238E27FC236}">
                     <a16:creationId xmlns:a16="http://schemas.microsoft.com/office/drawing/2014/main" id="{8723F7C8-1C0F-59B3-0EF5-B4C87FC7D0DA}"/>
@@ -40198,7 +40426,7 @@
         <mc:Fallback xmlns="">
           <p:sp>
             <p:nvSpPr>
-              <p:cNvPr id="4" name="TextBox 3">
+              <p:cNvPr id="4" name="TextBox 3" descr="Note: The subscript t for w indicates when the update happens during learning. The subscript is often dropped (we only keep track of the current w)">
                 <a:extLst>
                   <a:ext uri="{FF2B5EF4-FFF2-40B4-BE49-F238E27FC236}">
                     <a16:creationId xmlns:a16="http://schemas.microsoft.com/office/drawing/2014/main" id="{8723F7C8-1C0F-59B3-0EF5-B4C87FC7D0DA}"/>
@@ -40494,7 +40722,7 @@
         <mc:Choice Requires="a14">
           <p:sp>
             <p:nvSpPr>
-              <p:cNvPr id="2" name="Title 1">
+              <p:cNvPr id="2" name="Title 1" descr="Prediction Objective (VE bar)">
                 <a:extLst>
                   <a:ext uri="{FF2B5EF4-FFF2-40B4-BE49-F238E27FC236}">
                     <a16:creationId xmlns:a16="http://schemas.microsoft.com/office/drawing/2014/main" id="{A6225E20-3603-3F96-2FC8-D6C1E6830E55}"/>
@@ -40523,7 +40751,7 @@
                       <m:accPr>
                         <m:chr m:val="̅"/>
                         <m:ctrlPr>
-                          <a:rPr lang="en-US" i="1" smtClean="0">
+                          <a:rPr lang="en-US" b="0" i="1" smtClean="0">
                             <a:latin typeface="Cambria Math" panose="02040503050406030204" pitchFamily="18" charset="0"/>
                           </a:rPr>
                         </m:ctrlPr>
@@ -40550,7 +40778,7 @@
         <mc:Fallback xmlns="">
           <p:sp>
             <p:nvSpPr>
-              <p:cNvPr id="2" name="Title 1">
+              <p:cNvPr id="2" name="Title 1" descr="Prediction Objective (VE bar)">
                 <a:extLst>
                   <a:ext uri="{FF2B5EF4-FFF2-40B4-BE49-F238E27FC236}">
                     <a16:creationId xmlns:a16="http://schemas.microsoft.com/office/drawing/2014/main" id="{A6225E20-3603-3F96-2FC8-D6C1E6830E55}"/>
@@ -40591,7 +40819,7 @@
         <mc:Choice Requires="a14">
           <p:sp>
             <p:nvSpPr>
-              <p:cNvPr id="3" name="Content Placeholder 2">
+              <p:cNvPr id="3" name="Content Placeholder 2" descr="Learning algorithm: Update the weights w to reduce the error for v hat (s,w) is approximately v sub pi. Note on generalization: Any change of w will also affect the prediction for other states and thus reduce or increase their error!. Prediction error for state s: the absolute value of v sub pi (s) minus v hat (s,w). To calculate the error over all states we need to define how much we care about each state. We use a state distribution function mu (s) is greater than or equal to 0; the sum over s, of mu (s) equals 1. mu (s) is typically the fraction of time spent in s when following pi . We obtain data by following a policy pi so samples already comes from this distribution. For continuous tasks, mu (s) is a stationary distribution called the on-policy distribution. For episodic tasks a near stationary distribution only exists for ergodic* MDPs with large horizons">
                 <a:extLst>
                   <a:ext uri="{FF2B5EF4-FFF2-40B4-BE49-F238E27FC236}">
                     <a16:creationId xmlns:a16="http://schemas.microsoft.com/office/drawing/2014/main" id="{5011D2B2-B573-9A22-66E2-8A27E27D16CC}"/>
@@ -40663,7 +40891,7 @@
                     <m:d>
                       <m:dPr>
                         <m:ctrlPr>
-                          <a:rPr lang="en-US" i="1" dirty="0">
+                          <a:rPr lang="en-US" i="1">
                             <a:latin typeface="Cambria Math" panose="02040503050406030204" pitchFamily="18" charset="0"/>
                           </a:rPr>
                         </m:ctrlPr>
@@ -40778,7 +41006,7 @@
                         <m:begChr m:val="|"/>
                         <m:endChr m:val="|"/>
                         <m:ctrlPr>
-                          <a:rPr lang="en-US" i="1" smtClean="0">
+                          <a:rPr lang="en-US" b="0" i="1" smtClean="0">
                             <a:latin typeface="Cambria Math" panose="02040503050406030204" pitchFamily="18" charset="0"/>
                           </a:rPr>
                         </m:ctrlPr>
@@ -41128,7 +41356,7 @@
         <mc:Fallback xmlns="">
           <p:sp>
             <p:nvSpPr>
-              <p:cNvPr id="3" name="Content Placeholder 2">
+              <p:cNvPr id="3" name="Content Placeholder 2" descr="Learning algorithm: Update the weights w to reduce the error for v hat (s,w) is approximately v sub pi. Note on generalization: Any change of w will also affect the prediction for other states and thus reduce or increase their error!. Prediction error for state s: the absolute value of v sub pi (s) minus v hat (s,w). To calculate the error over all states we need to define how much we care about each state. We use a state distribution function mu (s) is greater than or equal to 0; the sum over s, of mu (s) equals 1. mu (s) is typically the fraction of time spent in s when following pi . We obtain data by following a policy pi so samples already comes from this distribution. For continuous tasks, mu (s) is a stationary distribution called the on-policy distribution. For episodic tasks a near stationary distribution only exists for ergodic* MDPs with large horizons">
                 <a:extLst>
                   <a:ext uri="{FF2B5EF4-FFF2-40B4-BE49-F238E27FC236}">
                     <a16:creationId xmlns:a16="http://schemas.microsoft.com/office/drawing/2014/main" id="{5011D2B2-B573-9A22-66E2-8A27E27D16CC}"/>
@@ -41173,7 +41401,7 @@
         <mc:Choice Requires="a14">
           <p:sp>
             <p:nvSpPr>
-              <p:cNvPr id="5" name="TextBox 4">
+              <p:cNvPr id="5" name="TextBox 4" descr="Definition: Mean square value error VE bar is defined as the sum over s in S, of mu (s) [v sub pi minus v hat (s,w)] squared">
                 <a:extLst>
                   <a:ext uri="{FF2B5EF4-FFF2-40B4-BE49-F238E27FC236}">
                     <a16:creationId xmlns:a16="http://schemas.microsoft.com/office/drawing/2014/main" id="{B60AE832-3161-626E-1379-EADD13E60C4B}"/>
@@ -41231,15 +41459,12 @@
                 </a:br>
                 <a14:m>
                   <m:oMathPara xmlns:m="http://schemas.openxmlformats.org/officeDocument/2006/math">
-                    <m:oMathParaPr>
-                      <m:jc m:val="centerGroup"/>
-                    </m:oMathParaPr>
-                    <m:oMath xmlns:m="http://schemas.openxmlformats.org/officeDocument/2006/math">
+                    <m:oMath>
                       <m:acc>
                         <m:accPr>
                           <m:chr m:val="̅"/>
                           <m:ctrlPr>
-                            <a:rPr lang="en-US" i="1" smtClean="0">
+                            <a:rPr lang="en-US" b="0" i="1" smtClean="0">
                               <a:latin typeface="Cambria Math" panose="02040503050406030204" pitchFamily="18" charset="0"/>
                             </a:rPr>
                           </m:ctrlPr>
@@ -41336,7 +41561,7 @@
                                   <m:begChr m:val="["/>
                                   <m:endChr m:val="]"/>
                                   <m:ctrlPr>
-                                    <a:rPr lang="en-US" b="0" i="1" smtClean="0">
+                                    <a:rPr lang="en-US" i="1">
                                       <a:latin typeface="Cambria Math" panose="02040503050406030204" pitchFamily="18" charset="0"/>
                                     </a:rPr>
                                   </m:ctrlPr>
@@ -41445,7 +41670,7 @@
         <mc:Fallback xmlns="">
           <p:sp>
             <p:nvSpPr>
-              <p:cNvPr id="5" name="TextBox 4">
+              <p:cNvPr id="5" name="TextBox 4" descr="Definition: Mean square value error VE bar is defined as the sum over s in S, of mu (s) [v sub pi minus v hat (s,w)] squared">
                 <a:extLst>
                   <a:ext uri="{FF2B5EF4-FFF2-40B4-BE49-F238E27FC236}">
                     <a16:creationId xmlns:a16="http://schemas.microsoft.com/office/drawing/2014/main" id="{B60AE832-3161-626E-1379-EADD13E60C4B}"/>
@@ -41491,7 +41716,7 @@
         <mc:Choice Requires="a14">
           <p:sp>
             <p:nvSpPr>
-              <p:cNvPr id="4" name="TextBox 3">
+              <p:cNvPr id="4" name="TextBox 3" descr="*Ergodic: The Markov process when following pi is irreducible (all states are reachable) and aperiodic (does not get stuck)">
                 <a:extLst>
                   <a:ext uri="{FF2B5EF4-FFF2-40B4-BE49-F238E27FC236}">
                     <a16:creationId xmlns:a16="http://schemas.microsoft.com/office/drawing/2014/main" id="{95FF9CD1-DC49-A6AF-FFC2-346163866CD0}"/>
@@ -41546,7 +41771,7 @@
         <mc:Fallback xmlns="">
           <p:sp>
             <p:nvSpPr>
-              <p:cNvPr id="4" name="TextBox 3">
+              <p:cNvPr id="4" name="TextBox 3" descr="*Ergodic: The Markov process when following pi is irreducible (all states are reachable) and aperiodic (does not get stuck)">
                 <a:extLst>
                   <a:ext uri="{FF2B5EF4-FFF2-40B4-BE49-F238E27FC236}">
                     <a16:creationId xmlns:a16="http://schemas.microsoft.com/office/drawing/2014/main" id="{95FF9CD1-DC49-A6AF-FFC2-346163866CD0}"/>
@@ -42246,7 +42471,7 @@
         <mc:Choice Requires="a14">
           <p:sp>
             <p:nvSpPr>
-              <p:cNvPr id="3" name="Content Placeholder 2">
+              <p:cNvPr id="3" name="Content Placeholder 2" descr="Find the parameter vector w star that leads to the smallest error (the global optimum): VE bar (w star) is less than or equal to VE bar (w) for all w. Local optima: Often, we will only find a local optimum where the equation above only holds for w in a small neighborhood around w star . Note: Policies converge typically way before the value function converges so finding the global optimal value function may not be necessary. Convergence: Convergence to the global or a local optimum depends on the used approximation and the learning method. We will discuss this for each method. Bias: Different approximation methods have different bias (are not able to represent the true value function)">
                 <a:extLst>
                   <a:ext uri="{FF2B5EF4-FFF2-40B4-BE49-F238E27FC236}">
                     <a16:creationId xmlns:a16="http://schemas.microsoft.com/office/drawing/2014/main" id="{CF9CFE80-0730-DB79-FA4E-3D388C1A58F9}"/>
@@ -42276,7 +42501,7 @@
                     <m:sSup>
                       <m:sSupPr>
                         <m:ctrlPr>
-                          <a:rPr lang="en-US" i="1">
+                          <a:rPr lang="en-US" b="1" i="1">
                             <a:latin typeface="Cambria Math" panose="02040503050406030204" pitchFamily="18" charset="0"/>
                           </a:rPr>
                         </m:ctrlPr>
@@ -42328,7 +42553,7 @@
                       <m:accPr>
                         <m:chr m:val="̅"/>
                         <m:ctrlPr>
-                          <a:rPr lang="en-US" i="1" smtClean="0">
+                          <a:rPr lang="en-US" b="0" i="1" smtClean="0">
                             <a:latin typeface="Cambria Math" panose="02040503050406030204" pitchFamily="18" charset="0"/>
                           </a:rPr>
                         </m:ctrlPr>
@@ -42345,7 +42570,7 @@
                     <m:d>
                       <m:dPr>
                         <m:ctrlPr>
-                          <a:rPr lang="en-US" b="0" i="1" smtClean="0">
+                          <a:rPr lang="en-US" i="1">
                             <a:latin typeface="Cambria Math" panose="02040503050406030204" pitchFamily="18" charset="0"/>
                           </a:rPr>
                         </m:ctrlPr>
@@ -42354,7 +42579,7 @@
                         <m:sSup>
                           <m:sSupPr>
                             <m:ctrlPr>
-                              <a:rPr lang="en-US" i="1">
+                              <a:rPr lang="en-US" b="1" i="1">
                                 <a:latin typeface="Cambria Math" panose="02040503050406030204" pitchFamily="18" charset="0"/>
                               </a:rPr>
                             </m:ctrlPr>
@@ -42405,7 +42630,7 @@
                     <m:d>
                       <m:dPr>
                         <m:ctrlPr>
-                          <a:rPr lang="en-US" b="1" i="1">
+                          <a:rPr lang="en-US" b="1" i="1" smtClean="0">
                             <a:latin typeface="Cambria Math" panose="02040503050406030204" pitchFamily="18" charset="0"/>
                           </a:rPr>
                         </m:ctrlPr>
@@ -42487,7 +42712,7 @@
                     <m:sSup>
                       <m:sSupPr>
                         <m:ctrlPr>
-                          <a:rPr lang="en-US" i="1">
+                          <a:rPr lang="en-US" b="1" i="1">
                             <a:latin typeface="Cambria Math" panose="02040503050406030204" pitchFamily="18" charset="0"/>
                           </a:rPr>
                         </m:ctrlPr>
@@ -42563,7 +42788,7 @@
         <mc:Fallback xmlns="">
           <p:sp>
             <p:nvSpPr>
-              <p:cNvPr id="3" name="Content Placeholder 2">
+              <p:cNvPr id="3" name="Content Placeholder 2" descr="Find the parameter vector w star that leads to the smallest error (the global optimum): VE bar (w star) is less than or equal to VE bar (w) for all w. Local optima: Often, we will only find a local optimum where the equation above only holds for w in a small neighborhood around w star . Note: Policies converge typically way before the value function converges so finding the global optimal value function may not be necessary. Convergence: Convergence to the global or a local optimum depends on the used approximation and the learning method. We will discuss this for each method. Bias: Different approximation methods have different bias (are not able to represent the true value function)">
                 <a:extLst>
                   <a:ext uri="{FF2B5EF4-FFF2-40B4-BE49-F238E27FC236}">
                     <a16:creationId xmlns:a16="http://schemas.microsoft.com/office/drawing/2014/main" id="{CF9CFE80-0730-DB79-FA4E-3D388C1A58F9}"/>

--- a/slides/Lecture_Chapter09.pptx
+++ b/slides/Lecture_Chapter09.pptx
@@ -300,7 +300,7 @@
           <a:p>
             <a:fld id="{2987FC57-34F3-4A88-970B-010E7C0EC943}" type="datetimeFigureOut">
               <a:rPr lang="en-US" smtClean="0"/>
-              <a:t>10/15/26</a:t>
+              <a:t>10/19/2026</a:t>
             </a:fld>
             <a:endParaRPr lang="en-US"/>
           </a:p>
@@ -882,7 +882,7 @@
           <a:p>
             <a:fld id="{3E22BF2E-04DA-469E-97C5-BB68A0368813}" type="datetimeFigureOut">
               <a:rPr lang="en-US" smtClean="0"/>
-              <a:t>10/15/26</a:t>
+              <a:t>10/19/2026</a:t>
             </a:fld>
             <a:endParaRPr lang="en-US"/>
           </a:p>
@@ -1080,7 +1080,7 @@
           <a:p>
             <a:fld id="{3E22BF2E-04DA-469E-97C5-BB68A0368813}" type="datetimeFigureOut">
               <a:rPr lang="en-US" smtClean="0"/>
-              <a:t>10/15/26</a:t>
+              <a:t>10/19/2026</a:t>
             </a:fld>
             <a:endParaRPr lang="en-US"/>
           </a:p>
@@ -1288,7 +1288,7 @@
           <a:p>
             <a:fld id="{3E22BF2E-04DA-469E-97C5-BB68A0368813}" type="datetimeFigureOut">
               <a:rPr lang="en-US" smtClean="0"/>
-              <a:t>10/15/26</a:t>
+              <a:t>10/19/2026</a:t>
             </a:fld>
             <a:endParaRPr lang="en-US"/>
           </a:p>
@@ -1496,7 +1496,7 @@
           <a:p>
             <a:fld id="{3E22BF2E-04DA-469E-97C5-BB68A0368813}" type="datetimeFigureOut">
               <a:rPr lang="en-US" smtClean="0"/>
-              <a:t>10/15/26</a:t>
+              <a:t>10/19/2026</a:t>
             </a:fld>
             <a:endParaRPr lang="en-US"/>
           </a:p>
@@ -1771,7 +1771,7 @@
           <a:p>
             <a:fld id="{3E22BF2E-04DA-469E-97C5-BB68A0368813}" type="datetimeFigureOut">
               <a:rPr lang="en-US" smtClean="0"/>
-              <a:t>10/15/26</a:t>
+              <a:t>10/19/2026</a:t>
             </a:fld>
             <a:endParaRPr lang="en-US"/>
           </a:p>
@@ -2036,7 +2036,7 @@
           <a:p>
             <a:fld id="{3E22BF2E-04DA-469E-97C5-BB68A0368813}" type="datetimeFigureOut">
               <a:rPr lang="en-US" smtClean="0"/>
-              <a:t>10/15/26</a:t>
+              <a:t>10/19/2026</a:t>
             </a:fld>
             <a:endParaRPr lang="en-US"/>
           </a:p>
@@ -2448,7 +2448,7 @@
           <a:p>
             <a:fld id="{3E22BF2E-04DA-469E-97C5-BB68A0368813}" type="datetimeFigureOut">
               <a:rPr lang="en-US" smtClean="0"/>
-              <a:t>10/15/26</a:t>
+              <a:t>10/19/2026</a:t>
             </a:fld>
             <a:endParaRPr lang="en-US"/>
           </a:p>
@@ -2589,7 +2589,7 @@
           <a:p>
             <a:fld id="{3E22BF2E-04DA-469E-97C5-BB68A0368813}" type="datetimeFigureOut">
               <a:rPr lang="en-US" smtClean="0"/>
-              <a:t>10/15/26</a:t>
+              <a:t>10/19/2026</a:t>
             </a:fld>
             <a:endParaRPr lang="en-US"/>
           </a:p>
@@ -2702,7 +2702,7 @@
           <a:p>
             <a:fld id="{3E22BF2E-04DA-469E-97C5-BB68A0368813}" type="datetimeFigureOut">
               <a:rPr lang="en-US" smtClean="0"/>
-              <a:t>10/15/26</a:t>
+              <a:t>10/19/2026</a:t>
             </a:fld>
             <a:endParaRPr lang="en-US"/>
           </a:p>
@@ -3013,7 +3013,7 @@
           <a:p>
             <a:fld id="{3E22BF2E-04DA-469E-97C5-BB68A0368813}" type="datetimeFigureOut">
               <a:rPr lang="en-US" smtClean="0"/>
-              <a:t>10/15/26</a:t>
+              <a:t>10/19/2026</a:t>
             </a:fld>
             <a:endParaRPr lang="en-US"/>
           </a:p>
@@ -3301,7 +3301,7 @@
           <a:p>
             <a:fld id="{3E22BF2E-04DA-469E-97C5-BB68A0368813}" type="datetimeFigureOut">
               <a:rPr lang="en-US" smtClean="0"/>
-              <a:t>10/15/26</a:t>
+              <a:t>10/19/2026</a:t>
             </a:fld>
             <a:endParaRPr lang="en-US"/>
           </a:p>
@@ -3542,7 +3542,7 @@
           <a:p>
             <a:fld id="{3E22BF2E-04DA-469E-97C5-BB68A0368813}" type="datetimeFigureOut">
               <a:rPr lang="en-US" smtClean="0"/>
-              <a:t>10/15/26</a:t>
+              <a:t>10/19/2026</a:t>
             </a:fld>
             <a:endParaRPr lang="en-US"/>
           </a:p>
@@ -5962,7 +5962,7 @@
                           <m:sSup>
                             <m:sSupPr>
                               <m:ctrlPr>
-                                <a:rPr lang="en-US" b="0" i="1" smtClean="0">
+                                <a:rPr lang="en-US" i="1">
                                   <a:latin typeface="Cambria Math" panose="02040503050406030204" pitchFamily="18" charset="0"/>
                                 </a:rPr>
                               </m:ctrlPr>
@@ -10915,7 +10915,7 @@
                           <m:begChr m:val="["/>
                           <m:endChr m:val="]"/>
                           <m:ctrlPr>
-                            <a:rPr lang="en-US" i="1" smtClean="0">
+                            <a:rPr lang="en-US" i="1">
                               <a:solidFill>
                                 <a:srgbClr val="FF0000"/>
                               </a:solidFill>
@@ -11416,7 +11416,7 @@
                           <m:begChr m:val="["/>
                           <m:endChr m:val="]"/>
                           <m:ctrlPr>
-                            <a:rPr lang="en-US" i="1" smtClean="0">
+                            <a:rPr lang="en-US" i="1">
                               <a:solidFill>
                                 <a:srgbClr val="FF0000"/>
                               </a:solidFill>
@@ -14814,7 +14814,7 @@
                         <m:d>
                           <m:dPr>
                             <m:ctrlPr>
-                              <a:rPr lang="en-US" i="1">
+                              <a:rPr lang="en-US" i="1" smtClean="0">
                                 <a:latin typeface="Cambria Math" panose="02040503050406030204" pitchFamily="18" charset="0"/>
                                 <a:ea typeface="Cambria Math" panose="02040503050406030204" pitchFamily="18" charset="0"/>
                               </a:rPr>
@@ -20705,8 +20705,8 @@
           </a:p>
         </p:txBody>
       </p:sp>
-      <mc:AlternateContent xmlns:mc="http://schemas.openxmlformats.org/markup-compatibility/2006">
-        <mc:Choice xmlns:a14="http://schemas.microsoft.com/office/drawing/2010/main" Requires="a14">
+      <mc:AlternateContent xmlns:mc="http://schemas.openxmlformats.org/markup-compatibility/2006" xmlns:a14="http://schemas.microsoft.com/office/drawing/2010/main">
+        <mc:Choice Requires="a14">
           <p:sp>
             <p:nvSpPr>
               <p:cNvPr id="41" name="TextBox 40">
@@ -21844,7 +21844,7 @@
             </p:txBody>
           </p:sp>
         </mc:Choice>
-        <mc:Fallback>
+        <mc:Fallback xmlns="">
           <p:sp>
             <p:nvSpPr>
               <p:cNvPr id="41" name="TextBox 40">
@@ -23057,8 +23057,8 @@
           </p:txBody>
         </p:sp>
       </p:grpSp>
-      <mc:AlternateContent xmlns:mc="http://schemas.openxmlformats.org/markup-compatibility/2006">
-        <mc:Choice xmlns:a14="http://schemas.microsoft.com/office/drawing/2010/main" Requires="a14">
+      <mc:AlternateContent xmlns:mc="http://schemas.openxmlformats.org/markup-compatibility/2006" xmlns:a14="http://schemas.microsoft.com/office/drawing/2010/main">
+        <mc:Choice Requires="a14">
           <p:sp>
             <p:nvSpPr>
               <p:cNvPr id="46" name="Speech Bubble: Rectangle with Corners Rounded 45">
@@ -23153,7 +23153,7 @@
             </p:txBody>
           </p:sp>
         </mc:Choice>
-        <mc:Fallback>
+        <mc:Fallback xmlns="">
           <p:sp>
             <p:nvSpPr>
               <p:cNvPr id="46" name="Speech Bubble: Rectangle with Corners Rounded 45">
@@ -38606,8 +38606,8 @@
           </a:p>
         </p:txBody>
       </p:sp>
-      <mc:AlternateContent xmlns:mc="http://schemas.openxmlformats.org/markup-compatibility/2006" xmlns:a14="http://schemas.microsoft.com/office/drawing/2010/main">
-        <mc:Choice Requires="a14">
+      <mc:AlternateContent xmlns:mc="http://schemas.openxmlformats.org/markup-compatibility/2006">
+        <mc:Choice xmlns:a14="http://schemas.microsoft.com/office/drawing/2010/main" Requires="a14">
           <p:sp>
             <p:nvSpPr>
               <p:cNvPr id="5" name="Content Placeholder 4" descr="Issue: Tabular methods do not scale for large state spaces. Space complexity: Memory needed for storing the value function with O(given S given) entries as a table. No Generalization: Many states will never be encountered during learning and therefore cannot be predicted. Idea: Try to find an approximate value function for policy pi :. v hat (s,w) is approximately v sub pi with w in the real numbers to the power d. Requirements:. The function needs to have a manageable number of parameters, the weight vector w. I.e., d is much less than given S given . The function can only depend on features of state s . The function needs to generalize, so states with similar features get a similar value. Note: Approximation functions do this automatically, since all states share the weight vector and will be affected by changes in the weights">
@@ -38624,10 +38624,15 @@
                 <p:ph idx="1"/>
               </p:nvPr>
             </p:nvSpPr>
-            <p:spPr/>
+            <p:spPr>
+              <a:xfrm>
+                <a:off x="838200" y="1397331"/>
+                <a:ext cx="10515600" cy="4193934"/>
+              </a:xfrm>
+            </p:spPr>
             <p:txBody>
               <a:bodyPr>
-                <a:normAutofit fontScale="77500" lnSpcReduction="20000"/>
+                <a:normAutofit fontScale="70000" lnSpcReduction="20000"/>
               </a:bodyPr>
               <a:lstStyle/>
               <a:p>
@@ -38717,7 +38722,15 @@
                 </a:r>
                 <a:r>
                   <a:rPr lang="en-US" dirty="0"/>
-                  <a:t>: Try to find an approximate value function for policy </a:t>
+                  <a:t>: Try to find an </a:t>
+                </a:r>
+                <a:r>
+                  <a:rPr lang="en-US" b="1" dirty="0"/>
+                  <a:t>approximate value function </a:t>
+                </a:r>
+                <a:r>
+                  <a:rPr lang="en-US" dirty="0"/>
+                  <a:t>for policy </a:t>
                 </a:r>
                 <a14:m>
                   <m:oMath xmlns:m="http://schemas.openxmlformats.org/officeDocument/2006/math">
@@ -39009,24 +39022,13 @@
                 </a:r>
                 <a:r>
                   <a:rPr lang="en-US" dirty="0"/>
-                  <a:t>, so states with similar features get a similar value. </a:t>
-                </a:r>
-                <a:br>
-                  <a:rPr lang="en-US" dirty="0"/>
-                </a:br>
-                <a:r>
-                  <a:rPr lang="en-US" dirty="0"/>
-                  <a:t>Note: Approximation functions do this automatically, since all states share the weight vector and will be affected by changes in the weights.</a:t>
-                </a:r>
-              </a:p>
-              <a:p>
-                <a:pPr lvl="1"/>
-                <a:endParaRPr lang="en-US" dirty="0"/>
+                  <a:t>, so states with similar features get a similar value.</a:t>
+                </a:r>
               </a:p>
             </p:txBody>
           </p:sp>
         </mc:Choice>
-        <mc:Fallback xmlns="">
+        <mc:Fallback>
           <p:sp>
             <p:nvSpPr>
               <p:cNvPr id="5" name="Content Placeholder 4" descr="Issue: Tabular methods do not scale for large state spaces. Space complexity: Memory needed for storing the value function with O(given S given) entries as a table. No Generalization: Many states will never be encountered during learning and therefore cannot be predicted. Idea: Try to find an approximate value function for policy pi :. v hat (s,w) is approximately v sub pi with w in the real numbers to the power d. Requirements:. The function needs to have a manageable number of parameters, the weight vector w. I.e., d is much less than given S given . The function can only depend on features of state s . The function needs to generalize, so states with similar features get a similar value. Note: Approximation functions do this automatically, since all states share the weight vector and will be affected by changes in the weights">
@@ -39044,10 +39046,14 @@
               </p:nvPr>
             </p:nvSpPr>
             <p:spPr>
+              <a:xfrm>
+                <a:off x="838200" y="1397331"/>
+                <a:ext cx="10515600" cy="4193934"/>
+              </a:xfrm>
               <a:blipFill>
                 <a:blip r:embed="rId3"/>
                 <a:stretch>
-                  <a:fillRect l="-754" t="-2551" b="-1276"/>
+                  <a:fillRect l="-638" t="-2471"/>
                 </a:stretch>
               </a:blipFill>
             </p:spPr>
@@ -39066,6 +39072,112 @@
           </p:sp>
         </mc:Fallback>
       </mc:AlternateContent>
+      <p:sp>
+        <p:nvSpPr>
+          <p:cNvPr id="2" name="Speech Bubble: Rectangle with Corners Rounded 1">
+            <a:extLst>
+              <a:ext uri="{FF2B5EF4-FFF2-40B4-BE49-F238E27FC236}">
+                <a16:creationId xmlns:a16="http://schemas.microsoft.com/office/drawing/2014/main" id="{EC25172D-33A3-AB11-C896-BA03368F6CBE}"/>
+              </a:ext>
+            </a:extLst>
+          </p:cNvPr>
+          <p:cNvSpPr/>
+          <p:nvPr/>
+        </p:nvSpPr>
+        <p:spPr>
+          <a:xfrm>
+            <a:off x="1191236" y="5591264"/>
+            <a:ext cx="3804408" cy="834704"/>
+          </a:xfrm>
+          <a:prstGeom prst="wedgeRoundRectCallout">
+            <a:avLst>
+              <a:gd name="adj1" fmla="val 25032"/>
+              <a:gd name="adj2" fmla="val -114385"/>
+              <a:gd name="adj3" fmla="val 16667"/>
+            </a:avLst>
+          </a:prstGeom>
+        </p:spPr>
+        <p:style>
+          <a:lnRef idx="2">
+            <a:schemeClr val="accent1">
+              <a:shade val="15000"/>
+            </a:schemeClr>
+          </a:lnRef>
+          <a:fillRef idx="1">
+            <a:schemeClr val="accent1"/>
+          </a:fillRef>
+          <a:effectRef idx="0">
+            <a:schemeClr val="accent1"/>
+          </a:effectRef>
+          <a:fontRef idx="minor">
+            <a:schemeClr val="lt1"/>
+          </a:fontRef>
+        </p:style>
+        <p:txBody>
+          <a:bodyPr rtlCol="0" anchor="ctr"/>
+          <a:lstStyle/>
+          <a:p>
+            <a:pPr algn="ctr"/>
+            <a:r>
+              <a:rPr lang="en-US" sz="1600" dirty="0"/>
+              <a:t>Approximation functions do this automatically, since all states share a small weight vector</a:t>
+            </a:r>
+          </a:p>
+        </p:txBody>
+      </p:sp>
+      <p:sp>
+        <p:nvSpPr>
+          <p:cNvPr id="9" name="Speech Bubble: Rectangle with Corners Rounded 8">
+            <a:extLst>
+              <a:ext uri="{FF2B5EF4-FFF2-40B4-BE49-F238E27FC236}">
+                <a16:creationId xmlns:a16="http://schemas.microsoft.com/office/drawing/2014/main" id="{BEA8FFD0-45E7-2DFF-4B1E-DD93572847CF}"/>
+              </a:ext>
+            </a:extLst>
+          </p:cNvPr>
+          <p:cNvSpPr/>
+          <p:nvPr/>
+        </p:nvSpPr>
+        <p:spPr>
+          <a:xfrm>
+            <a:off x="5571688" y="5591264"/>
+            <a:ext cx="3804408" cy="834704"/>
+          </a:xfrm>
+          <a:prstGeom prst="wedgeRoundRectCallout">
+            <a:avLst>
+              <a:gd name="adj1" fmla="val -67250"/>
+              <a:gd name="adj2" fmla="val -20917"/>
+              <a:gd name="adj3" fmla="val 16667"/>
+            </a:avLst>
+          </a:prstGeom>
+        </p:spPr>
+        <p:style>
+          <a:lnRef idx="2">
+            <a:schemeClr val="accent3">
+              <a:shade val="15000"/>
+            </a:schemeClr>
+          </a:lnRef>
+          <a:fillRef idx="1">
+            <a:schemeClr val="accent3"/>
+          </a:fillRef>
+          <a:effectRef idx="0">
+            <a:schemeClr val="accent3"/>
+          </a:effectRef>
+          <a:fontRef idx="minor">
+            <a:schemeClr val="lt1"/>
+          </a:fontRef>
+        </p:style>
+        <p:txBody>
+          <a:bodyPr rtlCol="0" anchor="ctr"/>
+          <a:lstStyle/>
+          <a:p>
+            <a:pPr algn="ctr"/>
+            <a:r>
+              <a:rPr lang="en-US" sz="1600" dirty="0"/>
+              <a:t>This implies that we cannot change individual state values like in tabular methods! </a:t>
+            </a:r>
+          </a:p>
+        </p:txBody>
+      </p:sp>
     </p:spTree>
     <p:extLst>
       <p:ext uri="{BB962C8B-B14F-4D97-AF65-F5344CB8AC3E}">
@@ -39306,6 +39418,96 @@
                       </p:childTnLst>
                     </p:cTn>
                   </p:par>
+                  <p:par>
+                    <p:cTn id="19" fill="hold">
+                      <p:stCondLst>
+                        <p:cond delay="indefinite"/>
+                      </p:stCondLst>
+                      <p:childTnLst>
+                        <p:par>
+                          <p:cTn id="20" fill="hold">
+                            <p:stCondLst>
+                              <p:cond delay="0"/>
+                            </p:stCondLst>
+                            <p:childTnLst>
+                              <p:par>
+                                <p:cTn id="21" presetID="1" presetClass="entr" presetSubtype="0" fill="hold" grpId="0" nodeType="clickEffect">
+                                  <p:stCondLst>
+                                    <p:cond delay="0"/>
+                                  </p:stCondLst>
+                                  <p:childTnLst>
+                                    <p:set>
+                                      <p:cBhvr>
+                                        <p:cTn id="22" dur="1" fill="hold">
+                                          <p:stCondLst>
+                                            <p:cond delay="0"/>
+                                          </p:stCondLst>
+                                        </p:cTn>
+                                        <p:tgtEl>
+                                          <p:spTgt spid="2"/>
+                                        </p:tgtEl>
+                                        <p:attrNameLst>
+                                          <p:attrName>style.visibility</p:attrName>
+                                        </p:attrNameLst>
+                                      </p:cBhvr>
+                                      <p:to>
+                                        <p:strVal val="visible"/>
+                                      </p:to>
+                                    </p:set>
+                                  </p:childTnLst>
+                                </p:cTn>
+                              </p:par>
+                            </p:childTnLst>
+                          </p:cTn>
+                        </p:par>
+                      </p:childTnLst>
+                    </p:cTn>
+                  </p:par>
+                  <p:par>
+                    <p:cTn id="23" fill="hold">
+                      <p:stCondLst>
+                        <p:cond delay="indefinite"/>
+                      </p:stCondLst>
+                      <p:childTnLst>
+                        <p:par>
+                          <p:cTn id="24" fill="hold">
+                            <p:stCondLst>
+                              <p:cond delay="0"/>
+                            </p:stCondLst>
+                            <p:childTnLst>
+                              <p:par>
+                                <p:cTn id="25" presetID="1" presetClass="entr" presetSubtype="0" fill="hold" grpId="0" nodeType="clickEffect">
+                                  <p:stCondLst>
+                                    <p:cond delay="0"/>
+                                  </p:stCondLst>
+                                  <p:childTnLst>
+                                    <p:set>
+                                      <p:cBhvr>
+                                        <p:cTn id="26" dur="1" fill="hold">
+                                          <p:stCondLst>
+                                            <p:cond delay="0"/>
+                                          </p:stCondLst>
+                                        </p:cTn>
+                                        <p:tgtEl>
+                                          <p:spTgt spid="9"/>
+                                        </p:tgtEl>
+                                        <p:attrNameLst>
+                                          <p:attrName>style.visibility</p:attrName>
+                                        </p:attrNameLst>
+                                      </p:cBhvr>
+                                      <p:to>
+                                        <p:strVal val="visible"/>
+                                      </p:to>
+                                    </p:set>
+                                  </p:childTnLst>
+                                </p:cTn>
+                              </p:par>
+                            </p:childTnLst>
+                          </p:cTn>
+                        </p:par>
+                      </p:childTnLst>
+                    </p:cTn>
+                  </p:par>
                 </p:childTnLst>
               </p:cTn>
               <p:prevCondLst>
@@ -39327,6 +39529,10 @@
         </p:cTn>
       </p:par>
     </p:tnLst>
+    <p:bldLst>
+      <p:bldP spid="2" grpId="0" animBg="1"/>
+      <p:bldP spid="9" grpId="0" animBg="1"/>
+    </p:bldLst>
   </p:timing>
 </p:sld>
 </file>
@@ -39433,7 +39639,7 @@
           <a:p>
             <a:r>
               <a:rPr lang="en-US" dirty="0"/>
-              <a:t>In RL we consider different forms of generalization:</a:t>
+              <a:t>In RL we consider additional goals of generalization:</a:t>
             </a:r>
           </a:p>
           <a:p>
@@ -39476,7 +39682,15 @@
             </a:r>
             <a:r>
               <a:rPr lang="en-US" dirty="0"/>
-              <a:t>Does it generalize for new, but related environment? (~ transfer learning) </a:t>
+              <a:t>Does it generalize for new, but related environment? (~ </a:t>
+            </a:r>
+            <a:r>
+              <a:rPr lang="en-US" b="1" dirty="0"/>
+              <a:t>transfer learning</a:t>
+            </a:r>
+            <a:r>
+              <a:rPr lang="en-US" dirty="0"/>
+              <a:t>) </a:t>
             </a:r>
           </a:p>
           <a:p>
@@ -39494,6 +39708,147 @@
   <p:clrMapOvr>
     <a:masterClrMapping/>
   </p:clrMapOvr>
+  <p:timing>
+    <p:tnLst>
+      <p:par>
+        <p:cTn id="1" dur="indefinite" restart="never" nodeType="tmRoot">
+          <p:childTnLst>
+            <p:seq concurrent="1" nextAc="seek">
+              <p:cTn id="2" dur="indefinite" nodeType="mainSeq">
+                <p:childTnLst>
+                  <p:par>
+                    <p:cTn id="3" fill="hold">
+                      <p:stCondLst>
+                        <p:cond delay="indefinite"/>
+                      </p:stCondLst>
+                      <p:childTnLst>
+                        <p:par>
+                          <p:cTn id="4" fill="hold">
+                            <p:stCondLst>
+                              <p:cond delay="0"/>
+                            </p:stCondLst>
+                            <p:childTnLst>
+                              <p:par>
+                                <p:cTn id="5" presetID="1" presetClass="entr" presetSubtype="0" fill="hold" nodeType="clickEffect">
+                                  <p:stCondLst>
+                                    <p:cond delay="0"/>
+                                  </p:stCondLst>
+                                  <p:childTnLst>
+                                    <p:set>
+                                      <p:cBhvr>
+                                        <p:cTn id="6" dur="1" fill="hold">
+                                          <p:stCondLst>
+                                            <p:cond delay="0"/>
+                                          </p:stCondLst>
+                                        </p:cTn>
+                                        <p:tgtEl>
+                                          <p:spTgt spid="3">
+                                            <p:txEl>
+                                              <p:pRg st="2" end="2"/>
+                                            </p:txEl>
+                                          </p:spTgt>
+                                        </p:tgtEl>
+                                        <p:attrNameLst>
+                                          <p:attrName>style.visibility</p:attrName>
+                                        </p:attrNameLst>
+                                      </p:cBhvr>
+                                      <p:to>
+                                        <p:strVal val="visible"/>
+                                      </p:to>
+                                    </p:set>
+                                  </p:childTnLst>
+                                </p:cTn>
+                              </p:par>
+                              <p:par>
+                                <p:cTn id="7" presetID="1" presetClass="entr" presetSubtype="0" fill="hold" nodeType="withEffect">
+                                  <p:stCondLst>
+                                    <p:cond delay="0"/>
+                                  </p:stCondLst>
+                                  <p:childTnLst>
+                                    <p:set>
+                                      <p:cBhvr>
+                                        <p:cTn id="8" dur="1" fill="hold">
+                                          <p:stCondLst>
+                                            <p:cond delay="0"/>
+                                          </p:stCondLst>
+                                        </p:cTn>
+                                        <p:tgtEl>
+                                          <p:spTgt spid="3">
+                                            <p:txEl>
+                                              <p:pRg st="3" end="3"/>
+                                            </p:txEl>
+                                          </p:spTgt>
+                                        </p:tgtEl>
+                                        <p:attrNameLst>
+                                          <p:attrName>style.visibility</p:attrName>
+                                        </p:attrNameLst>
+                                      </p:cBhvr>
+                                      <p:to>
+                                        <p:strVal val="visible"/>
+                                      </p:to>
+                                    </p:set>
+                                  </p:childTnLst>
+                                </p:cTn>
+                              </p:par>
+                              <p:par>
+                                <p:cTn id="9" presetID="1" presetClass="entr" presetSubtype="0" fill="hold" nodeType="withEffect">
+                                  <p:stCondLst>
+                                    <p:cond delay="0"/>
+                                  </p:stCondLst>
+                                  <p:childTnLst>
+                                    <p:set>
+                                      <p:cBhvr>
+                                        <p:cTn id="10" dur="1" fill="hold">
+                                          <p:stCondLst>
+                                            <p:cond delay="0"/>
+                                          </p:stCondLst>
+                                        </p:cTn>
+                                        <p:tgtEl>
+                                          <p:spTgt spid="3">
+                                            <p:txEl>
+                                              <p:pRg st="5" end="5"/>
+                                            </p:txEl>
+                                          </p:spTgt>
+                                        </p:tgtEl>
+                                        <p:attrNameLst>
+                                          <p:attrName>style.visibility</p:attrName>
+                                        </p:attrNameLst>
+                                      </p:cBhvr>
+                                      <p:to>
+                                        <p:strVal val="visible"/>
+                                      </p:to>
+                                    </p:set>
+                                  </p:childTnLst>
+                                </p:cTn>
+                              </p:par>
+                            </p:childTnLst>
+                          </p:cTn>
+                        </p:par>
+                      </p:childTnLst>
+                    </p:cTn>
+                  </p:par>
+                </p:childTnLst>
+              </p:cTn>
+              <p:prevCondLst>
+                <p:cond evt="onPrev" delay="0">
+                  <p:tgtEl>
+                    <p:sldTgt/>
+                  </p:tgtEl>
+                </p:cond>
+              </p:prevCondLst>
+              <p:nextCondLst>
+                <p:cond evt="onNext" delay="0">
+                  <p:tgtEl>
+                    <p:sldTgt/>
+                  </p:tgtEl>
+                </p:cond>
+              </p:nextCondLst>
+            </p:seq>
+          </p:childTnLst>
+        </p:cTn>
+      </p:par>
+    </p:tnLst>
+  </p:timing>
 </p:sld>
 </file>
 
@@ -39544,8 +39899,8 @@
           </a:p>
         </p:txBody>
       </p:sp>
-      <mc:AlternateContent xmlns:mc="http://schemas.openxmlformats.org/markup-compatibility/2006" xmlns:a14="http://schemas.microsoft.com/office/drawing/2010/main">
-        <mc:Choice Requires="a14">
+      <mc:AlternateContent xmlns:mc="http://schemas.openxmlformats.org/markup-compatibility/2006">
+        <mc:Choice xmlns:a14="http://schemas.microsoft.com/office/drawing/2010/main" Requires="a14">
           <p:sp>
             <p:nvSpPr>
               <p:cNvPr id="3" name="Content Placeholder 2" descr="Approach: Use function approximation (supervised learning). We need training data in the form of s maps to u where the target u is a “backed-up value” representing the desired value. Some options for training data S sub t maps to U :. MC: S sub t maps to G sub t. TD(0): S sub t maps to R sub t plus 1, plus gamma v hat (S sub t plus 1,w sub t). DP: S sub t maps to E sub pi [R sub t plus 1, plus gamma v hat (S sub t plus 1,w sub t)]">
@@ -39668,7 +40023,7 @@
                 </a14:m>
                 <a:r>
                   <a:rPr lang="en-US" dirty="0"/>
-                  <a:t> is a “backed-up value” representing the desired value. </a:t>
+                  <a:t> is a “backed-up value” representing the desired state value. </a:t>
                 </a:r>
               </a:p>
               <a:p>
@@ -40281,7 +40636,7 @@
             </p:txBody>
           </p:sp>
         </mc:Choice>
-        <mc:Fallback xmlns="">
+        <mc:Fallback>
           <p:sp>
             <p:nvSpPr>
               <p:cNvPr id="3" name="Content Placeholder 2" descr="Approach: Use function approximation (supervised learning). We need training data in the form of s maps to u where the target u is a “backed-up value” representing the desired value. Some options for training data S sub t maps to U :. MC: S sub t maps to G sub t. TD(0): S sub t maps to R sub t plus 1, plus gamma v hat (S sub t plus 1,w sub t). DP: S sub t maps to E sub pi [R sub t plus 1, plus gamma v hat (S sub t plus 1,w sub t)]">
@@ -40302,7 +40657,7 @@
               <a:blipFill>
                 <a:blip r:embed="rId2"/>
                 <a:stretch>
-                  <a:fillRect l="-1217" t="-2168"/>
+                  <a:fillRect l="-1217" t="-2168" b="-1658"/>
                 </a:stretch>
               </a:blipFill>
             </p:spPr>
@@ -40622,33 +40977,15 @@
                                   </p:childTnLst>
                                 </p:cTn>
                               </p:par>
-                            </p:childTnLst>
-                          </p:cTn>
-                        </p:par>
-                      </p:childTnLst>
-                    </p:cTn>
-                  </p:par>
-                  <p:par>
-                    <p:cTn id="13" fill="hold">
-                      <p:stCondLst>
-                        <p:cond delay="indefinite"/>
-                      </p:stCondLst>
-                      <p:childTnLst>
-                        <p:par>
-                          <p:cTn id="14" fill="hold">
-                            <p:stCondLst>
-                              <p:cond delay="0"/>
-                            </p:stCondLst>
-                            <p:childTnLst>
                               <p:par>
-                                <p:cTn id="15" presetID="1" presetClass="entr" presetSubtype="0" fill="hold" grpId="0" nodeType="clickEffect">
+                                <p:cTn id="13" presetID="1" presetClass="entr" presetSubtype="0" fill="hold" grpId="0" nodeType="withEffect">
                                   <p:stCondLst>
                                     <p:cond delay="0"/>
                                   </p:stCondLst>
                                   <p:childTnLst>
                                     <p:set>
                                       <p:cBhvr>
-                                        <p:cTn id="16" dur="1" fill="hold">
+                                        <p:cTn id="14" dur="1" fill="hold">
                                           <p:stCondLst>
                                             <p:cond delay="0"/>
                                           </p:stCondLst>
@@ -41550,7 +41887,7 @@
                           <m:sSup>
                             <m:sSupPr>
                               <m:ctrlPr>
-                                <a:rPr lang="en-US" b="0" i="1" smtClean="0">
+                                <a:rPr lang="en-US" i="1">
                                   <a:latin typeface="Cambria Math" panose="02040503050406030204" pitchFamily="18" charset="0"/>
                                 </a:rPr>
                               </m:ctrlPr>
@@ -42570,7 +42907,7 @@
                     <m:d>
                       <m:dPr>
                         <m:ctrlPr>
-                          <a:rPr lang="en-US" i="1">
+                          <a:rPr lang="en-US" b="1" i="1">
                             <a:latin typeface="Cambria Math" panose="02040503050406030204" pitchFamily="18" charset="0"/>
                           </a:rPr>
                         </m:ctrlPr>

--- a/slides/Lecture_Chapter09.pptx
+++ b/slides/Lecture_Chapter09.pptx
@@ -5,7 +5,7 @@
     <p:sldMasterId id="2147483648" r:id="rId1"/>
   </p:sldMasterIdLst>
   <p:notesMasterIdLst>
-    <p:notesMasterId r:id="rId38"/>
+    <p:notesMasterId r:id="rId39"/>
   </p:notesMasterIdLst>
   <p:sldIdLst>
     <p:sldId id="256" r:id="rId2"/>
@@ -35,15 +35,16 @@
     <p:sldId id="418" r:id="rId26"/>
     <p:sldId id="412" r:id="rId27"/>
     <p:sldId id="482" r:id="rId28"/>
-    <p:sldId id="483" r:id="rId29"/>
-    <p:sldId id="410" r:id="rId30"/>
-    <p:sldId id="411" r:id="rId31"/>
-    <p:sldId id="414" r:id="rId32"/>
-    <p:sldId id="421" r:id="rId33"/>
-    <p:sldId id="484" r:id="rId34"/>
-    <p:sldId id="415" r:id="rId35"/>
-    <p:sldId id="422" r:id="rId36"/>
-    <p:sldId id="424" r:id="rId37"/>
+    <p:sldId id="485" r:id="rId29"/>
+    <p:sldId id="483" r:id="rId30"/>
+    <p:sldId id="410" r:id="rId31"/>
+    <p:sldId id="411" r:id="rId32"/>
+    <p:sldId id="414" r:id="rId33"/>
+    <p:sldId id="421" r:id="rId34"/>
+    <p:sldId id="484" r:id="rId35"/>
+    <p:sldId id="415" r:id="rId36"/>
+    <p:sldId id="422" r:id="rId37"/>
+    <p:sldId id="424" r:id="rId38"/>
   </p:sldIdLst>
   <p:sldSz cx="12192000" cy="6858000"/>
   <p:notesSz cx="6858000" cy="9144000"/>
@@ -186,6 +187,7 @@
             <p14:sldId id="418"/>
             <p14:sldId id="412"/>
             <p14:sldId id="482"/>
+            <p14:sldId id="485"/>
             <p14:sldId id="483"/>
           </p14:sldIdLst>
         </p14:section>
@@ -300,7 +302,7 @@
           <a:p>
             <a:fld id="{2987FC57-34F3-4A88-970B-010E7C0EC943}" type="datetimeFigureOut">
               <a:rPr lang="en-US" smtClean="0"/>
-              <a:t>10/19/2026</a:t>
+              <a:t>10/20/2026</a:t>
             </a:fld>
             <a:endParaRPr lang="en-US"/>
           </a:p>
@@ -882,7 +884,7 @@
           <a:p>
             <a:fld id="{3E22BF2E-04DA-469E-97C5-BB68A0368813}" type="datetimeFigureOut">
               <a:rPr lang="en-US" smtClean="0"/>
-              <a:t>10/19/2026</a:t>
+              <a:t>10/20/2026</a:t>
             </a:fld>
             <a:endParaRPr lang="en-US"/>
           </a:p>
@@ -1080,7 +1082,7 @@
           <a:p>
             <a:fld id="{3E22BF2E-04DA-469E-97C5-BB68A0368813}" type="datetimeFigureOut">
               <a:rPr lang="en-US" smtClean="0"/>
-              <a:t>10/19/2026</a:t>
+              <a:t>10/20/2026</a:t>
             </a:fld>
             <a:endParaRPr lang="en-US"/>
           </a:p>
@@ -1288,7 +1290,7 @@
           <a:p>
             <a:fld id="{3E22BF2E-04DA-469E-97C5-BB68A0368813}" type="datetimeFigureOut">
               <a:rPr lang="en-US" smtClean="0"/>
-              <a:t>10/19/2026</a:t>
+              <a:t>10/20/2026</a:t>
             </a:fld>
             <a:endParaRPr lang="en-US"/>
           </a:p>
@@ -1496,7 +1498,7 @@
           <a:p>
             <a:fld id="{3E22BF2E-04DA-469E-97C5-BB68A0368813}" type="datetimeFigureOut">
               <a:rPr lang="en-US" smtClean="0"/>
-              <a:t>10/19/2026</a:t>
+              <a:t>10/20/2026</a:t>
             </a:fld>
             <a:endParaRPr lang="en-US"/>
           </a:p>
@@ -1771,7 +1773,7 @@
           <a:p>
             <a:fld id="{3E22BF2E-04DA-469E-97C5-BB68A0368813}" type="datetimeFigureOut">
               <a:rPr lang="en-US" smtClean="0"/>
-              <a:t>10/19/2026</a:t>
+              <a:t>10/20/2026</a:t>
             </a:fld>
             <a:endParaRPr lang="en-US"/>
           </a:p>
@@ -2036,7 +2038,7 @@
           <a:p>
             <a:fld id="{3E22BF2E-04DA-469E-97C5-BB68A0368813}" type="datetimeFigureOut">
               <a:rPr lang="en-US" smtClean="0"/>
-              <a:t>10/19/2026</a:t>
+              <a:t>10/20/2026</a:t>
             </a:fld>
             <a:endParaRPr lang="en-US"/>
           </a:p>
@@ -2448,7 +2450,7 @@
           <a:p>
             <a:fld id="{3E22BF2E-04DA-469E-97C5-BB68A0368813}" type="datetimeFigureOut">
               <a:rPr lang="en-US" smtClean="0"/>
-              <a:t>10/19/2026</a:t>
+              <a:t>10/20/2026</a:t>
             </a:fld>
             <a:endParaRPr lang="en-US"/>
           </a:p>
@@ -2589,7 +2591,7 @@
           <a:p>
             <a:fld id="{3E22BF2E-04DA-469E-97C5-BB68A0368813}" type="datetimeFigureOut">
               <a:rPr lang="en-US" smtClean="0"/>
-              <a:t>10/19/2026</a:t>
+              <a:t>10/20/2026</a:t>
             </a:fld>
             <a:endParaRPr lang="en-US"/>
           </a:p>
@@ -2702,7 +2704,7 @@
           <a:p>
             <a:fld id="{3E22BF2E-04DA-469E-97C5-BB68A0368813}" type="datetimeFigureOut">
               <a:rPr lang="en-US" smtClean="0"/>
-              <a:t>10/19/2026</a:t>
+              <a:t>10/20/2026</a:t>
             </a:fld>
             <a:endParaRPr lang="en-US"/>
           </a:p>
@@ -3013,7 +3015,7 @@
           <a:p>
             <a:fld id="{3E22BF2E-04DA-469E-97C5-BB68A0368813}" type="datetimeFigureOut">
               <a:rPr lang="en-US" smtClean="0"/>
-              <a:t>10/19/2026</a:t>
+              <a:t>10/20/2026</a:t>
             </a:fld>
             <a:endParaRPr lang="en-US"/>
           </a:p>
@@ -3301,7 +3303,7 @@
           <a:p>
             <a:fld id="{3E22BF2E-04DA-469E-97C5-BB68A0368813}" type="datetimeFigureOut">
               <a:rPr lang="en-US" smtClean="0"/>
-              <a:t>10/19/2026</a:t>
+              <a:t>10/20/2026</a:t>
             </a:fld>
             <a:endParaRPr lang="en-US"/>
           </a:p>
@@ -3542,7 +3544,7 @@
           <a:p>
             <a:fld id="{3E22BF2E-04DA-469E-97C5-BB68A0368813}" type="datetimeFigureOut">
               <a:rPr lang="en-US" smtClean="0"/>
-              <a:t>10/19/2026</a:t>
+              <a:t>10/20/2026</a:t>
             </a:fld>
             <a:endParaRPr lang="en-US"/>
           </a:p>
@@ -4806,8 +4808,8 @@
           </a:p>
         </p:txBody>
       </p:sp>
-      <mc:AlternateContent xmlns:mc="http://schemas.openxmlformats.org/markup-compatibility/2006" xmlns:a14="http://schemas.microsoft.com/office/drawing/2010/main">
-        <mc:Choice Requires="a14">
+      <mc:AlternateContent xmlns:mc="http://schemas.openxmlformats.org/markup-compatibility/2006">
+        <mc:Choice xmlns:a14="http://schemas.microsoft.com/office/drawing/2010/main" Requires="a14">
           <p:sp>
             <p:nvSpPr>
               <p:cNvPr id="3" name="Content Placeholder 2" descr="Setup. For a given policy pi, learn an approximation v hat (s,w) is approximately v sub pi. We use w is defined as (w sub 1,w sub 2, dot dot dot,w sub d) transpose. C hoose v hat (s,w) as a differentiable function of w for all s in S. Learning. We sample following pi, and observe at each discrete time step t equals 0, 1, 2, 3, dot dot dot a new example S sub t maps to v sub pi (S sub t) . Update w to reduce VE bar . I.e., make v hat (s,w) more similar to v sub pi . Note that the samples automatically follow the distribution mu for pi">
@@ -4971,130 +4973,104 @@
                       </a:rPr>
                       <m:t> ≝</m:t>
                     </m:r>
-                    <m:sSup>
-                      <m:sSupPr>
+                    <m:d>
+                      <m:dPr>
                         <m:ctrlPr>
                           <a:rPr lang="en-US" i="1">
                             <a:latin typeface="Cambria Math" panose="02040503050406030204" pitchFamily="18" charset="0"/>
                           </a:rPr>
                         </m:ctrlPr>
-                      </m:sSupPr>
+                      </m:dPr>
                       <m:e>
-                        <m:d>
-                          <m:dPr>
+                        <m:sSub>
+                          <m:sSubPr>
                             <m:ctrlPr>
                               <a:rPr lang="en-US" i="1">
                                 <a:latin typeface="Cambria Math" panose="02040503050406030204" pitchFamily="18" charset="0"/>
                               </a:rPr>
                             </m:ctrlPr>
-                          </m:dPr>
+                          </m:sSubPr>
                           <m:e>
-                            <m:sSub>
-                              <m:sSubPr>
-                                <m:ctrlPr>
-                                  <a:rPr lang="en-US" i="1">
-                                    <a:latin typeface="Cambria Math" panose="02040503050406030204" pitchFamily="18" charset="0"/>
-                                  </a:rPr>
-                                </m:ctrlPr>
-                              </m:sSubPr>
-                              <m:e>
-                                <m:r>
-                                  <a:rPr lang="en-US" i="1">
-                                    <a:latin typeface="Cambria Math" panose="02040503050406030204" pitchFamily="18" charset="0"/>
-                                  </a:rPr>
-                                  <m:t>𝑤</m:t>
-                                </m:r>
-                              </m:e>
-                              <m:sub>
-                                <m:r>
-                                  <a:rPr lang="en-US" i="1">
-                                    <a:latin typeface="Cambria Math" panose="02040503050406030204" pitchFamily="18" charset="0"/>
-                                  </a:rPr>
-                                  <m:t>1</m:t>
-                                </m:r>
-                              </m:sub>
-                            </m:sSub>
                             <m:r>
                               <a:rPr lang="en-US" i="1">
                                 <a:latin typeface="Cambria Math" panose="02040503050406030204" pitchFamily="18" charset="0"/>
                               </a:rPr>
-                              <m:t>,</m:t>
+                              <m:t>𝑤</m:t>
                             </m:r>
-                            <m:sSub>
-                              <m:sSubPr>
-                                <m:ctrlPr>
-                                  <a:rPr lang="en-US" i="1">
-                                    <a:latin typeface="Cambria Math" panose="02040503050406030204" pitchFamily="18" charset="0"/>
-                                  </a:rPr>
-                                </m:ctrlPr>
-                              </m:sSubPr>
-                              <m:e>
-                                <m:r>
-                                  <a:rPr lang="en-US" i="1">
-                                    <a:latin typeface="Cambria Math" panose="02040503050406030204" pitchFamily="18" charset="0"/>
-                                  </a:rPr>
-                                  <m:t>𝑤</m:t>
-                                </m:r>
-                              </m:e>
-                              <m:sub>
-                                <m:r>
-                                  <a:rPr lang="en-US" i="1">
-                                    <a:latin typeface="Cambria Math" panose="02040503050406030204" pitchFamily="18" charset="0"/>
-                                  </a:rPr>
-                                  <m:t>2</m:t>
-                                </m:r>
-                              </m:sub>
-                            </m:sSub>
+                          </m:e>
+                          <m:sub>
                             <m:r>
                               <a:rPr lang="en-US" i="1">
                                 <a:latin typeface="Cambria Math" panose="02040503050406030204" pitchFamily="18" charset="0"/>
                               </a:rPr>
-                              <m:t>,…,</m:t>
+                              <m:t>1</m:t>
                             </m:r>
-                            <m:sSub>
-                              <m:sSubPr>
-                                <m:ctrlPr>
-                                  <a:rPr lang="en-US" i="1">
-                                    <a:latin typeface="Cambria Math" panose="02040503050406030204" pitchFamily="18" charset="0"/>
-                                  </a:rPr>
-                                </m:ctrlPr>
-                              </m:sSubPr>
-                              <m:e>
-                                <m:r>
-                                  <a:rPr lang="en-US" i="1">
-                                    <a:latin typeface="Cambria Math" panose="02040503050406030204" pitchFamily="18" charset="0"/>
-                                  </a:rPr>
-                                  <m:t>𝑤</m:t>
-                                </m:r>
-                              </m:e>
-                              <m:sub>
-                                <m:r>
-                                  <a:rPr lang="en-US" i="1">
-                                    <a:latin typeface="Cambria Math" panose="02040503050406030204" pitchFamily="18" charset="0"/>
-                                  </a:rPr>
-                                  <m:t>𝑑</m:t>
-                                </m:r>
-                              </m:sub>
-                            </m:sSub>
+                          </m:sub>
+                        </m:sSub>
+                        <m:r>
+                          <a:rPr lang="en-US" i="1">
+                            <a:latin typeface="Cambria Math" panose="02040503050406030204" pitchFamily="18" charset="0"/>
+                          </a:rPr>
+                          <m:t>,</m:t>
+                        </m:r>
+                        <m:sSub>
+                          <m:sSubPr>
+                            <m:ctrlPr>
+                              <a:rPr lang="en-US" i="1">
+                                <a:latin typeface="Cambria Math" panose="02040503050406030204" pitchFamily="18" charset="0"/>
+                              </a:rPr>
+                            </m:ctrlPr>
+                          </m:sSubPr>
+                          <m:e>
+                            <m:r>
+                              <a:rPr lang="en-US" i="1">
+                                <a:latin typeface="Cambria Math" panose="02040503050406030204" pitchFamily="18" charset="0"/>
+                              </a:rPr>
+                              <m:t>𝑤</m:t>
+                            </m:r>
                           </m:e>
-                        </m:d>
+                          <m:sub>
+                            <m:r>
+                              <a:rPr lang="en-US" i="1">
+                                <a:latin typeface="Cambria Math" panose="02040503050406030204" pitchFamily="18" charset="0"/>
+                              </a:rPr>
+                              <m:t>2</m:t>
+                            </m:r>
+                          </m:sub>
+                        </m:sSub>
+                        <m:r>
+                          <a:rPr lang="en-US" i="1">
+                            <a:latin typeface="Cambria Math" panose="02040503050406030204" pitchFamily="18" charset="0"/>
+                          </a:rPr>
+                          <m:t>,…,</m:t>
+                        </m:r>
+                        <m:sSub>
+                          <m:sSubPr>
+                            <m:ctrlPr>
+                              <a:rPr lang="en-US" i="1">
+                                <a:latin typeface="Cambria Math" panose="02040503050406030204" pitchFamily="18" charset="0"/>
+                              </a:rPr>
+                            </m:ctrlPr>
+                          </m:sSubPr>
+                          <m:e>
+                            <m:r>
+                              <a:rPr lang="en-US" i="1">
+                                <a:latin typeface="Cambria Math" panose="02040503050406030204" pitchFamily="18" charset="0"/>
+                              </a:rPr>
+                              <m:t>𝑤</m:t>
+                            </m:r>
+                          </m:e>
+                          <m:sub>
+                            <m:r>
+                              <a:rPr lang="en-US" i="1">
+                                <a:latin typeface="Cambria Math" panose="02040503050406030204" pitchFamily="18" charset="0"/>
+                              </a:rPr>
+                              <m:t>𝑑</m:t>
+                            </m:r>
+                          </m:sub>
+                        </m:sSub>
                       </m:e>
-                      <m:sup>
-                        <m:r>
-                          <a:rPr lang="en-US" i="1">
-                            <a:latin typeface="Cambria Math" panose="02040503050406030204" pitchFamily="18" charset="0"/>
-                          </a:rPr>
-                          <m:t>⊤</m:t>
-                        </m:r>
-                      </m:sup>
-                    </m:sSup>
-                    <m:r>
-                      <a:rPr lang="en-US" i="1">
-                        <a:latin typeface="Cambria Math" panose="02040503050406030204" pitchFamily="18" charset="0"/>
-                        <a:ea typeface="Cambria Math" panose="02040503050406030204" pitchFamily="18" charset="0"/>
-                      </a:rPr>
-                      <m:t> </m:t>
-                    </m:r>
+                    </m:d>
                   </m:oMath>
                 </a14:m>
                 <a:endParaRPr lang="en-US" dirty="0"/>
@@ -5562,7 +5538,7 @@
                 </a:br>
                 <a:r>
                   <a:rPr lang="en-US" dirty="0"/>
-                  <a:t>Note that the samples automatically follow the distribution </a:t>
+                  <a:t>Note that the samples automatically follow the correct distribution </a:t>
                 </a:r>
                 <a14:m>
                   <m:oMath xmlns:m="http://schemas.openxmlformats.org/officeDocument/2006/math">
@@ -5599,7 +5575,7 @@
             </p:txBody>
           </p:sp>
         </mc:Choice>
-        <mc:Fallback xmlns="">
+        <mc:Fallback>
           <p:sp>
             <p:nvSpPr>
               <p:cNvPr id="3" name="Content Placeholder 2" descr="Setup. For a given policy pi, learn an approximation v hat (s,w) is approximately v sub pi. We use w is defined as (w sub 1,w sub 2, dot dot dot,w sub d) transpose. C hoose v hat (s,w) as a differentiable function of w for all s in S. Learning. We sample following pi, and observe at each discrete time step t equals 0, 1, 2, 3, dot dot dot a new example S sub t maps to v sub pi (S sub t) . Update w to reduce VE bar . I.e., make v hat (s,w) more similar to v sub pi . Note that the samples automatically follow the distribution mu for pi">
@@ -6146,6 +6122,9 @@
                     <p:cTn id="3" fill="hold">
                       <p:stCondLst>
                         <p:cond delay="indefinite"/>
+                        <p:cond evt="onBegin" delay="0">
+                          <p:tn val="2"/>
+                        </p:cond>
                       </p:stCondLst>
                       <p:childTnLst>
                         <p:par>
@@ -6155,7 +6134,7 @@
                             </p:stCondLst>
                             <p:childTnLst>
                               <p:par>
-                                <p:cTn id="5" presetID="1" presetClass="entr" presetSubtype="0" fill="hold" nodeType="clickEffect">
+                                <p:cTn id="5" presetID="1" presetClass="entr" presetSubtype="0" fill="hold" grpId="0" nodeType="withEffect">
                                   <p:stCondLst>
                                     <p:cond delay="0"/>
                                   </p:stCondLst>
@@ -6163,68 +6142,6 @@
                                     <p:set>
                                       <p:cBhvr>
                                         <p:cTn id="6" dur="1" fill="hold">
-                                          <p:stCondLst>
-                                            <p:cond delay="0"/>
-                                          </p:stCondLst>
-                                        </p:cTn>
-                                        <p:tgtEl>
-                                          <p:spTgt spid="3">
-                                            <p:txEl>
-                                              <p:pRg st="5" end="5"/>
-                                            </p:txEl>
-                                          </p:spTgt>
-                                        </p:tgtEl>
-                                        <p:attrNameLst>
-                                          <p:attrName>style.visibility</p:attrName>
-                                        </p:attrNameLst>
-                                      </p:cBhvr>
-                                      <p:to>
-                                        <p:strVal val="visible"/>
-                                      </p:to>
-                                    </p:set>
-                                  </p:childTnLst>
-                                </p:cTn>
-                              </p:par>
-                              <p:par>
-                                <p:cTn id="7" presetID="1" presetClass="entr" presetSubtype="0" fill="hold" nodeType="withEffect">
-                                  <p:stCondLst>
-                                    <p:cond delay="0"/>
-                                  </p:stCondLst>
-                                  <p:childTnLst>
-                                    <p:set>
-                                      <p:cBhvr>
-                                        <p:cTn id="8" dur="1" fill="hold">
-                                          <p:stCondLst>
-                                            <p:cond delay="0"/>
-                                          </p:stCondLst>
-                                        </p:cTn>
-                                        <p:tgtEl>
-                                          <p:spTgt spid="3">
-                                            <p:txEl>
-                                              <p:pRg st="6" end="6"/>
-                                            </p:txEl>
-                                          </p:spTgt>
-                                        </p:tgtEl>
-                                        <p:attrNameLst>
-                                          <p:attrName>style.visibility</p:attrName>
-                                        </p:attrNameLst>
-                                      </p:cBhvr>
-                                      <p:to>
-                                        <p:strVal val="visible"/>
-                                      </p:to>
-                                    </p:set>
-                                  </p:childTnLst>
-                                </p:cTn>
-                              </p:par>
-                              <p:par>
-                                <p:cTn id="9" presetID="1" presetClass="entr" presetSubtype="0" fill="hold" grpId="0" nodeType="withEffect">
-                                  <p:stCondLst>
-                                    <p:cond delay="0"/>
-                                  </p:stCondLst>
-                                  <p:childTnLst>
-                                    <p:set>
-                                      <p:cBhvr>
-                                        <p:cTn id="10" dur="1" fill="hold">
                                           <p:stCondLst>
                                             <p:cond delay="0"/>
                                           </p:stCondLst>
@@ -6243,64 +6160,15 @@
                                   </p:childTnLst>
                                 </p:cTn>
                               </p:par>
-                            </p:childTnLst>
-                          </p:cTn>
-                        </p:par>
-                      </p:childTnLst>
-                    </p:cTn>
-                  </p:par>
-                  <p:par>
-                    <p:cTn id="11" fill="hold">
-                      <p:stCondLst>
-                        <p:cond delay="indefinite"/>
-                      </p:stCondLst>
-                      <p:childTnLst>
-                        <p:par>
-                          <p:cTn id="12" fill="hold">
-                            <p:stCondLst>
-                              <p:cond delay="0"/>
-                            </p:stCondLst>
-                            <p:childTnLst>
                               <p:par>
-                                <p:cTn id="13" presetID="1" presetClass="entr" presetSubtype="0" fill="hold" nodeType="clickEffect">
+                                <p:cTn id="7" presetID="1" presetClass="entr" presetSubtype="0" fill="hold" grpId="0" nodeType="withEffect">
                                   <p:stCondLst>
                                     <p:cond delay="0"/>
                                   </p:stCondLst>
                                   <p:childTnLst>
                                     <p:set>
                                       <p:cBhvr>
-                                        <p:cTn id="14" dur="1" fill="hold">
-                                          <p:stCondLst>
-                                            <p:cond delay="0"/>
-                                          </p:stCondLst>
-                                        </p:cTn>
-                                        <p:tgtEl>
-                                          <p:spTgt spid="3">
-                                            <p:txEl>
-                                              <p:pRg st="8" end="8"/>
-                                            </p:txEl>
-                                          </p:spTgt>
-                                        </p:tgtEl>
-                                        <p:attrNameLst>
-                                          <p:attrName>style.visibility</p:attrName>
-                                        </p:attrNameLst>
-                                      </p:cBhvr>
-                                      <p:to>
-                                        <p:strVal val="visible"/>
-                                      </p:to>
-                                    </p:set>
-                                  </p:childTnLst>
-                                </p:cTn>
-                              </p:par>
-                              <p:par>
-                                <p:cTn id="15" presetID="1" presetClass="entr" presetSubtype="0" fill="hold" grpId="0" nodeType="withEffect">
-                                  <p:stCondLst>
-                                    <p:cond delay="0"/>
-                                  </p:stCondLst>
-                                  <p:childTnLst>
-                                    <p:set>
-                                      <p:cBhvr>
-                                        <p:cTn id="16" dur="1" fill="hold">
+                                        <p:cTn id="8" dur="1" fill="hold">
                                           <p:stCondLst>
                                             <p:cond delay="0"/>
                                           </p:stCondLst>
@@ -6399,8 +6267,8 @@
           </a:p>
         </p:txBody>
       </p:sp>
-      <mc:AlternateContent xmlns:mc="http://schemas.openxmlformats.org/markup-compatibility/2006" xmlns:a14="http://schemas.microsoft.com/office/drawing/2010/main">
-        <mc:Choice Requires="a14">
+      <mc:AlternateContent xmlns:mc="http://schemas.openxmlformats.org/markup-compatibility/2006">
+        <mc:Choice xmlns:a14="http://schemas.microsoft.com/office/drawing/2010/main" Requires="a14">
           <p:sp>
             <p:nvSpPr>
               <p:cNvPr id="3" name="Content Placeholder 2" descr="Minimize VE bar is defined as the sum over s in S, of mu (s) [v sub pi minus v hat (s,w)] squared by moving w in the direction gradient of VE bar . Definition of the gradient: gradient of f (w) equals (the fraction partial f (w), over partial w sub 1, end fraction, the fraction partial f (w), over partial w sub 2, end fraction, dot dot dot, the fraction partial f (w), over partial w sub d, end fraction) transpose. Update for one observation: S sub t maps to v sub pi (S sub t). w sub t plus 1, equals w sub t minus 1 over 2 alpha gradient of [v sub pi (S sub t) minus v hat (S sub t,w sub t)] squared equals w sub t plus alpha [v sub pi (S sub t) minus v hat (S sub t,w sub t)] gradient of v hat (S sub t,w sub t). Important property of SGD: Only depends on the gradient of the loss function. Does not need the gradient of the unknown value function!. Stochastic: because update is on a single (randomly chosen) example for S sub t . This is why there is no sum in the update. Step size alpha : Since we update towards a sampled value and updates of w for one state will change the value for other states as well, we use many small updates (small value of alpha)">
@@ -6419,8 +6287,8 @@
             </p:nvSpPr>
             <p:spPr>
               <a:xfrm>
-                <a:off x="838200" y="1235487"/>
-                <a:ext cx="7797521" cy="5010117"/>
+                <a:off x="644980" y="1235487"/>
+                <a:ext cx="7990742" cy="5010117"/>
               </a:xfrm>
             </p:spPr>
             <p:txBody>
@@ -7901,7 +7769,7 @@
                 </a:r>
                 <a:r>
                   <a:rPr lang="en-US" dirty="0"/>
-                  <a:t>: Only depends on the gradient of the loss function. Does not need the gradient of the unknown value function!</a:t>
+                  <a:t>: Only depends on the gradient of the approximation function. Does not need the gradient of the unknown value function!</a:t>
                 </a:r>
                 <a:endParaRPr lang="en-US" b="1" dirty="0"/>
               </a:p>
@@ -7948,9 +7816,8 @@
                 </a14:m>
                 <a:r>
                   <a:rPr lang="en-US" dirty="0"/>
-                  <a:t>. This is why there is no sum in the update.</a:t>
-                </a:r>
-                <a:endParaRPr lang="en-US" b="1" dirty="0"/>
+                  <a:t>. </a:t>
+                </a:r>
               </a:p>
               <a:p>
                 <a:r>
@@ -7969,7 +7836,7 @@
                 </a14:m>
                 <a:r>
                   <a:rPr lang="en-US" dirty="0"/>
-                  <a:t>: Since we update towards a sampled value and updates of </a:t>
+                  <a:t>: Since we update towards a sampled value (sample variance!) and updates of </a:t>
                 </a:r>
                 <a14:m>
                   <m:oMath xmlns:m="http://schemas.openxmlformats.org/officeDocument/2006/math">
@@ -7983,7 +7850,7 @@
                 </a14:m>
                 <a:r>
                   <a:rPr lang="en-US" dirty="0"/>
-                  <a:t> for one state will change the value for other states as well, we use many small updates (small value of </a:t>
+                  <a:t> for one state will change the values for other states as well, we typically use many small updates (= a small value of </a:t>
                 </a:r>
                 <a14:m>
                   <m:oMath xmlns:m="http://schemas.openxmlformats.org/officeDocument/2006/math">
@@ -8006,7 +7873,7 @@
             </p:txBody>
           </p:sp>
         </mc:Choice>
-        <mc:Fallback xmlns="">
+        <mc:Fallback>
           <p:sp>
             <p:nvSpPr>
               <p:cNvPr id="3" name="Content Placeholder 2" descr="Minimize VE bar is defined as the sum over s in S, of mu (s) [v sub pi minus v hat (s,w)] squared by moving w in the direction gradient of VE bar . Definition of the gradient: gradient of f (w) equals (the fraction partial f (w), over partial w sub 1, end fraction, the fraction partial f (w), over partial w sub 2, end fraction, dot dot dot, the fraction partial f (w), over partial w sub d, end fraction) transpose. Update for one observation: S sub t maps to v sub pi (S sub t). w sub t plus 1, equals w sub t minus 1 over 2 alpha gradient of [v sub pi (S sub t) minus v hat (S sub t,w sub t)] squared equals w sub t plus alpha [v sub pi (S sub t) minus v hat (S sub t,w sub t)] gradient of v hat (S sub t,w sub t). Important property of SGD: Only depends on the gradient of the loss function. Does not need the gradient of the unknown value function!. Stochastic: because update is on a single (randomly chosen) example for S sub t . This is why there is no sum in the update. Step size alpha : Since we update towards a sampled value and updates of w for one state will change the value for other states as well, we use many small updates (small value of alpha)">
@@ -8025,13 +7892,13 @@
             </p:nvSpPr>
             <p:spPr>
               <a:xfrm>
-                <a:off x="838200" y="1235487"/>
-                <a:ext cx="7797521" cy="5010117"/>
+                <a:off x="644980" y="1235487"/>
+                <a:ext cx="7990742" cy="5010117"/>
               </a:xfrm>
               <a:blipFill>
                 <a:blip r:embed="rId2"/>
                 <a:stretch>
-                  <a:fillRect l="-704" t="-10219"/>
+                  <a:fillRect l="-686" t="-10219" r="-381"/>
                 </a:stretch>
               </a:blipFill>
             </p:spPr>
@@ -8050,8 +7917,8 @@
           </p:sp>
         </mc:Fallback>
       </mc:AlternateContent>
-      <mc:AlternateContent xmlns:mc="http://schemas.openxmlformats.org/markup-compatibility/2006" xmlns:a14="http://schemas.microsoft.com/office/drawing/2010/main">
-        <mc:Choice Requires="a14">
+      <mc:AlternateContent xmlns:mc="http://schemas.openxmlformats.org/markup-compatibility/2006">
+        <mc:Choice xmlns:a14="http://schemas.microsoft.com/office/drawing/2010/main" Requires="a14">
           <p:sp>
             <p:nvSpPr>
               <p:cNvPr id="4" name="Speech Bubble: Rectangle with Corners Rounded 3" descr="Applying the chain rule* shows that we only need the gradient of the approximation function. Notes: the sign changes and 1 over 2 was chosen for convenience">
@@ -8107,7 +7974,7 @@
                 </a:br>
                 <a:r>
                   <a:rPr lang="en-US" sz="1400" dirty="0"/>
-                  <a:t>Notes: the sign changes and  </a:t>
+                  <a:t>Note: the sign changes and  </a:t>
                 </a:r>
                 <a14:m>
                   <m:oMath xmlns:m="http://schemas.openxmlformats.org/officeDocument/2006/math">
@@ -8150,7 +8017,7 @@
             </p:txBody>
           </p:sp>
         </mc:Choice>
-        <mc:Fallback xmlns="">
+        <mc:Fallback>
           <p:sp>
             <p:nvSpPr>
               <p:cNvPr id="4" name="Speech Bubble: Rectangle with Corners Rounded 3" descr="Applying the chain rule* shows that we only need the gradient of the approximation function. Notes: the sign changes and 1 over 2 was chosen for convenience">
@@ -8213,10 +8080,10 @@
         </p:nvGrpSpPr>
         <p:grpSpPr>
           <a:xfrm>
-            <a:off x="8636467" y="1235487"/>
-            <a:ext cx="3169663" cy="1991944"/>
-            <a:chOff x="8665828" y="1015068"/>
-            <a:chExt cx="3169663" cy="1991944"/>
+            <a:off x="8578744" y="1235487"/>
+            <a:ext cx="3227386" cy="1991944"/>
+            <a:chOff x="8608105" y="1015068"/>
+            <a:chExt cx="3227386" cy="1991944"/>
           </a:xfrm>
         </p:grpSpPr>
         <p:pic>
@@ -8495,8 +8362,8 @@
             </p:sp>
           </mc:Fallback>
         </mc:AlternateContent>
-        <mc:AlternateContent xmlns:mc="http://schemas.openxmlformats.org/markup-compatibility/2006" xmlns:a14="http://schemas.microsoft.com/office/drawing/2010/main">
-          <mc:Choice Requires="a14">
+        <mc:AlternateContent xmlns:mc="http://schemas.openxmlformats.org/markup-compatibility/2006">
+          <mc:Choice xmlns:a14="http://schemas.microsoft.com/office/drawing/2010/main" Requires="a14">
             <p:sp>
               <p:nvSpPr>
                 <p:cNvPr id="11" name="TextBox 10" descr="Equation: f">
@@ -8511,8 +8378,8 @@
               </p:nvSpPr>
               <p:spPr>
                 <a:xfrm>
-                  <a:off x="8665828" y="1211027"/>
-                  <a:ext cx="294568" cy="261610"/>
+                  <a:off x="8608105" y="1143570"/>
+                  <a:ext cx="681405" cy="261610"/>
                 </a:xfrm>
                 <a:prstGeom prst="rect">
                   <a:avLst/>
@@ -8535,6 +8402,30 @@
                           </a:rPr>
                           <m:t>𝑓</m:t>
                         </m:r>
+                        <m:r>
+                          <a:rPr lang="en-US" sz="1100" b="0" i="1" dirty="0" smtClean="0">
+                            <a:latin typeface="Cambria Math" panose="02040503050406030204" pitchFamily="18" charset="0"/>
+                          </a:rPr>
+                          <m:t>=</m:t>
+                        </m:r>
+                        <m:acc>
+                          <m:accPr>
+                            <m:chr m:val="̅"/>
+                            <m:ctrlPr>
+                              <a:rPr lang="en-US" sz="1100" i="1">
+                                <a:latin typeface="Cambria Math" panose="02040503050406030204" pitchFamily="18" charset="0"/>
+                              </a:rPr>
+                            </m:ctrlPr>
+                          </m:accPr>
+                          <m:e>
+                            <m:r>
+                              <a:rPr lang="en-US" sz="1100" i="1">
+                                <a:latin typeface="Cambria Math" panose="02040503050406030204" pitchFamily="18" charset="0"/>
+                              </a:rPr>
+                              <m:t>𝑉𝐸</m:t>
+                            </m:r>
+                          </m:e>
+                        </m:acc>
                       </m:oMath>
                     </m:oMathPara>
                   </a14:m>
@@ -8543,7 +8434,7 @@
               </p:txBody>
             </p:sp>
           </mc:Choice>
-          <mc:Fallback xmlns="">
+          <mc:Fallback>
             <p:sp>
               <p:nvSpPr>
                 <p:cNvPr id="11" name="TextBox 10" descr="Equation: f">
@@ -8560,8 +8451,8 @@
               </p:nvSpPr>
               <p:spPr>
                 <a:xfrm>
-                  <a:off x="8665828" y="1211027"/>
-                  <a:ext cx="294568" cy="261610"/>
+                  <a:off x="8608105" y="1143570"/>
+                  <a:ext cx="681405" cy="261610"/>
                 </a:xfrm>
                 <a:prstGeom prst="rect">
                   <a:avLst/>
@@ -8776,8 +8667,8 @@
           </p:style>
         </p:cxnSp>
       </p:grpSp>
-      <mc:AlternateContent xmlns:mc="http://schemas.openxmlformats.org/markup-compatibility/2006" xmlns:a14="http://schemas.microsoft.com/office/drawing/2010/main">
-        <mc:Choice Requires="a14">
+      <mc:AlternateContent xmlns:mc="http://schemas.openxmlformats.org/markup-compatibility/2006">
+        <mc:Choice xmlns:a14="http://schemas.microsoft.com/office/drawing/2010/main" Requires="a14">
           <p:sp>
             <p:nvSpPr>
               <p:cNvPr id="16" name="TextBox 15" descr="*Chain rule (of differentiation). h(x) equals z(y(x)). is equivalent to. h prime(x) equals z prime(y(x)) y prime(x)">
@@ -8792,8 +8683,8 @@
             </p:nvSpPr>
             <p:spPr>
               <a:xfrm>
-                <a:off x="8724655" y="4776328"/>
-                <a:ext cx="3023277" cy="954107"/>
+                <a:off x="8635721" y="4776328"/>
+                <a:ext cx="3215791" cy="1600438"/>
               </a:xfrm>
               <a:prstGeom prst="rect">
                 <a:avLst/>
@@ -9001,10 +8892,48 @@
                 </a14:m>
                 <a:endParaRPr lang="en-US" sz="1400" dirty="0"/>
               </a:p>
+              <a:p>
+                <a:pPr/>
+                <a:br>
+                  <a:rPr lang="en-US" sz="1400" dirty="0"/>
+                </a:br>
+                <a:r>
+                  <a:rPr lang="en-US" sz="1400" dirty="0"/>
+                  <a:t>Here </a:t>
+                </a:r>
+                <a14:m>
+                  <m:oMath xmlns:m="http://schemas.openxmlformats.org/officeDocument/2006/math">
+                    <m:r>
+                      <a:rPr lang="en-US" sz="1400" b="0" i="1" smtClean="0">
+                        <a:latin typeface="Cambria Math" panose="02040503050406030204" pitchFamily="18" charset="0"/>
+                      </a:rPr>
+                      <m:t>𝑥</m:t>
+                    </m:r>
+                  </m:oMath>
+                </a14:m>
+                <a:r>
+                  <a:rPr lang="en-US" sz="1400" dirty="0"/>
+                  <a:t> is the vector </a:t>
+                </a:r>
+                <a14:m>
+                  <m:oMath xmlns:m="http://schemas.openxmlformats.org/officeDocument/2006/math">
+                    <m:r>
+                      <a:rPr lang="en-US" sz="1400" b="1" i="1" smtClean="0">
+                        <a:latin typeface="Cambria Math" panose="02040503050406030204" pitchFamily="18" charset="0"/>
+                      </a:rPr>
+                      <m:t>𝒘</m:t>
+                    </m:r>
+                  </m:oMath>
+                </a14:m>
+                <a:r>
+                  <a:rPr lang="en-US" sz="1400" dirty="0"/>
+                  <a:t> and we have partial derivatives written as gradients.</a:t>
+                </a:r>
+              </a:p>
             </p:txBody>
           </p:sp>
         </mc:Choice>
-        <mc:Fallback xmlns="">
+        <mc:Fallback>
           <p:sp>
             <p:nvSpPr>
               <p:cNvPr id="16" name="TextBox 15" descr="*Chain rule (of differentiation). h(x) equals z(y(x)). is equivalent to. h prime(x) equals z prime(y(x)) y prime(x)">
@@ -9021,8 +8950,8 @@
             </p:nvSpPr>
             <p:spPr>
               <a:xfrm>
-                <a:off x="8724655" y="4776328"/>
-                <a:ext cx="3023277" cy="954107"/>
+                <a:off x="8635721" y="4776328"/>
+                <a:ext cx="3215791" cy="1600438"/>
               </a:xfrm>
               <a:prstGeom prst="rect">
                 <a:avLst/>
@@ -9030,7 +8959,7 @@
               <a:blipFill>
                 <a:blip r:embed="rId9"/>
                 <a:stretch>
-                  <a:fillRect l="-401" t="-629" b="-629"/>
+                  <a:fillRect l="-377" t="-377" b="-2264"/>
                 </a:stretch>
               </a:blipFill>
             </p:spPr>
@@ -9571,8 +9500,8 @@
           </a:p>
         </p:txBody>
       </p:sp>
-      <mc:AlternateContent xmlns:mc="http://schemas.openxmlformats.org/markup-compatibility/2006" xmlns:a14="http://schemas.microsoft.com/office/drawing/2010/main">
-        <mc:Choice Requires="a14">
+      <mc:AlternateContent xmlns:mc="http://schemas.openxmlformats.org/markup-compatibility/2006">
+        <mc:Choice xmlns:a14="http://schemas.microsoft.com/office/drawing/2010/main" Requires="a14">
           <p:sp>
             <p:nvSpPr>
               <p:cNvPr id="3" name="Content Placeholder 2" descr="SGD converges to a local optimum if the stochastic approximation criterion (Robbins–Monro conditions) is met: the sum over n equals 1 to infinity, of alpha sub n (a) equals infinity and the sum over n equals 1 to infinity, of alpha sub n, to the power 2, (a) is less than or equal to infinity. alpha sub n (a) … step size used after the n -th selection of action a. Popular choices for alpha :. Tabular MC uses alpha sub n (a) equals 1 over n which leads to sample averaging. Not appropriate for TD or approximation!. Constant alpha equals 1 divided by tau means a tabular estimate would approach to the mean target after tau experiences + keeps learning. How to choose alpha in practice. Typical values: 0.1, 0.01, 0.001. If learning diverges: reduce alpha by a factor of 10. If learning is too slow: increase alpha bey a factor of 2 to 5. Plot learning curve">
@@ -9954,25 +9883,19 @@
                 <a:pPr lvl="1"/>
                 <a:r>
                   <a:rPr lang="en-US" dirty="0"/>
-                  <a:t>Tabular MC uses </a:t>
+                  <a:t>Tabular MC uses sample averaging which is equivalent to </a:t>
                 </a:r>
                 <a14:m>
                   <m:oMath xmlns:m="http://schemas.openxmlformats.org/officeDocument/2006/math">
                     <m:sSub>
                       <m:sSubPr>
                         <m:ctrlPr>
-                          <a:rPr lang="en-US" b="0" i="1" smtClean="0">
+                          <a:rPr lang="en-US" i="1">
                             <a:latin typeface="Cambria Math" panose="02040503050406030204" pitchFamily="18" charset="0"/>
                           </a:rPr>
                         </m:ctrlPr>
                       </m:sSubPr>
                       <m:e>
-                        <m:r>
-                          <a:rPr lang="en-US" b="0" i="1" smtClean="0">
-                            <a:latin typeface="Cambria Math" panose="02040503050406030204" pitchFamily="18" charset="0"/>
-                          </a:rPr>
-                          <m:t> </m:t>
-                        </m:r>
                         <m:r>
                           <a:rPr lang="en-US" i="1">
                             <a:latin typeface="Cambria Math" panose="02040503050406030204" pitchFamily="18" charset="0"/>
@@ -10041,7 +9964,7 @@
                 </a14:m>
                 <a:r>
                   <a:rPr lang="en-US" dirty="0"/>
-                  <a:t>   which leads to sample averaging.  </a:t>
+                  <a:t> .  </a:t>
                 </a:r>
                 <a:r>
                   <a:rPr lang="en-US" b="1" dirty="0"/>
@@ -10082,7 +10005,7 @@
                 </a14:m>
                 <a:r>
                   <a:rPr lang="en-US" dirty="0"/>
-                  <a:t> means a tabular estimate would approach to the mean target after </a:t>
+                  <a:t> means a tabular estimate would approach the mean target after </a:t>
                 </a:r>
                 <a14:m>
                   <m:oMath xmlns:m="http://schemas.openxmlformats.org/officeDocument/2006/math">
@@ -10193,7 +10116,7 @@
             </p:txBody>
           </p:sp>
         </mc:Choice>
-        <mc:Fallback xmlns="">
+        <mc:Fallback>
           <p:sp>
             <p:nvSpPr>
               <p:cNvPr id="3" name="Content Placeholder 2" descr="SGD converges to a local optimum if the stochastic approximation criterion (Robbins–Monro conditions) is met: the sum over n equals 1 to infinity, of alpha sub n (a) equals infinity and the sum over n equals 1 to infinity, of alpha sub n, to the power 2, (a) is less than or equal to infinity. alpha sub n (a) … step size used after the n -th selection of action a. Popular choices for alpha :. Tabular MC uses alpha sub n (a) equals 1 over n which leads to sample averaging. Not appropriate for TD or approximation!. Constant alpha equals 1 divided by tau means a tabular estimate would approach to the mean target after tau experiences + keeps learning. How to choose alpha in practice. Typical values: 0.1, 0.01, 0.001. If learning diverges: reduce alpha by a factor of 10. If learning is too slow: increase alpha bey a factor of 2 to 5. Plot learning curve">
@@ -12639,8 +12562,8 @@
           </a:p>
         </p:txBody>
       </p:sp>
-      <mc:AlternateContent xmlns:mc="http://schemas.openxmlformats.org/markup-compatibility/2006" xmlns:a14="http://schemas.microsoft.com/office/drawing/2010/main">
-        <mc:Choice Requires="a14">
+      <mc:AlternateContent xmlns:mc="http://schemas.openxmlformats.org/markup-compatibility/2006">
+        <mc:Choice xmlns:a14="http://schemas.microsoft.com/office/drawing/2010/main" Requires="a14">
           <p:sp>
             <p:nvSpPr>
               <p:cNvPr id="3" name="Content Placeholder 2" descr="Issue:. To get the true gradient requires, the target has to be unbiased, fixed and only the prediction can depend on w . w sub t plus 1, equals w sub t plus alpha [U sub t minus v hat (S sub t,w sub t)] gradient of v hat (S sub t,w sub t). Gradient Monte Carlo Algorithm: Works since U sub t equals G sub t is the result of only sampled rewards which are independent of w . Bootstrapping methods (e.g., n -step TD): break this requirement because U sub t depends on the bootstrap estimate v hat (S sub t plus n,w) and thus the current value of w . This does not result in a true gradient, and convergence cannot be guaranteed. Semi-Gradient Methods:. If we use the approach with a biased target estimate, then this is called a semi-gradient method. Advantages:. Are usually faster learners. Often still converge (especially for linear approximators). TD can learn online">
@@ -12681,7 +12604,15 @@
               <a:p>
                 <a:r>
                   <a:rPr lang="en-US" dirty="0"/>
-                  <a:t>To get the true gradient requires, the target has to be unbiased, fixed and only the prediction can depend on </a:t>
+                  <a:t>To get the true gradient requires, the target has to be </a:t>
+                </a:r>
+                <a:r>
+                  <a:rPr lang="en-US" b="1" dirty="0"/>
+                  <a:t>unbiased</a:t>
+                </a:r>
+                <a:r>
+                  <a:rPr lang="en-US" dirty="0"/>
+                  <a:t>, fixed and only the prediction can depend on </a:t>
                 </a:r>
                 <a14:m>
                   <m:oMath xmlns:m="http://schemas.openxmlformats.org/officeDocument/2006/math">
@@ -13150,7 +13081,7 @@
                 </a:br>
                 <a:r>
                   <a:rPr lang="en-US" b="1" dirty="0"/>
-                  <a:t>Bootstrapping methods </a:t>
+                  <a:t>Bootstrapping </a:t>
                 </a:r>
                 <a:r>
                   <a:rPr lang="en-US" dirty="0"/>
@@ -13168,7 +13099,7 @@
                 </a14:m>
                 <a:r>
                   <a:rPr lang="en-US" dirty="0"/>
-                  <a:t>-step TD): break this requirement because </a:t>
+                  <a:t>-step TD): breaks this requirement because </a:t>
                 </a:r>
                 <a14:m>
                   <m:oMath xmlns:m="http://schemas.openxmlformats.org/officeDocument/2006/math">
@@ -13201,7 +13132,15 @@
                 </a14:m>
                 <a:r>
                   <a:rPr lang="en-US" dirty="0"/>
-                  <a:t> depends on the bootstrap estimate </a:t>
+                  <a:t> depends on the </a:t>
+                </a:r>
+                <a:r>
+                  <a:rPr lang="en-US" dirty="0" err="1"/>
+                  <a:t>bootstraped</a:t>
+                </a:r>
+                <a:r>
+                  <a:rPr lang="en-US" dirty="0"/>
+                  <a:t> estimate </a:t>
                 </a:r>
                 <a14:m>
                   <m:oMath xmlns:m="http://schemas.openxmlformats.org/officeDocument/2006/math">
@@ -13372,7 +13311,7 @@
             </p:txBody>
           </p:sp>
         </mc:Choice>
-        <mc:Fallback xmlns="">
+        <mc:Fallback>
           <p:sp>
             <p:nvSpPr>
               <p:cNvPr id="3" name="Content Placeholder 2" descr="Issue:. To get the true gradient requires, the target has to be unbiased, fixed and only the prediction can depend on w . w sub t plus 1, equals w sub t plus alpha [U sub t minus v hat (S sub t,w sub t)] gradient of v hat (S sub t,w sub t). Gradient Monte Carlo Algorithm: Works since U sub t equals G sub t is the result of only sampled rewards which are independent of w . Bootstrapping methods (e.g., n -step TD): break this requirement because U sub t depends on the bootstrap estimate v hat (S sub t plus n,w) and thus the current value of w . This does not result in a true gradient, and convergence cannot be guaranteed. Semi-Gradient Methods:. If we use the approach with a biased target estimate, then this is called a semi-gradient method. Advantages:. Are usually faster learners. Often still converge (especially for linear approximators). TD can learn online">
@@ -14804,7 +14743,7 @@
                     <m:sSup>
                       <m:sSupPr>
                         <m:ctrlPr>
-                          <a:rPr lang="en-US" i="1">
+                          <a:rPr lang="en-US" i="1" smtClean="0">
                             <a:latin typeface="Cambria Math" panose="02040503050406030204" pitchFamily="18" charset="0"/>
                             <a:ea typeface="Cambria Math" panose="02040503050406030204" pitchFamily="18" charset="0"/>
                           </a:rPr>
@@ -23570,8 +23509,8 @@
           </a:p>
         </p:txBody>
       </p:sp>
-      <mc:AlternateContent xmlns:mc="http://schemas.openxmlformats.org/markup-compatibility/2006" xmlns:a14="http://schemas.microsoft.com/office/drawing/2010/main">
-        <mc:Choice Requires="a14">
+      <mc:AlternateContent xmlns:mc="http://schemas.openxmlformats.org/markup-compatibility/2006">
+        <mc:Choice xmlns:a14="http://schemas.microsoft.com/office/drawing/2010/main" Requires="a14">
           <p:sp>
             <p:nvSpPr>
               <p:cNvPr id="3" name="Content Placeholder 2" descr="Partition the space using several overlapping grids. Represent the state by the “active” tiles in the grids. Similar states will share active tiles. Leads to a local generalization. alpha is typically chosen to be small since a change will also affect neighboring states. Popular: alpha equals the fraction 1, over 10 #tilings, end fraction">
@@ -23596,7 +23535,7 @@
             </p:spPr>
             <p:txBody>
               <a:bodyPr>
-                <a:normAutofit fontScale="62500" lnSpcReduction="20000"/>
+                <a:normAutofit fontScale="55000" lnSpcReduction="20000"/>
               </a:bodyPr>
               <a:lstStyle/>
               <a:p>
@@ -23624,8 +23563,27 @@
                 </a:r>
                 <a:r>
                   <a:rPr lang="en-US" dirty="0"/>
-                  <a:t>in the grids.</a:t>
-                </a:r>
+                  <a:t>in the grids as a vector </a:t>
+                </a:r>
+                <a14:m>
+                  <m:oMath xmlns:m="http://schemas.openxmlformats.org/officeDocument/2006/math">
+                    <m:r>
+                      <a:rPr lang="en-US" b="1" i="1" smtClean="0">
+                        <a:latin typeface="Cambria Math" panose="02040503050406030204" pitchFamily="18" charset="0"/>
+                      </a:rPr>
+                      <m:t>𝒙</m:t>
+                    </m:r>
+                  </m:oMath>
+                </a14:m>
+                <a:r>
+                  <a:rPr lang="en-US" b="1" dirty="0"/>
+                  <a:t> </a:t>
+                </a:r>
+                <a:r>
+                  <a:rPr lang="en-US" dirty="0"/>
+                  <a:t>with 1 for all active tiles and 0 for all others.</a:t>
+                </a:r>
+                <a:endParaRPr lang="en-US" b="1" dirty="0"/>
               </a:p>
               <a:p>
                 <a:r>
@@ -23652,6 +23610,9 @@
                   <a:rPr lang="en-US" dirty="0"/>
                   <a:t> is typically chosen to be small since a change will also affect neighboring states. </a:t>
                 </a:r>
+                <a:br>
+                  <a:rPr lang="en-US" dirty="0"/>
+                </a:br>
                 <a:br>
                   <a:rPr lang="en-US" dirty="0"/>
                 </a:br>
@@ -23720,7 +23681,7 @@
             </p:txBody>
           </p:sp>
         </mc:Choice>
-        <mc:Fallback xmlns="">
+        <mc:Fallback>
           <p:sp>
             <p:nvSpPr>
               <p:cNvPr id="3" name="Content Placeholder 2" descr="Partition the space using several overlapping grids. Represent the state by the “active” tiles in the grids. Similar states will share active tiles. Leads to a local generalization. alpha is typically chosen to be small since a change will also affect neighboring states. Popular: alpha equals the fraction 1, over 10 #tilings, end fraction">
@@ -23745,7 +23706,7 @@
               <a:blipFill>
                 <a:blip r:embed="rId2"/>
                 <a:stretch>
-                  <a:fillRect l="-406" t="-5814" b="-4651"/>
+                  <a:fillRect l="-174" t="-3876" b="-1938"/>
                 </a:stretch>
               </a:blipFill>
             </p:spPr>
@@ -25279,6 +25240,1016 @@
           <p:cNvPr id="2" name="Title 1">
             <a:extLst>
               <a:ext uri="{FF2B5EF4-FFF2-40B4-BE49-F238E27FC236}">
+                <a16:creationId xmlns:a16="http://schemas.microsoft.com/office/drawing/2014/main" id="{8375476B-93B8-200D-AFC4-FD5D82620F70}"/>
+              </a:ext>
+            </a:extLst>
+          </p:cNvPr>
+          <p:cNvSpPr>
+            <a:spLocks noGrp="1"/>
+          </p:cNvSpPr>
+          <p:nvPr>
+            <p:ph type="title"/>
+          </p:nvPr>
+        </p:nvSpPr>
+        <p:spPr/>
+        <p:txBody>
+          <a:bodyPr>
+            <a:normAutofit/>
+          </a:bodyPr>
+          <a:lstStyle/>
+          <a:p>
+            <a:r>
+              <a:rPr lang="en-US" dirty="0"/>
+              <a:t>Tabular RL as a Special Case</a:t>
+            </a:r>
+          </a:p>
+        </p:txBody>
+      </p:sp>
+      <mc:AlternateContent xmlns:mc="http://schemas.openxmlformats.org/markup-compatibility/2006">
+        <mc:Choice xmlns:a14="http://schemas.microsoft.com/office/drawing/2010/main" Requires="a14">
+          <p:sp>
+            <p:nvSpPr>
+              <p:cNvPr id="3" name="Content Placeholder 2">
+                <a:extLst>
+                  <a:ext uri="{FF2B5EF4-FFF2-40B4-BE49-F238E27FC236}">
+                    <a16:creationId xmlns:a16="http://schemas.microsoft.com/office/drawing/2014/main" id="{E2D94023-3844-D64E-09EE-AFC4A96E153F}"/>
+                  </a:ext>
+                </a:extLst>
+              </p:cNvPr>
+              <p:cNvSpPr>
+                <a:spLocks noGrp="1"/>
+              </p:cNvSpPr>
+              <p:nvPr>
+                <p:ph idx="1"/>
+              </p:nvPr>
+            </p:nvSpPr>
+            <p:spPr>
+              <a:xfrm>
+                <a:off x="838200" y="1397330"/>
+                <a:ext cx="6204045" cy="4779633"/>
+              </a:xfrm>
+            </p:spPr>
+            <p:txBody>
+              <a:bodyPr>
+                <a:normAutofit fontScale="85000" lnSpcReduction="20000"/>
+              </a:bodyPr>
+              <a:lstStyle/>
+              <a:p>
+                <a:pPr marL="0" indent="0">
+                  <a:buNone/>
+                </a:pPr>
+                <a:r>
+                  <a:rPr lang="en-US" dirty="0"/>
+                  <a:t>Tabular RL is a special case of Linear Approximation for a discrete state space.</a:t>
+                </a:r>
+              </a:p>
+              <a:p>
+                <a:endParaRPr lang="en-US" dirty="0"/>
+              </a:p>
+              <a:p>
+                <a:r>
+                  <a:rPr lang="en-US" b="1" dirty="0"/>
+                  <a:t>State feature vector</a:t>
+                </a:r>
+                <a:r>
+                  <a:rPr lang="en-US" dirty="0"/>
+                  <a:t>: </a:t>
+                </a:r>
+                <a14:m>
+                  <m:oMath xmlns:m="http://schemas.openxmlformats.org/officeDocument/2006/math">
+                    <m:r>
+                      <a:rPr lang="en-US" b="1" i="1" smtClean="0">
+                        <a:latin typeface="Cambria Math" panose="02040503050406030204" pitchFamily="18" charset="0"/>
+                      </a:rPr>
+                      <m:t>𝒙</m:t>
+                    </m:r>
+                    <m:r>
+                      <a:rPr lang="en-US" b="0" i="1" smtClean="0">
+                        <a:latin typeface="Cambria Math" panose="02040503050406030204" pitchFamily="18" charset="0"/>
+                      </a:rPr>
+                      <m:t> </m:t>
+                    </m:r>
+                  </m:oMath>
+                </a14:m>
+                <a:r>
+                  <a:rPr lang="en-US" dirty="0"/>
+                  <a:t>is a 1-hot encoding for the state.</a:t>
+                </a:r>
+              </a:p>
+              <a:p>
+                <a:r>
+                  <a:rPr lang="en-US" b="1" dirty="0"/>
+                  <a:t>Weight vector</a:t>
+                </a:r>
+                <a:r>
+                  <a:rPr lang="en-US" dirty="0"/>
+                  <a:t>: </a:t>
+                </a:r>
+                <a14:m>
+                  <m:oMath xmlns:m="http://schemas.openxmlformats.org/officeDocument/2006/math">
+                    <m:r>
+                      <a:rPr lang="en-US" b="1" i="1" smtClean="0">
+                        <a:latin typeface="Cambria Math" panose="02040503050406030204" pitchFamily="18" charset="0"/>
+                      </a:rPr>
+                      <m:t>𝒘</m:t>
+                    </m:r>
+                  </m:oMath>
+                </a14:m>
+                <a:r>
+                  <a:rPr lang="en-US" b="1" dirty="0"/>
+                  <a:t> </a:t>
+                </a:r>
+                <a:r>
+                  <a:rPr lang="en-US" dirty="0"/>
+                  <a:t>has 1 entry for each state.</a:t>
+                </a:r>
+              </a:p>
+              <a:p>
+                <a:endParaRPr lang="en-US" dirty="0"/>
+              </a:p>
+              <a:p>
+                <a14:m>
+                  <m:oMath xmlns:m="http://schemas.openxmlformats.org/officeDocument/2006/math">
+                    <m:acc>
+                      <m:accPr>
+                        <m:chr m:val="̂"/>
+                        <m:ctrlPr>
+                          <a:rPr lang="en-US" i="1">
+                            <a:latin typeface="Cambria Math" panose="02040503050406030204" pitchFamily="18" charset="0"/>
+                          </a:rPr>
+                        </m:ctrlPr>
+                      </m:accPr>
+                      <m:e>
+                        <m:r>
+                          <a:rPr lang="en-US" i="1">
+                            <a:latin typeface="Cambria Math" panose="02040503050406030204" pitchFamily="18" charset="0"/>
+                          </a:rPr>
+                          <m:t>𝑣</m:t>
+                        </m:r>
+                      </m:e>
+                    </m:acc>
+                    <m:d>
+                      <m:dPr>
+                        <m:ctrlPr>
+                          <a:rPr lang="en-US" i="1">
+                            <a:latin typeface="Cambria Math" panose="02040503050406030204" pitchFamily="18" charset="0"/>
+                          </a:rPr>
+                        </m:ctrlPr>
+                      </m:dPr>
+                      <m:e>
+                        <m:r>
+                          <a:rPr lang="en-US" i="1">
+                            <a:latin typeface="Cambria Math" panose="02040503050406030204" pitchFamily="18" charset="0"/>
+                          </a:rPr>
+                          <m:t>𝑠</m:t>
+                        </m:r>
+                        <m:r>
+                          <a:rPr lang="en-US" i="1">
+                            <a:latin typeface="Cambria Math" panose="02040503050406030204" pitchFamily="18" charset="0"/>
+                          </a:rPr>
+                          <m:t>,</m:t>
+                        </m:r>
+                        <m:r>
+                          <a:rPr lang="en-US" b="1" i="1">
+                            <a:latin typeface="Cambria Math" panose="02040503050406030204" pitchFamily="18" charset="0"/>
+                          </a:rPr>
+                          <m:t>𝒘</m:t>
+                        </m:r>
+                      </m:e>
+                    </m:d>
+                    <m:r>
+                      <a:rPr lang="en-US" b="1" i="1" smtClean="0">
+                        <a:latin typeface="Cambria Math" panose="02040503050406030204" pitchFamily="18" charset="0"/>
+                      </a:rPr>
+                      <m:t>=</m:t>
+                    </m:r>
+                    <m:sSup>
+                      <m:sSupPr>
+                        <m:ctrlPr>
+                          <a:rPr lang="en-US" b="1" i="1">
+                            <a:latin typeface="Cambria Math" panose="02040503050406030204" pitchFamily="18" charset="0"/>
+                          </a:rPr>
+                        </m:ctrlPr>
+                      </m:sSupPr>
+                      <m:e>
+                        <m:r>
+                          <a:rPr lang="en-US" b="1" i="1">
+                            <a:latin typeface="Cambria Math" panose="02040503050406030204" pitchFamily="18" charset="0"/>
+                          </a:rPr>
+                          <m:t>𝒘</m:t>
+                        </m:r>
+                      </m:e>
+                      <m:sup>
+                        <m:r>
+                          <a:rPr lang="en-US" b="1" i="1">
+                            <a:latin typeface="Cambria Math" panose="02040503050406030204" pitchFamily="18" charset="0"/>
+                          </a:rPr>
+                          <m:t>⊤</m:t>
+                        </m:r>
+                      </m:sup>
+                    </m:sSup>
+                    <m:r>
+                      <a:rPr lang="en-US" b="1" i="1">
+                        <a:latin typeface="Cambria Math" panose="02040503050406030204" pitchFamily="18" charset="0"/>
+                      </a:rPr>
+                      <m:t>𝒙</m:t>
+                    </m:r>
+                    <m:d>
+                      <m:dPr>
+                        <m:ctrlPr>
+                          <a:rPr lang="en-US" i="1">
+                            <a:latin typeface="Cambria Math" panose="02040503050406030204" pitchFamily="18" charset="0"/>
+                          </a:rPr>
+                        </m:ctrlPr>
+                      </m:dPr>
+                      <m:e>
+                        <m:r>
+                          <a:rPr lang="en-US" i="1">
+                            <a:latin typeface="Cambria Math" panose="02040503050406030204" pitchFamily="18" charset="0"/>
+                          </a:rPr>
+                          <m:t>𝑠</m:t>
+                        </m:r>
+                      </m:e>
+                    </m:d>
+                  </m:oMath>
+                </a14:m>
+                <a:r>
+                  <a:rPr lang="en-US" dirty="0"/>
+                  <a:t> now always picks a single value from </a:t>
+                </a:r>
+                <a14:m>
+                  <m:oMath xmlns:m="http://schemas.openxmlformats.org/officeDocument/2006/math">
+                    <m:r>
+                      <a:rPr lang="en-US" b="1" i="1" smtClean="0">
+                        <a:latin typeface="Cambria Math" panose="02040503050406030204" pitchFamily="18" charset="0"/>
+                      </a:rPr>
+                      <m:t>𝒘</m:t>
+                    </m:r>
+                    <m:r>
+                      <a:rPr lang="en-US" b="0" i="0" smtClean="0">
+                        <a:latin typeface="Cambria Math" panose="02040503050406030204" pitchFamily="18" charset="0"/>
+                      </a:rPr>
+                      <m:t>.</m:t>
+                    </m:r>
+                  </m:oMath>
+                </a14:m>
+                <a:endParaRPr lang="en-US" dirty="0"/>
+              </a:p>
+              <a:p>
+                <a:endParaRPr lang="en-US" dirty="0"/>
+              </a:p>
+              <a:p>
+                <a:r>
+                  <a:rPr lang="en-US" dirty="0"/>
+                  <a:t>Consequences:</a:t>
+                </a:r>
+              </a:p>
+              <a:p>
+                <a:pPr lvl="1"/>
+                <a14:m>
+                  <m:oMath xmlns:m="http://schemas.openxmlformats.org/officeDocument/2006/math">
+                    <m:r>
+                      <a:rPr lang="en-US" b="1" i="1" smtClean="0">
+                        <a:latin typeface="Cambria Math" panose="02040503050406030204" pitchFamily="18" charset="0"/>
+                      </a:rPr>
+                      <m:t>𝒘</m:t>
+                    </m:r>
+                  </m:oMath>
+                </a14:m>
+                <a:r>
+                  <a:rPr lang="en-US" b="1" dirty="0"/>
+                  <a:t> </a:t>
+                </a:r>
+                <a:r>
+                  <a:rPr lang="en-US" dirty="0"/>
+                  <a:t>is just </a:t>
+                </a:r>
+                <a14:m>
+                  <m:oMath xmlns:m="http://schemas.openxmlformats.org/officeDocument/2006/math">
+                    <m:r>
+                      <a:rPr lang="en-US" b="0" i="1" smtClean="0">
+                        <a:latin typeface="Cambria Math" panose="02040503050406030204" pitchFamily="18" charset="0"/>
+                      </a:rPr>
+                      <m:t>𝑉</m:t>
+                    </m:r>
+                  </m:oMath>
+                </a14:m>
+                <a:r>
+                  <a:rPr lang="en-US" dirty="0"/>
+                  <a:t> in our tabular methods.</a:t>
+                </a:r>
+              </a:p>
+              <a:p>
+                <a:pPr lvl="1"/>
+                <a:r>
+                  <a:rPr lang="en-US" dirty="0"/>
+                  <a:t>No generalization</a:t>
+                </a:r>
+              </a:p>
+              <a:p>
+                <a:endParaRPr lang="en-US" dirty="0"/>
+              </a:p>
+              <a:p>
+                <a:endParaRPr lang="en-US" dirty="0"/>
+              </a:p>
+            </p:txBody>
+          </p:sp>
+        </mc:Choice>
+        <mc:Fallback>
+          <p:sp>
+            <p:nvSpPr>
+              <p:cNvPr id="3" name="Content Placeholder 2">
+                <a:extLst>
+                  <a:ext uri="{FF2B5EF4-FFF2-40B4-BE49-F238E27FC236}">
+                    <a16:creationId xmlns:a16="http://schemas.microsoft.com/office/drawing/2014/main" id="{E2D94023-3844-D64E-09EE-AFC4A96E153F}"/>
+                  </a:ext>
+                </a:extLst>
+              </p:cNvPr>
+              <p:cNvSpPr>
+                <a:spLocks noGrp="1" noRot="1" noChangeAspect="1" noMove="1" noResize="1" noEditPoints="1" noAdjustHandles="1" noChangeArrowheads="1" noChangeShapeType="1" noTextEdit="1"/>
+              </p:cNvSpPr>
+              <p:nvPr>
+                <p:ph idx="1"/>
+              </p:nvPr>
+            </p:nvSpPr>
+            <p:spPr>
+              <a:xfrm>
+                <a:off x="838200" y="1397330"/>
+                <a:ext cx="6204045" cy="4779633"/>
+              </a:xfrm>
+              <a:blipFill>
+                <a:blip r:embed="rId2"/>
+                <a:stretch>
+                  <a:fillRect l="-1573" t="-2806" r="-1278"/>
+                </a:stretch>
+              </a:blipFill>
+            </p:spPr>
+            <p:txBody>
+              <a:bodyPr/>
+              <a:lstStyle/>
+              <a:p>
+                <a:r>
+                  <a:rPr lang="en-US">
+                    <a:noFill/>
+                  </a:rPr>
+                  <a:t> </a:t>
+                </a:r>
+              </a:p>
+            </p:txBody>
+          </p:sp>
+        </mc:Fallback>
+      </mc:AlternateContent>
+      <p:grpSp>
+        <p:nvGrpSpPr>
+          <p:cNvPr id="8" name="Group 7" descr="A simple maze example to show the equivalence to tabular methods.">
+            <a:extLst>
+              <a:ext uri="{FF2B5EF4-FFF2-40B4-BE49-F238E27FC236}">
+                <a16:creationId xmlns:a16="http://schemas.microsoft.com/office/drawing/2014/main" id="{B8B79CFE-5227-591B-309E-D0C8871346E3}"/>
+              </a:ext>
+            </a:extLst>
+          </p:cNvPr>
+          <p:cNvGrpSpPr/>
+          <p:nvPr/>
+        </p:nvGrpSpPr>
+        <p:grpSpPr>
+          <a:xfrm>
+            <a:off x="7786557" y="1124198"/>
+            <a:ext cx="3942019" cy="4744675"/>
+            <a:chOff x="7786557" y="1124198"/>
+            <a:chExt cx="3942019" cy="4744675"/>
+          </a:xfrm>
+        </p:grpSpPr>
+        <p:pic>
+          <p:nvPicPr>
+            <p:cNvPr id="4" name="Picture 3">
+              <a:extLst>
+                <a:ext uri="{FF2B5EF4-FFF2-40B4-BE49-F238E27FC236}">
+                  <a16:creationId xmlns:a16="http://schemas.microsoft.com/office/drawing/2014/main" id="{615E8526-F2F5-D312-A9EE-01AB110CD188}"/>
+                </a:ext>
+              </a:extLst>
+            </p:cNvPr>
+            <p:cNvPicPr>
+              <a:picLocks noChangeAspect="1"/>
+            </p:cNvPicPr>
+            <p:nvPr/>
+          </p:nvPicPr>
+          <p:blipFill>
+            <a:blip r:embed="rId3"/>
+            <a:stretch>
+              <a:fillRect/>
+            </a:stretch>
+          </p:blipFill>
+          <p:spPr>
+            <a:xfrm>
+              <a:off x="7786557" y="1650846"/>
+              <a:ext cx="3473726" cy="2701786"/>
+            </a:xfrm>
+            <a:prstGeom prst="rect">
+              <a:avLst/>
+            </a:prstGeom>
+          </p:spPr>
+        </p:pic>
+        <mc:AlternateContent xmlns:mc="http://schemas.openxmlformats.org/markup-compatibility/2006">
+          <mc:Choice xmlns:a14="http://schemas.microsoft.com/office/drawing/2010/main" Requires="a14">
+            <p:sp>
+              <p:nvSpPr>
+                <p:cNvPr id="6" name="TextBox 5">
+                  <a:extLst>
+                    <a:ext uri="{FF2B5EF4-FFF2-40B4-BE49-F238E27FC236}">
+                      <a16:creationId xmlns:a16="http://schemas.microsoft.com/office/drawing/2014/main" id="{0F8698FB-EAF6-FD2F-962C-4D5389EB0A0B}"/>
+                    </a:ext>
+                  </a:extLst>
+                </p:cNvPr>
+                <p:cNvSpPr txBox="1"/>
+                <p:nvPr/>
+              </p:nvSpPr>
+              <p:spPr>
+                <a:xfrm>
+                  <a:off x="7786557" y="4545434"/>
+                  <a:ext cx="3942019" cy="1323439"/>
+                </a:xfrm>
+                <a:prstGeom prst="rect">
+                  <a:avLst/>
+                </a:prstGeom>
+                <a:noFill/>
+              </p:spPr>
+              <p:txBody>
+                <a:bodyPr wrap="square">
+                  <a:spAutoFit/>
+                </a:bodyPr>
+                <a:lstStyle/>
+                <a:p>
+                  <a:pPr/>
+                  <a14:m>
+                    <m:oMathPara xmlns:m="http://schemas.openxmlformats.org/officeDocument/2006/math">
+                      <m:oMathParaPr>
+                        <m:jc m:val="left"/>
+                      </m:oMathParaPr>
+                      <m:oMath>
+                        <m:r>
+                          <a:rPr lang="en-US" sz="2000" b="1" i="1" smtClean="0">
+                            <a:latin typeface="Cambria Math" panose="02040503050406030204" pitchFamily="18" charset="0"/>
+                          </a:rPr>
+                          <m:t>𝒙</m:t>
+                        </m:r>
+                        <m:d>
+                          <m:dPr>
+                            <m:ctrlPr>
+                              <a:rPr lang="en-US" sz="2000" b="0" i="1" smtClean="0">
+                                <a:latin typeface="Cambria Math" panose="02040503050406030204" pitchFamily="18" charset="0"/>
+                              </a:rPr>
+                            </m:ctrlPr>
+                          </m:dPr>
+                          <m:e>
+                            <m:r>
+                              <a:rPr lang="en-US" sz="2000" b="0" i="1" smtClean="0">
+                                <a:latin typeface="Cambria Math" panose="02040503050406030204" pitchFamily="18" charset="0"/>
+                              </a:rPr>
+                              <m:t>𝑠</m:t>
+                            </m:r>
+                            <m:r>
+                              <a:rPr lang="en-US" sz="2000" b="0" i="1" smtClean="0">
+                                <a:latin typeface="Cambria Math" panose="02040503050406030204" pitchFamily="18" charset="0"/>
+                              </a:rPr>
+                              <m:t>(0,0)</m:t>
+                            </m:r>
+                          </m:e>
+                        </m:d>
+                        <m:r>
+                          <a:rPr lang="en-US" sz="2000" b="0" i="1" smtClean="0">
+                            <a:latin typeface="Cambria Math" panose="02040503050406030204" pitchFamily="18" charset="0"/>
+                          </a:rPr>
+                          <m:t>=</m:t>
+                        </m:r>
+                        <m:d>
+                          <m:dPr>
+                            <m:ctrlPr>
+                              <a:rPr lang="en-US" sz="2000" b="0" i="1" smtClean="0">
+                                <a:latin typeface="Cambria Math" panose="02040503050406030204" pitchFamily="18" charset="0"/>
+                              </a:rPr>
+                            </m:ctrlPr>
+                          </m:dPr>
+                          <m:e>
+                            <m:r>
+                              <a:rPr lang="en-US" sz="2000" b="0" i="1" smtClean="0">
+                                <a:latin typeface="Cambria Math" panose="02040503050406030204" pitchFamily="18" charset="0"/>
+                              </a:rPr>
+                              <m:t>1,0,0,0,0,0,0,0,0,0,0</m:t>
+                            </m:r>
+                          </m:e>
+                        </m:d>
+                      </m:oMath>
+                    </m:oMathPara>
+                  </a14:m>
+                  <a:endParaRPr lang="en-US" sz="1400" b="0" dirty="0"/>
+                </a:p>
+                <a:p>
+                  <a:pPr/>
+                  <a14:m>
+                    <m:oMathPara xmlns:m="http://schemas.openxmlformats.org/officeDocument/2006/math">
+                      <m:oMathParaPr>
+                        <m:jc m:val="left"/>
+                      </m:oMathParaPr>
+                      <m:oMath>
+                        <m:r>
+                          <a:rPr lang="en-US" sz="2000" b="1" i="1" smtClean="0">
+                            <a:latin typeface="Cambria Math" panose="02040503050406030204" pitchFamily="18" charset="0"/>
+                          </a:rPr>
+                          <m:t>𝒘</m:t>
+                        </m:r>
+                        <m:r>
+                          <a:rPr lang="en-US" sz="2000" b="0" i="1" smtClean="0">
+                            <a:latin typeface="Cambria Math" panose="02040503050406030204" pitchFamily="18" charset="0"/>
+                          </a:rPr>
+                          <m:t>=</m:t>
+                        </m:r>
+                        <m:d>
+                          <m:dPr>
+                            <m:ctrlPr>
+                              <a:rPr lang="en-US" sz="2000" b="0" i="1" smtClean="0">
+                                <a:latin typeface="Cambria Math" panose="02040503050406030204" pitchFamily="18" charset="0"/>
+                              </a:rPr>
+                            </m:ctrlPr>
+                          </m:dPr>
+                          <m:e>
+                            <m:sSub>
+                              <m:sSubPr>
+                                <m:ctrlPr>
+                                  <a:rPr lang="en-US" sz="2000" b="0" i="1" smtClean="0">
+                                    <a:latin typeface="Cambria Math" panose="02040503050406030204" pitchFamily="18" charset="0"/>
+                                  </a:rPr>
+                                </m:ctrlPr>
+                              </m:sSubPr>
+                              <m:e>
+                                <m:r>
+                                  <a:rPr lang="en-US" sz="2000" b="0" i="1" smtClean="0">
+                                    <a:latin typeface="Cambria Math" panose="02040503050406030204" pitchFamily="18" charset="0"/>
+                                  </a:rPr>
+                                  <m:t>𝑉</m:t>
+                                </m:r>
+                              </m:e>
+                              <m:sub>
+                                <m:r>
+                                  <a:rPr lang="en-US" sz="2000" b="0" i="1" smtClean="0">
+                                    <a:latin typeface="Cambria Math" panose="02040503050406030204" pitchFamily="18" charset="0"/>
+                                  </a:rPr>
+                                  <m:t>0</m:t>
+                                </m:r>
+                              </m:sub>
+                            </m:sSub>
+                            <m:r>
+                              <a:rPr lang="en-US" sz="2000" b="0" i="1" smtClean="0">
+                                <a:latin typeface="Cambria Math" panose="02040503050406030204" pitchFamily="18" charset="0"/>
+                              </a:rPr>
+                              <m:t>,</m:t>
+                            </m:r>
+                            <m:sSub>
+                              <m:sSubPr>
+                                <m:ctrlPr>
+                                  <a:rPr lang="en-US" sz="2000" b="0" i="1" smtClean="0">
+                                    <a:latin typeface="Cambria Math" panose="02040503050406030204" pitchFamily="18" charset="0"/>
+                                  </a:rPr>
+                                </m:ctrlPr>
+                              </m:sSubPr>
+                              <m:e>
+                                <m:r>
+                                  <a:rPr lang="en-US" sz="2000" b="0" i="1" smtClean="0">
+                                    <a:latin typeface="Cambria Math" panose="02040503050406030204" pitchFamily="18" charset="0"/>
+                                  </a:rPr>
+                                  <m:t>𝑉</m:t>
+                                </m:r>
+                              </m:e>
+                              <m:sub>
+                                <m:r>
+                                  <a:rPr lang="en-US" sz="2000" b="0" i="1" smtClean="0">
+                                    <a:latin typeface="Cambria Math" panose="02040503050406030204" pitchFamily="18" charset="0"/>
+                                  </a:rPr>
+                                  <m:t>1</m:t>
+                                </m:r>
+                              </m:sub>
+                            </m:sSub>
+                            <m:r>
+                              <a:rPr lang="en-US" sz="2000" b="0" i="1" smtClean="0">
+                                <a:latin typeface="Cambria Math" panose="02040503050406030204" pitchFamily="18" charset="0"/>
+                              </a:rPr>
+                              <m:t>,</m:t>
+                            </m:r>
+                            <m:sSub>
+                              <m:sSubPr>
+                                <m:ctrlPr>
+                                  <a:rPr lang="en-US" sz="2000" b="0" i="1" smtClean="0">
+                                    <a:latin typeface="Cambria Math" panose="02040503050406030204" pitchFamily="18" charset="0"/>
+                                  </a:rPr>
+                                </m:ctrlPr>
+                              </m:sSubPr>
+                              <m:e>
+                                <m:r>
+                                  <a:rPr lang="en-US" sz="2000" b="0" i="1" smtClean="0">
+                                    <a:latin typeface="Cambria Math" panose="02040503050406030204" pitchFamily="18" charset="0"/>
+                                  </a:rPr>
+                                  <m:t>𝑉</m:t>
+                                </m:r>
+                              </m:e>
+                              <m:sub>
+                                <m:r>
+                                  <a:rPr lang="en-US" sz="2000" b="0" i="1" smtClean="0">
+                                    <a:latin typeface="Cambria Math" panose="02040503050406030204" pitchFamily="18" charset="0"/>
+                                  </a:rPr>
+                                  <m:t>2</m:t>
+                                </m:r>
+                              </m:sub>
+                            </m:sSub>
+                            <m:r>
+                              <a:rPr lang="en-US" sz="2000" b="0" i="1" smtClean="0">
+                                <a:latin typeface="Cambria Math" panose="02040503050406030204" pitchFamily="18" charset="0"/>
+                              </a:rPr>
+                              <m:t>,…,</m:t>
+                            </m:r>
+                            <m:sSub>
+                              <m:sSubPr>
+                                <m:ctrlPr>
+                                  <a:rPr lang="en-US" sz="2000" b="0" i="1" smtClean="0">
+                                    <a:latin typeface="Cambria Math" panose="02040503050406030204" pitchFamily="18" charset="0"/>
+                                  </a:rPr>
+                                </m:ctrlPr>
+                              </m:sSubPr>
+                              <m:e>
+                                <m:r>
+                                  <a:rPr lang="en-US" sz="2000" b="0" i="1" smtClean="0">
+                                    <a:latin typeface="Cambria Math" panose="02040503050406030204" pitchFamily="18" charset="0"/>
+                                  </a:rPr>
+                                  <m:t>𝑉</m:t>
+                                </m:r>
+                              </m:e>
+                              <m:sub>
+                                <m:r>
+                                  <a:rPr lang="en-US" sz="2000" b="0" i="1" smtClean="0">
+                                    <a:latin typeface="Cambria Math" panose="02040503050406030204" pitchFamily="18" charset="0"/>
+                                  </a:rPr>
+                                  <m:t>10</m:t>
+                                </m:r>
+                              </m:sub>
+                            </m:sSub>
+                          </m:e>
+                        </m:d>
+                      </m:oMath>
+                    </m:oMathPara>
+                  </a14:m>
+                  <a:br>
+                    <a:rPr lang="en-US" sz="2000" b="0" dirty="0"/>
+                  </a:br>
+                  <a:br>
+                    <a:rPr lang="en-US" sz="2000" b="0" dirty="0"/>
+                  </a:br>
+                  <a14:m>
+                    <m:oMathPara xmlns:m="http://schemas.openxmlformats.org/officeDocument/2006/math">
+                      <m:oMathParaPr>
+                        <m:jc m:val="left"/>
+                      </m:oMathParaPr>
+                      <m:oMath>
+                        <m:acc>
+                          <m:accPr>
+                            <m:chr m:val="̂"/>
+                            <m:ctrlPr>
+                              <a:rPr lang="en-US" sz="2000" i="1">
+                                <a:latin typeface="Cambria Math" panose="02040503050406030204" pitchFamily="18" charset="0"/>
+                              </a:rPr>
+                            </m:ctrlPr>
+                          </m:accPr>
+                          <m:e>
+                            <m:r>
+                              <a:rPr lang="en-US" sz="2000" i="1">
+                                <a:latin typeface="Cambria Math" panose="02040503050406030204" pitchFamily="18" charset="0"/>
+                              </a:rPr>
+                              <m:t>𝑣</m:t>
+                            </m:r>
+                          </m:e>
+                        </m:acc>
+                        <m:d>
+                          <m:dPr>
+                            <m:ctrlPr>
+                              <a:rPr lang="en-US" sz="2000" i="1">
+                                <a:latin typeface="Cambria Math" panose="02040503050406030204" pitchFamily="18" charset="0"/>
+                              </a:rPr>
+                            </m:ctrlPr>
+                          </m:dPr>
+                          <m:e>
+                            <m:r>
+                              <a:rPr lang="en-US" sz="2000" i="1">
+                                <a:latin typeface="Cambria Math" panose="02040503050406030204" pitchFamily="18" charset="0"/>
+                              </a:rPr>
+                              <m:t>𝑠</m:t>
+                            </m:r>
+                            <m:r>
+                              <a:rPr lang="en-US" sz="2000" b="0" i="1" smtClean="0">
+                                <a:latin typeface="Cambria Math" panose="02040503050406030204" pitchFamily="18" charset="0"/>
+                              </a:rPr>
+                              <m:t>(0,0)</m:t>
+                            </m:r>
+                            <m:r>
+                              <a:rPr lang="en-US" sz="2000" i="1">
+                                <a:latin typeface="Cambria Math" panose="02040503050406030204" pitchFamily="18" charset="0"/>
+                              </a:rPr>
+                              <m:t>,</m:t>
+                            </m:r>
+                            <m:r>
+                              <a:rPr lang="en-US" sz="2000" b="1" i="1">
+                                <a:latin typeface="Cambria Math" panose="02040503050406030204" pitchFamily="18" charset="0"/>
+                              </a:rPr>
+                              <m:t>𝒘</m:t>
+                            </m:r>
+                          </m:e>
+                        </m:d>
+                        <m:r>
+                          <a:rPr lang="en-US" sz="2000" b="1" i="1">
+                            <a:latin typeface="Cambria Math" panose="02040503050406030204" pitchFamily="18" charset="0"/>
+                          </a:rPr>
+                          <m:t>=</m:t>
+                        </m:r>
+                        <m:sSup>
+                          <m:sSupPr>
+                            <m:ctrlPr>
+                              <a:rPr lang="en-US" sz="2000" b="1" i="1">
+                                <a:latin typeface="Cambria Math" panose="02040503050406030204" pitchFamily="18" charset="0"/>
+                              </a:rPr>
+                            </m:ctrlPr>
+                          </m:sSupPr>
+                          <m:e>
+                            <m:r>
+                              <a:rPr lang="en-US" sz="2000" b="1" i="1">
+                                <a:latin typeface="Cambria Math" panose="02040503050406030204" pitchFamily="18" charset="0"/>
+                              </a:rPr>
+                              <m:t>𝒘</m:t>
+                            </m:r>
+                          </m:e>
+                          <m:sup>
+                            <m:r>
+                              <a:rPr lang="en-US" sz="2000" b="1" i="1">
+                                <a:latin typeface="Cambria Math" panose="02040503050406030204" pitchFamily="18" charset="0"/>
+                              </a:rPr>
+                              <m:t>⊤</m:t>
+                            </m:r>
+                          </m:sup>
+                        </m:sSup>
+                        <m:r>
+                          <a:rPr lang="en-US" sz="2000" b="1" i="1">
+                            <a:latin typeface="Cambria Math" panose="02040503050406030204" pitchFamily="18" charset="0"/>
+                          </a:rPr>
+                          <m:t>𝒙</m:t>
+                        </m:r>
+                        <m:d>
+                          <m:dPr>
+                            <m:ctrlPr>
+                              <a:rPr lang="en-US" sz="2000" i="1">
+                                <a:latin typeface="Cambria Math" panose="02040503050406030204" pitchFamily="18" charset="0"/>
+                              </a:rPr>
+                            </m:ctrlPr>
+                          </m:dPr>
+                          <m:e>
+                            <m:r>
+                              <a:rPr lang="en-US" sz="2000" i="1">
+                                <a:latin typeface="Cambria Math" panose="02040503050406030204" pitchFamily="18" charset="0"/>
+                              </a:rPr>
+                              <m:t>𝑠</m:t>
+                            </m:r>
+                            <m:r>
+                              <a:rPr lang="en-US" sz="2000" b="0" i="1" smtClean="0">
+                                <a:latin typeface="Cambria Math" panose="02040503050406030204" pitchFamily="18" charset="0"/>
+                              </a:rPr>
+                              <m:t>(0,0)</m:t>
+                            </m:r>
+                          </m:e>
+                        </m:d>
+                        <m:r>
+                          <a:rPr lang="en-US" sz="2000" b="0" i="1" smtClean="0">
+                            <a:latin typeface="Cambria Math" panose="02040503050406030204" pitchFamily="18" charset="0"/>
+                          </a:rPr>
+                          <m:t>=</m:t>
+                        </m:r>
+                        <m:sSub>
+                          <m:sSubPr>
+                            <m:ctrlPr>
+                              <a:rPr lang="en-US" sz="2000" b="0" i="1" smtClean="0">
+                                <a:latin typeface="Cambria Math" panose="02040503050406030204" pitchFamily="18" charset="0"/>
+                              </a:rPr>
+                            </m:ctrlPr>
+                          </m:sSubPr>
+                          <m:e>
+                            <m:r>
+                              <a:rPr lang="en-US" sz="2000" b="0" i="1" smtClean="0">
+                                <a:latin typeface="Cambria Math" panose="02040503050406030204" pitchFamily="18" charset="0"/>
+                              </a:rPr>
+                              <m:t>𝑉</m:t>
+                            </m:r>
+                          </m:e>
+                          <m:sub>
+                            <m:r>
+                              <a:rPr lang="en-US" sz="2000" b="0" i="1" smtClean="0">
+                                <a:latin typeface="Cambria Math" panose="02040503050406030204" pitchFamily="18" charset="0"/>
+                              </a:rPr>
+                              <m:t>0</m:t>
+                            </m:r>
+                          </m:sub>
+                        </m:sSub>
+                      </m:oMath>
+                    </m:oMathPara>
+                  </a14:m>
+                  <a:endParaRPr lang="en-US" sz="2000" b="0" dirty="0"/>
+                </a:p>
+              </p:txBody>
+            </p:sp>
+          </mc:Choice>
+          <mc:Fallback>
+            <p:sp>
+              <p:nvSpPr>
+                <p:cNvPr id="6" name="TextBox 5">
+                  <a:extLst>
+                    <a:ext uri="{FF2B5EF4-FFF2-40B4-BE49-F238E27FC236}">
+                      <a16:creationId xmlns:a16="http://schemas.microsoft.com/office/drawing/2014/main" id="{0F8698FB-EAF6-FD2F-962C-4D5389EB0A0B}"/>
+                    </a:ext>
+                  </a:extLst>
+                </p:cNvPr>
+                <p:cNvSpPr txBox="1">
+                  <a:spLocks noRot="1" noChangeAspect="1" noMove="1" noResize="1" noEditPoints="1" noAdjustHandles="1" noChangeArrowheads="1" noChangeShapeType="1" noTextEdit="1"/>
+                </p:cNvSpPr>
+                <p:nvPr/>
+              </p:nvSpPr>
+              <p:spPr>
+                <a:xfrm>
+                  <a:off x="7786557" y="4545434"/>
+                  <a:ext cx="3942019" cy="1323439"/>
+                </a:xfrm>
+                <a:prstGeom prst="rect">
+                  <a:avLst/>
+                </a:prstGeom>
+                <a:blipFill>
+                  <a:blip r:embed="rId4"/>
+                  <a:stretch>
+                    <a:fillRect b="-3687"/>
+                  </a:stretch>
+                </a:blipFill>
+              </p:spPr>
+              <p:txBody>
+                <a:bodyPr/>
+                <a:lstStyle/>
+                <a:p>
+                  <a:r>
+                    <a:rPr lang="en-US">
+                      <a:noFill/>
+                    </a:rPr>
+                    <a:t> </a:t>
+                  </a:r>
+                </a:p>
+              </p:txBody>
+            </p:sp>
+          </mc:Fallback>
+        </mc:AlternateContent>
+        <p:sp>
+          <p:nvSpPr>
+            <p:cNvPr id="7" name="TextBox 6">
+              <a:extLst>
+                <a:ext uri="{FF2B5EF4-FFF2-40B4-BE49-F238E27FC236}">
+                  <a16:creationId xmlns:a16="http://schemas.microsoft.com/office/drawing/2014/main" id="{4B5CF3AB-B5DD-4B88-5213-24B3CEBE15B8}"/>
+                </a:ext>
+              </a:extLst>
+            </p:cNvPr>
+            <p:cNvSpPr txBox="1"/>
+            <p:nvPr/>
+          </p:nvSpPr>
+          <p:spPr>
+            <a:xfrm>
+              <a:off x="7915701" y="1124198"/>
+              <a:ext cx="1549021" cy="369332"/>
+            </a:xfrm>
+            <a:prstGeom prst="rect">
+              <a:avLst/>
+            </a:prstGeom>
+            <a:noFill/>
+          </p:spPr>
+          <p:txBody>
+            <a:bodyPr wrap="square" rtlCol="0">
+              <a:spAutoFit/>
+            </a:bodyPr>
+            <a:lstStyle/>
+            <a:p>
+              <a:r>
+                <a:rPr lang="en-US" dirty="0"/>
+                <a:t>Example:</a:t>
+              </a:r>
+            </a:p>
+          </p:txBody>
+        </p:sp>
+      </p:grpSp>
+    </p:spTree>
+    <p:extLst>
+      <p:ext uri="{BB962C8B-B14F-4D97-AF65-F5344CB8AC3E}">
+        <p14:creationId xmlns:p14="http://schemas.microsoft.com/office/powerpoint/2010/main" val="579299197"/>
+      </p:ext>
+    </p:extLst>
+  </p:cSld>
+  <p:clrMapOvr>
+    <a:masterClrMapping/>
+  </p:clrMapOvr>
+  <p:timing>
+    <p:tnLst>
+      <p:par>
+        <p:cTn id="1" dur="indefinite" restart="never" nodeType="tmRoot">
+          <p:childTnLst>
+            <p:seq concurrent="1" nextAc="seek">
+              <p:cTn id="2" dur="indefinite" nodeType="mainSeq">
+                <p:childTnLst>
+                  <p:par>
+                    <p:cTn id="3" fill="hold">
+                      <p:stCondLst>
+                        <p:cond delay="indefinite"/>
+                      </p:stCondLst>
+                      <p:childTnLst>
+                        <p:par>
+                          <p:cTn id="4" fill="hold">
+                            <p:stCondLst>
+                              <p:cond delay="0"/>
+                            </p:stCondLst>
+                            <p:childTnLst>
+                              <p:par>
+                                <p:cTn id="5" presetID="1" presetClass="entr" presetSubtype="0" fill="hold" nodeType="clickEffect">
+                                  <p:stCondLst>
+                                    <p:cond delay="0"/>
+                                  </p:stCondLst>
+                                  <p:childTnLst>
+                                    <p:set>
+                                      <p:cBhvr>
+                                        <p:cTn id="6" dur="1" fill="hold">
+                                          <p:stCondLst>
+                                            <p:cond delay="0"/>
+                                          </p:stCondLst>
+                                        </p:cTn>
+                                        <p:tgtEl>
+                                          <p:spTgt spid="8"/>
+                                        </p:tgtEl>
+                                        <p:attrNameLst>
+                                          <p:attrName>style.visibility</p:attrName>
+                                        </p:attrNameLst>
+                                      </p:cBhvr>
+                                      <p:to>
+                                        <p:strVal val="visible"/>
+                                      </p:to>
+                                    </p:set>
+                                  </p:childTnLst>
+                                </p:cTn>
+                              </p:par>
+                            </p:childTnLst>
+                          </p:cTn>
+                        </p:par>
+                      </p:childTnLst>
+                    </p:cTn>
+                  </p:par>
+                </p:childTnLst>
+              </p:cTn>
+              <p:prevCondLst>
+                <p:cond evt="onPrev" delay="0">
+                  <p:tgtEl>
+                    <p:sldTgt/>
+                  </p:tgtEl>
+                </p:cond>
+              </p:prevCondLst>
+              <p:nextCondLst>
+                <p:cond evt="onNext" delay="0">
+                  <p:tgtEl>
+                    <p:sldTgt/>
+                  </p:tgtEl>
+                </p:cond>
+              </p:nextCondLst>
+            </p:seq>
+          </p:childTnLst>
+        </p:cTn>
+      </p:par>
+    </p:tnLst>
+  </p:timing>
+</p:sld>
+</file>
+
+<file path=ppt/slides/slide29.xml><?xml version="1.0" encoding="utf-8"?>
+<p:sld xmlns:a="http://schemas.openxmlformats.org/drawingml/2006/main" xmlns:r="http://schemas.openxmlformats.org/officeDocument/2006/relationships" xmlns:p="http://schemas.openxmlformats.org/presentationml/2006/main">
+  <p:cSld>
+    <p:spTree>
+      <p:nvGrpSpPr>
+        <p:cNvPr id="1" name=""/>
+        <p:cNvGrpSpPr/>
+        <p:nvPr/>
+      </p:nvGrpSpPr>
+      <p:grpSpPr>
+        <a:xfrm>
+          <a:off x="0" y="0"/>
+          <a:ext cx="0" cy="0"/>
+          <a:chOff x="0" y="0"/>
+          <a:chExt cx="0" cy="0"/>
+        </a:xfrm>
+      </p:grpSpPr>
+      <p:sp>
+        <p:nvSpPr>
+          <p:cNvPr id="2" name="Title 1">
+            <a:extLst>
+              <a:ext uri="{FF2B5EF4-FFF2-40B4-BE49-F238E27FC236}">
                 <a16:creationId xmlns:a16="http://schemas.microsoft.com/office/drawing/2014/main" id="{08FDE7C5-DE21-E0E4-C7C7-7B5888EF3D67}"/>
               </a:ext>
             </a:extLst>
@@ -25321,7 +26292,7 @@
         <p:spPr/>
         <p:txBody>
           <a:bodyPr>
-            <a:normAutofit fontScale="85000" lnSpcReduction="20000"/>
+            <a:normAutofit fontScale="77500" lnSpcReduction="20000"/>
           </a:bodyPr>
           <a:lstStyle/>
           <a:p>
@@ -25379,7 +26350,7 @@
           <a:p>
             <a:r>
               <a:rPr lang="en-US" dirty="0"/>
-              <a:t>Practical approach: RL</a:t>
+              <a:t>Practical approach for RL with approximation</a:t>
             </a:r>
           </a:p>
           <a:p>
@@ -25397,7 +26368,7 @@
             </a:r>
             <a:r>
               <a:rPr lang="en-US" dirty="0"/>
-              <a:t>with features from current observations and the observation history</a:t>
+              <a:t>with features from current observations and the observation history (E.g., observation stacking).</a:t>
             </a:r>
           </a:p>
           <a:p>
@@ -25411,17 +26382,7 @@
             </a:r>
             <a:r>
               <a:rPr lang="en-US" dirty="0"/>
-              <a:t>on those features</a:t>
-            </a:r>
-          </a:p>
-          <a:p>
-            <a:pPr marL="971550" lvl="1" indent="-514350">
-              <a:buFont typeface="+mj-lt"/>
-              <a:buAutoNum type="arabicPeriod"/>
-            </a:pPr>
-            <a:r>
-              <a:rPr lang="en-US" dirty="0"/>
-              <a:t>Learn a value function or policy from the compressed representation.</a:t>
+              <a:t>on those features to learn a value function or policy from the compressed representation.</a:t>
             </a:r>
           </a:p>
           <a:p>
@@ -25438,7 +26399,7 @@
             </a:r>
             <a:r>
               <a:rPr lang="en-US" dirty="0"/>
-              <a:t>: Maze solver where the x and y coordinates are noisy. Using the change in coordinates for the last few steps helps.</a:t>
+              <a:t>: Maze solver where the x and y coordinates are noisy. Using the observed coordinates from the last few steps (stacking them) helps average out random noise in the observations.</a:t>
             </a:r>
           </a:p>
         </p:txBody>
@@ -25447,92 +26408,6 @@
     <p:extLst>
       <p:ext uri="{BB962C8B-B14F-4D97-AF65-F5344CB8AC3E}">
         <p14:creationId xmlns:p14="http://schemas.microsoft.com/office/powerpoint/2010/main" val="1605762469"/>
-      </p:ext>
-    </p:extLst>
-  </p:cSld>
-  <p:clrMapOvr>
-    <a:masterClrMapping/>
-  </p:clrMapOvr>
-</p:sld>
-</file>
-
-<file path=ppt/slides/slide29.xml><?xml version="1.0" encoding="utf-8"?>
-<p:sld xmlns:a="http://schemas.openxmlformats.org/drawingml/2006/main" xmlns:r="http://schemas.openxmlformats.org/officeDocument/2006/relationships" xmlns:p="http://schemas.openxmlformats.org/presentationml/2006/main">
-  <p:cSld>
-    <p:spTree>
-      <p:nvGrpSpPr>
-        <p:cNvPr id="1" name=""/>
-        <p:cNvGrpSpPr/>
-        <p:nvPr/>
-      </p:nvGrpSpPr>
-      <p:grpSpPr>
-        <a:xfrm>
-          <a:off x="0" y="0"/>
-          <a:ext cx="0" cy="0"/>
-          <a:chOff x="0" y="0"/>
-          <a:chExt cx="0" cy="0"/>
-        </a:xfrm>
-      </p:grpSpPr>
-      <p:sp>
-        <p:nvSpPr>
-          <p:cNvPr id="4" name="Title 3">
-            <a:extLst>
-              <a:ext uri="{FF2B5EF4-FFF2-40B4-BE49-F238E27FC236}">
-                <a16:creationId xmlns:a16="http://schemas.microsoft.com/office/drawing/2014/main" id="{D4F3D035-6970-410A-56D5-7B2461C3DB86}"/>
-              </a:ext>
-            </a:extLst>
-          </p:cNvPr>
-          <p:cNvSpPr>
-            <a:spLocks noGrp="1"/>
-          </p:cNvSpPr>
-          <p:nvPr>
-            <p:ph type="title"/>
-          </p:nvPr>
-        </p:nvSpPr>
-        <p:spPr/>
-        <p:txBody>
-          <a:bodyPr/>
-          <a:lstStyle/>
-          <a:p>
-            <a:r>
-              <a:rPr lang="en-US" dirty="0"/>
-              <a:t>Non-Linear Function Approximation</a:t>
-            </a:r>
-          </a:p>
-        </p:txBody>
-      </p:sp>
-      <p:sp>
-        <p:nvSpPr>
-          <p:cNvPr id="5" name="Text Placeholder 4">
-            <a:extLst>
-              <a:ext uri="{FF2B5EF4-FFF2-40B4-BE49-F238E27FC236}">
-                <a16:creationId xmlns:a16="http://schemas.microsoft.com/office/drawing/2014/main" id="{A0742DE7-913C-60BB-DF8E-B71A7E28A534}"/>
-              </a:ext>
-            </a:extLst>
-          </p:cNvPr>
-          <p:cNvSpPr>
-            <a:spLocks noGrp="1"/>
-          </p:cNvSpPr>
-          <p:nvPr>
-            <p:ph type="body" idx="1"/>
-          </p:nvPr>
-        </p:nvSpPr>
-        <p:spPr/>
-        <p:txBody>
-          <a:bodyPr/>
-          <a:lstStyle/>
-          <a:p>
-            <a:r>
-              <a:rPr lang="en-US" dirty="0"/>
-              <a:t>Artificial Neural Networks</a:t>
-            </a:r>
-          </a:p>
-        </p:txBody>
-      </p:sp>
-    </p:spTree>
-    <p:extLst>
-      <p:ext uri="{BB962C8B-B14F-4D97-AF65-F5344CB8AC3E}">
-        <p14:creationId xmlns:p14="http://schemas.microsoft.com/office/powerpoint/2010/main" val="3665102247"/>
       </p:ext>
     </p:extLst>
   </p:cSld>
@@ -29912,6 +30787,92 @@
       </p:grpSpPr>
       <p:sp>
         <p:nvSpPr>
+          <p:cNvPr id="4" name="Title 3">
+            <a:extLst>
+              <a:ext uri="{FF2B5EF4-FFF2-40B4-BE49-F238E27FC236}">
+                <a16:creationId xmlns:a16="http://schemas.microsoft.com/office/drawing/2014/main" id="{D4F3D035-6970-410A-56D5-7B2461C3DB86}"/>
+              </a:ext>
+            </a:extLst>
+          </p:cNvPr>
+          <p:cNvSpPr>
+            <a:spLocks noGrp="1"/>
+          </p:cNvSpPr>
+          <p:nvPr>
+            <p:ph type="title"/>
+          </p:nvPr>
+        </p:nvSpPr>
+        <p:spPr/>
+        <p:txBody>
+          <a:bodyPr/>
+          <a:lstStyle/>
+          <a:p>
+            <a:r>
+              <a:rPr lang="en-US" dirty="0"/>
+              <a:t>Non-Linear Function Approximation</a:t>
+            </a:r>
+          </a:p>
+        </p:txBody>
+      </p:sp>
+      <p:sp>
+        <p:nvSpPr>
+          <p:cNvPr id="5" name="Text Placeholder 4">
+            <a:extLst>
+              <a:ext uri="{FF2B5EF4-FFF2-40B4-BE49-F238E27FC236}">
+                <a16:creationId xmlns:a16="http://schemas.microsoft.com/office/drawing/2014/main" id="{A0742DE7-913C-60BB-DF8E-B71A7E28A534}"/>
+              </a:ext>
+            </a:extLst>
+          </p:cNvPr>
+          <p:cNvSpPr>
+            <a:spLocks noGrp="1"/>
+          </p:cNvSpPr>
+          <p:nvPr>
+            <p:ph type="body" idx="1"/>
+          </p:nvPr>
+        </p:nvSpPr>
+        <p:spPr/>
+        <p:txBody>
+          <a:bodyPr/>
+          <a:lstStyle/>
+          <a:p>
+            <a:r>
+              <a:rPr lang="en-US" dirty="0"/>
+              <a:t>Artificial Neural Networks</a:t>
+            </a:r>
+          </a:p>
+        </p:txBody>
+      </p:sp>
+    </p:spTree>
+    <p:extLst>
+      <p:ext uri="{BB962C8B-B14F-4D97-AF65-F5344CB8AC3E}">
+        <p14:creationId xmlns:p14="http://schemas.microsoft.com/office/powerpoint/2010/main" val="3665102247"/>
+      </p:ext>
+    </p:extLst>
+  </p:cSld>
+  <p:clrMapOvr>
+    <a:masterClrMapping/>
+  </p:clrMapOvr>
+</p:sld>
+</file>
+
+<file path=ppt/slides/slide31.xml><?xml version="1.0" encoding="utf-8"?>
+<p:sld xmlns:a="http://schemas.openxmlformats.org/drawingml/2006/main" xmlns:r="http://schemas.openxmlformats.org/officeDocument/2006/relationships" xmlns:p="http://schemas.openxmlformats.org/presentationml/2006/main">
+  <p:cSld>
+    <p:spTree>
+      <p:nvGrpSpPr>
+        <p:cNvPr id="1" name=""/>
+        <p:cNvGrpSpPr/>
+        <p:nvPr/>
+      </p:nvGrpSpPr>
+      <p:grpSpPr>
+        <a:xfrm>
+          <a:off x="0" y="0"/>
+          <a:ext cx="0" cy="0"/>
+          <a:chOff x="0" y="0"/>
+          <a:chExt cx="0" cy="0"/>
+        </a:xfrm>
+      </p:grpSpPr>
+      <p:sp>
+        <p:nvSpPr>
           <p:cNvPr id="2" name="Title 1">
             <a:extLst>
               <a:ext uri="{FF2B5EF4-FFF2-40B4-BE49-F238E27FC236}">
@@ -29988,7 +30949,7 @@
             <a:pPr lvl="1"/>
             <a:r>
               <a:rPr lang="en-US" dirty="0"/>
-              <a:t>Convolution networks</a:t>
+              <a:t> Convolutional networks</a:t>
             </a:r>
           </a:p>
           <a:p>
@@ -30015,13 +30976,13 @@
           <a:p>
             <a:r>
               <a:rPr lang="en-US" dirty="0"/>
-              <a:t>Networks are trained like linear models using SGD. For deep networks this uses backpropagation.</a:t>
+              <a:t>Networks are trained like linear models using SGD. For deep networks, this uses backpropagation.</a:t>
             </a:r>
           </a:p>
           <a:p>
             <a:r>
               <a:rPr lang="en-US" dirty="0"/>
-              <a:t>ANNs are non-linear universal approximators so they can learn any value function.</a:t>
+              <a:t>ANNs are universal approximators, so they can learn any value function.</a:t>
             </a:r>
           </a:p>
           <a:p>
@@ -30044,7 +31005,7 @@
             <a:pPr lvl="1"/>
             <a:r>
               <a:rPr lang="en-US" dirty="0"/>
-              <a:t>Convergence is not guaranteed. </a:t>
+              <a:t> Generally, no convergence guarantee. </a:t>
             </a:r>
           </a:p>
           <a:p>
@@ -30073,7 +31034,7 @@
         </p:nvGrpSpPr>
         <p:grpSpPr>
           <a:xfrm>
-            <a:off x="8207189" y="1193884"/>
+            <a:off x="7276460" y="1226541"/>
             <a:ext cx="3920629" cy="2021412"/>
             <a:chOff x="1129787" y="3714030"/>
             <a:chExt cx="3920629" cy="2021412"/>
@@ -33536,7 +34497,7 @@
 </p:sld>
 </file>
 
-<file path=ppt/slides/slide31.xml><?xml version="1.0" encoding="utf-8"?>
+<file path=ppt/slides/slide32.xml><?xml version="1.0" encoding="utf-8"?>
 <p:sld xmlns:a="http://schemas.openxmlformats.org/drawingml/2006/main" xmlns:r="http://schemas.openxmlformats.org/officeDocument/2006/relationships" xmlns:p="http://schemas.openxmlformats.org/presentationml/2006/main">
   <p:cSld>
     <p:spTree>
@@ -33622,7 +34583,7 @@
 </p:sld>
 </file>
 
-<file path=ppt/slides/slide32.xml><?xml version="1.0" encoding="utf-8"?>
+<file path=ppt/slides/slide33.xml><?xml version="1.0" encoding="utf-8"?>
 <p:sld xmlns:a="http://schemas.openxmlformats.org/drawingml/2006/main" xmlns:r="http://schemas.openxmlformats.org/officeDocument/2006/relationships" xmlns:p="http://schemas.openxmlformats.org/presentationml/2006/main">
   <p:cSld>
     <p:spTree>
@@ -33667,8 +34628,8 @@
           </a:p>
         </p:txBody>
       </p:sp>
-      <mc:AlternateContent xmlns:mc="http://schemas.openxmlformats.org/markup-compatibility/2006" xmlns:a14="http://schemas.microsoft.com/office/drawing/2010/main">
-        <mc:Choice Requires="a14">
+      <mc:AlternateContent xmlns:mc="http://schemas.openxmlformats.org/markup-compatibility/2006">
+        <mc:Choice xmlns:a14="http://schemas.microsoft.com/office/drawing/2010/main" Requires="a14">
           <p:sp>
             <p:nvSpPr>
               <p:cNvPr id="5" name="Content Placeholder 4" descr="Estimate a parametric approximation for value-action function. q hat (s,a,w) is approximately q sub star (s,a). Training data: S sub t,A sub t maps to U sub t. Update: w sub t plus 1, equals w sub t plus alpha [U sub t minus q hat (S sub t,A sub t, w sub t)] gradient of q hat (S sub t,A sub t,w sub t). U sub t can be any approximation:. MC: U sub t equals G sub t. 1-step TD: U sub t equals R sub t plus 1, plus gamma q hat (S sub t, A sub t,w sub t). …. Policy improvement: update policy with greedy action A star sub t plus 1 equals argmax over a, of q hat (S sub t plus 1,a, w sub t). For on-policy control, use a soft approximation to the greedy policy (e.g., epsilon -greedy)">
@@ -33694,7 +34655,7 @@
               <a:p>
                 <a:r>
                   <a:rPr lang="en-US" dirty="0"/>
-                  <a:t>Estimate a parametric approximation for value-action function.</a:t>
+                  <a:t>Estimate a parametric approximation for the value-action function.</a:t>
                 </a:r>
                 <a:br>
                   <a:rPr lang="en-US" dirty="0"/>
@@ -34914,8 +35875,12 @@
               </a:p>
               <a:p>
                 <a:r>
+                  <a:rPr lang="en-US" b="1" dirty="0"/>
+                  <a:t>Exploration</a:t>
+                </a:r>
+                <a:r>
                   <a:rPr lang="en-US" dirty="0"/>
-                  <a:t>For on-policy control, use a soft approximation to the greedy policy (e.g., </a:t>
+                  <a:t>: For on-policy control, use a soft approximation to the greedy policy (e.g., </a:t>
                 </a:r>
                 <a14:m>
                   <m:oMath xmlns:m="http://schemas.openxmlformats.org/officeDocument/2006/math">
@@ -34935,7 +35900,7 @@
             </p:txBody>
           </p:sp>
         </mc:Choice>
-        <mc:Fallback xmlns="">
+        <mc:Fallback>
           <p:sp>
             <p:nvSpPr>
               <p:cNvPr id="5" name="Content Placeholder 4" descr="Estimate a parametric approximation for value-action function. q hat (s,a,w) is approximately q sub star (s,a). Training data: S sub t,A sub t maps to U sub t. Update: w sub t plus 1, equals w sub t plus alpha [U sub t minus q hat (S sub t,A sub t, w sub t)] gradient of q hat (S sub t,A sub t,w sub t). U sub t can be any approximation:. MC: U sub t equals G sub t. 1-step TD: U sub t equals R sub t plus 1, plus gamma q hat (S sub t, A sub t,w sub t). …. Policy improvement: update policy with greedy action A star sub t plus 1 equals argmax over a, of q hat (S sub t plus 1,a, w sub t). For on-policy control, use a soft approximation to the greedy policy (e.g., epsilon -greedy)">
@@ -34956,7 +35921,7 @@
               <a:blipFill>
                 <a:blip r:embed="rId2"/>
                 <a:stretch>
-                  <a:fillRect l="-522" t="-2168"/>
+                  <a:fillRect l="-522" t="-2168" b="-1913"/>
                 </a:stretch>
               </a:blipFill>
             </p:spPr>
@@ -35471,7 +36436,7 @@
 </p:sld>
 </file>
 
-<file path=ppt/slides/slide33.xml><?xml version="1.0" encoding="utf-8"?>
+<file path=ppt/slides/slide34.xml><?xml version="1.0" encoding="utf-8"?>
 <p:sld xmlns:a="http://schemas.openxmlformats.org/drawingml/2006/main" xmlns:r="http://schemas.openxmlformats.org/officeDocument/2006/relationships" xmlns:p="http://schemas.openxmlformats.org/presentationml/2006/main">
   <p:cSld>
     <p:spTree>
@@ -35516,8 +36481,8 @@
           </a:p>
         </p:txBody>
       </p:sp>
-      <mc:AlternateContent xmlns:mc="http://schemas.openxmlformats.org/markup-compatibility/2006" xmlns:a14="http://schemas.microsoft.com/office/drawing/2010/main">
-        <mc:Choice Requires="a14">
+      <mc:AlternateContent xmlns:mc="http://schemas.openxmlformats.org/markup-compatibility/2006">
+        <mc:Choice xmlns:a14="http://schemas.microsoft.com/office/drawing/2010/main" Requires="a14">
           <p:sp>
             <p:nvSpPr>
               <p:cNvPr id="3" name="Content Placeholder 2" descr="We need to learn to predict q hat (s,a,w) which should have a different value for each action. Geramifard et al. (2013)* suggest to have different state-feature weights for each action. Example: A state described by x and y and three actions, the weight vector would be w equals (w sub intercept, w sub x,action1, w sub y,action1, w sub x,action2, w sub y,action2, w sub x,action3, w sub y,action3). In the prediction/update, only the intercept and the weights belonging to the action are used">
@@ -35541,6 +36506,9 @@
               </a:bodyPr>
               <a:lstStyle/>
               <a:p>
+                <a:pPr marL="0" indent="0">
+                  <a:buNone/>
+                </a:pPr>
                 <a:r>
                   <a:rPr lang="en-US" dirty="0"/>
                   <a:t>We need to learn to predict </a:t>
@@ -35614,13 +36582,22 @@
                 </a:r>
               </a:p>
               <a:p>
+                <a:pPr marL="0" indent="0">
+                  <a:buNone/>
+                </a:pPr>
+                <a:endParaRPr lang="en-US" dirty="0"/>
+              </a:p>
+              <a:p>
+                <a:pPr marL="0" indent="0">
+                  <a:buNone/>
+                </a:pPr>
                 <a:r>
                   <a:rPr lang="en-US" dirty="0" err="1"/>
                   <a:t>Geramifard</a:t>
                 </a:r>
                 <a:r>
                   <a:rPr lang="en-US" dirty="0"/>
-                  <a:t> et al. (2013)* suggest to have different state-feature weights for each action.</a:t>
+                  <a:t> et al. (2013)* suggest having different state-feature weights for each action.</a:t>
                 </a:r>
               </a:p>
               <a:p>
@@ -35658,7 +36635,7 @@
                 </a14:m>
                 <a:r>
                   <a:rPr lang="en-US" dirty="0"/>
-                  <a:t> and three actions, the weight vector would be</a:t>
+                  <a:t> + 3 actions would use </a:t>
                 </a:r>
                 <a:br>
                   <a:rPr lang="en-US" dirty="0"/>
@@ -36069,13 +37046,13 @@
               <a:p>
                 <a:r>
                   <a:rPr lang="en-US" dirty="0"/>
-                  <a:t>In the prediction/update, only the intercept and the weights belonging to the action are used.</a:t>
+                  <a:t>For prediction/update, only the intercept and the weights belonging to the action are used.</a:t>
                 </a:r>
               </a:p>
             </p:txBody>
           </p:sp>
         </mc:Choice>
-        <mc:Fallback xmlns="">
+        <mc:Fallback>
           <p:sp>
             <p:nvSpPr>
               <p:cNvPr id="3" name="Content Placeholder 2" descr="We need to learn to predict q hat (s,a,w) which should have a different value for each action. Geramifard et al. (2013)* suggest to have different state-feature weights for each action. Example: A state described by x and y and three actions, the weight vector would be w equals (w sub intercept, w sub x,action1, w sub y,action1, w sub x,action2, w sub y,action2, w sub x,action3, w sub y,action3). In the prediction/update, only the intercept and the weights belonging to the action are used">
@@ -36096,7 +37073,7 @@
               <a:blipFill>
                 <a:blip r:embed="rId2"/>
                 <a:stretch>
-                  <a:fillRect l="-812" t="-2296"/>
+                  <a:fillRect l="-928" t="-2296"/>
                 </a:stretch>
               </a:blipFill>
             </p:spPr>
@@ -36179,7 +37156,7 @@
 </p:sld>
 </file>
 
-<file path=ppt/slides/slide34.xml><?xml version="1.0" encoding="utf-8"?>
+<file path=ppt/slides/slide35.xml><?xml version="1.0" encoding="utf-8"?>
 <p:sld xmlns:a="http://schemas.openxmlformats.org/drawingml/2006/main" xmlns:r="http://schemas.openxmlformats.org/officeDocument/2006/relationships" xmlns:p="http://schemas.openxmlformats.org/presentationml/2006/main">
   <p:cSld>
     <p:spTree>
@@ -36427,7 +37404,7 @@
 </p:sld>
 </file>
 
-<file path=ppt/slides/slide35.xml><?xml version="1.0" encoding="utf-8"?>
+<file path=ppt/slides/slide36.xml><?xml version="1.0" encoding="utf-8"?>
 <p:sld xmlns:a="http://schemas.openxmlformats.org/drawingml/2006/main" xmlns:r="http://schemas.openxmlformats.org/officeDocument/2006/relationships" xmlns:p="http://schemas.openxmlformats.org/presentationml/2006/main">
   <p:cSld>
     <p:spTree>
@@ -36472,8 +37449,8 @@
           </a:p>
         </p:txBody>
       </p:sp>
-      <mc:AlternateContent xmlns:mc="http://schemas.openxmlformats.org/markup-compatibility/2006" xmlns:a14="http://schemas.microsoft.com/office/drawing/2010/main">
-        <mc:Choice Requires="a14">
+      <mc:AlternateContent xmlns:mc="http://schemas.openxmlformats.org/markup-compatibility/2006">
+        <mc:Choice xmlns:a14="http://schemas.microsoft.com/office/drawing/2010/main" Requires="a14">
           <p:sp>
             <p:nvSpPr>
               <p:cNvPr id="3" name="Content Placeholder 2" descr="Discounting vs. Average Reward. Discounted rewards (gamma -returns) are used for tabular methods because returns for each state are separately identified and averaged. G sub t equals R sub t plus 1, plus gamma R sub t plus 2, plus gamma squared R sub t plus 3, plus dot dot dot. With approximation, returns are shared (generalized) between states and it is often better to focus on the long-run average reward per time step. r (pi) equals lim over T to infinity, of 1 over T the sum over t equals 1 to T, of R sub t. Differential Returns. It is often helpful to use differences between the immediate rewards and the average reward given policy pi . G sub t equals the sum over k equals 1 to infinity, of (R sub t plus k plus 1, minus r (pi)). This leads to a differential value function">
@@ -36712,11 +37689,11 @@
               <a:p>
                 <a:r>
                   <a:rPr lang="en-US" dirty="0"/>
-                  <a:t>With approximation, returns are shared (generalized) between states and it is often better to focus on the long-run </a:t>
+                  <a:t>With approximation, returns are shared between states and it is often better to focus on the long-run </a:t>
                 </a:r>
                 <a:r>
                   <a:rPr lang="en-US" b="1" dirty="0"/>
-                  <a:t>average reward </a:t>
+                  <a:t>average reward of a policy </a:t>
                 </a:r>
                 <a:r>
                   <a:rPr lang="en-US" dirty="0"/>
@@ -37102,13 +38079,56 @@
               <a:p>
                 <a:r>
                   <a:rPr lang="en-US" dirty="0"/>
-                  <a:t>This leads to a differential value function. </a:t>
+                  <a:t>Subtracting </a:t>
+                </a:r>
+                <a14:m>
+                  <m:oMath xmlns:m="http://schemas.openxmlformats.org/officeDocument/2006/math">
+                    <m:r>
+                      <a:rPr lang="en-US" i="1">
+                        <a:latin typeface="Cambria Math" panose="02040503050406030204" pitchFamily="18" charset="0"/>
+                      </a:rPr>
+                      <m:t>𝑟</m:t>
+                    </m:r>
+                    <m:d>
+                      <m:dPr>
+                        <m:ctrlPr>
+                          <a:rPr lang="en-US" i="1">
+                            <a:latin typeface="Cambria Math" panose="02040503050406030204" pitchFamily="18" charset="0"/>
+                          </a:rPr>
+                        </m:ctrlPr>
+                      </m:dPr>
+                      <m:e>
+                        <m:r>
+                          <a:rPr lang="en-US" i="1">
+                            <a:latin typeface="Cambria Math" panose="02040503050406030204" pitchFamily="18" charset="0"/>
+                          </a:rPr>
+                          <m:t>𝜋</m:t>
+                        </m:r>
+                      </m:e>
+                    </m:d>
+                    <m:r>
+                      <a:rPr lang="en-US" i="1">
+                        <a:latin typeface="Cambria Math" panose="02040503050406030204" pitchFamily="18" charset="0"/>
+                      </a:rPr>
+                      <m:t> </m:t>
+                    </m:r>
+                  </m:oMath>
+                </a14:m>
+                <a:r>
+                  <a:rPr lang="en-US" dirty="0"/>
+                  <a:t>makes sure that the infinite sum does not diverge.</a:t>
+                </a:r>
+              </a:p>
+              <a:p>
+                <a:r>
+                  <a:rPr lang="en-US" dirty="0"/>
+                  <a:t>Differential returns lead to differential value functions. </a:t>
                 </a:r>
               </a:p>
             </p:txBody>
           </p:sp>
         </mc:Choice>
-        <mc:Fallback xmlns="">
+        <mc:Fallback>
           <p:sp>
             <p:nvSpPr>
               <p:cNvPr id="3" name="Content Placeholder 2" descr="Discounting vs. Average Reward. Discounted rewards (gamma -returns) are used for tabular methods because returns for each state are separately identified and averaged. G sub t equals R sub t plus 1, plus gamma R sub t plus 2, plus gamma squared R sub t plus 3, plus dot dot dot. With approximation, returns are shared (generalized) between states and it is often better to focus on the long-run average reward per time step. r (pi) equals lim over T to infinity, of 1 over T the sum over t equals 1 to T, of R sub t. Differential Returns. It is often helpful to use differences between the immediate rewards and the average reward given policy pi . G sub t equals the sum over k equals 1 to infinity, of (R sub t plus k plus 1, minus r (pi)). This leads to a differential value function">
@@ -37148,6 +38168,59 @@
           </p:sp>
         </mc:Fallback>
       </mc:AlternateContent>
+      <p:sp>
+        <p:nvSpPr>
+          <p:cNvPr id="4" name="Speech Bubble: Rectangle with Corners Rounded 3">
+            <a:extLst>
+              <a:ext uri="{FF2B5EF4-FFF2-40B4-BE49-F238E27FC236}">
+                <a16:creationId xmlns:a16="http://schemas.microsoft.com/office/drawing/2014/main" id="{0F6DEFDC-C726-3B0D-3E63-A5F03C0A16E8}"/>
+              </a:ext>
+            </a:extLst>
+          </p:cNvPr>
+          <p:cNvSpPr/>
+          <p:nvPr/>
+        </p:nvSpPr>
+        <p:spPr>
+          <a:xfrm>
+            <a:off x="8833757" y="3102429"/>
+            <a:ext cx="2441122" cy="1110342"/>
+          </a:xfrm>
+          <a:prstGeom prst="wedgeRoundRectCallout">
+            <a:avLst>
+              <a:gd name="adj1" fmla="val -115555"/>
+              <a:gd name="adj2" fmla="val -4167"/>
+              <a:gd name="adj3" fmla="val 16667"/>
+            </a:avLst>
+          </a:prstGeom>
+        </p:spPr>
+        <p:style>
+          <a:lnRef idx="2">
+            <a:schemeClr val="accent1">
+              <a:shade val="15000"/>
+            </a:schemeClr>
+          </a:lnRef>
+          <a:fillRef idx="1">
+            <a:schemeClr val="accent1"/>
+          </a:fillRef>
+          <a:effectRef idx="0">
+            <a:schemeClr val="accent1"/>
+          </a:effectRef>
+          <a:fontRef idx="minor">
+            <a:schemeClr val="lt1"/>
+          </a:fontRef>
+        </p:style>
+        <p:txBody>
+          <a:bodyPr rtlCol="0" anchor="ctr"/>
+          <a:lstStyle/>
+          <a:p>
+            <a:pPr algn="ctr"/>
+            <a:r>
+              <a:rPr lang="en-US" dirty="0"/>
+              <a:t>The average reward  does not depend on the start state.</a:t>
+            </a:r>
+          </a:p>
+        </p:txBody>
+      </p:sp>
     </p:spTree>
     <p:extLst>
       <p:ext uri="{BB962C8B-B14F-4D97-AF65-F5344CB8AC3E}">
@@ -37158,10 +38231,182 @@
   <p:clrMapOvr>
     <a:masterClrMapping/>
   </p:clrMapOvr>
+  <p:timing>
+    <p:tnLst>
+      <p:par>
+        <p:cTn id="1" dur="indefinite" restart="never" nodeType="tmRoot">
+          <p:childTnLst>
+            <p:seq concurrent="1" nextAc="seek">
+              <p:cTn id="2" dur="indefinite" nodeType="mainSeq">
+                <p:childTnLst>
+                  <p:par>
+                    <p:cTn id="3" fill="hold">
+                      <p:stCondLst>
+                        <p:cond delay="indefinite"/>
+                      </p:stCondLst>
+                      <p:childTnLst>
+                        <p:par>
+                          <p:cTn id="4" fill="hold">
+                            <p:stCondLst>
+                              <p:cond delay="0"/>
+                            </p:stCondLst>
+                            <p:childTnLst>
+                              <p:par>
+                                <p:cTn id="5" presetID="1" presetClass="entr" presetSubtype="0" fill="hold" nodeType="clickEffect">
+                                  <p:stCondLst>
+                                    <p:cond delay="0"/>
+                                  </p:stCondLst>
+                                  <p:childTnLst>
+                                    <p:set>
+                                      <p:cBhvr>
+                                        <p:cTn id="6" dur="1" fill="hold">
+                                          <p:stCondLst>
+                                            <p:cond delay="0"/>
+                                          </p:stCondLst>
+                                        </p:cTn>
+                                        <p:tgtEl>
+                                          <p:spTgt spid="3">
+                                            <p:txEl>
+                                              <p:pRg st="5" end="5"/>
+                                            </p:txEl>
+                                          </p:spTgt>
+                                        </p:tgtEl>
+                                        <p:attrNameLst>
+                                          <p:attrName>style.visibility</p:attrName>
+                                        </p:attrNameLst>
+                                      </p:cBhvr>
+                                      <p:to>
+                                        <p:strVal val="visible"/>
+                                      </p:to>
+                                    </p:set>
+                                  </p:childTnLst>
+                                </p:cTn>
+                              </p:par>
+                              <p:par>
+                                <p:cTn id="7" presetID="1" presetClass="entr" presetSubtype="0" fill="hold" nodeType="withEffect">
+                                  <p:stCondLst>
+                                    <p:cond delay="0"/>
+                                  </p:stCondLst>
+                                  <p:childTnLst>
+                                    <p:set>
+                                      <p:cBhvr>
+                                        <p:cTn id="8" dur="1" fill="hold">
+                                          <p:stCondLst>
+                                            <p:cond delay="0"/>
+                                          </p:stCondLst>
+                                        </p:cTn>
+                                        <p:tgtEl>
+                                          <p:spTgt spid="3">
+                                            <p:txEl>
+                                              <p:pRg st="6" end="6"/>
+                                            </p:txEl>
+                                          </p:spTgt>
+                                        </p:tgtEl>
+                                        <p:attrNameLst>
+                                          <p:attrName>style.visibility</p:attrName>
+                                        </p:attrNameLst>
+                                      </p:cBhvr>
+                                      <p:to>
+                                        <p:strVal val="visible"/>
+                                      </p:to>
+                                    </p:set>
+                                  </p:childTnLst>
+                                </p:cTn>
+                              </p:par>
+                              <p:par>
+                                <p:cTn id="9" presetID="1" presetClass="entr" presetSubtype="0" fill="hold" nodeType="withEffect">
+                                  <p:stCondLst>
+                                    <p:cond delay="0"/>
+                                  </p:stCondLst>
+                                  <p:childTnLst>
+                                    <p:set>
+                                      <p:cBhvr>
+                                        <p:cTn id="10" dur="1" fill="hold">
+                                          <p:stCondLst>
+                                            <p:cond delay="0"/>
+                                          </p:stCondLst>
+                                        </p:cTn>
+                                        <p:tgtEl>
+                                          <p:spTgt spid="3">
+                                            <p:txEl>
+                                              <p:pRg st="7" end="7"/>
+                                            </p:txEl>
+                                          </p:spTgt>
+                                        </p:tgtEl>
+                                        <p:attrNameLst>
+                                          <p:attrName>style.visibility</p:attrName>
+                                        </p:attrNameLst>
+                                      </p:cBhvr>
+                                      <p:to>
+                                        <p:strVal val="visible"/>
+                                      </p:to>
+                                    </p:set>
+                                  </p:childTnLst>
+                                </p:cTn>
+                              </p:par>
+                              <p:par>
+                                <p:cTn id="11" presetID="1" presetClass="entr" presetSubtype="0" fill="hold" nodeType="withEffect">
+                                  <p:stCondLst>
+                                    <p:cond delay="0"/>
+                                  </p:stCondLst>
+                                  <p:childTnLst>
+                                    <p:set>
+                                      <p:cBhvr>
+                                        <p:cTn id="12" dur="1" fill="hold">
+                                          <p:stCondLst>
+                                            <p:cond delay="0"/>
+                                          </p:stCondLst>
+                                        </p:cTn>
+                                        <p:tgtEl>
+                                          <p:spTgt spid="3">
+                                            <p:txEl>
+                                              <p:pRg st="8" end="8"/>
+                                            </p:txEl>
+                                          </p:spTgt>
+                                        </p:tgtEl>
+                                        <p:attrNameLst>
+                                          <p:attrName>style.visibility</p:attrName>
+                                        </p:attrNameLst>
+                                      </p:cBhvr>
+                                      <p:to>
+                                        <p:strVal val="visible"/>
+                                      </p:to>
+                                    </p:set>
+                                  </p:childTnLst>
+                                </p:cTn>
+                              </p:par>
+                            </p:childTnLst>
+                          </p:cTn>
+                        </p:par>
+                      </p:childTnLst>
+                    </p:cTn>
+                  </p:par>
+                </p:childTnLst>
+              </p:cTn>
+              <p:prevCondLst>
+                <p:cond evt="onPrev" delay="0">
+                  <p:tgtEl>
+                    <p:sldTgt/>
+                  </p:tgtEl>
+                </p:cond>
+              </p:prevCondLst>
+              <p:nextCondLst>
+                <p:cond evt="onNext" delay="0">
+                  <p:tgtEl>
+                    <p:sldTgt/>
+                  </p:tgtEl>
+                </p:cond>
+              </p:nextCondLst>
+            </p:seq>
+          </p:childTnLst>
+        </p:cTn>
+      </p:par>
+    </p:tnLst>
+  </p:timing>
 </p:sld>
 </file>
 
-<file path=ppt/slides/slide36.xml><?xml version="1.0" encoding="utf-8"?>
+<file path=ppt/slides/slide37.xml><?xml version="1.0" encoding="utf-8"?>
 <p:sld xmlns:a="http://schemas.openxmlformats.org/drawingml/2006/main" xmlns:r="http://schemas.openxmlformats.org/officeDocument/2006/relationships" xmlns:p="http://schemas.openxmlformats.org/presentationml/2006/main">
   <p:cSld>
     <p:bg>
@@ -38702,7 +39947,7 @@
                 </a:pPr>
                 <a:r>
                   <a:rPr lang="en-US" b="1" dirty="0"/>
-                  <a:t>No Generalization</a:t>
+                  <a:t>No generalization</a:t>
                 </a:r>
                 <a:r>
                   <a:rPr lang="en-US" dirty="0"/>
@@ -39139,28 +40384,28 @@
         </p:nvSpPr>
         <p:spPr>
           <a:xfrm>
-            <a:off x="5571688" y="5591264"/>
-            <a:ext cx="3804408" cy="834704"/>
+            <a:off x="5571688" y="5210735"/>
+            <a:ext cx="3804408" cy="1215233"/>
           </a:xfrm>
           <a:prstGeom prst="wedgeRoundRectCallout">
             <a:avLst>
               <a:gd name="adj1" fmla="val -67250"/>
-              <a:gd name="adj2" fmla="val -20917"/>
+              <a:gd name="adj2" fmla="val 13386"/>
               <a:gd name="adj3" fmla="val 16667"/>
             </a:avLst>
           </a:prstGeom>
         </p:spPr>
         <p:style>
           <a:lnRef idx="2">
-            <a:schemeClr val="accent3">
+            <a:schemeClr val="accent2">
               <a:shade val="15000"/>
             </a:schemeClr>
           </a:lnRef>
           <a:fillRef idx="1">
-            <a:schemeClr val="accent3"/>
+            <a:schemeClr val="accent2"/>
           </a:fillRef>
           <a:effectRef idx="0">
-            <a:schemeClr val="accent3"/>
+            <a:schemeClr val="accent2"/>
           </a:effectRef>
           <a:fontRef idx="minor">
             <a:schemeClr val="lt1"/>
@@ -39173,7 +40418,7 @@
             <a:pPr algn="ctr"/>
             <a:r>
               <a:rPr lang="en-US" sz="1600" dirty="0"/>
-              <a:t>This implies that we cannot change individual state values like in tabular methods! </a:t>
+              <a:t>This implies that we cannot change individual state values, as we can in tabular methods! This may be a problem for policy improvement! </a:t>
             </a:r>
           </a:p>
         </p:txBody>
@@ -39899,8 +41144,8 @@
           </a:p>
         </p:txBody>
       </p:sp>
-      <mc:AlternateContent xmlns:mc="http://schemas.openxmlformats.org/markup-compatibility/2006">
-        <mc:Choice xmlns:a14="http://schemas.microsoft.com/office/drawing/2010/main" Requires="a14">
+      <mc:AlternateContent xmlns:mc="http://schemas.openxmlformats.org/markup-compatibility/2006" xmlns:a14="http://schemas.microsoft.com/office/drawing/2010/main">
+        <mc:Choice Requires="a14">
           <p:sp>
             <p:nvSpPr>
               <p:cNvPr id="3" name="Content Placeholder 2" descr="Approach: Use function approximation (supervised learning). We need training data in the form of s maps to u where the target u is a “backed-up value” representing the desired value. Some options for training data S sub t maps to U :. MC: S sub t maps to G sub t. TD(0): S sub t maps to R sub t plus 1, plus gamma v hat (S sub t plus 1,w sub t). DP: S sub t maps to E sub pi [R sub t plus 1, plus gamma v hat (S sub t plus 1,w sub t)]">
@@ -40636,7 +41881,7 @@
             </p:txBody>
           </p:sp>
         </mc:Choice>
-        <mc:Fallback>
+        <mc:Fallback xmlns="">
           <p:sp>
             <p:nvSpPr>
               <p:cNvPr id="3" name="Content Placeholder 2" descr="Approach: Use function approximation (supervised learning). We need training data in the form of s maps to u where the target u is a “backed-up value” representing the desired value. Some options for training data S sub t maps to U :. MC: S sub t maps to G sub t. TD(0): S sub t maps to R sub t plus 1, plus gamma v hat (S sub t plus 1,w sub t). DP: S sub t maps to E sub pi [R sub t plus 1, plus gamma v hat (S sub t plus 1,w sub t)]">
@@ -41152,8 +42397,8 @@
           </p:sp>
         </mc:Fallback>
       </mc:AlternateContent>
-      <mc:AlternateContent xmlns:mc="http://schemas.openxmlformats.org/markup-compatibility/2006" xmlns:a14="http://schemas.microsoft.com/office/drawing/2010/main">
-        <mc:Choice Requires="a14">
+      <mc:AlternateContent xmlns:mc="http://schemas.openxmlformats.org/markup-compatibility/2006">
+        <mc:Choice xmlns:a14="http://schemas.microsoft.com/office/drawing/2010/main" Requires="a14">
           <p:sp>
             <p:nvSpPr>
               <p:cNvPr id="3" name="Content Placeholder 2" descr="Learning algorithm: Update the weights w to reduce the error for v hat (s,w) is approximately v sub pi. Note on generalization: Any change of w will also affect the prediction for other states and thus reduce or increase their error!. Prediction error for state s: the absolute value of v sub pi (s) minus v hat (s,w). To calculate the error over all states we need to define how much we care about each state. We use a state distribution function mu (s) is greater than or equal to 0; the sum over s, of mu (s) equals 1. mu (s) is typically the fraction of time spent in s when following pi . We obtain data by following a policy pi so samples already comes from this distribution. For continuous tasks, mu (s) is a stationary distribution called the on-policy distribution. For episodic tasks a near stationary distribution only exists for ergodic* MDPs with large horizons">
@@ -41178,7 +42423,7 @@
             </p:spPr>
             <p:txBody>
               <a:bodyPr>
-                <a:normAutofit fontScale="55000" lnSpcReduction="20000"/>
+                <a:normAutofit fontScale="70000" lnSpcReduction="20000"/>
               </a:bodyPr>
               <a:lstStyle/>
               <a:p>
@@ -41207,6 +42452,12 @@
                 </a:r>
                 <a14:m>
                   <m:oMath xmlns:m="http://schemas.openxmlformats.org/officeDocument/2006/math">
+                    <m:r>
+                      <a:rPr lang="en-US" b="0" i="0" smtClean="0">
+                        <a:latin typeface="Cambria Math" panose="02040503050406030204" pitchFamily="18" charset="0"/>
+                      </a:rPr>
+                      <m:t>      </m:t>
+                    </m:r>
                     <m:acc>
                       <m:accPr>
                         <m:chr m:val="̂"/>
@@ -41298,43 +42549,11 @@
               <a:p>
                 <a:r>
                   <a:rPr lang="en-US" b="1" dirty="0"/>
-                  <a:t>Note on generalization</a:t>
+                  <a:t>Prediction error </a:t>
                 </a:r>
                 <a:r>
                   <a:rPr lang="en-US" dirty="0"/>
-                  <a:t>: Any change of </a:t>
-                </a:r>
-                <a14:m>
-                  <m:oMath xmlns:m="http://schemas.openxmlformats.org/officeDocument/2006/math">
-                    <m:r>
-                      <a:rPr lang="en-US" b="1" i="1">
-                        <a:latin typeface="Cambria Math" panose="02040503050406030204" pitchFamily="18" charset="0"/>
-                        <a:ea typeface="Cambria Math" panose="02040503050406030204" pitchFamily="18" charset="0"/>
-                      </a:rPr>
-                      <m:t>𝒘</m:t>
-                    </m:r>
-                    <m:r>
-                      <a:rPr lang="en-US" b="1" i="1">
-                        <a:latin typeface="Cambria Math" panose="02040503050406030204" pitchFamily="18" charset="0"/>
-                        <a:ea typeface="Cambria Math" panose="02040503050406030204" pitchFamily="18" charset="0"/>
-                      </a:rPr>
-                      <m:t> </m:t>
-                    </m:r>
-                  </m:oMath>
-                </a14:m>
-                <a:r>
-                  <a:rPr lang="en-US" dirty="0"/>
-                  <a:t>will also affect the prediction for other states and thus reduce or increase their error!</a:t>
-                </a:r>
-              </a:p>
-              <a:p>
-                <a:r>
-                  <a:rPr lang="en-US" b="1" dirty="0"/>
-                  <a:t>Prediction error </a:t>
-                </a:r>
-                <a:r>
-                  <a:rPr lang="en-US" dirty="0"/>
-                  <a:t>for state s:                                                  </a:t>
+                  <a:t>for state s:                                                                                  </a:t>
                 </a:r>
                 <a14:m>
                   <m:oMath xmlns:m="http://schemas.openxmlformats.org/officeDocument/2006/math">
@@ -41609,7 +42828,14 @@
                 </a14:m>
                 <a:r>
                   <a:rPr lang="en-US" dirty="0"/>
-                  <a:t>. We obtain data by following a policy </a:t>
+                  <a:t>. </a:t>
+                </a:r>
+                <a:br>
+                  <a:rPr lang="en-US" dirty="0"/>
+                </a:br>
+                <a:r>
+                  <a:rPr lang="en-US" dirty="0"/>
+                  <a:t>We obtain data by following a policy </a:t>
                 </a:r>
                 <a14:m>
                   <m:oMath xmlns:m="http://schemas.openxmlformats.org/officeDocument/2006/math">
@@ -41690,7 +42916,7 @@
             </p:txBody>
           </p:sp>
         </mc:Choice>
-        <mc:Fallback xmlns="">
+        <mc:Fallback>
           <p:sp>
             <p:nvSpPr>
               <p:cNvPr id="3" name="Content Placeholder 2" descr="Learning algorithm: Update the weights w to reduce the error for v hat (s,w) is approximately v sub pi. Note on generalization: Any change of w will also affect the prediction for other states and thus reduce or increase their error!. Prediction error for state s: the absolute value of v sub pi (s) minus v hat (s,w). To calculate the error over all states we need to define how much we care about each state. We use a state distribution function mu (s) is greater than or equal to 0; the sum over s, of mu (s) equals 1. mu (s) is typically the fraction of time spent in s when following pi . We obtain data by following a policy pi so samples already comes from this distribution. For continuous tasks, mu (s) is a stationary distribution called the on-policy distribution. For episodic tasks a near stationary distribution only exists for ergodic* MDPs with large horizons">
@@ -41715,7 +42941,7 @@
               <a:blipFill>
                 <a:blip r:embed="rId3"/>
                 <a:stretch>
-                  <a:fillRect l="-174" t="-1815" b="-1633"/>
+                  <a:fillRect l="-522" t="-3267" b="-13975"/>
                 </a:stretch>
               </a:blipFill>
             </p:spPr>
@@ -42164,13 +43390,13 @@
         </p:nvSpPr>
         <p:spPr>
           <a:xfrm>
-            <a:off x="9500382" y="4468837"/>
+            <a:off x="9615214" y="4809849"/>
             <a:ext cx="2400886" cy="1176997"/>
           </a:xfrm>
           <a:prstGeom prst="wedgeRoundRectCallout">
             <a:avLst>
-              <a:gd name="adj1" fmla="val -118735"/>
-              <a:gd name="adj2" fmla="val 34611"/>
+              <a:gd name="adj1" fmla="val -121115"/>
+              <a:gd name="adj2" fmla="val -16719"/>
               <a:gd name="adj3" fmla="val 16667"/>
             </a:avLst>
           </a:prstGeom>
@@ -42202,58 +43428,7 @@
             </a:r>
             <a:r>
               <a:rPr lang="en-US" sz="1200" dirty="0"/>
-              <a:t>: Squared errors useful mathematical and statistical properties that make learning and optimization easier and more effective.</a:t>
-            </a:r>
-          </a:p>
-        </p:txBody>
-      </p:sp>
-      <p:sp>
-        <p:nvSpPr>
-          <p:cNvPr id="7" name="TextBox 6">
-            <a:extLst>
-              <a:ext uri="{FF2B5EF4-FFF2-40B4-BE49-F238E27FC236}">
-                <a16:creationId xmlns:a16="http://schemas.microsoft.com/office/drawing/2014/main" id="{4DBB76A8-1014-AF99-CD8E-82278A692321}"/>
-              </a:ext>
-            </a:extLst>
-          </p:cNvPr>
-          <p:cNvSpPr txBox="1"/>
-          <p:nvPr/>
-        </p:nvSpPr>
-        <p:spPr>
-          <a:xfrm>
-            <a:off x="9978705" y="3888297"/>
-            <a:ext cx="1263635" cy="369332"/>
-          </a:xfrm>
-          <a:prstGeom prst="rect">
-            <a:avLst/>
-          </a:prstGeom>
-        </p:spPr>
-        <p:style>
-          <a:lnRef idx="2">
-            <a:schemeClr val="accent2">
-              <a:shade val="15000"/>
-            </a:schemeClr>
-          </a:lnRef>
-          <a:fillRef idx="1">
-            <a:schemeClr val="accent2"/>
-          </a:fillRef>
-          <a:effectRef idx="0">
-            <a:schemeClr val="accent2"/>
-          </a:effectRef>
-          <a:fontRef idx="minor">
-            <a:schemeClr val="lt1"/>
-          </a:fontRef>
-        </p:style>
-        <p:txBody>
-          <a:bodyPr wrap="square" rtlCol="0">
-            <a:spAutoFit/>
-          </a:bodyPr>
-          <a:lstStyle/>
-          <a:p>
-            <a:pPr algn="ctr"/>
-            <a:r>
-              <a:rPr lang="en-US" dirty="0"/>
-              <a:t>See Code</a:t>
+              <a:t>: Squared errors have useful mathematical and statistical properties that make learning and optimization easier and more effective.</a:t>
             </a:r>
           </a:p>
         </p:txBody>
@@ -42402,7 +43577,7 @@
                                         <p:tgtEl>
                                           <p:spTgt spid="3">
                                             <p:txEl>
-                                              <p:pRg st="2" end="2"/>
+                                              <p:pRg st="3" end="3"/>
                                             </p:txEl>
                                           </p:spTgt>
                                         </p:tgtEl>
@@ -42466,26 +43641,39 @@
                                   </p:childTnLst>
                                 </p:cTn>
                               </p:par>
-                            </p:childTnLst>
-                          </p:cTn>
-                        </p:par>
-                      </p:childTnLst>
-                    </p:cTn>
-                  </p:par>
-                  <p:par>
-                    <p:cTn id="19" fill="hold">
-                      <p:stCondLst>
-                        <p:cond delay="indefinite"/>
-                      </p:stCondLst>
-                      <p:childTnLst>
-                        <p:par>
-                          <p:cTn id="20" fill="hold">
-                            <p:stCondLst>
-                              <p:cond delay="0"/>
-                            </p:stCondLst>
-                            <p:childTnLst>
                               <p:par>
-                                <p:cTn id="21" presetID="1" presetClass="entr" presetSubtype="0" fill="hold" grpId="0" nodeType="clickEffect">
+                                <p:cTn id="19" presetID="1" presetClass="entr" presetSubtype="0" fill="hold" grpId="0" nodeType="withEffect">
+                                  <p:stCondLst>
+                                    <p:cond delay="0"/>
+                                  </p:stCondLst>
+                                  <p:childTnLst>
+                                    <p:set>
+                                      <p:cBhvr>
+                                        <p:cTn id="20" dur="1" fill="hold">
+                                          <p:stCondLst>
+                                            <p:cond delay="0"/>
+                                          </p:stCondLst>
+                                        </p:cTn>
+                                        <p:tgtEl>
+                                          <p:spTgt spid="3">
+                                            <p:txEl>
+                                              <p:pRg st="5" end="5"/>
+                                            </p:txEl>
+                                          </p:spTgt>
+                                        </p:tgtEl>
+                                        <p:attrNameLst>
+                                          <p:attrName>style.visibility</p:attrName>
+                                        </p:attrNameLst>
+                                      </p:cBhvr>
+                                      <p:to>
+                                        <p:strVal val="visible"/>
+                                      </p:to>
+                                    </p:set>
+                                  </p:childTnLst>
+                                </p:cTn>
+                              </p:par>
+                              <p:par>
+                                <p:cTn id="21" presetID="1" presetClass="entr" presetSubtype="0" fill="hold" grpId="0" nodeType="withEffect">
                                   <p:stCondLst>
                                     <p:cond delay="0"/>
                                   </p:stCondLst>
@@ -42500,7 +43688,7 @@
                                         <p:tgtEl>
                                           <p:spTgt spid="3">
                                             <p:txEl>
-                                              <p:pRg st="5" end="5"/>
+                                              <p:pRg st="6" end="6"/>
                                             </p:txEl>
                                           </p:spTgt>
                                         </p:tgtEl>
@@ -42529,68 +43717,6 @@
                                           </p:stCondLst>
                                         </p:cTn>
                                         <p:tgtEl>
-                                          <p:spTgt spid="3">
-                                            <p:txEl>
-                                              <p:pRg st="6" end="6"/>
-                                            </p:txEl>
-                                          </p:spTgt>
-                                        </p:tgtEl>
-                                        <p:attrNameLst>
-                                          <p:attrName>style.visibility</p:attrName>
-                                        </p:attrNameLst>
-                                      </p:cBhvr>
-                                      <p:to>
-                                        <p:strVal val="visible"/>
-                                      </p:to>
-                                    </p:set>
-                                  </p:childTnLst>
-                                </p:cTn>
-                              </p:par>
-                              <p:par>
-                                <p:cTn id="25" presetID="1" presetClass="entr" presetSubtype="0" fill="hold" grpId="0" nodeType="withEffect">
-                                  <p:stCondLst>
-                                    <p:cond delay="0"/>
-                                  </p:stCondLst>
-                                  <p:childTnLst>
-                                    <p:set>
-                                      <p:cBhvr>
-                                        <p:cTn id="26" dur="1" fill="hold">
-                                          <p:stCondLst>
-                                            <p:cond delay="0"/>
-                                          </p:stCondLst>
-                                        </p:cTn>
-                                        <p:tgtEl>
-                                          <p:spTgt spid="3">
-                                            <p:txEl>
-                                              <p:pRg st="7" end="7"/>
-                                            </p:txEl>
-                                          </p:spTgt>
-                                        </p:tgtEl>
-                                        <p:attrNameLst>
-                                          <p:attrName>style.visibility</p:attrName>
-                                        </p:attrNameLst>
-                                      </p:cBhvr>
-                                      <p:to>
-                                        <p:strVal val="visible"/>
-                                      </p:to>
-                                    </p:set>
-                                  </p:childTnLst>
-                                </p:cTn>
-                              </p:par>
-                              <p:par>
-                                <p:cTn id="27" presetID="1" presetClass="entr" presetSubtype="0" fill="hold" grpId="0" nodeType="withEffect">
-                                  <p:stCondLst>
-                                    <p:cond delay="0"/>
-                                  </p:stCondLst>
-                                  <p:childTnLst>
-                                    <p:set>
-                                      <p:cBhvr>
-                                        <p:cTn id="28" dur="1" fill="hold">
-                                          <p:stCondLst>
-                                            <p:cond delay="0"/>
-                                          </p:stCondLst>
-                                        </p:cTn>
-                                        <p:tgtEl>
                                           <p:spTgt spid="4"/>
                                         </p:tgtEl>
                                         <p:attrNameLst>
@@ -42611,26 +43737,26 @@
                     </p:cTn>
                   </p:par>
                   <p:par>
-                    <p:cTn id="29" fill="hold">
+                    <p:cTn id="25" fill="hold">
                       <p:stCondLst>
                         <p:cond delay="indefinite"/>
                       </p:stCondLst>
                       <p:childTnLst>
                         <p:par>
-                          <p:cTn id="30" fill="hold">
+                          <p:cTn id="26" fill="hold">
                             <p:stCondLst>
                               <p:cond delay="0"/>
                             </p:stCondLst>
                             <p:childTnLst>
                               <p:par>
-                                <p:cTn id="31" presetID="1" presetClass="entr" presetSubtype="0" fill="hold" grpId="0" nodeType="clickEffect">
+                                <p:cTn id="27" presetID="1" presetClass="entr" presetSubtype="0" fill="hold" grpId="0" nodeType="clickEffect">
                                   <p:stCondLst>
                                     <p:cond delay="0"/>
                                   </p:stCondLst>
                                   <p:childTnLst>
                                     <p:set>
                                       <p:cBhvr>
-                                        <p:cTn id="32" dur="1" fill="hold">
+                                        <p:cTn id="28" dur="1" fill="hold">
                                           <p:stCondLst>
                                             <p:cond delay="0"/>
                                           </p:stCondLst>
@@ -42650,65 +43776,20 @@
                                 </p:cTn>
                               </p:par>
                               <p:par>
-                                <p:cTn id="33" presetID="1" presetClass="entr" presetSubtype="0" fill="hold" grpId="0" nodeType="withEffect">
+                                <p:cTn id="29" presetID="1" presetClass="entr" presetSubtype="0" fill="hold" grpId="0" nodeType="withEffect">
                                   <p:stCondLst>
                                     <p:cond delay="0"/>
                                   </p:stCondLst>
                                   <p:childTnLst>
                                     <p:set>
                                       <p:cBhvr>
-                                        <p:cTn id="34" dur="1" fill="hold">
+                                        <p:cTn id="30" dur="1" fill="hold">
                                           <p:stCondLst>
                                             <p:cond delay="0"/>
                                           </p:stCondLst>
                                         </p:cTn>
                                         <p:tgtEl>
                                           <p:spTgt spid="6"/>
-                                        </p:tgtEl>
-                                        <p:attrNameLst>
-                                          <p:attrName>style.visibility</p:attrName>
-                                        </p:attrNameLst>
-                                      </p:cBhvr>
-                                      <p:to>
-                                        <p:strVal val="visible"/>
-                                      </p:to>
-                                    </p:set>
-                                  </p:childTnLst>
-                                </p:cTn>
-                              </p:par>
-                            </p:childTnLst>
-                          </p:cTn>
-                        </p:par>
-                      </p:childTnLst>
-                    </p:cTn>
-                  </p:par>
-                  <p:par>
-                    <p:cTn id="35" fill="hold">
-                      <p:stCondLst>
-                        <p:cond delay="indefinite"/>
-                      </p:stCondLst>
-                      <p:childTnLst>
-                        <p:par>
-                          <p:cTn id="36" fill="hold">
-                            <p:stCondLst>
-                              <p:cond delay="0"/>
-                            </p:stCondLst>
-                            <p:childTnLst>
-                              <p:par>
-                                <p:cTn id="37" presetID="1" presetClass="entr" presetSubtype="0" fill="hold" grpId="0" nodeType="clickEffect">
-                                  <p:stCondLst>
-                                    <p:cond delay="0"/>
-                                  </p:stCondLst>
-                                  <p:childTnLst>
-                                    <p:set>
-                                      <p:cBhvr>
-                                        <p:cTn id="38" dur="1" fill="hold">
-                                          <p:stCondLst>
-                                            <p:cond delay="0"/>
-                                          </p:stCondLst>
-                                        </p:cTn>
-                                        <p:tgtEl>
-                                          <p:spTgt spid="7"/>
                                         </p:tgtEl>
                                         <p:attrNameLst>
                                           <p:attrName>style.visibility</p:attrName>
@@ -42753,7 +43834,6 @@
       <p:bldP spid="5" grpId="0" animBg="1"/>
       <p:bldP spid="4" grpId="0"/>
       <p:bldP spid="6" grpId="0" animBg="1"/>
-      <p:bldP spid="7" grpId="0" animBg="1"/>
     </p:bldLst>
   </p:timing>
 </p:sld>
@@ -42804,8 +43884,8 @@
           </a:p>
         </p:txBody>
       </p:sp>
-      <mc:AlternateContent xmlns:mc="http://schemas.openxmlformats.org/markup-compatibility/2006" xmlns:a14="http://schemas.microsoft.com/office/drawing/2010/main">
-        <mc:Choice Requires="a14">
+      <mc:AlternateContent xmlns:mc="http://schemas.openxmlformats.org/markup-compatibility/2006">
+        <mc:Choice xmlns:a14="http://schemas.microsoft.com/office/drawing/2010/main" Requires="a14">
           <p:sp>
             <p:nvSpPr>
               <p:cNvPr id="3" name="Content Placeholder 2" descr="Find the parameter vector w star that leads to the smallest error (the global optimum): VE bar (w star) is less than or equal to VE bar (w) for all w. Local optima: Often, we will only find a local optimum where the equation above only holds for w in a small neighborhood around w star . Note: Policies converge typically way before the value function converges so finding the global optimal value function may not be necessary. Convergence: Convergence to the global or a local optimum depends on the used approximation and the learning method. We will discuss this for each method. Bias: Different approximation methods have different bias (are not able to represent the true value function)">
@@ -43089,7 +44169,7 @@
                 </a:r>
                 <a:r>
                   <a:rPr lang="en-US" dirty="0"/>
-                  <a:t>: Policies converge typically way before the value function converges so finding the global optimal value function may not be necessary.</a:t>
+                  <a:t>: Policies converge typically way before the value function converges, so finding the global optimal value function may not be necessary.</a:t>
                 </a:r>
               </a:p>
               <a:p>
@@ -43112,7 +44192,7 @@
                 </a:r>
                 <a:r>
                   <a:rPr lang="en-US" dirty="0"/>
-                  <a:t>: Different approximation methods have different bias (are not able to represent the true value function).</a:t>
+                  <a:t>: Different approximation methods have different bias (=are not able to represent the true value function).</a:t>
                 </a:r>
                 <a:br>
                   <a:rPr lang="en-US" dirty="0"/>
@@ -43122,7 +44202,7 @@
             </p:txBody>
           </p:sp>
         </mc:Choice>
-        <mc:Fallback xmlns="">
+        <mc:Fallback>
           <p:sp>
             <p:nvSpPr>
               <p:cNvPr id="3" name="Content Placeholder 2" descr="Find the parameter vector w star that leads to the smallest error (the global optimum): VE bar (w star) is less than or equal to VE bar (w) for all w. Local optima: Often, we will only find a local optimum where the equation above only holds for w in a small neighborhood around w star . Note: Policies converge typically way before the value function converges so finding the global optimal value function may not be necessary. Convergence: Convergence to the global or a local optimum depends on the used approximation and the learning method. We will discuss this for each method. Bias: Different approximation methods have different bias (are not able to represent the true value function)">
@@ -43143,7 +44223,7 @@
               <a:blipFill>
                 <a:blip r:embed="rId2"/>
                 <a:stretch>
-                  <a:fillRect l="-696" t="-2551" r="-580"/>
+                  <a:fillRect l="-696" t="-2551" r="-1101"/>
                 </a:stretch>
               </a:blipFill>
             </p:spPr>

--- a/slides/Lecture_Chapter09.pptx
+++ b/slides/Lecture_Chapter09.pptx
@@ -302,7 +302,7 @@
           <a:p>
             <a:fld id="{2987FC57-34F3-4A88-970B-010E7C0EC943}" type="datetimeFigureOut">
               <a:rPr lang="en-US" smtClean="0"/>
-              <a:t>10/20/2026</a:t>
+              <a:t>10/21/2026</a:t>
             </a:fld>
             <a:endParaRPr lang="en-US"/>
           </a:p>
@@ -884,7 +884,7 @@
           <a:p>
             <a:fld id="{3E22BF2E-04DA-469E-97C5-BB68A0368813}" type="datetimeFigureOut">
               <a:rPr lang="en-US" smtClean="0"/>
-              <a:t>10/20/2026</a:t>
+              <a:t>10/21/2026</a:t>
             </a:fld>
             <a:endParaRPr lang="en-US"/>
           </a:p>
@@ -1082,7 +1082,7 @@
           <a:p>
             <a:fld id="{3E22BF2E-04DA-469E-97C5-BB68A0368813}" type="datetimeFigureOut">
               <a:rPr lang="en-US" smtClean="0"/>
-              <a:t>10/20/2026</a:t>
+              <a:t>10/21/2026</a:t>
             </a:fld>
             <a:endParaRPr lang="en-US"/>
           </a:p>
@@ -1290,7 +1290,7 @@
           <a:p>
             <a:fld id="{3E22BF2E-04DA-469E-97C5-BB68A0368813}" type="datetimeFigureOut">
               <a:rPr lang="en-US" smtClean="0"/>
-              <a:t>10/20/2026</a:t>
+              <a:t>10/21/2026</a:t>
             </a:fld>
             <a:endParaRPr lang="en-US"/>
           </a:p>
@@ -1498,7 +1498,7 @@
           <a:p>
             <a:fld id="{3E22BF2E-04DA-469E-97C5-BB68A0368813}" type="datetimeFigureOut">
               <a:rPr lang="en-US" smtClean="0"/>
-              <a:t>10/20/2026</a:t>
+              <a:t>10/21/2026</a:t>
             </a:fld>
             <a:endParaRPr lang="en-US"/>
           </a:p>
@@ -1773,7 +1773,7 @@
           <a:p>
             <a:fld id="{3E22BF2E-04DA-469E-97C5-BB68A0368813}" type="datetimeFigureOut">
               <a:rPr lang="en-US" smtClean="0"/>
-              <a:t>10/20/2026</a:t>
+              <a:t>10/21/2026</a:t>
             </a:fld>
             <a:endParaRPr lang="en-US"/>
           </a:p>
@@ -2038,7 +2038,7 @@
           <a:p>
             <a:fld id="{3E22BF2E-04DA-469E-97C5-BB68A0368813}" type="datetimeFigureOut">
               <a:rPr lang="en-US" smtClean="0"/>
-              <a:t>10/20/2026</a:t>
+              <a:t>10/21/2026</a:t>
             </a:fld>
             <a:endParaRPr lang="en-US"/>
           </a:p>
@@ -2450,7 +2450,7 @@
           <a:p>
             <a:fld id="{3E22BF2E-04DA-469E-97C5-BB68A0368813}" type="datetimeFigureOut">
               <a:rPr lang="en-US" smtClean="0"/>
-              <a:t>10/20/2026</a:t>
+              <a:t>10/21/2026</a:t>
             </a:fld>
             <a:endParaRPr lang="en-US"/>
           </a:p>
@@ -2591,7 +2591,7 @@
           <a:p>
             <a:fld id="{3E22BF2E-04DA-469E-97C5-BB68A0368813}" type="datetimeFigureOut">
               <a:rPr lang="en-US" smtClean="0"/>
-              <a:t>10/20/2026</a:t>
+              <a:t>10/21/2026</a:t>
             </a:fld>
             <a:endParaRPr lang="en-US"/>
           </a:p>
@@ -2704,7 +2704,7 @@
           <a:p>
             <a:fld id="{3E22BF2E-04DA-469E-97C5-BB68A0368813}" type="datetimeFigureOut">
               <a:rPr lang="en-US" smtClean="0"/>
-              <a:t>10/20/2026</a:t>
+              <a:t>10/21/2026</a:t>
             </a:fld>
             <a:endParaRPr lang="en-US"/>
           </a:p>
@@ -3015,7 +3015,7 @@
           <a:p>
             <a:fld id="{3E22BF2E-04DA-469E-97C5-BB68A0368813}" type="datetimeFigureOut">
               <a:rPr lang="en-US" smtClean="0"/>
-              <a:t>10/20/2026</a:t>
+              <a:t>10/21/2026</a:t>
             </a:fld>
             <a:endParaRPr lang="en-US"/>
           </a:p>
@@ -3303,7 +3303,7 @@
           <a:p>
             <a:fld id="{3E22BF2E-04DA-469E-97C5-BB68A0368813}" type="datetimeFigureOut">
               <a:rPr lang="en-US" smtClean="0"/>
-              <a:t>10/20/2026</a:t>
+              <a:t>10/21/2026</a:t>
             </a:fld>
             <a:endParaRPr lang="en-US"/>
           </a:p>
@@ -3544,7 +3544,7 @@
           <a:p>
             <a:fld id="{3E22BF2E-04DA-469E-97C5-BB68A0368813}" type="datetimeFigureOut">
               <a:rPr lang="en-US" smtClean="0"/>
-              <a:t>10/20/2026</a:t>
+              <a:t>10/21/2026</a:t>
             </a:fld>
             <a:endParaRPr lang="en-US"/>
           </a:p>
@@ -4808,8 +4808,8 @@
           </a:p>
         </p:txBody>
       </p:sp>
-      <mc:AlternateContent xmlns:mc="http://schemas.openxmlformats.org/markup-compatibility/2006">
-        <mc:Choice xmlns:a14="http://schemas.microsoft.com/office/drawing/2010/main" Requires="a14">
+      <mc:AlternateContent xmlns:mc="http://schemas.openxmlformats.org/markup-compatibility/2006" xmlns:a14="http://schemas.microsoft.com/office/drawing/2010/main">
+        <mc:Choice Requires="a14">
           <p:sp>
             <p:nvSpPr>
               <p:cNvPr id="3" name="Content Placeholder 2" descr="Setup. For a given policy pi, learn an approximation v hat (s,w) is approximately v sub pi. We use w is defined as (w sub 1,w sub 2, dot dot dot,w sub d) transpose. C hoose v hat (s,w) as a differentiable function of w for all s in S. Learning. We sample following pi, and observe at each discrete time step t equals 0, 1, 2, 3, dot dot dot a new example S sub t maps to v sub pi (S sub t) . Update w to reduce VE bar . I.e., make v hat (s,w) more similar to v sub pi . Note that the samples automatically follow the distribution mu for pi">
@@ -5575,7 +5575,7 @@
             </p:txBody>
           </p:sp>
         </mc:Choice>
-        <mc:Fallback>
+        <mc:Fallback xmlns="">
           <p:sp>
             <p:nvSpPr>
               <p:cNvPr id="3" name="Content Placeholder 2" descr="Setup. For a given policy pi, learn an approximation v hat (s,w) is approximately v sub pi. We use w is defined as (w sub 1,w sub 2, dot dot dot,w sub d) transpose. C hoose v hat (s,w) as a differentiable function of w for all s in S. Learning. We sample following pi, and observe at each discrete time step t equals 0, 1, 2, 3, dot dot dot a new example S sub t maps to v sub pi (S sub t) . Update w to reduce VE bar . I.e., make v hat (s,w) more similar to v sub pi . Note that the samples automatically follow the distribution mu for pi">
@@ -6267,8 +6267,8 @@
           </a:p>
         </p:txBody>
       </p:sp>
-      <mc:AlternateContent xmlns:mc="http://schemas.openxmlformats.org/markup-compatibility/2006">
-        <mc:Choice xmlns:a14="http://schemas.microsoft.com/office/drawing/2010/main" Requires="a14">
+      <mc:AlternateContent xmlns:mc="http://schemas.openxmlformats.org/markup-compatibility/2006" xmlns:a14="http://schemas.microsoft.com/office/drawing/2010/main">
+        <mc:Choice Requires="a14">
           <p:sp>
             <p:nvSpPr>
               <p:cNvPr id="3" name="Content Placeholder 2" descr="Minimize VE bar is defined as the sum over s in S, of mu (s) [v sub pi minus v hat (s,w)] squared by moving w in the direction gradient of VE bar . Definition of the gradient: gradient of f (w) equals (the fraction partial f (w), over partial w sub 1, end fraction, the fraction partial f (w), over partial w sub 2, end fraction, dot dot dot, the fraction partial f (w), over partial w sub d, end fraction) transpose. Update for one observation: S sub t maps to v sub pi (S sub t). w sub t plus 1, equals w sub t minus 1 over 2 alpha gradient of [v sub pi (S sub t) minus v hat (S sub t,w sub t)] squared equals w sub t plus alpha [v sub pi (S sub t) minus v hat (S sub t,w sub t)] gradient of v hat (S sub t,w sub t). Important property of SGD: Only depends on the gradient of the loss function. Does not need the gradient of the unknown value function!. Stochastic: because update is on a single (randomly chosen) example for S sub t . This is why there is no sum in the update. Step size alpha : Since we update towards a sampled value and updates of w for one state will change the value for other states as well, we use many small updates (small value of alpha)">
@@ -7873,7 +7873,7 @@
             </p:txBody>
           </p:sp>
         </mc:Choice>
-        <mc:Fallback>
+        <mc:Fallback xmlns="">
           <p:sp>
             <p:nvSpPr>
               <p:cNvPr id="3" name="Content Placeholder 2" descr="Minimize VE bar is defined as the sum over s in S, of mu (s) [v sub pi minus v hat (s,w)] squared by moving w in the direction gradient of VE bar . Definition of the gradient: gradient of f (w) equals (the fraction partial f (w), over partial w sub 1, end fraction, the fraction partial f (w), over partial w sub 2, end fraction, dot dot dot, the fraction partial f (w), over partial w sub d, end fraction) transpose. Update for one observation: S sub t maps to v sub pi (S sub t). w sub t plus 1, equals w sub t minus 1 over 2 alpha gradient of [v sub pi (S sub t) minus v hat (S sub t,w sub t)] squared equals w sub t plus alpha [v sub pi (S sub t) minus v hat (S sub t,w sub t)] gradient of v hat (S sub t,w sub t). Important property of SGD: Only depends on the gradient of the loss function. Does not need the gradient of the unknown value function!. Stochastic: because update is on a single (randomly chosen) example for S sub t . This is why there is no sum in the update. Step size alpha : Since we update towards a sampled value and updates of w for one state will change the value for other states as well, we use many small updates (small value of alpha)">
@@ -7917,8 +7917,8 @@
           </p:sp>
         </mc:Fallback>
       </mc:AlternateContent>
-      <mc:AlternateContent xmlns:mc="http://schemas.openxmlformats.org/markup-compatibility/2006">
-        <mc:Choice xmlns:a14="http://schemas.microsoft.com/office/drawing/2010/main" Requires="a14">
+      <mc:AlternateContent xmlns:mc="http://schemas.openxmlformats.org/markup-compatibility/2006" xmlns:a14="http://schemas.microsoft.com/office/drawing/2010/main">
+        <mc:Choice Requires="a14">
           <p:sp>
             <p:nvSpPr>
               <p:cNvPr id="4" name="Speech Bubble: Rectangle with Corners Rounded 3" descr="Applying the chain rule* shows that we only need the gradient of the approximation function. Notes: the sign changes and 1 over 2 was chosen for convenience">
@@ -8017,7 +8017,7 @@
             </p:txBody>
           </p:sp>
         </mc:Choice>
-        <mc:Fallback>
+        <mc:Fallback xmlns="">
           <p:sp>
             <p:nvSpPr>
               <p:cNvPr id="4" name="Speech Bubble: Rectangle with Corners Rounded 3" descr="Applying the chain rule* shows that we only need the gradient of the approximation function. Notes: the sign changes and 1 over 2 was chosen for convenience">
@@ -8362,8 +8362,8 @@
             </p:sp>
           </mc:Fallback>
         </mc:AlternateContent>
-        <mc:AlternateContent xmlns:mc="http://schemas.openxmlformats.org/markup-compatibility/2006">
-          <mc:Choice xmlns:a14="http://schemas.microsoft.com/office/drawing/2010/main" Requires="a14">
+        <mc:AlternateContent xmlns:mc="http://schemas.openxmlformats.org/markup-compatibility/2006" xmlns:a14="http://schemas.microsoft.com/office/drawing/2010/main">
+          <mc:Choice Requires="a14">
             <p:sp>
               <p:nvSpPr>
                 <p:cNvPr id="11" name="TextBox 10" descr="Equation: f">
@@ -8434,7 +8434,7 @@
               </p:txBody>
             </p:sp>
           </mc:Choice>
-          <mc:Fallback>
+          <mc:Fallback xmlns="">
             <p:sp>
               <p:nvSpPr>
                 <p:cNvPr id="11" name="TextBox 10" descr="Equation: f">
@@ -8667,8 +8667,8 @@
           </p:style>
         </p:cxnSp>
       </p:grpSp>
-      <mc:AlternateContent xmlns:mc="http://schemas.openxmlformats.org/markup-compatibility/2006">
-        <mc:Choice xmlns:a14="http://schemas.microsoft.com/office/drawing/2010/main" Requires="a14">
+      <mc:AlternateContent xmlns:mc="http://schemas.openxmlformats.org/markup-compatibility/2006" xmlns:a14="http://schemas.microsoft.com/office/drawing/2010/main">
+        <mc:Choice Requires="a14">
           <p:sp>
             <p:nvSpPr>
               <p:cNvPr id="16" name="TextBox 15" descr="*Chain rule (of differentiation). h(x) equals z(y(x)). is equivalent to. h prime(x) equals z prime(y(x)) y prime(x)">
@@ -8893,7 +8893,6 @@
                 <a:endParaRPr lang="en-US" sz="1400" dirty="0"/>
               </a:p>
               <a:p>
-                <a:pPr/>
                 <a:br>
                   <a:rPr lang="en-US" sz="1400" dirty="0"/>
                 </a:br>
@@ -8933,7 +8932,7 @@
             </p:txBody>
           </p:sp>
         </mc:Choice>
-        <mc:Fallback>
+        <mc:Fallback xmlns="">
           <p:sp>
             <p:nvSpPr>
               <p:cNvPr id="16" name="TextBox 15" descr="*Chain rule (of differentiation). h(x) equals z(y(x)). is equivalent to. h prime(x) equals z prime(y(x)) y prime(x)">
@@ -9500,8 +9499,8 @@
           </a:p>
         </p:txBody>
       </p:sp>
-      <mc:AlternateContent xmlns:mc="http://schemas.openxmlformats.org/markup-compatibility/2006">
-        <mc:Choice xmlns:a14="http://schemas.microsoft.com/office/drawing/2010/main" Requires="a14">
+      <mc:AlternateContent xmlns:mc="http://schemas.openxmlformats.org/markup-compatibility/2006" xmlns:a14="http://schemas.microsoft.com/office/drawing/2010/main">
+        <mc:Choice Requires="a14">
           <p:sp>
             <p:nvSpPr>
               <p:cNvPr id="3" name="Content Placeholder 2" descr="SGD converges to a local optimum if the stochastic approximation criterion (Robbins–Monro conditions) is met: the sum over n equals 1 to infinity, of alpha sub n (a) equals infinity and the sum over n equals 1 to infinity, of alpha sub n, to the power 2, (a) is less than or equal to infinity. alpha sub n (a) … step size used after the n -th selection of action a. Popular choices for alpha :. Tabular MC uses alpha sub n (a) equals 1 over n which leads to sample averaging. Not appropriate for TD or approximation!. Constant alpha equals 1 divided by tau means a tabular estimate would approach to the mean target after tau experiences + keeps learning. How to choose alpha in practice. Typical values: 0.1, 0.01, 0.001. If learning diverges: reduce alpha by a factor of 10. If learning is too slow: increase alpha bey a factor of 2 to 5. Plot learning curve">
@@ -10116,7 +10115,7 @@
             </p:txBody>
           </p:sp>
         </mc:Choice>
-        <mc:Fallback>
+        <mc:Fallback xmlns="">
           <p:sp>
             <p:nvSpPr>
               <p:cNvPr id="3" name="Content Placeholder 2" descr="SGD converges to a local optimum if the stochastic approximation criterion (Robbins–Monro conditions) is met: the sum over n equals 1 to infinity, of alpha sub n (a) equals infinity and the sum over n equals 1 to infinity, of alpha sub n, to the power 2, (a) is less than or equal to infinity. alpha sub n (a) … step size used after the n -th selection of action a. Popular choices for alpha :. Tabular MC uses alpha sub n (a) equals 1 over n which leads to sample averaging. Not appropriate for TD or approximation!. Constant alpha equals 1 divided by tau means a tabular estimate would approach to the mean target after tau experiences + keeps learning. How to choose alpha in practice. Typical values: 0.1, 0.01, 0.001. If learning diverges: reduce alpha by a factor of 10. If learning is too slow: increase alpha bey a factor of 2 to 5. Plot learning curve">
@@ -12562,8 +12561,8 @@
           </a:p>
         </p:txBody>
       </p:sp>
-      <mc:AlternateContent xmlns:mc="http://schemas.openxmlformats.org/markup-compatibility/2006">
-        <mc:Choice xmlns:a14="http://schemas.microsoft.com/office/drawing/2010/main" Requires="a14">
+      <mc:AlternateContent xmlns:mc="http://schemas.openxmlformats.org/markup-compatibility/2006" xmlns:a14="http://schemas.microsoft.com/office/drawing/2010/main">
+        <mc:Choice Requires="a14">
           <p:sp>
             <p:nvSpPr>
               <p:cNvPr id="3" name="Content Placeholder 2" descr="Issue:. To get the true gradient requires, the target has to be unbiased, fixed and only the prediction can depend on w . w sub t plus 1, equals w sub t plus alpha [U sub t minus v hat (S sub t,w sub t)] gradient of v hat (S sub t,w sub t). Gradient Monte Carlo Algorithm: Works since U sub t equals G sub t is the result of only sampled rewards which are independent of w . Bootstrapping methods (e.g., n -step TD): break this requirement because U sub t depends on the bootstrap estimate v hat (S sub t plus n,w) and thus the current value of w . This does not result in a true gradient, and convergence cannot be guaranteed. Semi-Gradient Methods:. If we use the approach with a biased target estimate, then this is called a semi-gradient method. Advantages:. Are usually faster learners. Often still converge (especially for linear approximators). TD can learn online">
@@ -13311,7 +13310,7 @@
             </p:txBody>
           </p:sp>
         </mc:Choice>
-        <mc:Fallback>
+        <mc:Fallback xmlns="">
           <p:sp>
             <p:nvSpPr>
               <p:cNvPr id="3" name="Content Placeholder 2" descr="Issue:. To get the true gradient requires, the target has to be unbiased, fixed and only the prediction can depend on w . w sub t plus 1, equals w sub t plus alpha [U sub t minus v hat (S sub t,w sub t)] gradient of v hat (S sub t,w sub t). Gradient Monte Carlo Algorithm: Works since U sub t equals G sub t is the result of only sampled rewards which are independent of w . Bootstrapping methods (e.g., n -step TD): break this requirement because U sub t depends on the bootstrap estimate v hat (S sub t plus n,w) and thus the current value of w . This does not result in a true gradient, and convergence cannot be guaranteed. Semi-Gradient Methods:. If we use the approach with a biased target estimate, then this is called a semi-gradient method. Advantages:. Are usually faster learners. Often still converge (especially for linear approximators). TD can learn online">
@@ -23509,8 +23508,8 @@
           </a:p>
         </p:txBody>
       </p:sp>
-      <mc:AlternateContent xmlns:mc="http://schemas.openxmlformats.org/markup-compatibility/2006">
-        <mc:Choice xmlns:a14="http://schemas.microsoft.com/office/drawing/2010/main" Requires="a14">
+      <mc:AlternateContent xmlns:mc="http://schemas.openxmlformats.org/markup-compatibility/2006" xmlns:a14="http://schemas.microsoft.com/office/drawing/2010/main">
+        <mc:Choice Requires="a14">
           <p:sp>
             <p:nvSpPr>
               <p:cNvPr id="3" name="Content Placeholder 2" descr="Partition the space using several overlapping grids. Represent the state by the “active” tiles in the grids. Similar states will share active tiles. Leads to a local generalization. alpha is typically chosen to be small since a change will also affect neighboring states. Popular: alpha equals the fraction 1, over 10 #tilings, end fraction">
@@ -23681,7 +23680,7 @@
             </p:txBody>
           </p:sp>
         </mc:Choice>
-        <mc:Fallback>
+        <mc:Fallback xmlns="">
           <p:sp>
             <p:nvSpPr>
               <p:cNvPr id="3" name="Content Placeholder 2" descr="Partition the space using several overlapping grids. Represent the state by the “active” tiles in the grids. Similar states will share active tiles. Leads to a local generalization. alpha is typically chosen to be small since a change will also affect neighboring states. Popular: alpha equals the fraction 1, over 10 #tilings, end fraction">
@@ -25265,8 +25264,8 @@
           </a:p>
         </p:txBody>
       </p:sp>
-      <mc:AlternateContent xmlns:mc="http://schemas.openxmlformats.org/markup-compatibility/2006">
-        <mc:Choice xmlns:a14="http://schemas.microsoft.com/office/drawing/2010/main" Requires="a14">
+      <mc:AlternateContent xmlns:mc="http://schemas.openxmlformats.org/markup-compatibility/2006" xmlns:a14="http://schemas.microsoft.com/office/drawing/2010/main">
+        <mc:Choice Requires="a14">
           <p:sp>
             <p:nvSpPr>
               <p:cNvPr id="3" name="Content Placeholder 2">
@@ -25555,7 +25554,7 @@
             </p:txBody>
           </p:sp>
         </mc:Choice>
-        <mc:Fallback>
+        <mc:Fallback xmlns="">
           <p:sp>
             <p:nvSpPr>
               <p:cNvPr id="3" name="Content Placeholder 2">
@@ -25649,8 +25648,8 @@
             </a:prstGeom>
           </p:spPr>
         </p:pic>
-        <mc:AlternateContent xmlns:mc="http://schemas.openxmlformats.org/markup-compatibility/2006">
-          <mc:Choice xmlns:a14="http://schemas.microsoft.com/office/drawing/2010/main" Requires="a14">
+        <mc:AlternateContent xmlns:mc="http://schemas.openxmlformats.org/markup-compatibility/2006" xmlns:a14="http://schemas.microsoft.com/office/drawing/2010/main">
+          <mc:Choice Requires="a14">
             <p:sp>
               <p:nvSpPr>
                 <p:cNvPr id="6" name="TextBox 5">
@@ -26059,7 +26058,7 @@
               </p:txBody>
             </p:sp>
           </mc:Choice>
-          <mc:Fallback>
+          <mc:Fallback xmlns="">
             <p:sp>
               <p:nvSpPr>
                 <p:cNvPr id="6" name="TextBox 5">
@@ -34628,8 +34627,8 @@
           </a:p>
         </p:txBody>
       </p:sp>
-      <mc:AlternateContent xmlns:mc="http://schemas.openxmlformats.org/markup-compatibility/2006">
-        <mc:Choice xmlns:a14="http://schemas.microsoft.com/office/drawing/2010/main" Requires="a14">
+      <mc:AlternateContent xmlns:mc="http://schemas.openxmlformats.org/markup-compatibility/2006" xmlns:a14="http://schemas.microsoft.com/office/drawing/2010/main">
+        <mc:Choice Requires="a14">
           <p:sp>
             <p:nvSpPr>
               <p:cNvPr id="5" name="Content Placeholder 4" descr="Estimate a parametric approximation for value-action function. q hat (s,a,w) is approximately q sub star (s,a). Training data: S sub t,A sub t maps to U sub t. Update: w sub t plus 1, equals w sub t plus alpha [U sub t minus q hat (S sub t,A sub t, w sub t)] gradient of q hat (S sub t,A sub t,w sub t). U sub t can be any approximation:. MC: U sub t equals G sub t. 1-step TD: U sub t equals R sub t plus 1, plus gamma q hat (S sub t, A sub t,w sub t). …. Policy improvement: update policy with greedy action A star sub t plus 1 equals argmax over a, of q hat (S sub t plus 1,a, w sub t). For on-policy control, use a soft approximation to the greedy policy (e.g., epsilon -greedy)">
@@ -35900,7 +35899,7 @@
             </p:txBody>
           </p:sp>
         </mc:Choice>
-        <mc:Fallback>
+        <mc:Fallback xmlns="">
           <p:sp>
             <p:nvSpPr>
               <p:cNvPr id="5" name="Content Placeholder 4" descr="Estimate a parametric approximation for value-action function. q hat (s,a,w) is approximately q sub star (s,a). Training data: S sub t,A sub t maps to U sub t. Update: w sub t plus 1, equals w sub t plus alpha [U sub t minus q hat (S sub t,A sub t, w sub t)] gradient of q hat (S sub t,A sub t,w sub t). U sub t can be any approximation:. MC: U sub t equals G sub t. 1-step TD: U sub t equals R sub t plus 1, plus gamma q hat (S sub t, A sub t,w sub t). …. Policy improvement: update policy with greedy action A star sub t plus 1 equals argmax over a, of q hat (S sub t plus 1,a, w sub t). For on-policy control, use a soft approximation to the greedy policy (e.g., epsilon -greedy)">
@@ -36481,8 +36480,8 @@
           </a:p>
         </p:txBody>
       </p:sp>
-      <mc:AlternateContent xmlns:mc="http://schemas.openxmlformats.org/markup-compatibility/2006">
-        <mc:Choice xmlns:a14="http://schemas.microsoft.com/office/drawing/2010/main" Requires="a14">
+      <mc:AlternateContent xmlns:mc="http://schemas.openxmlformats.org/markup-compatibility/2006" xmlns:a14="http://schemas.microsoft.com/office/drawing/2010/main">
+        <mc:Choice Requires="a14">
           <p:sp>
             <p:nvSpPr>
               <p:cNvPr id="3" name="Content Placeholder 2" descr="We need to learn to predict q hat (s,a,w) which should have a different value for each action. Geramifard et al. (2013)* suggest to have different state-feature weights for each action. Example: A state described by x and y and three actions, the weight vector would be w equals (w sub intercept, w sub x,action1, w sub y,action1, w sub x,action2, w sub y,action2, w sub x,action3, w sub y,action3). In the prediction/update, only the intercept and the weights belonging to the action are used">
@@ -37052,7 +37051,7 @@
             </p:txBody>
           </p:sp>
         </mc:Choice>
-        <mc:Fallback>
+        <mc:Fallback xmlns="">
           <p:sp>
             <p:nvSpPr>
               <p:cNvPr id="3" name="Content Placeholder 2" descr="We need to learn to predict q hat (s,a,w) which should have a different value for each action. Geramifard et al. (2013)* suggest to have different state-feature weights for each action. Example: A state described by x and y and three actions, the weight vector would be w equals (w sub intercept, w sub x,action1, w sub y,action1, w sub x,action2, w sub y,action2, w sub x,action3, w sub y,action3). In the prediction/update, only the intercept and the weights belonging to the action are used">
@@ -37449,8 +37448,8 @@
           </a:p>
         </p:txBody>
       </p:sp>
-      <mc:AlternateContent xmlns:mc="http://schemas.openxmlformats.org/markup-compatibility/2006">
-        <mc:Choice xmlns:a14="http://schemas.microsoft.com/office/drawing/2010/main" Requires="a14">
+      <mc:AlternateContent xmlns:mc="http://schemas.openxmlformats.org/markup-compatibility/2006" xmlns:a14="http://schemas.microsoft.com/office/drawing/2010/main">
+        <mc:Choice Requires="a14">
           <p:sp>
             <p:nvSpPr>
               <p:cNvPr id="3" name="Content Placeholder 2" descr="Discounting vs. Average Reward. Discounted rewards (gamma -returns) are used for tabular methods because returns for each state are separately identified and averaged. G sub t equals R sub t plus 1, plus gamma R sub t plus 2, plus gamma squared R sub t plus 3, plus dot dot dot. With approximation, returns are shared (generalized) between states and it is often better to focus on the long-run average reward per time step. r (pi) equals lim over T to infinity, of 1 over T the sum over t equals 1 to T, of R sub t. Differential Returns. It is often helpful to use differences between the immediate rewards and the average reward given policy pi . G sub t equals the sum over k equals 1 to infinity, of (R sub t plus k plus 1, minus r (pi)). This leads to a differential value function">
@@ -38128,7 +38127,7 @@
             </p:txBody>
           </p:sp>
         </mc:Choice>
-        <mc:Fallback>
+        <mc:Fallback xmlns="">
           <p:sp>
             <p:nvSpPr>
               <p:cNvPr id="3" name="Content Placeholder 2" descr="Discounting vs. Average Reward. Discounted rewards (gamma -returns) are used for tabular methods because returns for each state are separately identified and averaged. G sub t equals R sub t plus 1, plus gamma R sub t plus 2, plus gamma squared R sub t plus 3, plus dot dot dot. With approximation, returns are shared (generalized) between states and it is often better to focus on the long-run average reward per time step. r (pi) equals lim over T to infinity, of 1 over T the sum over t equals 1 to T, of R sub t. Differential Returns. It is often helpful to use differences between the immediate rewards and the average reward given policy pi . G sub t equals the sum over k equals 1 to infinity, of (R sub t plus k plus 1, minus r (pi)). This leads to a differential value function">
@@ -39872,12 +39871,12 @@
             <p:spPr>
               <a:xfrm>
                 <a:off x="838200" y="1397331"/>
-                <a:ext cx="10515600" cy="4193934"/>
+                <a:ext cx="8419051" cy="3883539"/>
               </a:xfrm>
             </p:spPr>
             <p:txBody>
               <a:bodyPr>
-                <a:normAutofit fontScale="70000" lnSpcReduction="20000"/>
+                <a:normAutofit fontScale="62500" lnSpcReduction="20000"/>
               </a:bodyPr>
               <a:lstStyle/>
               <a:p>
@@ -39951,7 +39950,7 @@
                 </a:r>
                 <a:r>
                   <a:rPr lang="en-US" dirty="0"/>
-                  <a:t>: Many states will never be encountered during learning and therefore cannot be predicted.</a:t>
+                  <a:t>: State values are stored independently. Many states will never be encountered during learning and therefore cannot be predicted.</a:t>
                 </a:r>
               </a:p>
               <a:p>
@@ -40293,12 +40292,12 @@
             <p:spPr>
               <a:xfrm>
                 <a:off x="838200" y="1397331"/>
-                <a:ext cx="10515600" cy="4193934"/>
+                <a:ext cx="8419051" cy="3883539"/>
               </a:xfrm>
               <a:blipFill>
                 <a:blip r:embed="rId3"/>
                 <a:stretch>
-                  <a:fillRect l="-638" t="-2471"/>
+                  <a:fillRect l="-652" t="-2355"/>
                 </a:stretch>
               </a:blipFill>
             </p:spPr>
@@ -40385,7 +40384,7 @@
         <p:spPr>
           <a:xfrm>
             <a:off x="5571688" y="5210735"/>
-            <a:ext cx="3804408" cy="1215233"/>
+            <a:ext cx="3968944" cy="1215233"/>
           </a:xfrm>
           <a:prstGeom prst="wedgeRoundRectCallout">
             <a:avLst>
@@ -40418,11 +40417,548 @@
             <a:pPr algn="ctr"/>
             <a:r>
               <a:rPr lang="en-US" sz="1600" dirty="0"/>
-              <a:t>This implies that we cannot change individual state values, as we can in tabular methods! This may be a problem for policy improvement! </a:t>
+              <a:t>This implies that we cannot change individual state values, as we can in tabular methods! This may be a problem for </a:t>
+            </a:r>
+            <a:r>
+              <a:rPr lang="en-US" sz="1600" b="1" dirty="0"/>
+              <a:t>greedy policy improvement</a:t>
+            </a:r>
+            <a:r>
+              <a:rPr lang="en-US" sz="1600" dirty="0"/>
+              <a:t>! </a:t>
             </a:r>
           </a:p>
         </p:txBody>
       </p:sp>
+      <p:sp>
+        <p:nvSpPr>
+          <p:cNvPr id="6" name="TextBox 5">
+            <a:extLst>
+              <a:ext uri="{FF2B5EF4-FFF2-40B4-BE49-F238E27FC236}">
+                <a16:creationId xmlns:a16="http://schemas.microsoft.com/office/drawing/2014/main" id="{B86D6411-A9BF-4C0D-F704-64BCD93925A4}"/>
+              </a:ext>
+            </a:extLst>
+          </p:cNvPr>
+          <p:cNvSpPr txBox="1"/>
+          <p:nvPr/>
+        </p:nvSpPr>
+        <p:spPr>
+          <a:xfrm>
+            <a:off x="9432049" y="878250"/>
+            <a:ext cx="2381393" cy="369332"/>
+          </a:xfrm>
+          <a:prstGeom prst="rect">
+            <a:avLst/>
+          </a:prstGeom>
+          <a:noFill/>
+        </p:spPr>
+        <p:txBody>
+          <a:bodyPr wrap="square" rtlCol="0">
+            <a:spAutoFit/>
+          </a:bodyPr>
+          <a:lstStyle/>
+          <a:p>
+            <a:pPr algn="ctr"/>
+            <a:r>
+              <a:rPr lang="en-US" dirty="0"/>
+              <a:t>Value Function</a:t>
+            </a:r>
+          </a:p>
+        </p:txBody>
+      </p:sp>
+      <mc:AlternateContent xmlns:mc="http://schemas.openxmlformats.org/markup-compatibility/2006">
+        <mc:Choice xmlns:a14="http://schemas.microsoft.com/office/drawing/2010/main" Requires="a14">
+          <p:graphicFrame>
+            <p:nvGraphicFramePr>
+              <p:cNvPr id="8" name="Table 7">
+                <a:extLst>
+                  <a:ext uri="{FF2B5EF4-FFF2-40B4-BE49-F238E27FC236}">
+                    <a16:creationId xmlns:a16="http://schemas.microsoft.com/office/drawing/2014/main" id="{DA3EB6A7-1666-4447-DD8C-3E5A4FD59E4E}"/>
+                  </a:ext>
+                </a:extLst>
+              </p:cNvPr>
+              <p:cNvGraphicFramePr>
+                <a:graphicFrameLocks noGrp="1"/>
+              </p:cNvGraphicFramePr>
+              <p:nvPr>
+                <p:extLst>
+                  <p:ext uri="{D42A27DB-BD31-4B8C-83A1-F6EECF244321}">
+                    <p14:modId xmlns:p14="http://schemas.microsoft.com/office/powerpoint/2010/main" val="82288981"/>
+                  </p:ext>
+                </p:extLst>
+              </p:nvPr>
+            </p:nvGraphicFramePr>
+            <p:xfrm>
+              <a:off x="9540632" y="1278474"/>
+              <a:ext cx="2141037" cy="1524000"/>
+            </p:xfrm>
+            <a:graphic>
+              <a:graphicData uri="http://schemas.openxmlformats.org/drawingml/2006/table">
+                <a:tbl>
+                  <a:tblPr firstRow="1" bandRow="1">
+                    <a:tableStyleId>{93296810-A885-4BE3-A3E7-6D5BEEA58F35}</a:tableStyleId>
+                  </a:tblPr>
+                  <a:tblGrid>
+                    <a:gridCol w="590368">
+                      <a:extLst>
+                        <a:ext uri="{9D8B030D-6E8A-4147-A177-3AD203B41FA5}">
+                          <a16:colId xmlns:a16="http://schemas.microsoft.com/office/drawing/2014/main" val="3711460689"/>
+                        </a:ext>
+                      </a:extLst>
+                    </a:gridCol>
+                    <a:gridCol w="1550669">
+                      <a:extLst>
+                        <a:ext uri="{9D8B030D-6E8A-4147-A177-3AD203B41FA5}">
+                          <a16:colId xmlns:a16="http://schemas.microsoft.com/office/drawing/2014/main" val="2080107700"/>
+                        </a:ext>
+                      </a:extLst>
+                    </a:gridCol>
+                  </a:tblGrid>
+                  <a:tr h="288751">
+                    <a:tc>
+                      <a:txBody>
+                        <a:bodyPr/>
+                        <a:lstStyle/>
+                        <a:p>
+                          <a:pPr/>
+                          <a14:m>
+                            <m:oMathPara xmlns:m="http://schemas.openxmlformats.org/officeDocument/2006/math">
+                              <m:oMath>
+                                <m:r>
+                                  <a:rPr lang="en-US" sz="1400" dirty="0" smtClean="0">
+                                    <a:latin typeface="Cambria Math" panose="02040503050406030204" pitchFamily="18" charset="0"/>
+                                  </a:rPr>
+                                  <m:t>𝑠</m:t>
+                                </m:r>
+                              </m:oMath>
+                            </m:oMathPara>
+                          </a14:m>
+                          <a:endParaRPr lang="en-US" sz="1400" dirty="0"/>
+                        </a:p>
+                      </a:txBody>
+                      <a:tcPr/>
+                    </a:tc>
+                    <a:tc>
+                      <a:txBody>
+                        <a:bodyPr/>
+                        <a:lstStyle/>
+                        <a:p>
+                          <a:r>
+                            <a:rPr lang="en-US" sz="1400" b="1" dirty="0"/>
+                            <a:t>State Value </a:t>
+                          </a:r>
+                          <a14:m>
+                            <m:oMath xmlns:m="http://schemas.openxmlformats.org/officeDocument/2006/math">
+                              <m:r>
+                                <a:rPr lang="en-US" sz="1400" b="1" i="1" dirty="0" smtClean="0">
+                                  <a:latin typeface="Cambria Math" panose="02040503050406030204" pitchFamily="18" charset="0"/>
+                                </a:rPr>
+                                <m:t>𝑽</m:t>
+                              </m:r>
+                              <m:r>
+                                <a:rPr lang="en-US" sz="1400" dirty="0" smtClean="0">
+                                  <a:latin typeface="Cambria Math" panose="02040503050406030204" pitchFamily="18" charset="0"/>
+                                </a:rPr>
+                                <m:t>(</m:t>
+                              </m:r>
+                              <m:r>
+                                <a:rPr lang="en-US" sz="1400" b="1" i="0" dirty="0" smtClean="0">
+                                  <a:latin typeface="Cambria Math" panose="02040503050406030204" pitchFamily="18" charset="0"/>
+                                </a:rPr>
+                                <m:t>𝐬</m:t>
+                              </m:r>
+                              <m:r>
+                                <a:rPr lang="en-US" sz="1400" dirty="0" smtClean="0">
+                                  <a:latin typeface="Cambria Math" panose="02040503050406030204" pitchFamily="18" charset="0"/>
+                                </a:rPr>
+                                <m:t>)</m:t>
+                              </m:r>
+                            </m:oMath>
+                          </a14:m>
+                          <a:endParaRPr lang="en-US" sz="1400" dirty="0"/>
+                        </a:p>
+                      </a:txBody>
+                      <a:tcPr/>
+                    </a:tc>
+                    <a:extLst>
+                      <a:ext uri="{0D108BD9-81ED-4DB2-BD59-A6C34878D82A}">
+                        <a16:rowId xmlns:a16="http://schemas.microsoft.com/office/drawing/2014/main" val="2008869826"/>
+                      </a:ext>
+                    </a:extLst>
+                  </a:tr>
+                  <a:tr h="288751">
+                    <a:tc>
+                      <a:txBody>
+                        <a:bodyPr/>
+                        <a:lstStyle/>
+                        <a:p>
+                          <a:r>
+                            <a:rPr lang="en-US" sz="1400"/>
+                            <a:t>(1,1)</a:t>
+                          </a:r>
+                          <a:endParaRPr lang="en-US" sz="1400" dirty="0"/>
+                        </a:p>
+                      </a:txBody>
+                      <a:tcPr/>
+                    </a:tc>
+                    <a:tc>
+                      <a:txBody>
+                        <a:bodyPr/>
+                        <a:lstStyle/>
+                        <a:p>
+                          <a:r>
+                            <a:rPr lang="en-US" sz="1400"/>
+                            <a:t>0.7453</a:t>
+                          </a:r>
+                          <a:endParaRPr lang="en-US" sz="1400" dirty="0"/>
+                        </a:p>
+                      </a:txBody>
+                      <a:tcPr/>
+                    </a:tc>
+                    <a:extLst>
+                      <a:ext uri="{0D108BD9-81ED-4DB2-BD59-A6C34878D82A}">
+                        <a16:rowId xmlns:a16="http://schemas.microsoft.com/office/drawing/2014/main" val="524805492"/>
+                      </a:ext>
+                    </a:extLst>
+                  </a:tr>
+                  <a:tr h="288751">
+                    <a:tc>
+                      <a:txBody>
+                        <a:bodyPr/>
+                        <a:lstStyle/>
+                        <a:p>
+                          <a:r>
+                            <a:rPr lang="en-US" sz="1400"/>
+                            <a:t>(1,2)</a:t>
+                          </a:r>
+                          <a:endParaRPr lang="en-US" sz="1400" dirty="0"/>
+                        </a:p>
+                      </a:txBody>
+                      <a:tcPr/>
+                    </a:tc>
+                    <a:tc>
+                      <a:txBody>
+                        <a:bodyPr/>
+                        <a:lstStyle/>
+                        <a:p>
+                          <a:r>
+                            <a:rPr lang="en-US" sz="1400"/>
+                            <a:t>?</a:t>
+                          </a:r>
+                          <a:endParaRPr lang="en-US" sz="1400" dirty="0"/>
+                        </a:p>
+                      </a:txBody>
+                      <a:tcPr/>
+                    </a:tc>
+                    <a:extLst>
+                      <a:ext uri="{0D108BD9-81ED-4DB2-BD59-A6C34878D82A}">
+                        <a16:rowId xmlns:a16="http://schemas.microsoft.com/office/drawing/2014/main" val="3725035416"/>
+                      </a:ext>
+                    </a:extLst>
+                  </a:tr>
+                  <a:tr h="288751">
+                    <a:tc>
+                      <a:txBody>
+                        <a:bodyPr/>
+                        <a:lstStyle/>
+                        <a:p>
+                          <a:r>
+                            <a:rPr lang="en-US" sz="1400"/>
+                            <a:t>(1,3)</a:t>
+                          </a:r>
+                          <a:endParaRPr lang="en-US" sz="1400" dirty="0"/>
+                        </a:p>
+                      </a:txBody>
+                      <a:tcPr/>
+                    </a:tc>
+                    <a:tc>
+                      <a:txBody>
+                        <a:bodyPr/>
+                        <a:lstStyle/>
+                        <a:p>
+                          <a:r>
+                            <a:rPr lang="en-US" sz="1400" dirty="0"/>
+                            <a:t>0.8016</a:t>
+                          </a:r>
+                        </a:p>
+                      </a:txBody>
+                      <a:tcPr/>
+                    </a:tc>
+                    <a:extLst>
+                      <a:ext uri="{0D108BD9-81ED-4DB2-BD59-A6C34878D82A}">
+                        <a16:rowId xmlns:a16="http://schemas.microsoft.com/office/drawing/2014/main" val="1524338055"/>
+                      </a:ext>
+                    </a:extLst>
+                  </a:tr>
+                  <a:tr h="288751">
+                    <a:tc>
+                      <a:txBody>
+                        <a:bodyPr/>
+                        <a:lstStyle/>
+                        <a:p>
+                          <a:r>
+                            <a:rPr lang="en-US" sz="1400" dirty="0"/>
+                            <a:t>…</a:t>
+                          </a:r>
+                        </a:p>
+                      </a:txBody>
+                      <a:tcPr/>
+                    </a:tc>
+                    <a:tc>
+                      <a:txBody>
+                        <a:bodyPr/>
+                        <a:lstStyle/>
+                        <a:p>
+                          <a:r>
+                            <a:rPr lang="en-US" sz="1400" dirty="0"/>
+                            <a:t>…</a:t>
+                          </a:r>
+                        </a:p>
+                      </a:txBody>
+                      <a:tcPr/>
+                    </a:tc>
+                    <a:extLst>
+                      <a:ext uri="{0D108BD9-81ED-4DB2-BD59-A6C34878D82A}">
+                        <a16:rowId xmlns:a16="http://schemas.microsoft.com/office/drawing/2014/main" val="868402448"/>
+                      </a:ext>
+                    </a:extLst>
+                  </a:tr>
+                </a:tbl>
+              </a:graphicData>
+            </a:graphic>
+          </p:graphicFrame>
+        </mc:Choice>
+        <mc:Fallback>
+          <p:graphicFrame>
+            <p:nvGraphicFramePr>
+              <p:cNvPr id="8" name="Table 7">
+                <a:extLst>
+                  <a:ext uri="{FF2B5EF4-FFF2-40B4-BE49-F238E27FC236}">
+                    <a16:creationId xmlns:a16="http://schemas.microsoft.com/office/drawing/2014/main" id="{DA3EB6A7-1666-4447-DD8C-3E5A4FD59E4E}"/>
+                  </a:ext>
+                </a:extLst>
+              </p:cNvPr>
+              <p:cNvGraphicFramePr>
+                <a:graphicFrameLocks noGrp="1"/>
+              </p:cNvGraphicFramePr>
+              <p:nvPr>
+                <p:extLst>
+                  <p:ext uri="{D42A27DB-BD31-4B8C-83A1-F6EECF244321}">
+                    <p14:modId xmlns:p14="http://schemas.microsoft.com/office/powerpoint/2010/main" val="82288981"/>
+                  </p:ext>
+                </p:extLst>
+              </p:nvPr>
+            </p:nvGraphicFramePr>
+            <p:xfrm>
+              <a:off x="9540632" y="1278474"/>
+              <a:ext cx="2141037" cy="1524000"/>
+            </p:xfrm>
+            <a:graphic>
+              <a:graphicData uri="http://schemas.openxmlformats.org/drawingml/2006/table">
+                <a:tbl>
+                  <a:tblPr firstRow="1" bandRow="1">
+                    <a:tableStyleId>{93296810-A885-4BE3-A3E7-6D5BEEA58F35}</a:tableStyleId>
+                  </a:tblPr>
+                  <a:tblGrid>
+                    <a:gridCol w="590368">
+                      <a:extLst>
+                        <a:ext uri="{9D8B030D-6E8A-4147-A177-3AD203B41FA5}">
+                          <a16:colId xmlns:a16="http://schemas.microsoft.com/office/drawing/2014/main" val="3711460689"/>
+                        </a:ext>
+                      </a:extLst>
+                    </a:gridCol>
+                    <a:gridCol w="1550669">
+                      <a:extLst>
+                        <a:ext uri="{9D8B030D-6E8A-4147-A177-3AD203B41FA5}">
+                          <a16:colId xmlns:a16="http://schemas.microsoft.com/office/drawing/2014/main" val="2080107700"/>
+                        </a:ext>
+                      </a:extLst>
+                    </a:gridCol>
+                  </a:tblGrid>
+                  <a:tr h="304800">
+                    <a:tc>
+                      <a:txBody>
+                        <a:bodyPr/>
+                        <a:lstStyle/>
+                        <a:p>
+                          <a:endParaRPr lang="en-US"/>
+                        </a:p>
+                      </a:txBody>
+                      <a:tcPr>
+                        <a:blipFill>
+                          <a:blip r:embed="rId4"/>
+                          <a:stretch>
+                            <a:fillRect l="-1031" t="-2000" r="-267010" b="-422000"/>
+                          </a:stretch>
+                        </a:blipFill>
+                      </a:tcPr>
+                    </a:tc>
+                    <a:tc>
+                      <a:txBody>
+                        <a:bodyPr/>
+                        <a:lstStyle/>
+                        <a:p>
+                          <a:endParaRPr lang="en-US"/>
+                        </a:p>
+                      </a:txBody>
+                      <a:tcPr>
+                        <a:blipFill>
+                          <a:blip r:embed="rId4"/>
+                          <a:stretch>
+                            <a:fillRect l="-38431" t="-2000" r="-1569" b="-422000"/>
+                          </a:stretch>
+                        </a:blipFill>
+                      </a:tcPr>
+                    </a:tc>
+                    <a:extLst>
+                      <a:ext uri="{0D108BD9-81ED-4DB2-BD59-A6C34878D82A}">
+                        <a16:rowId xmlns:a16="http://schemas.microsoft.com/office/drawing/2014/main" val="2008869826"/>
+                      </a:ext>
+                    </a:extLst>
+                  </a:tr>
+                  <a:tr h="304800">
+                    <a:tc>
+                      <a:txBody>
+                        <a:bodyPr/>
+                        <a:lstStyle/>
+                        <a:p>
+                          <a:r>
+                            <a:rPr lang="en-US" sz="1400"/>
+                            <a:t>(1,1)</a:t>
+                          </a:r>
+                          <a:endParaRPr lang="en-US" sz="1400" dirty="0"/>
+                        </a:p>
+                      </a:txBody>
+                      <a:tcPr/>
+                    </a:tc>
+                    <a:tc>
+                      <a:txBody>
+                        <a:bodyPr/>
+                        <a:lstStyle/>
+                        <a:p>
+                          <a:r>
+                            <a:rPr lang="en-US" sz="1400"/>
+                            <a:t>0.7453</a:t>
+                          </a:r>
+                          <a:endParaRPr lang="en-US" sz="1400" dirty="0"/>
+                        </a:p>
+                      </a:txBody>
+                      <a:tcPr/>
+                    </a:tc>
+                    <a:extLst>
+                      <a:ext uri="{0D108BD9-81ED-4DB2-BD59-A6C34878D82A}">
+                        <a16:rowId xmlns:a16="http://schemas.microsoft.com/office/drawing/2014/main" val="524805492"/>
+                      </a:ext>
+                    </a:extLst>
+                  </a:tr>
+                  <a:tr h="304800">
+                    <a:tc>
+                      <a:txBody>
+                        <a:bodyPr/>
+                        <a:lstStyle/>
+                        <a:p>
+                          <a:r>
+                            <a:rPr lang="en-US" sz="1400"/>
+                            <a:t>(1,2)</a:t>
+                          </a:r>
+                          <a:endParaRPr lang="en-US" sz="1400" dirty="0"/>
+                        </a:p>
+                      </a:txBody>
+                      <a:tcPr/>
+                    </a:tc>
+                    <a:tc>
+                      <a:txBody>
+                        <a:bodyPr/>
+                        <a:lstStyle/>
+                        <a:p>
+                          <a:r>
+                            <a:rPr lang="en-US" sz="1400"/>
+                            <a:t>?</a:t>
+                          </a:r>
+                          <a:endParaRPr lang="en-US" sz="1400" dirty="0"/>
+                        </a:p>
+                      </a:txBody>
+                      <a:tcPr/>
+                    </a:tc>
+                    <a:extLst>
+                      <a:ext uri="{0D108BD9-81ED-4DB2-BD59-A6C34878D82A}">
+                        <a16:rowId xmlns:a16="http://schemas.microsoft.com/office/drawing/2014/main" val="3725035416"/>
+                      </a:ext>
+                    </a:extLst>
+                  </a:tr>
+                  <a:tr h="304800">
+                    <a:tc>
+                      <a:txBody>
+                        <a:bodyPr/>
+                        <a:lstStyle/>
+                        <a:p>
+                          <a:r>
+                            <a:rPr lang="en-US" sz="1400"/>
+                            <a:t>(1,3)</a:t>
+                          </a:r>
+                          <a:endParaRPr lang="en-US" sz="1400" dirty="0"/>
+                        </a:p>
+                      </a:txBody>
+                      <a:tcPr/>
+                    </a:tc>
+                    <a:tc>
+                      <a:txBody>
+                        <a:bodyPr/>
+                        <a:lstStyle/>
+                        <a:p>
+                          <a:r>
+                            <a:rPr lang="en-US" sz="1400" dirty="0"/>
+                            <a:t>0.8016</a:t>
+                          </a:r>
+                        </a:p>
+                      </a:txBody>
+                      <a:tcPr/>
+                    </a:tc>
+                    <a:extLst>
+                      <a:ext uri="{0D108BD9-81ED-4DB2-BD59-A6C34878D82A}">
+                        <a16:rowId xmlns:a16="http://schemas.microsoft.com/office/drawing/2014/main" val="1524338055"/>
+                      </a:ext>
+                    </a:extLst>
+                  </a:tr>
+                  <a:tr h="304800">
+                    <a:tc>
+                      <a:txBody>
+                        <a:bodyPr/>
+                        <a:lstStyle/>
+                        <a:p>
+                          <a:r>
+                            <a:rPr lang="en-US" sz="1400" dirty="0"/>
+                            <a:t>…</a:t>
+                          </a:r>
+                        </a:p>
+                      </a:txBody>
+                      <a:tcPr/>
+                    </a:tc>
+                    <a:tc>
+                      <a:txBody>
+                        <a:bodyPr/>
+                        <a:lstStyle/>
+                        <a:p>
+                          <a:r>
+                            <a:rPr lang="en-US" sz="1400" dirty="0"/>
+                            <a:t>…</a:t>
+                          </a:r>
+                        </a:p>
+                      </a:txBody>
+                      <a:tcPr/>
+                    </a:tc>
+                    <a:extLst>
+                      <a:ext uri="{0D108BD9-81ED-4DB2-BD59-A6C34878D82A}">
+                        <a16:rowId xmlns:a16="http://schemas.microsoft.com/office/drawing/2014/main" val="868402448"/>
+                      </a:ext>
+                    </a:extLst>
+                  </a:tr>
+                </a:tbl>
+              </a:graphicData>
+            </a:graphic>
+          </p:graphicFrame>
+        </mc:Fallback>
+      </mc:AlternateContent>
     </p:spTree>
     <p:extLst>
       <p:ext uri="{BB962C8B-B14F-4D97-AF65-F5344CB8AC3E}">
@@ -40843,10 +41379,15 @@
             <p:ph idx="1"/>
           </p:nvPr>
         </p:nvSpPr>
-        <p:spPr/>
+        <p:spPr>
+          <a:xfrm>
+            <a:off x="838200" y="1326023"/>
+            <a:ext cx="7928295" cy="4779633"/>
+          </a:xfrm>
+        </p:spPr>
         <p:txBody>
           <a:bodyPr>
-            <a:normAutofit/>
+            <a:normAutofit fontScale="92500" lnSpcReduction="10000"/>
           </a:bodyPr>
           <a:lstStyle/>
           <a:p>
@@ -40898,7 +41439,7 @@
             </a:r>
             <a:r>
               <a:rPr lang="en-US" dirty="0"/>
-              <a:t>Does it perform well in an environment after limited data is gathered? (= </a:t>
+              <a:t>Does it perform well in an environment after gathering limited data (episodes)? (= </a:t>
             </a:r>
             <a:r>
               <a:rPr lang="en-US" b="1" dirty="0"/>
@@ -41144,8 +41685,8 @@
           </a:p>
         </p:txBody>
       </p:sp>
-      <mc:AlternateContent xmlns:mc="http://schemas.openxmlformats.org/markup-compatibility/2006" xmlns:a14="http://schemas.microsoft.com/office/drawing/2010/main">
-        <mc:Choice Requires="a14">
+      <mc:AlternateContent xmlns:mc="http://schemas.openxmlformats.org/markup-compatibility/2006">
+        <mc:Choice xmlns:a14="http://schemas.microsoft.com/office/drawing/2010/main" Requires="a14">
           <p:sp>
             <p:nvSpPr>
               <p:cNvPr id="3" name="Content Placeholder 2" descr="Approach: Use function approximation (supervised learning). We need training data in the form of s maps to u where the target u is a “backed-up value” representing the desired value. Some options for training data S sub t maps to U :. MC: S sub t maps to G sub t. TD(0): S sub t maps to R sub t plus 1, plus gamma v hat (S sub t plus 1,w sub t). DP: S sub t maps to E sub pi [R sub t plus 1, plus gamma v hat (S sub t plus 1,w sub t)]">
@@ -41268,7 +41809,15 @@
                 </a14:m>
                 <a:r>
                   <a:rPr lang="en-US" dirty="0"/>
-                  <a:t> is a “backed-up value” representing the desired state value. </a:t>
+                  <a:t> represents </a:t>
+                </a:r>
+                <a:r>
+                  <a:rPr lang="en-US"/>
+                  <a:t>a noisy sample </a:t>
+                </a:r>
+                <a:r>
+                  <a:rPr lang="en-US" dirty="0"/>
+                  <a:t>of the state value. </a:t>
                 </a:r>
               </a:p>
               <a:p>
@@ -41881,7 +42430,7 @@
             </p:txBody>
           </p:sp>
         </mc:Choice>
-        <mc:Fallback xmlns="">
+        <mc:Fallback>
           <p:sp>
             <p:nvSpPr>
               <p:cNvPr id="3" name="Content Placeholder 2" descr="Approach: Use function approximation (supervised learning). We need training data in the form of s maps to u where the target u is a “backed-up value” representing the desired value. Some options for training data S sub t maps to U :. MC: S sub t maps to G sub t. TD(0): S sub t maps to R sub t plus 1, plus gamma v hat (S sub t plus 1,w sub t). DP: S sub t maps to E sub pi [R sub t plus 1, plus gamma v hat (S sub t plus 1,w sub t)]">
@@ -41902,7 +42451,7 @@
               <a:blipFill>
                 <a:blip r:embed="rId2"/>
                 <a:stretch>
-                  <a:fillRect l="-1217" t="-2168" b="-1658"/>
+                  <a:fillRect l="-1217" t="-2168"/>
                 </a:stretch>
               </a:blipFill>
             </p:spPr>
@@ -42397,8 +42946,8 @@
           </p:sp>
         </mc:Fallback>
       </mc:AlternateContent>
-      <mc:AlternateContent xmlns:mc="http://schemas.openxmlformats.org/markup-compatibility/2006">
-        <mc:Choice xmlns:a14="http://schemas.microsoft.com/office/drawing/2010/main" Requires="a14">
+      <mc:AlternateContent xmlns:mc="http://schemas.openxmlformats.org/markup-compatibility/2006" xmlns:a14="http://schemas.microsoft.com/office/drawing/2010/main">
+        <mc:Choice Requires="a14">
           <p:sp>
             <p:nvSpPr>
               <p:cNvPr id="3" name="Content Placeholder 2" descr="Learning algorithm: Update the weights w to reduce the error for v hat (s,w) is approximately v sub pi. Note on generalization: Any change of w will also affect the prediction for other states and thus reduce or increase their error!. Prediction error for state s: the absolute value of v sub pi (s) minus v hat (s,w). To calculate the error over all states we need to define how much we care about each state. We use a state distribution function mu (s) is greater than or equal to 0; the sum over s, of mu (s) equals 1. mu (s) is typically the fraction of time spent in s when following pi . We obtain data by following a policy pi so samples already comes from this distribution. For continuous tasks, mu (s) is a stationary distribution called the on-policy distribution. For episodic tasks a near stationary distribution only exists for ergodic* MDPs with large horizons">
@@ -42916,7 +43465,7 @@
             </p:txBody>
           </p:sp>
         </mc:Choice>
-        <mc:Fallback>
+        <mc:Fallback xmlns="">
           <p:sp>
             <p:nvSpPr>
               <p:cNvPr id="3" name="Content Placeholder 2" descr="Learning algorithm: Update the weights w to reduce the error for v hat (s,w) is approximately v sub pi. Note on generalization: Any change of w will also affect the prediction for other states and thus reduce or increase their error!. Prediction error for state s: the absolute value of v sub pi (s) minus v hat (s,w). To calculate the error over all states we need to define how much we care about each state. We use a state distribution function mu (s) is greater than or equal to 0; the sum over s, of mu (s) equals 1. mu (s) is typically the fraction of time spent in s when following pi . We obtain data by following a policy pi so samples already comes from this distribution. For continuous tasks, mu (s) is a stationary distribution called the on-policy distribution. For episodic tasks a near stationary distribution only exists for ergodic* MDPs with large horizons">
@@ -43884,8 +44433,8 @@
           </a:p>
         </p:txBody>
       </p:sp>
-      <mc:AlternateContent xmlns:mc="http://schemas.openxmlformats.org/markup-compatibility/2006">
-        <mc:Choice xmlns:a14="http://schemas.microsoft.com/office/drawing/2010/main" Requires="a14">
+      <mc:AlternateContent xmlns:mc="http://schemas.openxmlformats.org/markup-compatibility/2006" xmlns:a14="http://schemas.microsoft.com/office/drawing/2010/main">
+        <mc:Choice Requires="a14">
           <p:sp>
             <p:nvSpPr>
               <p:cNvPr id="3" name="Content Placeholder 2" descr="Find the parameter vector w star that leads to the smallest error (the global optimum): VE bar (w star) is less than or equal to VE bar (w) for all w. Local optima: Often, we will only find a local optimum where the equation above only holds for w in a small neighborhood around w star . Note: Policies converge typically way before the value function converges so finding the global optimal value function may not be necessary. Convergence: Convergence to the global or a local optimum depends on the used approximation and the learning method. We will discuss this for each method. Bias: Different approximation methods have different bias (are not able to represent the true value function)">
@@ -44202,7 +44751,7 @@
             </p:txBody>
           </p:sp>
         </mc:Choice>
-        <mc:Fallback>
+        <mc:Fallback xmlns="">
           <p:sp>
             <p:nvSpPr>
               <p:cNvPr id="3" name="Content Placeholder 2" descr="Find the parameter vector w star that leads to the smallest error (the global optimum): VE bar (w star) is less than or equal to VE bar (w) for all w. Local optima: Often, we will only find a local optimum where the equation above only holds for w in a small neighborhood around w star . Note: Policies converge typically way before the value function converges so finding the global optimal value function may not be necessary. Convergence: Convergence to the global or a local optimum depends on the used approximation and the learning method. We will discuss this for each method. Bias: Different approximation methods have different bias (are not able to represent the true value function)">
